--- a/presentations/REPL v3.pptx
+++ b/presentations/REPL v3.pptx
@@ -2,8 +2,8 @@
 <file path=ppt/presentation.xml><?xml version="1.0" encoding="utf-8"?>
 <p:presentation xmlns:a="http://schemas.openxmlformats.org/drawingml/2006/main" xmlns:r="http://schemas.openxmlformats.org/officeDocument/2006/relationships" xmlns:mc="http://schemas.openxmlformats.org/markup-compatibility/2006" xmlns:mv="urn:schemas-microsoft-com:mac:vml" xmlns:p="http://schemas.openxmlformats.org/presentationml/2006/main" xmlns:c="http://schemas.openxmlformats.org/drawingml/2006/chart" xmlns:dgm="http://schemas.openxmlformats.org/drawingml/2006/diagram" xmlns:o="urn:schemas-microsoft-com:office:office" xmlns:v="urn:schemas-microsoft-com:vml" xmlns:pvml="urn:schemas-microsoft-com:office:powerpoint" xmlns:com="http://schemas.openxmlformats.org/drawingml/2006/compatibility" xmlns:p14="http://schemas.microsoft.com/office/powerpoint/2010/main" xmlns:p15="http://schemas.microsoft.com/office/powerpoint/2012/main" xmlns:ahyp="http://schemas.microsoft.com/office/drawing/2018/hyperlinkcolor" autoCompressPictures="0" embedTrueTypeFonts="1" strictFirstAndLastChars="0" saveSubsetFonts="1">
   <p:sldMasterIdLst>
-    <p:sldMasterId id="2147483670" r:id="rId4"/>
-    <p:sldMasterId id="2147483671" r:id="rId5"/>
+    <p:sldMasterId id="2147483671" r:id="rId4"/>
+    <p:sldMasterId id="2147483672" r:id="rId5"/>
   </p:sldMasterIdLst>
   <p:notesMasterIdLst>
     <p:notesMasterId r:id="rId6"/>
@@ -24,16 +24,18 @@
     <p:sldId id="268" r:id="rId19"/>
     <p:sldId id="269" r:id="rId20"/>
     <p:sldId id="270" r:id="rId21"/>
+    <p:sldId id="271" r:id="rId22"/>
+    <p:sldId id="272" r:id="rId23"/>
   </p:sldIdLst>
   <p:sldSz cy="5143500" cx="9144000"/>
   <p:notesSz cx="6858000" cy="9144000"/>
   <p:embeddedFontLst>
     <p:embeddedFont>
       <p:font typeface="Proxima Nova"/>
-      <p:regular r:id="rId22"/>
-      <p:bold r:id="rId23"/>
-      <p:italic r:id="rId24"/>
-      <p:boldItalic r:id="rId25"/>
+      <p:regular r:id="rId24"/>
+      <p:bold r:id="rId25"/>
+      <p:italic r:id="rId26"/>
+      <p:boldItalic r:id="rId27"/>
     </p:embeddedFont>
   </p:embeddedFontLst>
   <p:defaultTextStyle>
@@ -715,7 +717,7 @@
   <p:cSld>
     <p:spTree>
       <p:nvGrpSpPr>
-        <p:cNvPr id="102" name="Shape 102"/>
+        <p:cNvPr id="107" name="Shape 107"/>
         <p:cNvGrpSpPr/>
         <p:nvPr/>
       </p:nvGrpSpPr>
@@ -729,7 +731,7 @@
       </p:grpSpPr>
       <p:sp>
         <p:nvSpPr>
-          <p:cNvPr id="103" name="Google Shape;103;p:notes"/>
+          <p:cNvPr id="108" name="Google Shape;108;p:notes"/>
           <p:cNvSpPr/>
           <p:nvPr>
             <p:ph idx="2" type="sldImg"/>
@@ -764,7 +766,7 @@
       </p:sp>
       <p:sp>
         <p:nvSpPr>
-          <p:cNvPr id="104" name="Google Shape;104;p:notes"/>
+          <p:cNvPr id="109" name="Google Shape;109;p:notes"/>
           <p:cNvSpPr txBox="1"/>
           <p:nvPr>
             <p:ph idx="1" type="body"/>
@@ -814,7 +816,7 @@
   <p:cSld>
     <p:spTree>
       <p:nvGrpSpPr>
-        <p:cNvPr id="170" name="Shape 170"/>
+        <p:cNvPr id="174" name="Shape 174"/>
         <p:cNvGrpSpPr/>
         <p:nvPr/>
       </p:nvGrpSpPr>
@@ -828,7 +830,7 @@
       </p:grpSpPr>
       <p:sp>
         <p:nvSpPr>
-          <p:cNvPr id="171" name="Google Shape;171;g20c89bfe95e_0_0:notes"/>
+          <p:cNvPr id="175" name="Google Shape;175;gb8acfec02f_0_14:notes"/>
           <p:cNvSpPr/>
           <p:nvPr>
             <p:ph idx="2" type="sldImg"/>
@@ -863,7 +865,7 @@
       </p:sp>
       <p:sp>
         <p:nvSpPr>
-          <p:cNvPr id="172" name="Google Shape;172;g20c89bfe95e_0_0:notes"/>
+          <p:cNvPr id="176" name="Google Shape;176;gb8acfec02f_0_14:notes"/>
           <p:cNvSpPr txBox="1"/>
           <p:nvPr>
             <p:ph idx="1" type="body"/>
@@ -913,7 +915,7 @@
   <p:cSld>
     <p:spTree>
       <p:nvGrpSpPr>
-        <p:cNvPr id="183" name="Shape 183"/>
+        <p:cNvPr id="184" name="Shape 184"/>
         <p:cNvGrpSpPr/>
         <p:nvPr/>
       </p:nvGrpSpPr>
@@ -927,7 +929,7 @@
       </p:grpSpPr>
       <p:sp>
         <p:nvSpPr>
-          <p:cNvPr id="184" name="Google Shape;184;g20c89bfe95e_0_12:notes"/>
+          <p:cNvPr id="185" name="Google Shape;185;g20c89bfe95e_0_0:notes"/>
           <p:cNvSpPr/>
           <p:nvPr>
             <p:ph idx="2" type="sldImg"/>
@@ -962,7 +964,7 @@
       </p:sp>
       <p:sp>
         <p:nvSpPr>
-          <p:cNvPr id="185" name="Google Shape;185;g20c89bfe95e_0_12:notes"/>
+          <p:cNvPr id="186" name="Google Shape;186;g20c89bfe95e_0_0:notes"/>
           <p:cNvSpPr txBox="1"/>
           <p:nvPr>
             <p:ph idx="1" type="body"/>
@@ -1012,7 +1014,7 @@
   <p:cSld>
     <p:spTree>
       <p:nvGrpSpPr>
-        <p:cNvPr id="196" name="Shape 196"/>
+        <p:cNvPr id="197" name="Shape 197"/>
         <p:cNvGrpSpPr/>
         <p:nvPr/>
       </p:nvGrpSpPr>
@@ -1026,7 +1028,293 @@
       </p:grpSpPr>
       <p:sp>
         <p:nvSpPr>
-          <p:cNvPr id="197" name="Google Shape;197;gb8acfec02f_0_0:notes"/>
+          <p:cNvPr id="198" name="Google Shape;198;g3dd07ce15c2_0_12:notes"/>
+          <p:cNvSpPr/>
+          <p:nvPr>
+            <p:ph idx="2" type="sldImg"/>
+          </p:nvPr>
+        </p:nvSpPr>
+        <p:spPr>
+          <a:xfrm>
+            <a:off x="533520" y="764280"/>
+            <a:ext cx="6704700" cy="3771300"/>
+          </a:xfrm>
+          <a:custGeom>
+            <a:rect b="b" l="l" r="r" t="t"/>
+            <a:pathLst>
+              <a:path extrusionOk="0" h="120000" w="120000">
+                <a:moveTo>
+                  <a:pt x="0" y="0"/>
+                </a:moveTo>
+                <a:lnTo>
+                  <a:pt x="120000" y="0"/>
+                </a:lnTo>
+                <a:lnTo>
+                  <a:pt x="120000" y="120000"/>
+                </a:lnTo>
+                <a:lnTo>
+                  <a:pt x="0" y="120000"/>
+                </a:lnTo>
+                <a:close/>
+              </a:path>
+            </a:pathLst>
+          </a:custGeom>
+        </p:spPr>
+      </p:sp>
+      <p:sp>
+        <p:nvSpPr>
+          <p:cNvPr id="199" name="Google Shape;199;g3dd07ce15c2_0_12:notes"/>
+          <p:cNvSpPr txBox="1"/>
+          <p:nvPr>
+            <p:ph idx="1" type="body"/>
+          </p:nvPr>
+        </p:nvSpPr>
+        <p:spPr>
+          <a:xfrm>
+            <a:off x="777240" y="4777560"/>
+            <a:ext cx="6217500" cy="4525800"/>
+          </a:xfrm>
+          <a:prstGeom prst="rect">
+            <a:avLst/>
+          </a:prstGeom>
+        </p:spPr>
+        <p:txBody>
+          <a:bodyPr anchorCtr="0" anchor="t" bIns="91425" lIns="91425" spcFirstLastPara="1" rIns="91425" wrap="square" tIns="91425">
+            <a:noAutofit/>
+          </a:bodyPr>
+          <a:lstStyle/>
+          <a:p>
+            <a:pPr indent="0" lvl="0" marL="0" rtl="0" algn="l">
+              <a:spcBef>
+                <a:spcPts val="0"/>
+              </a:spcBef>
+              <a:spcAft>
+                <a:spcPts val="0"/>
+              </a:spcAft>
+              <a:buNone/>
+            </a:pPr>
+            <a:r>
+              <a:t/>
+            </a:r>
+            <a:endParaRPr/>
+          </a:p>
+        </p:txBody>
+      </p:sp>
+      <p:sp>
+        <p:nvSpPr>
+          <p:cNvPr id="200" name="Google Shape;200;g3dd07ce15c2_0_12:notes"/>
+          <p:cNvSpPr txBox="1"/>
+          <p:nvPr>
+            <p:ph idx="12" type="sldNum"/>
+          </p:nvPr>
+        </p:nvSpPr>
+        <p:spPr>
+          <a:xfrm>
+            <a:off x="4399200" y="9555480"/>
+            <a:ext cx="3372900" cy="502500"/>
+          </a:xfrm>
+          <a:prstGeom prst="rect">
+            <a:avLst/>
+          </a:prstGeom>
+          <a:noFill/>
+          <a:ln>
+            <a:noFill/>
+          </a:ln>
+        </p:spPr>
+        <p:txBody>
+          <a:bodyPr anchorCtr="0" anchor="ctr" bIns="91425" lIns="91425" spcFirstLastPara="1" rIns="91425" wrap="square" tIns="91425">
+            <a:noAutofit/>
+          </a:bodyPr>
+          <a:lstStyle/>
+          <a:p>
+            <a:pPr indent="0" lvl="0" marL="0" rtl="0" algn="l">
+              <a:spcBef>
+                <a:spcPts val="0"/>
+              </a:spcBef>
+              <a:spcAft>
+                <a:spcPts val="0"/>
+              </a:spcAft>
+              <a:buNone/>
+            </a:pPr>
+            <a:fld id="{00000000-1234-1234-1234-123412341234}" type="slidenum">
+              <a:rPr lang="en"/>
+              <a:t>‹#›</a:t>
+            </a:fld>
+            <a:endParaRPr/>
+          </a:p>
+        </p:txBody>
+      </p:sp>
+    </p:spTree>
+  </p:cSld>
+  <p:clrMapOvr>
+    <a:masterClrMapping/>
+  </p:clrMapOvr>
+</p:notes>
+</file>
+
+<file path=ppt/notesSlides/notesSlide13.xml><?xml version="1.0" encoding="utf-8"?>
+<p:notes xmlns:a="http://schemas.openxmlformats.org/drawingml/2006/main" xmlns:r="http://schemas.openxmlformats.org/officeDocument/2006/relationships" xmlns:mc="http://schemas.openxmlformats.org/markup-compatibility/2006" xmlns:mv="urn:schemas-microsoft-com:mac:vml" xmlns:p="http://schemas.openxmlformats.org/presentationml/2006/main" xmlns:c="http://schemas.openxmlformats.org/drawingml/2006/chart" xmlns:dgm="http://schemas.openxmlformats.org/drawingml/2006/diagram" xmlns:o="urn:schemas-microsoft-com:office:office" xmlns:v="urn:schemas-microsoft-com:vml" xmlns:pvml="urn:schemas-microsoft-com:office:powerpoint" xmlns:com="http://schemas.openxmlformats.org/drawingml/2006/compatibility" xmlns:p14="http://schemas.microsoft.com/office/powerpoint/2010/main" xmlns:p15="http://schemas.microsoft.com/office/powerpoint/2012/main" xmlns:ahyp="http://schemas.microsoft.com/office/drawing/2018/hyperlinkcolor" showMasterPhAnim="0" showMasterSp="0">
+  <p:cSld>
+    <p:spTree>
+      <p:nvGrpSpPr>
+        <p:cNvPr id="207" name="Shape 207"/>
+        <p:cNvGrpSpPr/>
+        <p:nvPr/>
+      </p:nvGrpSpPr>
+      <p:grpSpPr>
+        <a:xfrm>
+          <a:off x="0" y="0"/>
+          <a:ext cx="0" cy="0"/>
+          <a:chOff x="0" y="0"/>
+          <a:chExt cx="0" cy="0"/>
+        </a:xfrm>
+      </p:grpSpPr>
+      <p:sp>
+        <p:nvSpPr>
+          <p:cNvPr id="208" name="Google Shape;208;g3dd07ce15c2_0_21:notes"/>
+          <p:cNvSpPr/>
+          <p:nvPr>
+            <p:ph idx="2" type="sldImg"/>
+          </p:nvPr>
+        </p:nvSpPr>
+        <p:spPr>
+          <a:xfrm>
+            <a:off x="533520" y="764280"/>
+            <a:ext cx="6704700" cy="3771300"/>
+          </a:xfrm>
+          <a:custGeom>
+            <a:rect b="b" l="l" r="r" t="t"/>
+            <a:pathLst>
+              <a:path extrusionOk="0" h="120000" w="120000">
+                <a:moveTo>
+                  <a:pt x="0" y="0"/>
+                </a:moveTo>
+                <a:lnTo>
+                  <a:pt x="120000" y="0"/>
+                </a:lnTo>
+                <a:lnTo>
+                  <a:pt x="120000" y="120000"/>
+                </a:lnTo>
+                <a:lnTo>
+                  <a:pt x="0" y="120000"/>
+                </a:lnTo>
+                <a:close/>
+              </a:path>
+            </a:pathLst>
+          </a:custGeom>
+        </p:spPr>
+      </p:sp>
+      <p:sp>
+        <p:nvSpPr>
+          <p:cNvPr id="209" name="Google Shape;209;g3dd07ce15c2_0_21:notes"/>
+          <p:cNvSpPr txBox="1"/>
+          <p:nvPr>
+            <p:ph idx="1" type="body"/>
+          </p:nvPr>
+        </p:nvSpPr>
+        <p:spPr>
+          <a:xfrm>
+            <a:off x="777240" y="4777560"/>
+            <a:ext cx="6217500" cy="4525800"/>
+          </a:xfrm>
+          <a:prstGeom prst="rect">
+            <a:avLst/>
+          </a:prstGeom>
+        </p:spPr>
+        <p:txBody>
+          <a:bodyPr anchorCtr="0" anchor="t" bIns="91425" lIns="91425" spcFirstLastPara="1" rIns="91425" wrap="square" tIns="91425">
+            <a:noAutofit/>
+          </a:bodyPr>
+          <a:lstStyle/>
+          <a:p>
+            <a:pPr indent="0" lvl="0" marL="0" rtl="0" algn="l">
+              <a:spcBef>
+                <a:spcPts val="0"/>
+              </a:spcBef>
+              <a:spcAft>
+                <a:spcPts val="0"/>
+              </a:spcAft>
+              <a:buNone/>
+            </a:pPr>
+            <a:r>
+              <a:t/>
+            </a:r>
+            <a:endParaRPr/>
+          </a:p>
+        </p:txBody>
+      </p:sp>
+      <p:sp>
+        <p:nvSpPr>
+          <p:cNvPr id="210" name="Google Shape;210;g3dd07ce15c2_0_21:notes"/>
+          <p:cNvSpPr txBox="1"/>
+          <p:nvPr>
+            <p:ph idx="12" type="sldNum"/>
+          </p:nvPr>
+        </p:nvSpPr>
+        <p:spPr>
+          <a:xfrm>
+            <a:off x="4399200" y="9555480"/>
+            <a:ext cx="3372900" cy="502500"/>
+          </a:xfrm>
+          <a:prstGeom prst="rect">
+            <a:avLst/>
+          </a:prstGeom>
+          <a:noFill/>
+          <a:ln>
+            <a:noFill/>
+          </a:ln>
+        </p:spPr>
+        <p:txBody>
+          <a:bodyPr anchorCtr="0" anchor="ctr" bIns="91425" lIns="91425" spcFirstLastPara="1" rIns="91425" wrap="square" tIns="91425">
+            <a:noAutofit/>
+          </a:bodyPr>
+          <a:lstStyle/>
+          <a:p>
+            <a:pPr indent="0" lvl="0" marL="0" rtl="0" algn="l">
+              <a:spcBef>
+                <a:spcPts val="0"/>
+              </a:spcBef>
+              <a:spcAft>
+                <a:spcPts val="0"/>
+              </a:spcAft>
+              <a:buNone/>
+            </a:pPr>
+            <a:fld id="{00000000-1234-1234-1234-123412341234}" type="slidenum">
+              <a:rPr lang="en"/>
+              <a:t>‹#›</a:t>
+            </a:fld>
+            <a:endParaRPr/>
+          </a:p>
+        </p:txBody>
+      </p:sp>
+    </p:spTree>
+  </p:cSld>
+  <p:clrMapOvr>
+    <a:masterClrMapping/>
+  </p:clrMapOvr>
+</p:notes>
+</file>
+
+<file path=ppt/notesSlides/notesSlide14.xml><?xml version="1.0" encoding="utf-8"?>
+<p:notes xmlns:a="http://schemas.openxmlformats.org/drawingml/2006/main" xmlns:r="http://schemas.openxmlformats.org/officeDocument/2006/relationships" xmlns:mc="http://schemas.openxmlformats.org/markup-compatibility/2006" xmlns:mv="urn:schemas-microsoft-com:mac:vml" xmlns:p="http://schemas.openxmlformats.org/presentationml/2006/main" xmlns:c="http://schemas.openxmlformats.org/drawingml/2006/chart" xmlns:dgm="http://schemas.openxmlformats.org/drawingml/2006/diagram" xmlns:o="urn:schemas-microsoft-com:office:office" xmlns:v="urn:schemas-microsoft-com:vml" xmlns:pvml="urn:schemas-microsoft-com:office:powerpoint" xmlns:com="http://schemas.openxmlformats.org/drawingml/2006/compatibility" xmlns:p14="http://schemas.microsoft.com/office/powerpoint/2010/main" xmlns:p15="http://schemas.microsoft.com/office/powerpoint/2012/main" xmlns:ahyp="http://schemas.microsoft.com/office/drawing/2018/hyperlinkcolor" showMasterPhAnim="0" showMasterSp="0">
+  <p:cSld>
+    <p:spTree>
+      <p:nvGrpSpPr>
+        <p:cNvPr id="217" name="Shape 217"/>
+        <p:cNvGrpSpPr/>
+        <p:nvPr/>
+      </p:nvGrpSpPr>
+      <p:grpSpPr>
+        <a:xfrm>
+          <a:off x="0" y="0"/>
+          <a:ext cx="0" cy="0"/>
+          <a:chOff x="0" y="0"/>
+          <a:chExt cx="0" cy="0"/>
+        </a:xfrm>
+      </p:grpSpPr>
+      <p:sp>
+        <p:nvSpPr>
+          <p:cNvPr id="218" name="Google Shape;218;g20c89bfe95e_0_12:notes"/>
           <p:cNvSpPr/>
           <p:nvPr>
             <p:ph idx="2" type="sldImg"/>
@@ -1061,7 +1349,7 @@
       </p:sp>
       <p:sp>
         <p:nvSpPr>
-          <p:cNvPr id="198" name="Google Shape;198;gb8acfec02f_0_0:notes"/>
+          <p:cNvPr id="219" name="Google Shape;219;g20c89bfe95e_0_12:notes"/>
           <p:cNvSpPr txBox="1"/>
           <p:nvPr>
             <p:ph idx="1" type="body"/>
@@ -1106,12 +1394,12 @@
 </p:notes>
 </file>
 
-<file path=ppt/notesSlides/notesSlide13.xml><?xml version="1.0" encoding="utf-8"?>
+<file path=ppt/notesSlides/notesSlide15.xml><?xml version="1.0" encoding="utf-8"?>
 <p:notes xmlns:a="http://schemas.openxmlformats.org/drawingml/2006/main" xmlns:r="http://schemas.openxmlformats.org/officeDocument/2006/relationships" xmlns:mc="http://schemas.openxmlformats.org/markup-compatibility/2006" xmlns:mv="urn:schemas-microsoft-com:mac:vml" xmlns:p="http://schemas.openxmlformats.org/presentationml/2006/main" xmlns:c="http://schemas.openxmlformats.org/drawingml/2006/chart" xmlns:dgm="http://schemas.openxmlformats.org/drawingml/2006/diagram" xmlns:o="urn:schemas-microsoft-com:office:office" xmlns:v="urn:schemas-microsoft-com:vml" xmlns:pvml="urn:schemas-microsoft-com:office:powerpoint" xmlns:com="http://schemas.openxmlformats.org/drawingml/2006/compatibility" xmlns:p14="http://schemas.microsoft.com/office/powerpoint/2010/main" xmlns:p15="http://schemas.microsoft.com/office/powerpoint/2012/main" xmlns:ahyp="http://schemas.microsoft.com/office/drawing/2018/hyperlinkcolor" showMasterPhAnim="0" showMasterSp="0">
   <p:cSld>
     <p:spTree>
       <p:nvGrpSpPr>
-        <p:cNvPr id="208" name="Shape 208"/>
+        <p:cNvPr id="230" name="Shape 230"/>
         <p:cNvGrpSpPr/>
         <p:nvPr/>
       </p:nvGrpSpPr>
@@ -1125,7 +1413,7 @@
       </p:grpSpPr>
       <p:sp>
         <p:nvSpPr>
-          <p:cNvPr id="209" name="Google Shape;209;g446a604d95_0_5:notes"/>
+          <p:cNvPr id="231" name="Google Shape;231;g446a604d95_0_5:notes"/>
           <p:cNvSpPr/>
           <p:nvPr>
             <p:ph idx="2" type="sldImg"/>
@@ -1160,7 +1448,7 @@
       </p:sp>
       <p:sp>
         <p:nvSpPr>
-          <p:cNvPr id="210" name="Google Shape;210;g446a604d95_0_5:notes"/>
+          <p:cNvPr id="232" name="Google Shape;232;g446a604d95_0_5:notes"/>
           <p:cNvSpPr txBox="1"/>
           <p:nvPr>
             <p:ph idx="1" type="body"/>
@@ -1205,12 +1493,12 @@
 </p:notes>
 </file>
 
-<file path=ppt/notesSlides/notesSlide14.xml><?xml version="1.0" encoding="utf-8"?>
+<file path=ppt/notesSlides/notesSlide16.xml><?xml version="1.0" encoding="utf-8"?>
 <p:notes xmlns:a="http://schemas.openxmlformats.org/drawingml/2006/main" xmlns:r="http://schemas.openxmlformats.org/officeDocument/2006/relationships" xmlns:mc="http://schemas.openxmlformats.org/markup-compatibility/2006" xmlns:mv="urn:schemas-microsoft-com:mac:vml" xmlns:p="http://schemas.openxmlformats.org/presentationml/2006/main" xmlns:c="http://schemas.openxmlformats.org/drawingml/2006/chart" xmlns:dgm="http://schemas.openxmlformats.org/drawingml/2006/diagram" xmlns:o="urn:schemas-microsoft-com:office:office" xmlns:v="urn:schemas-microsoft-com:vml" xmlns:pvml="urn:schemas-microsoft-com:office:powerpoint" xmlns:com="http://schemas.openxmlformats.org/drawingml/2006/compatibility" xmlns:p14="http://schemas.microsoft.com/office/powerpoint/2010/main" xmlns:p15="http://schemas.microsoft.com/office/powerpoint/2012/main" xmlns:ahyp="http://schemas.microsoft.com/office/drawing/2018/hyperlinkcolor" showMasterPhAnim="0" showMasterSp="0">
   <p:cSld>
     <p:spTree>
       <p:nvGrpSpPr>
-        <p:cNvPr id="223" name="Shape 223"/>
+        <p:cNvPr id="245" name="Shape 245"/>
         <p:cNvGrpSpPr/>
         <p:nvPr/>
       </p:nvGrpSpPr>
@@ -1224,7 +1512,7 @@
       </p:grpSpPr>
       <p:sp>
         <p:nvSpPr>
-          <p:cNvPr id="224" name="Google Shape;224;ga3014a3f69_0_1:notes"/>
+          <p:cNvPr id="246" name="Google Shape;246;ga3014a3f69_0_1:notes"/>
           <p:cNvSpPr/>
           <p:nvPr>
             <p:ph idx="2" type="sldImg"/>
@@ -1259,7 +1547,7 @@
       </p:sp>
       <p:sp>
         <p:nvSpPr>
-          <p:cNvPr id="225" name="Google Shape;225;ga3014a3f69_0_1:notes"/>
+          <p:cNvPr id="247" name="Google Shape;247;ga3014a3f69_0_1:notes"/>
           <p:cNvSpPr txBox="1"/>
           <p:nvPr>
             <p:ph idx="1" type="body"/>
@@ -1304,12 +1592,12 @@
 </p:notes>
 </file>
 
-<file path=ppt/notesSlides/notesSlide15.xml><?xml version="1.0" encoding="utf-8"?>
+<file path=ppt/notesSlides/notesSlide17.xml><?xml version="1.0" encoding="utf-8"?>
 <p:notes xmlns:a="http://schemas.openxmlformats.org/drawingml/2006/main" xmlns:r="http://schemas.openxmlformats.org/officeDocument/2006/relationships" xmlns:mc="http://schemas.openxmlformats.org/markup-compatibility/2006" xmlns:mv="urn:schemas-microsoft-com:mac:vml" xmlns:p="http://schemas.openxmlformats.org/presentationml/2006/main" xmlns:c="http://schemas.openxmlformats.org/drawingml/2006/chart" xmlns:dgm="http://schemas.openxmlformats.org/drawingml/2006/diagram" xmlns:o="urn:schemas-microsoft-com:office:office" xmlns:v="urn:schemas-microsoft-com:vml" xmlns:pvml="urn:schemas-microsoft-com:office:powerpoint" xmlns:com="http://schemas.openxmlformats.org/drawingml/2006/compatibility" xmlns:p14="http://schemas.microsoft.com/office/powerpoint/2010/main" xmlns:p15="http://schemas.microsoft.com/office/powerpoint/2012/main" xmlns:ahyp="http://schemas.microsoft.com/office/drawing/2018/hyperlinkcolor" showMasterPhAnim="0" showMasterSp="0">
   <p:cSld>
     <p:spTree>
       <p:nvGrpSpPr>
-        <p:cNvPr id="235" name="Shape 235"/>
+        <p:cNvPr id="257" name="Shape 257"/>
         <p:cNvGrpSpPr/>
         <p:nvPr/>
       </p:nvGrpSpPr>
@@ -1323,7 +1611,7 @@
       </p:grpSpPr>
       <p:sp>
         <p:nvSpPr>
-          <p:cNvPr id="236" name="Google Shape;236;g3d3c6ab39dd_0_52:notes"/>
+          <p:cNvPr id="258" name="Google Shape;258;g3d3c6ab39dd_0_52:notes"/>
           <p:cNvSpPr txBox="1"/>
           <p:nvPr>
             <p:ph idx="1" type="body"/>
@@ -1362,7 +1650,7 @@
       </p:sp>
       <p:sp>
         <p:nvSpPr>
-          <p:cNvPr id="237" name="Google Shape;237;g3d3c6ab39dd_0_52:notes"/>
+          <p:cNvPr id="259" name="Google Shape;259;g3d3c6ab39dd_0_52:notes"/>
           <p:cNvSpPr/>
           <p:nvPr>
             <p:ph idx="2" type="sldImg"/>
@@ -1408,7 +1696,7 @@
   <p:cSld>
     <p:spTree>
       <p:nvGrpSpPr>
-        <p:cNvPr id="108" name="Shape 108"/>
+        <p:cNvPr id="113" name="Shape 113"/>
         <p:cNvGrpSpPr/>
         <p:nvPr/>
       </p:nvGrpSpPr>
@@ -1422,7 +1710,7 @@
       </p:grpSpPr>
       <p:sp>
         <p:nvSpPr>
-          <p:cNvPr id="109" name="Google Shape;109;g95f3f96f3c_0_0:notes"/>
+          <p:cNvPr id="114" name="Google Shape;114;g95f3f96f3c_0_0:notes"/>
           <p:cNvSpPr/>
           <p:nvPr>
             <p:ph idx="2" type="sldImg"/>
@@ -1457,7 +1745,7 @@
       </p:sp>
       <p:sp>
         <p:nvSpPr>
-          <p:cNvPr id="110" name="Google Shape;110;g95f3f96f3c_0_0:notes"/>
+          <p:cNvPr id="115" name="Google Shape;115;g95f3f96f3c_0_0:notes"/>
           <p:cNvSpPr txBox="1"/>
           <p:nvPr>
             <p:ph idx="1" type="body"/>
@@ -1507,7 +1795,7 @@
   <p:cSld>
     <p:spTree>
       <p:nvGrpSpPr>
-        <p:cNvPr id="114" name="Shape 114"/>
+        <p:cNvPr id="119" name="Shape 119"/>
         <p:cNvGrpSpPr/>
         <p:nvPr/>
       </p:nvGrpSpPr>
@@ -1521,7 +1809,7 @@
       </p:grpSpPr>
       <p:sp>
         <p:nvSpPr>
-          <p:cNvPr id="115" name="Google Shape;115;g9cfa74970a_0_0:notes"/>
+          <p:cNvPr id="120" name="Google Shape;120;g9cfa74970a_0_0:notes"/>
           <p:cNvSpPr/>
           <p:nvPr>
             <p:ph idx="2" type="sldImg"/>
@@ -1556,7 +1844,7 @@
       </p:sp>
       <p:sp>
         <p:nvSpPr>
-          <p:cNvPr id="116" name="Google Shape;116;g9cfa74970a_0_0:notes"/>
+          <p:cNvPr id="121" name="Google Shape;121;g9cfa74970a_0_0:notes"/>
           <p:cNvSpPr txBox="1"/>
           <p:nvPr>
             <p:ph idx="1" type="body"/>
@@ -1638,7 +1926,7 @@
   <p:cSld>
     <p:spTree>
       <p:nvGrpSpPr>
-        <p:cNvPr id="120" name="Shape 120"/>
+        <p:cNvPr id="125" name="Shape 125"/>
         <p:cNvGrpSpPr/>
         <p:nvPr/>
       </p:nvGrpSpPr>
@@ -1652,7 +1940,7 @@
       </p:grpSpPr>
       <p:sp>
         <p:nvSpPr>
-          <p:cNvPr id="121" name="Google Shape;121;g7d5853f914ccd074_6:notes"/>
+          <p:cNvPr id="126" name="Google Shape;126;g3dd07ce15c2_0_0:notes"/>
           <p:cNvSpPr/>
           <p:nvPr>
             <p:ph idx="2" type="sldImg"/>
@@ -1687,7 +1975,7 @@
       </p:sp>
       <p:sp>
         <p:nvSpPr>
-          <p:cNvPr id="122" name="Google Shape;122;g7d5853f914ccd074_6:notes"/>
+          <p:cNvPr id="127" name="Google Shape;127;g3dd07ce15c2_0_0:notes"/>
           <p:cNvSpPr txBox="1"/>
           <p:nvPr>
             <p:ph idx="1" type="body"/>
@@ -1718,6 +2006,38 @@
               <a:buNone/>
             </a:pPr>
             <a:r>
+              <a:rPr lang="en"/>
+              <a:t>This is the editor that we suggest students use for editing their work. It has syntax checking and code-completion to make things a bit easier.</a:t>
+            </a:r>
+            <a:endParaRPr/>
+          </a:p>
+          <a:p>
+            <a:pPr indent="0" lvl="0" marL="0" rtl="0" algn="l">
+              <a:spcBef>
+                <a:spcPts val="0"/>
+              </a:spcBef>
+              <a:spcAft>
+                <a:spcPts val="0"/>
+              </a:spcAft>
+              <a:buNone/>
+            </a:pPr>
+            <a:r>
+              <a:rPr lang="en"/>
+              <a:t>For online work in groups, we’ll use the bbc:microbit editor.</a:t>
+            </a:r>
+            <a:endParaRPr/>
+          </a:p>
+          <a:p>
+            <a:pPr indent="0" lvl="0" marL="0" rtl="0" algn="l">
+              <a:spcBef>
+                <a:spcPts val="0"/>
+              </a:spcBef>
+              <a:spcAft>
+                <a:spcPts val="0"/>
+              </a:spcAft>
+              <a:buNone/>
+            </a:pPr>
+            <a:r>
               <a:t/>
             </a:r>
             <a:endParaRPr/>
@@ -1737,7 +2057,7 @@
   <p:cSld>
     <p:spTree>
       <p:nvGrpSpPr>
-        <p:cNvPr id="126" name="Shape 126"/>
+        <p:cNvPr id="134" name="Shape 134"/>
         <p:cNvGrpSpPr/>
         <p:nvPr/>
       </p:nvGrpSpPr>
@@ -1751,7 +2071,7 @@
       </p:grpSpPr>
       <p:sp>
         <p:nvSpPr>
-          <p:cNvPr id="127" name="Google Shape;127;g9fa940edee_0_7:notes"/>
+          <p:cNvPr id="135" name="Google Shape;135;g9fa940edee_0_7:notes"/>
           <p:cNvSpPr/>
           <p:nvPr>
             <p:ph idx="2" type="sldImg"/>
@@ -1786,7 +2106,7 @@
       </p:sp>
       <p:sp>
         <p:nvSpPr>
-          <p:cNvPr id="128" name="Google Shape;128;g9fa940edee_0_7:notes"/>
+          <p:cNvPr id="136" name="Google Shape;136;g9fa940edee_0_7:notes"/>
           <p:cNvSpPr txBox="1"/>
           <p:nvPr>
             <p:ph idx="1" type="body"/>
@@ -1868,7 +2188,7 @@
   <p:cSld>
     <p:spTree>
       <p:nvGrpSpPr>
-        <p:cNvPr id="133" name="Shape 133"/>
+        <p:cNvPr id="141" name="Shape 141"/>
         <p:cNvGrpSpPr/>
         <p:nvPr/>
       </p:nvGrpSpPr>
@@ -1882,7 +2202,7 @@
       </p:grpSpPr>
       <p:sp>
         <p:nvSpPr>
-          <p:cNvPr id="134" name="Google Shape;134;gb30a5969e3_0_7:notes"/>
+          <p:cNvPr id="142" name="Google Shape;142;g7d5853f914ccd074_6:notes"/>
           <p:cNvSpPr/>
           <p:nvPr>
             <p:ph idx="2" type="sldImg"/>
@@ -1917,7 +2237,7 @@
       </p:sp>
       <p:sp>
         <p:nvSpPr>
-          <p:cNvPr id="135" name="Google Shape;135;gb30a5969e3_0_7:notes"/>
+          <p:cNvPr id="143" name="Google Shape;143;g7d5853f914ccd074_6:notes"/>
           <p:cNvSpPr txBox="1"/>
           <p:nvPr>
             <p:ph idx="1" type="body"/>
@@ -1967,7 +2287,7 @@
   <p:cSld>
     <p:spTree>
       <p:nvGrpSpPr>
-        <p:cNvPr id="139" name="Shape 139"/>
+        <p:cNvPr id="147" name="Shape 147"/>
         <p:cNvGrpSpPr/>
         <p:nvPr/>
       </p:nvGrpSpPr>
@@ -1981,7 +2301,7 @@
       </p:grpSpPr>
       <p:sp>
         <p:nvSpPr>
-          <p:cNvPr id="140" name="Google Shape;140;gb30a5969e3_0_15:notes"/>
+          <p:cNvPr id="148" name="Google Shape;148;gb30a5969e3_0_15:notes"/>
           <p:cNvSpPr/>
           <p:nvPr>
             <p:ph idx="2" type="sldImg"/>
@@ -2016,7 +2336,7 @@
       </p:sp>
       <p:sp>
         <p:nvSpPr>
-          <p:cNvPr id="141" name="Google Shape;141;gb30a5969e3_0_15:notes"/>
+          <p:cNvPr id="149" name="Google Shape;149;gb30a5969e3_0_15:notes"/>
           <p:cNvSpPr txBox="1"/>
           <p:nvPr>
             <p:ph idx="1" type="body"/>
@@ -2066,7 +2386,7 @@
   <p:cSld>
     <p:spTree>
       <p:nvGrpSpPr>
-        <p:cNvPr id="145" name="Shape 145"/>
+        <p:cNvPr id="153" name="Shape 153"/>
         <p:cNvGrpSpPr/>
         <p:nvPr/>
       </p:nvGrpSpPr>
@@ -2080,7 +2400,7 @@
       </p:grpSpPr>
       <p:sp>
         <p:nvSpPr>
-          <p:cNvPr id="146" name="Google Shape;146;g9fa940edee_0_14:notes"/>
+          <p:cNvPr id="154" name="Google Shape;154;gb30a5969e3_0_7:notes"/>
           <p:cNvSpPr/>
           <p:nvPr>
             <p:ph idx="2" type="sldImg"/>
@@ -2115,7 +2435,7 @@
       </p:sp>
       <p:sp>
         <p:nvSpPr>
-          <p:cNvPr id="147" name="Google Shape;147;g9fa940edee_0_14:notes"/>
+          <p:cNvPr id="155" name="Google Shape;155;gb30a5969e3_0_7:notes"/>
           <p:cNvSpPr txBox="1"/>
           <p:nvPr>
             <p:ph idx="1" type="body"/>
@@ -2165,7 +2485,7 @@
   <p:cSld>
     <p:spTree>
       <p:nvGrpSpPr>
-        <p:cNvPr id="160" name="Shape 160"/>
+        <p:cNvPr id="159" name="Shape 159"/>
         <p:cNvGrpSpPr/>
         <p:nvPr/>
       </p:nvGrpSpPr>
@@ -2179,7 +2499,7 @@
       </p:grpSpPr>
       <p:sp>
         <p:nvSpPr>
-          <p:cNvPr id="161" name="Google Shape;161;gb8acfec02f_0_14:notes"/>
+          <p:cNvPr id="160" name="Google Shape;160;g9fa940edee_0_14:notes"/>
           <p:cNvSpPr/>
           <p:nvPr>
             <p:ph idx="2" type="sldImg"/>
@@ -2214,7 +2534,7 @@
       </p:sp>
       <p:sp>
         <p:nvSpPr>
-          <p:cNvPr id="162" name="Google Shape;162;gb8acfec02f_0_14:notes"/>
+          <p:cNvPr id="161" name="Google Shape;161;g9fa940edee_0_14:notes"/>
           <p:cNvSpPr txBox="1"/>
           <p:nvPr>
             <p:ph idx="1" type="body"/>
@@ -3335,8 +3655,8 @@
 </file>
 
 <file path=ppt/slideLayouts/slideLayout12.xml><?xml version="1.0" encoding="utf-8"?>
-<p:sldLayout xmlns:a="http://schemas.openxmlformats.org/drawingml/2006/main" xmlns:r="http://schemas.openxmlformats.org/officeDocument/2006/relationships" xmlns:mc="http://schemas.openxmlformats.org/markup-compatibility/2006" xmlns:mv="urn:schemas-microsoft-com:mac:vml" xmlns:p="http://schemas.openxmlformats.org/presentationml/2006/main" xmlns:c="http://schemas.openxmlformats.org/drawingml/2006/chart" xmlns:dgm="http://schemas.openxmlformats.org/drawingml/2006/diagram" xmlns:o="urn:schemas-microsoft-com:office:office" xmlns:v="urn:schemas-microsoft-com:vml" xmlns:pvml="urn:schemas-microsoft-com:office:powerpoint" xmlns:com="http://schemas.openxmlformats.org/drawingml/2006/compatibility" xmlns:p14="http://schemas.microsoft.com/office/powerpoint/2010/main" xmlns:p15="http://schemas.microsoft.com/office/powerpoint/2012/main" xmlns:ahyp="http://schemas.microsoft.com/office/drawing/2018/hyperlinkcolor" matchingName="TITLE" type="title">
-  <p:cSld name="TITLE">
+<p:sldLayout xmlns:a="http://schemas.openxmlformats.org/drawingml/2006/main" xmlns:r="http://schemas.openxmlformats.org/officeDocument/2006/relationships" xmlns:mc="http://schemas.openxmlformats.org/markup-compatibility/2006" xmlns:mv="urn:schemas-microsoft-com:mac:vml" xmlns:p="http://schemas.openxmlformats.org/presentationml/2006/main" xmlns:c="http://schemas.openxmlformats.org/drawingml/2006/chart" xmlns:dgm="http://schemas.openxmlformats.org/drawingml/2006/diagram" xmlns:o="urn:schemas-microsoft-com:office:office" xmlns:v="urn:schemas-microsoft-com:vml" xmlns:pvml="urn:schemas-microsoft-com:office:powerpoint" xmlns:com="http://schemas.openxmlformats.org/drawingml/2006/compatibility" xmlns:p14="http://schemas.microsoft.com/office/powerpoint/2010/main" xmlns:p15="http://schemas.microsoft.com/office/powerpoint/2012/main" xmlns:ahyp="http://schemas.microsoft.com/office/drawing/2018/hyperlinkcolor" matchingName="SECTION_HEADER">
+  <p:cSld name="BLANK_1">
     <p:bg>
       <p:bgPr>
         <a:solidFill>
@@ -3346,7 +3666,7 @@
     </p:bg>
     <p:spTree>
       <p:nvGrpSpPr>
-        <p:cNvPr id="56" name="Shape 56"/>
+        <p:cNvPr id="55" name="Shape 55"/>
         <p:cNvGrpSpPr/>
         <p:nvPr/>
       </p:nvGrpSpPr>
@@ -3360,7 +3680,7 @@
       </p:grpSpPr>
       <p:cxnSp>
         <p:nvCxnSpPr>
-          <p:cNvPr id="57" name="Google Shape;57;p14"/>
+          <p:cNvPr id="56" name="Google Shape;56;p13"/>
           <p:cNvCxnSpPr/>
           <p:nvPr/>
         </p:nvCxnSpPr>
@@ -3386,7 +3706,7 @@
       </p:cxnSp>
       <p:sp>
         <p:nvSpPr>
-          <p:cNvPr id="58" name="Google Shape;58;p14"/>
+          <p:cNvPr id="57" name="Google Shape;57;p13"/>
           <p:cNvSpPr txBox="1"/>
           <p:nvPr>
             <p:ph type="title"/>
@@ -3394,8 +3714,8 @@
         </p:nvSpPr>
         <p:spPr>
           <a:xfrm>
-            <a:off x="510480" y="1257480"/>
-            <a:ext cx="8122800" cy="1588200"/>
+            <a:off x="510480" y="2057400"/>
+            <a:ext cx="8122800" cy="778200"/>
           </a:xfrm>
           <a:prstGeom prst="rect">
             <a:avLst/>
@@ -3417,7 +3737,7 @@
               <a:spcAft>
                 <a:spcPts val="0"/>
               </a:spcAft>
-              <a:buSzPts val="1400"/>
+              <a:buSzPts val="2800"/>
               <a:buNone/>
               <a:defRPr b="0" i="0" sz="1800" u="none" cap="none" strike="noStrike"/>
             </a:lvl1pPr>
@@ -3428,7 +3748,7 @@
               <a:spcAft>
                 <a:spcPts val="0"/>
               </a:spcAft>
-              <a:buSzPts val="1400"/>
+              <a:buSzPts val="2800"/>
               <a:buNone/>
               <a:defRPr b="0" i="0" sz="1800" u="none" cap="none" strike="noStrike"/>
             </a:lvl2pPr>
@@ -3439,7 +3759,7 @@
               <a:spcAft>
                 <a:spcPts val="0"/>
               </a:spcAft>
-              <a:buSzPts val="1400"/>
+              <a:buSzPts val="2800"/>
               <a:buNone/>
               <a:defRPr b="0" i="0" sz="1800" u="none" cap="none" strike="noStrike"/>
             </a:lvl3pPr>
@@ -3450,7 +3770,7 @@
               <a:spcAft>
                 <a:spcPts val="0"/>
               </a:spcAft>
-              <a:buSzPts val="1400"/>
+              <a:buSzPts val="2800"/>
               <a:buNone/>
               <a:defRPr b="0" i="0" sz="1800" u="none" cap="none" strike="noStrike"/>
             </a:lvl4pPr>
@@ -3461,7 +3781,7 @@
               <a:spcAft>
                 <a:spcPts val="0"/>
               </a:spcAft>
-              <a:buSzPts val="1400"/>
+              <a:buSzPts val="2800"/>
               <a:buNone/>
               <a:defRPr b="0" i="0" sz="1800" u="none" cap="none" strike="noStrike"/>
             </a:lvl5pPr>
@@ -3472,7 +3792,7 @@
               <a:spcAft>
                 <a:spcPts val="0"/>
               </a:spcAft>
-              <a:buSzPts val="1400"/>
+              <a:buSzPts val="2800"/>
               <a:buNone/>
               <a:defRPr b="0" i="0" sz="1800" u="none" cap="none" strike="noStrike"/>
             </a:lvl6pPr>
@@ -3483,7 +3803,7 @@
               <a:spcAft>
                 <a:spcPts val="0"/>
               </a:spcAft>
-              <a:buSzPts val="1400"/>
+              <a:buSzPts val="2800"/>
               <a:buNone/>
               <a:defRPr b="0" i="0" sz="1800" u="none" cap="none" strike="noStrike"/>
             </a:lvl7pPr>
@@ -3494,7 +3814,7 @@
               <a:spcAft>
                 <a:spcPts val="0"/>
               </a:spcAft>
-              <a:buSzPts val="1400"/>
+              <a:buSzPts val="2800"/>
               <a:buNone/>
               <a:defRPr b="0" i="0" sz="1800" u="none" cap="none" strike="noStrike"/>
             </a:lvl8pPr>
@@ -3505,7 +3825,7 @@
               <a:spcAft>
                 <a:spcPts val="0"/>
               </a:spcAft>
-              <a:buSzPts val="1400"/>
+              <a:buSzPts val="2800"/>
               <a:buNone/>
               <a:defRPr b="0" i="0" sz="1800" u="none" cap="none" strike="noStrike"/>
             </a:lvl9pPr>
@@ -3515,7 +3835,7 @@
       </p:sp>
       <p:sp>
         <p:nvSpPr>
-          <p:cNvPr id="59" name="Google Shape;59;p14"/>
+          <p:cNvPr id="58" name="Google Shape;58;p13"/>
           <p:cNvSpPr txBox="1"/>
           <p:nvPr>
             <p:ph idx="12" type="sldNum"/>
@@ -3775,7 +4095,7 @@
       </p:sp>
       <p:sp>
         <p:nvSpPr>
-          <p:cNvPr id="60" name="Google Shape;60;p14"/>
+          <p:cNvPr id="59" name="Google Shape;59;p13"/>
           <p:cNvSpPr txBox="1"/>
           <p:nvPr>
             <p:ph idx="1" type="body"/>
@@ -3806,13 +4126,13 @@
               <a:spcAft>
                 <a:spcPts val="0"/>
               </a:spcAft>
-              <a:buSzPts val="1400"/>
+              <a:buSzPts val="1800"/>
               <a:buNone/>
               <a:defRPr b="0" i="0" sz="1800" u="none" cap="none" strike="noStrike"/>
             </a:lvl1pPr>
             <a:lvl2pPr indent="-228600" lvl="1" marL="914400" marR="0" algn="l">
               <a:spcBef>
-                <a:spcPts val="0"/>
+                <a:spcPts val="1600"/>
               </a:spcBef>
               <a:spcAft>
                 <a:spcPts val="0"/>
@@ -3823,7 +4143,7 @@
             </a:lvl2pPr>
             <a:lvl3pPr indent="-228600" lvl="2" marL="1371600" marR="0" algn="l">
               <a:spcBef>
-                <a:spcPts val="0"/>
+                <a:spcPts val="1600"/>
               </a:spcBef>
               <a:spcAft>
                 <a:spcPts val="0"/>
@@ -3834,7 +4154,7 @@
             </a:lvl3pPr>
             <a:lvl4pPr indent="-228600" lvl="3" marL="1828800" marR="0" algn="l">
               <a:spcBef>
-                <a:spcPts val="0"/>
+                <a:spcPts val="1600"/>
               </a:spcBef>
               <a:spcAft>
                 <a:spcPts val="0"/>
@@ -3845,7 +4165,7 @@
             </a:lvl4pPr>
             <a:lvl5pPr indent="-228600" lvl="4" marL="2286000" marR="0" algn="l">
               <a:spcBef>
-                <a:spcPts val="0"/>
+                <a:spcPts val="1600"/>
               </a:spcBef>
               <a:spcAft>
                 <a:spcPts val="0"/>
@@ -3856,7 +4176,7 @@
             </a:lvl5pPr>
             <a:lvl6pPr indent="-228600" lvl="5" marL="2743200" marR="0" algn="l">
               <a:spcBef>
-                <a:spcPts val="0"/>
+                <a:spcPts val="1600"/>
               </a:spcBef>
               <a:spcAft>
                 <a:spcPts val="0"/>
@@ -3867,7 +4187,7 @@
             </a:lvl6pPr>
             <a:lvl7pPr indent="-228600" lvl="6" marL="3200400" marR="0" algn="l">
               <a:spcBef>
-                <a:spcPts val="0"/>
+                <a:spcPts val="1600"/>
               </a:spcBef>
               <a:spcAft>
                 <a:spcPts val="0"/>
@@ -3878,7 +4198,7 @@
             </a:lvl7pPr>
             <a:lvl8pPr indent="-228600" lvl="7" marL="3657600" marR="0" algn="l">
               <a:spcBef>
-                <a:spcPts val="0"/>
+                <a:spcPts val="1600"/>
               </a:spcBef>
               <a:spcAft>
                 <a:spcPts val="0"/>
@@ -3889,10 +4209,10 @@
             </a:lvl8pPr>
             <a:lvl9pPr indent="-228600" lvl="8" marL="4114800" marR="0" algn="l">
               <a:spcBef>
-                <a:spcPts val="0"/>
-              </a:spcBef>
-              <a:spcAft>
-                <a:spcPts val="0"/>
+                <a:spcPts val="1600"/>
+              </a:spcBef>
+              <a:spcAft>
+                <a:spcPts val="1600"/>
               </a:spcAft>
               <a:buSzPts val="1400"/>
               <a:buNone/>
@@ -3911,8 +4231,8 @@
 </file>
 
 <file path=ppt/slideLayouts/slideLayout13.xml><?xml version="1.0" encoding="utf-8"?>
-<p:sldLayout xmlns:a="http://schemas.openxmlformats.org/drawingml/2006/main" xmlns:r="http://schemas.openxmlformats.org/officeDocument/2006/relationships" xmlns:mc="http://schemas.openxmlformats.org/markup-compatibility/2006" xmlns:mv="urn:schemas-microsoft-com:mac:vml" xmlns:p="http://schemas.openxmlformats.org/presentationml/2006/main" xmlns:c="http://schemas.openxmlformats.org/drawingml/2006/chart" xmlns:dgm="http://schemas.openxmlformats.org/drawingml/2006/diagram" xmlns:o="urn:schemas-microsoft-com:office:office" xmlns:v="urn:schemas-microsoft-com:vml" xmlns:pvml="urn:schemas-microsoft-com:office:powerpoint" xmlns:com="http://schemas.openxmlformats.org/drawingml/2006/compatibility" xmlns:p14="http://schemas.microsoft.com/office/powerpoint/2010/main" xmlns:p15="http://schemas.microsoft.com/office/powerpoint/2012/main" xmlns:ahyp="http://schemas.microsoft.com/office/drawing/2018/hyperlinkcolor" matchingName="SECTION_HEADER" type="blank">
-  <p:cSld name="BLANK">
+<p:sldLayout xmlns:a="http://schemas.openxmlformats.org/drawingml/2006/main" xmlns:r="http://schemas.openxmlformats.org/officeDocument/2006/relationships" xmlns:mc="http://schemas.openxmlformats.org/markup-compatibility/2006" xmlns:mv="urn:schemas-microsoft-com:mac:vml" xmlns:p="http://schemas.openxmlformats.org/presentationml/2006/main" xmlns:c="http://schemas.openxmlformats.org/drawingml/2006/chart" xmlns:dgm="http://schemas.openxmlformats.org/drawingml/2006/diagram" xmlns:o="urn:schemas-microsoft-com:office:office" xmlns:v="urn:schemas-microsoft-com:vml" xmlns:pvml="urn:schemas-microsoft-com:office:powerpoint" xmlns:com="http://schemas.openxmlformats.org/drawingml/2006/compatibility" xmlns:p14="http://schemas.microsoft.com/office/powerpoint/2010/main" xmlns:p15="http://schemas.microsoft.com/office/powerpoint/2012/main" xmlns:ahyp="http://schemas.microsoft.com/office/drawing/2018/hyperlinkcolor" matchingName="TITLE" type="title">
+  <p:cSld name="TITLE">
     <p:bg>
       <p:bgPr>
         <a:solidFill>
@@ -3970,8 +4290,8 @@
         </p:nvSpPr>
         <p:spPr>
           <a:xfrm>
-            <a:off x="510480" y="2057400"/>
-            <a:ext cx="8122800" cy="778200"/>
+            <a:off x="510480" y="1257480"/>
+            <a:ext cx="8122800" cy="1588200"/>
           </a:xfrm>
           <a:prstGeom prst="rect">
             <a:avLst/>
@@ -4487,12 +4807,12 @@
 </file>
 
 <file path=ppt/slideLayouts/slideLayout14.xml><?xml version="1.0" encoding="utf-8"?>
-<p:sldLayout xmlns:a="http://schemas.openxmlformats.org/drawingml/2006/main" xmlns:r="http://schemas.openxmlformats.org/officeDocument/2006/relationships" xmlns:mc="http://schemas.openxmlformats.org/markup-compatibility/2006" xmlns:mv="urn:schemas-microsoft-com:mac:vml" xmlns:p="http://schemas.openxmlformats.org/presentationml/2006/main" xmlns:c="http://schemas.openxmlformats.org/drawingml/2006/chart" xmlns:dgm="http://schemas.openxmlformats.org/drawingml/2006/diagram" xmlns:o="urn:schemas-microsoft-com:office:office" xmlns:v="urn:schemas-microsoft-com:vml" xmlns:pvml="urn:schemas-microsoft-com:office:powerpoint" xmlns:com="http://schemas.openxmlformats.org/drawingml/2006/compatibility" xmlns:p14="http://schemas.microsoft.com/office/powerpoint/2010/main" xmlns:p15="http://schemas.microsoft.com/office/powerpoint/2012/main" xmlns:ahyp="http://schemas.microsoft.com/office/drawing/2018/hyperlinkcolor" matchingName="TITLE_AND_BODY" type="tx">
-  <p:cSld name="TITLE_AND_BODY">
+<p:sldLayout xmlns:a="http://schemas.openxmlformats.org/drawingml/2006/main" xmlns:r="http://schemas.openxmlformats.org/officeDocument/2006/relationships" xmlns:mc="http://schemas.openxmlformats.org/markup-compatibility/2006" xmlns:mv="urn:schemas-microsoft-com:mac:vml" xmlns:p="http://schemas.openxmlformats.org/presentationml/2006/main" xmlns:c="http://schemas.openxmlformats.org/drawingml/2006/chart" xmlns:dgm="http://schemas.openxmlformats.org/drawingml/2006/diagram" xmlns:o="urn:schemas-microsoft-com:office:office" xmlns:v="urn:schemas-microsoft-com:vml" xmlns:pvml="urn:schemas-microsoft-com:office:powerpoint" xmlns:com="http://schemas.openxmlformats.org/drawingml/2006/compatibility" xmlns:p14="http://schemas.microsoft.com/office/powerpoint/2010/main" xmlns:p15="http://schemas.microsoft.com/office/powerpoint/2012/main" xmlns:ahyp="http://schemas.microsoft.com/office/drawing/2018/hyperlinkcolor" matchingName="SECTION_HEADER" type="blank">
+  <p:cSld name="BLANK">
     <p:bg>
       <p:bgPr>
         <a:solidFill>
-          <a:schemeClr val="lt1"/>
+          <a:schemeClr val="dk1"/>
         </a:solidFill>
       </p:bgPr>
     </p:bg>
@@ -4510,60 +4830,32 @@
           <a:chExt cx="0" cy="0"/>
         </a:xfrm>
       </p:grpSpPr>
-      <p:sp>
-        <p:nvSpPr>
+      <p:cxnSp>
+        <p:nvCxnSpPr>
           <p:cNvPr id="67" name="Google Shape;67;p16"/>
-          <p:cNvSpPr/>
+          <p:cNvCxnSpPr/>
           <p:nvPr/>
-        </p:nvSpPr>
+        </p:nvCxnSpPr>
         <p:spPr>
           <a:xfrm>
-            <a:off x="0" y="5045760"/>
-            <a:ext cx="9143700" cy="97500"/>
+            <a:off x="0" y="2998080"/>
+            <a:ext cx="9144300" cy="300"/>
           </a:xfrm>
-          <a:prstGeom prst="rect">
+          <a:prstGeom prst="straightConnector1">
             <a:avLst/>
           </a:prstGeom>
-          <a:solidFill>
-            <a:schemeClr val="lt2"/>
-          </a:solidFill>
-          <a:ln>
-            <a:noFill/>
+          <a:noFill/>
+          <a:ln cap="flat" cmpd="sng" w="19050">
+            <a:solidFill>
+              <a:srgbClr val="63D297"/>
+            </a:solidFill>
+            <a:prstDash val="solid"/>
+            <a:round/>
+            <a:headEnd len="sm" w="sm" type="none"/>
+            <a:tailEnd len="sm" w="sm" type="none"/>
           </a:ln>
         </p:spPr>
-        <p:txBody>
-          <a:bodyPr anchorCtr="0" anchor="ctr" bIns="48950" lIns="91425" spcFirstLastPara="1" rIns="91425" wrap="square" tIns="48950">
-            <a:noAutofit/>
-          </a:bodyPr>
-          <a:lstStyle/>
-          <a:p>
-            <a:pPr indent="0" lvl="0" marL="0" marR="0" rtl="0" algn="l">
-              <a:lnSpc>
-                <a:spcPct val="100000"/>
-              </a:lnSpc>
-              <a:spcBef>
-                <a:spcPts val="0"/>
-              </a:spcBef>
-              <a:spcAft>
-                <a:spcPts val="0"/>
-              </a:spcAft>
-              <a:buNone/>
-            </a:pPr>
-            <a:r>
-              <a:t/>
-            </a:r>
-            <a:endParaRPr b="0" sz="1400" u="none" strike="noStrike">
-              <a:solidFill>
-                <a:srgbClr val="000000"/>
-              </a:solidFill>
-              <a:latin typeface="Arial"/>
-              <a:ea typeface="Arial"/>
-              <a:cs typeface="Arial"/>
-              <a:sym typeface="Arial"/>
-            </a:endParaRPr>
-          </a:p>
-        </p:txBody>
-      </p:sp>
+      </p:cxnSp>
       <p:sp>
         <p:nvSpPr>
           <p:cNvPr id="68" name="Google Shape;68;p16"/>
@@ -4574,8 +4866,8 @@
         </p:nvSpPr>
         <p:spPr>
           <a:xfrm>
-            <a:off x="311760" y="444960"/>
-            <a:ext cx="8520000" cy="572400"/>
+            <a:off x="510480" y="2057400"/>
+            <a:ext cx="8122800" cy="778200"/>
           </a:xfrm>
           <a:prstGeom prst="rect">
             <a:avLst/>
@@ -4586,7 +4878,7 @@
           </a:ln>
         </p:spPr>
         <p:txBody>
-          <a:bodyPr anchorCtr="0" anchor="t" bIns="91425" lIns="91425" spcFirstLastPara="1" rIns="91425" wrap="square" tIns="91425">
+          <a:bodyPr anchorCtr="0" anchor="b" bIns="91425" lIns="91425" spcFirstLastPara="1" rIns="91425" wrap="square" tIns="91425">
             <a:noAutofit/>
           </a:bodyPr>
           <a:lstStyle>
@@ -4696,135 +4988,6 @@
       <p:sp>
         <p:nvSpPr>
           <p:cNvPr id="69" name="Google Shape;69;p16"/>
-          <p:cNvSpPr txBox="1"/>
-          <p:nvPr>
-            <p:ph idx="1" type="body"/>
-          </p:nvPr>
-        </p:nvSpPr>
-        <p:spPr>
-          <a:xfrm>
-            <a:off x="311760" y="1152360"/>
-            <a:ext cx="8520000" cy="3416100"/>
-          </a:xfrm>
-          <a:prstGeom prst="rect">
-            <a:avLst/>
-          </a:prstGeom>
-          <a:noFill/>
-          <a:ln>
-            <a:noFill/>
-          </a:ln>
-        </p:spPr>
-        <p:txBody>
-          <a:bodyPr anchorCtr="0" anchor="t" bIns="91425" lIns="91425" spcFirstLastPara="1" rIns="91425" wrap="square" tIns="91425">
-            <a:noAutofit/>
-          </a:bodyPr>
-          <a:lstStyle>
-            <a:lvl1pPr indent="-228600" lvl="0" marL="457200" marR="0" algn="l">
-              <a:spcBef>
-                <a:spcPts val="0"/>
-              </a:spcBef>
-              <a:spcAft>
-                <a:spcPts val="0"/>
-              </a:spcAft>
-              <a:buSzPts val="1400"/>
-              <a:buNone/>
-              <a:defRPr b="0" i="0" sz="1800" u="none" cap="none" strike="noStrike"/>
-            </a:lvl1pPr>
-            <a:lvl2pPr indent="-228600" lvl="1" marL="914400" marR="0" algn="l">
-              <a:spcBef>
-                <a:spcPts val="0"/>
-              </a:spcBef>
-              <a:spcAft>
-                <a:spcPts val="0"/>
-              </a:spcAft>
-              <a:buSzPts val="1400"/>
-              <a:buNone/>
-              <a:defRPr b="0" i="0" sz="1800" u="none" cap="none" strike="noStrike"/>
-            </a:lvl2pPr>
-            <a:lvl3pPr indent="-228600" lvl="2" marL="1371600" marR="0" algn="l">
-              <a:spcBef>
-                <a:spcPts val="0"/>
-              </a:spcBef>
-              <a:spcAft>
-                <a:spcPts val="0"/>
-              </a:spcAft>
-              <a:buSzPts val="1400"/>
-              <a:buNone/>
-              <a:defRPr b="0" i="0" sz="1800" u="none" cap="none" strike="noStrike"/>
-            </a:lvl3pPr>
-            <a:lvl4pPr indent="-228600" lvl="3" marL="1828800" marR="0" algn="l">
-              <a:spcBef>
-                <a:spcPts val="0"/>
-              </a:spcBef>
-              <a:spcAft>
-                <a:spcPts val="0"/>
-              </a:spcAft>
-              <a:buSzPts val="1400"/>
-              <a:buNone/>
-              <a:defRPr b="0" i="0" sz="1800" u="none" cap="none" strike="noStrike"/>
-            </a:lvl4pPr>
-            <a:lvl5pPr indent="-228600" lvl="4" marL="2286000" marR="0" algn="l">
-              <a:spcBef>
-                <a:spcPts val="0"/>
-              </a:spcBef>
-              <a:spcAft>
-                <a:spcPts val="0"/>
-              </a:spcAft>
-              <a:buSzPts val="1400"/>
-              <a:buNone/>
-              <a:defRPr b="0" i="0" sz="1800" u="none" cap="none" strike="noStrike"/>
-            </a:lvl5pPr>
-            <a:lvl6pPr indent="-228600" lvl="5" marL="2743200" marR="0" algn="l">
-              <a:spcBef>
-                <a:spcPts val="0"/>
-              </a:spcBef>
-              <a:spcAft>
-                <a:spcPts val="0"/>
-              </a:spcAft>
-              <a:buSzPts val="1400"/>
-              <a:buNone/>
-              <a:defRPr b="0" i="0" sz="1800" u="none" cap="none" strike="noStrike"/>
-            </a:lvl6pPr>
-            <a:lvl7pPr indent="-228600" lvl="6" marL="3200400" marR="0" algn="l">
-              <a:spcBef>
-                <a:spcPts val="0"/>
-              </a:spcBef>
-              <a:spcAft>
-                <a:spcPts val="0"/>
-              </a:spcAft>
-              <a:buSzPts val="1400"/>
-              <a:buNone/>
-              <a:defRPr b="0" i="0" sz="1800" u="none" cap="none" strike="noStrike"/>
-            </a:lvl7pPr>
-            <a:lvl8pPr indent="-228600" lvl="7" marL="3657600" marR="0" algn="l">
-              <a:spcBef>
-                <a:spcPts val="0"/>
-              </a:spcBef>
-              <a:spcAft>
-                <a:spcPts val="0"/>
-              </a:spcAft>
-              <a:buSzPts val="1400"/>
-              <a:buNone/>
-              <a:defRPr b="0" i="0" sz="1800" u="none" cap="none" strike="noStrike"/>
-            </a:lvl8pPr>
-            <a:lvl9pPr indent="-228600" lvl="8" marL="4114800" marR="0" algn="l">
-              <a:spcBef>
-                <a:spcPts val="0"/>
-              </a:spcBef>
-              <a:spcAft>
-                <a:spcPts val="0"/>
-              </a:spcAft>
-              <a:buSzPts val="1400"/>
-              <a:buNone/>
-              <a:defRPr b="0" i="0" sz="1800" u="none" cap="none" strike="noStrike"/>
-            </a:lvl9pPr>
-          </a:lstStyle>
-          <a:p/>
-        </p:txBody>
-      </p:sp>
-      <p:sp>
-        <p:nvSpPr>
-          <p:cNvPr id="70" name="Google Shape;70;p16"/>
           <p:cNvSpPr txBox="1"/>
           <p:nvPr>
             <p:ph idx="12" type="sldNum"/>
@@ -4856,14 +5019,14 @@
                 <a:spcPts val="0"/>
               </a:spcBef>
               <a:buClr>
-                <a:schemeClr val="dk1"/>
+                <a:schemeClr val="lt1"/>
               </a:buClr>
               <a:buSzPts val="1000"/>
               <a:buFont typeface="Proxima Nova"/>
               <a:buNone/>
-              <a:defRPr b="0" sz="1000" u="none" strike="noStrike">
-                <a:solidFill>
-                  <a:schemeClr val="dk1"/>
+              <a:defRPr b="0" i="0" sz="1000" u="none" cap="none" strike="noStrike">
+                <a:solidFill>
+                  <a:schemeClr val="lt1"/>
                 </a:solidFill>
                 <a:latin typeface="Proxima Nova"/>
                 <a:ea typeface="Proxima Nova"/>
@@ -4879,14 +5042,14 @@
                 <a:spcPts val="0"/>
               </a:spcBef>
               <a:buClr>
-                <a:schemeClr val="dk1"/>
+                <a:schemeClr val="lt1"/>
               </a:buClr>
               <a:buSzPts val="1000"/>
               <a:buFont typeface="Proxima Nova"/>
               <a:buNone/>
-              <a:defRPr b="0" sz="1000" u="none" strike="noStrike">
-                <a:solidFill>
-                  <a:schemeClr val="dk1"/>
+              <a:defRPr b="0" i="0" sz="1000" u="none" cap="none" strike="noStrike">
+                <a:solidFill>
+                  <a:schemeClr val="lt1"/>
                 </a:solidFill>
                 <a:latin typeface="Proxima Nova"/>
                 <a:ea typeface="Proxima Nova"/>
@@ -4902,14 +5065,14 @@
                 <a:spcPts val="0"/>
               </a:spcBef>
               <a:buClr>
-                <a:schemeClr val="dk1"/>
+                <a:schemeClr val="lt1"/>
               </a:buClr>
               <a:buSzPts val="1000"/>
               <a:buFont typeface="Proxima Nova"/>
               <a:buNone/>
-              <a:defRPr b="0" sz="1000" u="none" strike="noStrike">
-                <a:solidFill>
-                  <a:schemeClr val="dk1"/>
+              <a:defRPr b="0" i="0" sz="1000" u="none" cap="none" strike="noStrike">
+                <a:solidFill>
+                  <a:schemeClr val="lt1"/>
                 </a:solidFill>
                 <a:latin typeface="Proxima Nova"/>
                 <a:ea typeface="Proxima Nova"/>
@@ -4925,14 +5088,14 @@
                 <a:spcPts val="0"/>
               </a:spcBef>
               <a:buClr>
-                <a:schemeClr val="dk1"/>
+                <a:schemeClr val="lt1"/>
               </a:buClr>
               <a:buSzPts val="1000"/>
               <a:buFont typeface="Proxima Nova"/>
               <a:buNone/>
-              <a:defRPr b="0" sz="1000" u="none" strike="noStrike">
-                <a:solidFill>
-                  <a:schemeClr val="dk1"/>
+              <a:defRPr b="0" i="0" sz="1000" u="none" cap="none" strike="noStrike">
+                <a:solidFill>
+                  <a:schemeClr val="lt1"/>
                 </a:solidFill>
                 <a:latin typeface="Proxima Nova"/>
                 <a:ea typeface="Proxima Nova"/>
@@ -4948,14 +5111,14 @@
                 <a:spcPts val="0"/>
               </a:spcBef>
               <a:buClr>
-                <a:schemeClr val="dk1"/>
+                <a:schemeClr val="lt1"/>
               </a:buClr>
               <a:buSzPts val="1000"/>
               <a:buFont typeface="Proxima Nova"/>
               <a:buNone/>
-              <a:defRPr b="0" sz="1000" u="none" strike="noStrike">
-                <a:solidFill>
-                  <a:schemeClr val="dk1"/>
+              <a:defRPr b="0" i="0" sz="1000" u="none" cap="none" strike="noStrike">
+                <a:solidFill>
+                  <a:schemeClr val="lt1"/>
                 </a:solidFill>
                 <a:latin typeface="Proxima Nova"/>
                 <a:ea typeface="Proxima Nova"/>
@@ -4971,14 +5134,14 @@
                 <a:spcPts val="0"/>
               </a:spcBef>
               <a:buClr>
-                <a:schemeClr val="dk1"/>
+                <a:schemeClr val="lt1"/>
               </a:buClr>
               <a:buSzPts val="1000"/>
               <a:buFont typeface="Proxima Nova"/>
               <a:buNone/>
-              <a:defRPr b="0" sz="1000" u="none" strike="noStrike">
-                <a:solidFill>
-                  <a:schemeClr val="dk1"/>
+              <a:defRPr b="0" i="0" sz="1000" u="none" cap="none" strike="noStrike">
+                <a:solidFill>
+                  <a:schemeClr val="lt1"/>
                 </a:solidFill>
                 <a:latin typeface="Proxima Nova"/>
                 <a:ea typeface="Proxima Nova"/>
@@ -4994,14 +5157,14 @@
                 <a:spcPts val="0"/>
               </a:spcBef>
               <a:buClr>
-                <a:schemeClr val="dk1"/>
+                <a:schemeClr val="lt1"/>
               </a:buClr>
               <a:buSzPts val="1000"/>
               <a:buFont typeface="Proxima Nova"/>
               <a:buNone/>
-              <a:defRPr b="0" sz="1000" u="none" strike="noStrike">
-                <a:solidFill>
-                  <a:schemeClr val="dk1"/>
+              <a:defRPr b="0" i="0" sz="1000" u="none" cap="none" strike="noStrike">
+                <a:solidFill>
+                  <a:schemeClr val="lt1"/>
                 </a:solidFill>
                 <a:latin typeface="Proxima Nova"/>
                 <a:ea typeface="Proxima Nova"/>
@@ -5017,14 +5180,14 @@
                 <a:spcPts val="0"/>
               </a:spcBef>
               <a:buClr>
-                <a:schemeClr val="dk1"/>
+                <a:schemeClr val="lt1"/>
               </a:buClr>
               <a:buSzPts val="1000"/>
               <a:buFont typeface="Proxima Nova"/>
               <a:buNone/>
-              <a:defRPr b="0" sz="1000" u="none" strike="noStrike">
-                <a:solidFill>
-                  <a:schemeClr val="dk1"/>
+              <a:defRPr b="0" i="0" sz="1000" u="none" cap="none" strike="noStrike">
+                <a:solidFill>
+                  <a:schemeClr val="lt1"/>
                 </a:solidFill>
                 <a:latin typeface="Proxima Nova"/>
                 <a:ea typeface="Proxima Nova"/>
@@ -5040,14 +5203,14 @@
                 <a:spcPts val="0"/>
               </a:spcBef>
               <a:buClr>
-                <a:schemeClr val="dk1"/>
+                <a:schemeClr val="lt1"/>
               </a:buClr>
               <a:buSzPts val="1000"/>
               <a:buFont typeface="Proxima Nova"/>
               <a:buNone/>
-              <a:defRPr b="0" sz="1000" u="none" strike="noStrike">
-                <a:solidFill>
-                  <a:schemeClr val="dk1"/>
+              <a:defRPr b="0" i="0" sz="1000" u="none" cap="none" strike="noStrike">
+                <a:solidFill>
+                  <a:schemeClr val="lt1"/>
                 </a:solidFill>
                 <a:latin typeface="Proxima Nova"/>
                 <a:ea typeface="Proxima Nova"/>
@@ -5072,7 +5235,7 @@
             </a:fld>
             <a:endParaRPr>
               <a:solidFill>
-                <a:srgbClr val="000000"/>
+                <a:srgbClr val="FFFFFF"/>
               </a:solidFill>
               <a:latin typeface="Times New Roman"/>
               <a:ea typeface="Times New Roman"/>
@@ -5080,6 +5243,135 @@
               <a:sym typeface="Times New Roman"/>
             </a:endParaRPr>
           </a:p>
+        </p:txBody>
+      </p:sp>
+      <p:sp>
+        <p:nvSpPr>
+          <p:cNvPr id="70" name="Google Shape;70;p16"/>
+          <p:cNvSpPr txBox="1"/>
+          <p:nvPr>
+            <p:ph idx="1" type="body"/>
+          </p:nvPr>
+        </p:nvSpPr>
+        <p:spPr>
+          <a:xfrm>
+            <a:off x="457200" y="1203480"/>
+            <a:ext cx="8229300" cy="2982900"/>
+          </a:xfrm>
+          <a:prstGeom prst="rect">
+            <a:avLst/>
+          </a:prstGeom>
+          <a:noFill/>
+          <a:ln>
+            <a:noFill/>
+          </a:ln>
+        </p:spPr>
+        <p:txBody>
+          <a:bodyPr anchorCtr="0" anchor="t" bIns="0" lIns="0" spcFirstLastPara="1" rIns="0" wrap="square" tIns="0">
+            <a:normAutofit/>
+          </a:bodyPr>
+          <a:lstStyle>
+            <a:lvl1pPr indent="-228600" lvl="0" marL="457200" marR="0" algn="l">
+              <a:spcBef>
+                <a:spcPts val="0"/>
+              </a:spcBef>
+              <a:spcAft>
+                <a:spcPts val="0"/>
+              </a:spcAft>
+              <a:buSzPts val="1400"/>
+              <a:buNone/>
+              <a:defRPr b="0" i="0" sz="1800" u="none" cap="none" strike="noStrike"/>
+            </a:lvl1pPr>
+            <a:lvl2pPr indent="-228600" lvl="1" marL="914400" marR="0" algn="l">
+              <a:spcBef>
+                <a:spcPts val="0"/>
+              </a:spcBef>
+              <a:spcAft>
+                <a:spcPts val="0"/>
+              </a:spcAft>
+              <a:buSzPts val="1400"/>
+              <a:buNone/>
+              <a:defRPr b="0" i="0" sz="1800" u="none" cap="none" strike="noStrike"/>
+            </a:lvl2pPr>
+            <a:lvl3pPr indent="-228600" lvl="2" marL="1371600" marR="0" algn="l">
+              <a:spcBef>
+                <a:spcPts val="0"/>
+              </a:spcBef>
+              <a:spcAft>
+                <a:spcPts val="0"/>
+              </a:spcAft>
+              <a:buSzPts val="1400"/>
+              <a:buNone/>
+              <a:defRPr b="0" i="0" sz="1800" u="none" cap="none" strike="noStrike"/>
+            </a:lvl3pPr>
+            <a:lvl4pPr indent="-228600" lvl="3" marL="1828800" marR="0" algn="l">
+              <a:spcBef>
+                <a:spcPts val="0"/>
+              </a:spcBef>
+              <a:spcAft>
+                <a:spcPts val="0"/>
+              </a:spcAft>
+              <a:buSzPts val="1400"/>
+              <a:buNone/>
+              <a:defRPr b="0" i="0" sz="1800" u="none" cap="none" strike="noStrike"/>
+            </a:lvl4pPr>
+            <a:lvl5pPr indent="-228600" lvl="4" marL="2286000" marR="0" algn="l">
+              <a:spcBef>
+                <a:spcPts val="0"/>
+              </a:spcBef>
+              <a:spcAft>
+                <a:spcPts val="0"/>
+              </a:spcAft>
+              <a:buSzPts val="1400"/>
+              <a:buNone/>
+              <a:defRPr b="0" i="0" sz="1800" u="none" cap="none" strike="noStrike"/>
+            </a:lvl5pPr>
+            <a:lvl6pPr indent="-228600" lvl="5" marL="2743200" marR="0" algn="l">
+              <a:spcBef>
+                <a:spcPts val="0"/>
+              </a:spcBef>
+              <a:spcAft>
+                <a:spcPts val="0"/>
+              </a:spcAft>
+              <a:buSzPts val="1400"/>
+              <a:buNone/>
+              <a:defRPr b="0" i="0" sz="1800" u="none" cap="none" strike="noStrike"/>
+            </a:lvl6pPr>
+            <a:lvl7pPr indent="-228600" lvl="6" marL="3200400" marR="0" algn="l">
+              <a:spcBef>
+                <a:spcPts val="0"/>
+              </a:spcBef>
+              <a:spcAft>
+                <a:spcPts val="0"/>
+              </a:spcAft>
+              <a:buSzPts val="1400"/>
+              <a:buNone/>
+              <a:defRPr b="0" i="0" sz="1800" u="none" cap="none" strike="noStrike"/>
+            </a:lvl7pPr>
+            <a:lvl8pPr indent="-228600" lvl="7" marL="3657600" marR="0" algn="l">
+              <a:spcBef>
+                <a:spcPts val="0"/>
+              </a:spcBef>
+              <a:spcAft>
+                <a:spcPts val="0"/>
+              </a:spcAft>
+              <a:buSzPts val="1400"/>
+              <a:buNone/>
+              <a:defRPr b="0" i="0" sz="1800" u="none" cap="none" strike="noStrike"/>
+            </a:lvl8pPr>
+            <a:lvl9pPr indent="-228600" lvl="8" marL="4114800" marR="0" algn="l">
+              <a:spcBef>
+                <a:spcPts val="0"/>
+              </a:spcBef>
+              <a:spcAft>
+                <a:spcPts val="0"/>
+              </a:spcAft>
+              <a:buSzPts val="1400"/>
+              <a:buNone/>
+              <a:defRPr b="0" i="0" sz="1800" u="none" cap="none" strike="noStrike"/>
+            </a:lvl9pPr>
+          </a:lstStyle>
+          <a:p/>
         </p:txBody>
       </p:sp>
     </p:spTree>
@@ -5091,8 +5383,8 @@
 </file>
 
 <file path=ppt/slideLayouts/slideLayout15.xml><?xml version="1.0" encoding="utf-8"?>
-<p:sldLayout xmlns:a="http://schemas.openxmlformats.org/drawingml/2006/main" xmlns:r="http://schemas.openxmlformats.org/officeDocument/2006/relationships" xmlns:mc="http://schemas.openxmlformats.org/markup-compatibility/2006" xmlns:mv="urn:schemas-microsoft-com:mac:vml" xmlns:p="http://schemas.openxmlformats.org/presentationml/2006/main" xmlns:c="http://schemas.openxmlformats.org/drawingml/2006/chart" xmlns:dgm="http://schemas.openxmlformats.org/drawingml/2006/diagram" xmlns:o="urn:schemas-microsoft-com:office:office" xmlns:v="urn:schemas-microsoft-com:vml" xmlns:pvml="urn:schemas-microsoft-com:office:powerpoint" xmlns:com="http://schemas.openxmlformats.org/drawingml/2006/compatibility" xmlns:p14="http://schemas.microsoft.com/office/powerpoint/2010/main" xmlns:p15="http://schemas.microsoft.com/office/powerpoint/2012/main" xmlns:ahyp="http://schemas.microsoft.com/office/drawing/2018/hyperlinkcolor" matchingName="BIG_NUMBER">
-  <p:cSld name="BIG_NUMBER">
+<p:sldLayout xmlns:a="http://schemas.openxmlformats.org/drawingml/2006/main" xmlns:r="http://schemas.openxmlformats.org/officeDocument/2006/relationships" xmlns:mc="http://schemas.openxmlformats.org/markup-compatibility/2006" xmlns:mv="urn:schemas-microsoft-com:mac:vml" xmlns:p="http://schemas.openxmlformats.org/presentationml/2006/main" xmlns:c="http://schemas.openxmlformats.org/drawingml/2006/chart" xmlns:dgm="http://schemas.openxmlformats.org/drawingml/2006/diagram" xmlns:o="urn:schemas-microsoft-com:office:office" xmlns:v="urn:schemas-microsoft-com:vml" xmlns:pvml="urn:schemas-microsoft-com:office:powerpoint" xmlns:com="http://schemas.openxmlformats.org/drawingml/2006/compatibility" xmlns:p14="http://schemas.microsoft.com/office/powerpoint/2010/main" xmlns:p15="http://schemas.microsoft.com/office/powerpoint/2012/main" xmlns:ahyp="http://schemas.microsoft.com/office/drawing/2018/hyperlinkcolor" matchingName="TITLE_AND_BODY" type="tx">
+  <p:cSld name="TITLE_AND_BODY">
     <p:bg>
       <p:bgPr>
         <a:solidFill>
@@ -5173,13 +5465,13 @@
           <p:cNvPr id="73" name="Google Shape;73;p17"/>
           <p:cNvSpPr txBox="1"/>
           <p:nvPr>
-            <p:ph hasCustomPrompt="1" type="title"/>
+            <p:ph type="title"/>
           </p:nvPr>
         </p:nvSpPr>
         <p:spPr>
           <a:xfrm>
-            <a:off x="311760" y="991440"/>
-            <a:ext cx="8520000" cy="1917600"/>
+            <a:off x="311760" y="444960"/>
+            <a:ext cx="8520000" cy="572400"/>
           </a:xfrm>
           <a:prstGeom prst="rect">
             <a:avLst/>
@@ -5190,7 +5482,7 @@
           </a:ln>
         </p:spPr>
         <p:txBody>
-          <a:bodyPr anchorCtr="0" anchor="ctr" bIns="91425" lIns="91425" spcFirstLastPara="1" rIns="91425" wrap="square" tIns="91425">
+          <a:bodyPr anchorCtr="0" anchor="t" bIns="91425" lIns="91425" spcFirstLastPara="1" rIns="91425" wrap="square" tIns="91425">
             <a:noAutofit/>
           </a:bodyPr>
           <a:lstStyle>
@@ -5294,11 +5586,7 @@
               <a:defRPr b="0" i="0" sz="1800" u="none" cap="none" strike="noStrike"/>
             </a:lvl9pPr>
           </a:lstStyle>
-          <a:p>
-            <a:r>
-              <a:t>xx%</a:t>
-            </a:r>
-          </a:p>
+          <a:p/>
         </p:txBody>
       </p:sp>
       <p:sp>
@@ -5311,8 +5599,8 @@
         </p:nvSpPr>
         <p:spPr>
           <a:xfrm>
-            <a:off x="311760" y="3071160"/>
-            <a:ext cx="8520000" cy="901500"/>
+            <a:off x="311760" y="1152360"/>
+            <a:ext cx="8520000" cy="3416100"/>
           </a:xfrm>
           <a:prstGeom prst="rect">
             <a:avLst/>
@@ -5699,8 +5987,8 @@
 </file>
 
 <file path=ppt/slideLayouts/slideLayout16.xml><?xml version="1.0" encoding="utf-8"?>
-<p:sldLayout xmlns:a="http://schemas.openxmlformats.org/drawingml/2006/main" xmlns:r="http://schemas.openxmlformats.org/officeDocument/2006/relationships" xmlns:mc="http://schemas.openxmlformats.org/markup-compatibility/2006" xmlns:mv="urn:schemas-microsoft-com:mac:vml" xmlns:p="http://schemas.openxmlformats.org/presentationml/2006/main" xmlns:c="http://schemas.openxmlformats.org/drawingml/2006/chart" xmlns:dgm="http://schemas.openxmlformats.org/drawingml/2006/diagram" xmlns:o="urn:schemas-microsoft-com:office:office" xmlns:v="urn:schemas-microsoft-com:vml" xmlns:pvml="urn:schemas-microsoft-com:office:powerpoint" xmlns:com="http://schemas.openxmlformats.org/drawingml/2006/compatibility" xmlns:p14="http://schemas.microsoft.com/office/powerpoint/2010/main" xmlns:p15="http://schemas.microsoft.com/office/powerpoint/2012/main" xmlns:ahyp="http://schemas.microsoft.com/office/drawing/2018/hyperlinkcolor" matchingName="BLANK">
-  <p:cSld name="BLANK 2">
+<p:sldLayout xmlns:a="http://schemas.openxmlformats.org/drawingml/2006/main" xmlns:r="http://schemas.openxmlformats.org/officeDocument/2006/relationships" xmlns:mc="http://schemas.openxmlformats.org/markup-compatibility/2006" xmlns:mv="urn:schemas-microsoft-com:mac:vml" xmlns:p="http://schemas.openxmlformats.org/presentationml/2006/main" xmlns:c="http://schemas.openxmlformats.org/drawingml/2006/chart" xmlns:dgm="http://schemas.openxmlformats.org/drawingml/2006/diagram" xmlns:o="urn:schemas-microsoft-com:office:office" xmlns:v="urn:schemas-microsoft-com:vml" xmlns:pvml="urn:schemas-microsoft-com:office:powerpoint" xmlns:com="http://schemas.openxmlformats.org/drawingml/2006/compatibility" xmlns:p14="http://schemas.microsoft.com/office/powerpoint/2010/main" xmlns:p15="http://schemas.microsoft.com/office/powerpoint/2012/main" xmlns:ahyp="http://schemas.microsoft.com/office/drawing/2018/hyperlinkcolor" matchingName="BIG_NUMBER">
+  <p:cSld name="BIG_NUMBER">
     <p:bg>
       <p:bgPr>
         <a:solidFill>
@@ -5725,6 +6013,322 @@
       <p:sp>
         <p:nvSpPr>
           <p:cNvPr id="77" name="Google Shape;77;p18"/>
+          <p:cNvSpPr/>
+          <p:nvPr/>
+        </p:nvSpPr>
+        <p:spPr>
+          <a:xfrm>
+            <a:off x="0" y="5045760"/>
+            <a:ext cx="9143700" cy="97500"/>
+          </a:xfrm>
+          <a:prstGeom prst="rect">
+            <a:avLst/>
+          </a:prstGeom>
+          <a:solidFill>
+            <a:schemeClr val="lt2"/>
+          </a:solidFill>
+          <a:ln>
+            <a:noFill/>
+          </a:ln>
+        </p:spPr>
+        <p:txBody>
+          <a:bodyPr anchorCtr="0" anchor="ctr" bIns="48950" lIns="91425" spcFirstLastPara="1" rIns="91425" wrap="square" tIns="48950">
+            <a:noAutofit/>
+          </a:bodyPr>
+          <a:lstStyle/>
+          <a:p>
+            <a:pPr indent="0" lvl="0" marL="0" marR="0" rtl="0" algn="l">
+              <a:lnSpc>
+                <a:spcPct val="100000"/>
+              </a:lnSpc>
+              <a:spcBef>
+                <a:spcPts val="0"/>
+              </a:spcBef>
+              <a:spcAft>
+                <a:spcPts val="0"/>
+              </a:spcAft>
+              <a:buNone/>
+            </a:pPr>
+            <a:r>
+              <a:t/>
+            </a:r>
+            <a:endParaRPr b="0" sz="1400" u="none" strike="noStrike">
+              <a:solidFill>
+                <a:srgbClr val="000000"/>
+              </a:solidFill>
+              <a:latin typeface="Arial"/>
+              <a:ea typeface="Arial"/>
+              <a:cs typeface="Arial"/>
+              <a:sym typeface="Arial"/>
+            </a:endParaRPr>
+          </a:p>
+        </p:txBody>
+      </p:sp>
+      <p:sp>
+        <p:nvSpPr>
+          <p:cNvPr id="78" name="Google Shape;78;p18"/>
+          <p:cNvSpPr txBox="1"/>
+          <p:nvPr>
+            <p:ph hasCustomPrompt="1" type="title"/>
+          </p:nvPr>
+        </p:nvSpPr>
+        <p:spPr>
+          <a:xfrm>
+            <a:off x="311760" y="991440"/>
+            <a:ext cx="8520000" cy="1917600"/>
+          </a:xfrm>
+          <a:prstGeom prst="rect">
+            <a:avLst/>
+          </a:prstGeom>
+          <a:noFill/>
+          <a:ln>
+            <a:noFill/>
+          </a:ln>
+        </p:spPr>
+        <p:txBody>
+          <a:bodyPr anchorCtr="0" anchor="ctr" bIns="91425" lIns="91425" spcFirstLastPara="1" rIns="91425" wrap="square" tIns="91425">
+            <a:noAutofit/>
+          </a:bodyPr>
+          <a:lstStyle>
+            <a:lvl1pPr lvl="0" marR="0" algn="l">
+              <a:spcBef>
+                <a:spcPts val="0"/>
+              </a:spcBef>
+              <a:spcAft>
+                <a:spcPts val="0"/>
+              </a:spcAft>
+              <a:buSzPts val="1400"/>
+              <a:buNone/>
+              <a:defRPr b="0" i="0" sz="1800" u="none" cap="none" strike="noStrike"/>
+            </a:lvl1pPr>
+            <a:lvl2pPr lvl="1" marR="0" algn="l">
+              <a:spcBef>
+                <a:spcPts val="0"/>
+              </a:spcBef>
+              <a:spcAft>
+                <a:spcPts val="0"/>
+              </a:spcAft>
+              <a:buSzPts val="1400"/>
+              <a:buNone/>
+              <a:defRPr b="0" i="0" sz="1800" u="none" cap="none" strike="noStrike"/>
+            </a:lvl2pPr>
+            <a:lvl3pPr lvl="2" marR="0" algn="l">
+              <a:spcBef>
+                <a:spcPts val="0"/>
+              </a:spcBef>
+              <a:spcAft>
+                <a:spcPts val="0"/>
+              </a:spcAft>
+              <a:buSzPts val="1400"/>
+              <a:buNone/>
+              <a:defRPr b="0" i="0" sz="1800" u="none" cap="none" strike="noStrike"/>
+            </a:lvl3pPr>
+            <a:lvl4pPr lvl="3" marR="0" algn="l">
+              <a:spcBef>
+                <a:spcPts val="0"/>
+              </a:spcBef>
+              <a:spcAft>
+                <a:spcPts val="0"/>
+              </a:spcAft>
+              <a:buSzPts val="1400"/>
+              <a:buNone/>
+              <a:defRPr b="0" i="0" sz="1800" u="none" cap="none" strike="noStrike"/>
+            </a:lvl4pPr>
+            <a:lvl5pPr lvl="4" marR="0" algn="l">
+              <a:spcBef>
+                <a:spcPts val="0"/>
+              </a:spcBef>
+              <a:spcAft>
+                <a:spcPts val="0"/>
+              </a:spcAft>
+              <a:buSzPts val="1400"/>
+              <a:buNone/>
+              <a:defRPr b="0" i="0" sz="1800" u="none" cap="none" strike="noStrike"/>
+            </a:lvl5pPr>
+            <a:lvl6pPr lvl="5" marR="0" algn="l">
+              <a:spcBef>
+                <a:spcPts val="0"/>
+              </a:spcBef>
+              <a:spcAft>
+                <a:spcPts val="0"/>
+              </a:spcAft>
+              <a:buSzPts val="1400"/>
+              <a:buNone/>
+              <a:defRPr b="0" i="0" sz="1800" u="none" cap="none" strike="noStrike"/>
+            </a:lvl6pPr>
+            <a:lvl7pPr lvl="6" marR="0" algn="l">
+              <a:spcBef>
+                <a:spcPts val="0"/>
+              </a:spcBef>
+              <a:spcAft>
+                <a:spcPts val="0"/>
+              </a:spcAft>
+              <a:buSzPts val="1400"/>
+              <a:buNone/>
+              <a:defRPr b="0" i="0" sz="1800" u="none" cap="none" strike="noStrike"/>
+            </a:lvl7pPr>
+            <a:lvl8pPr lvl="7" marR="0" algn="l">
+              <a:spcBef>
+                <a:spcPts val="0"/>
+              </a:spcBef>
+              <a:spcAft>
+                <a:spcPts val="0"/>
+              </a:spcAft>
+              <a:buSzPts val="1400"/>
+              <a:buNone/>
+              <a:defRPr b="0" i="0" sz="1800" u="none" cap="none" strike="noStrike"/>
+            </a:lvl8pPr>
+            <a:lvl9pPr lvl="8" marR="0" algn="l">
+              <a:spcBef>
+                <a:spcPts val="0"/>
+              </a:spcBef>
+              <a:spcAft>
+                <a:spcPts val="0"/>
+              </a:spcAft>
+              <a:buSzPts val="1400"/>
+              <a:buNone/>
+              <a:defRPr b="0" i="0" sz="1800" u="none" cap="none" strike="noStrike"/>
+            </a:lvl9pPr>
+          </a:lstStyle>
+          <a:p>
+            <a:r>
+              <a:t>xx%</a:t>
+            </a:r>
+          </a:p>
+        </p:txBody>
+      </p:sp>
+      <p:sp>
+        <p:nvSpPr>
+          <p:cNvPr id="79" name="Google Shape;79;p18"/>
+          <p:cNvSpPr txBox="1"/>
+          <p:nvPr>
+            <p:ph idx="1" type="body"/>
+          </p:nvPr>
+        </p:nvSpPr>
+        <p:spPr>
+          <a:xfrm>
+            <a:off x="311760" y="3071160"/>
+            <a:ext cx="8520000" cy="901500"/>
+          </a:xfrm>
+          <a:prstGeom prst="rect">
+            <a:avLst/>
+          </a:prstGeom>
+          <a:noFill/>
+          <a:ln>
+            <a:noFill/>
+          </a:ln>
+        </p:spPr>
+        <p:txBody>
+          <a:bodyPr anchorCtr="0" anchor="t" bIns="91425" lIns="91425" spcFirstLastPara="1" rIns="91425" wrap="square" tIns="91425">
+            <a:noAutofit/>
+          </a:bodyPr>
+          <a:lstStyle>
+            <a:lvl1pPr indent="-228600" lvl="0" marL="457200" marR="0" algn="l">
+              <a:spcBef>
+                <a:spcPts val="0"/>
+              </a:spcBef>
+              <a:spcAft>
+                <a:spcPts val="0"/>
+              </a:spcAft>
+              <a:buSzPts val="1400"/>
+              <a:buNone/>
+              <a:defRPr b="0" i="0" sz="1800" u="none" cap="none" strike="noStrike"/>
+            </a:lvl1pPr>
+            <a:lvl2pPr indent="-228600" lvl="1" marL="914400" marR="0" algn="l">
+              <a:spcBef>
+                <a:spcPts val="0"/>
+              </a:spcBef>
+              <a:spcAft>
+                <a:spcPts val="0"/>
+              </a:spcAft>
+              <a:buSzPts val="1400"/>
+              <a:buNone/>
+              <a:defRPr b="0" i="0" sz="1800" u="none" cap="none" strike="noStrike"/>
+            </a:lvl2pPr>
+            <a:lvl3pPr indent="-228600" lvl="2" marL="1371600" marR="0" algn="l">
+              <a:spcBef>
+                <a:spcPts val="0"/>
+              </a:spcBef>
+              <a:spcAft>
+                <a:spcPts val="0"/>
+              </a:spcAft>
+              <a:buSzPts val="1400"/>
+              <a:buNone/>
+              <a:defRPr b="0" i="0" sz="1800" u="none" cap="none" strike="noStrike"/>
+            </a:lvl3pPr>
+            <a:lvl4pPr indent="-228600" lvl="3" marL="1828800" marR="0" algn="l">
+              <a:spcBef>
+                <a:spcPts val="0"/>
+              </a:spcBef>
+              <a:spcAft>
+                <a:spcPts val="0"/>
+              </a:spcAft>
+              <a:buSzPts val="1400"/>
+              <a:buNone/>
+              <a:defRPr b="0" i="0" sz="1800" u="none" cap="none" strike="noStrike"/>
+            </a:lvl4pPr>
+            <a:lvl5pPr indent="-228600" lvl="4" marL="2286000" marR="0" algn="l">
+              <a:spcBef>
+                <a:spcPts val="0"/>
+              </a:spcBef>
+              <a:spcAft>
+                <a:spcPts val="0"/>
+              </a:spcAft>
+              <a:buSzPts val="1400"/>
+              <a:buNone/>
+              <a:defRPr b="0" i="0" sz="1800" u="none" cap="none" strike="noStrike"/>
+            </a:lvl5pPr>
+            <a:lvl6pPr indent="-228600" lvl="5" marL="2743200" marR="0" algn="l">
+              <a:spcBef>
+                <a:spcPts val="0"/>
+              </a:spcBef>
+              <a:spcAft>
+                <a:spcPts val="0"/>
+              </a:spcAft>
+              <a:buSzPts val="1400"/>
+              <a:buNone/>
+              <a:defRPr b="0" i="0" sz="1800" u="none" cap="none" strike="noStrike"/>
+            </a:lvl6pPr>
+            <a:lvl7pPr indent="-228600" lvl="6" marL="3200400" marR="0" algn="l">
+              <a:spcBef>
+                <a:spcPts val="0"/>
+              </a:spcBef>
+              <a:spcAft>
+                <a:spcPts val="0"/>
+              </a:spcAft>
+              <a:buSzPts val="1400"/>
+              <a:buNone/>
+              <a:defRPr b="0" i="0" sz="1800" u="none" cap="none" strike="noStrike"/>
+            </a:lvl7pPr>
+            <a:lvl8pPr indent="-228600" lvl="7" marL="3657600" marR="0" algn="l">
+              <a:spcBef>
+                <a:spcPts val="0"/>
+              </a:spcBef>
+              <a:spcAft>
+                <a:spcPts val="0"/>
+              </a:spcAft>
+              <a:buSzPts val="1400"/>
+              <a:buNone/>
+              <a:defRPr b="0" i="0" sz="1800" u="none" cap="none" strike="noStrike"/>
+            </a:lvl8pPr>
+            <a:lvl9pPr indent="-228600" lvl="8" marL="4114800" marR="0" algn="l">
+              <a:spcBef>
+                <a:spcPts val="0"/>
+              </a:spcBef>
+              <a:spcAft>
+                <a:spcPts val="0"/>
+              </a:spcAft>
+              <a:buSzPts val="1400"/>
+              <a:buNone/>
+              <a:defRPr b="0" i="0" sz="1800" u="none" cap="none" strike="noStrike"/>
+            </a:lvl9pPr>
+          </a:lstStyle>
+          <a:p/>
+        </p:txBody>
+      </p:sp>
+      <p:sp>
+        <p:nvSpPr>
+          <p:cNvPr id="80" name="Google Shape;80;p18"/>
           <p:cNvSpPr txBox="1"/>
           <p:nvPr>
             <p:ph idx="12" type="sldNum"/>
@@ -5991,8 +6595,8 @@
 </file>
 
 <file path=ppt/slideLayouts/slideLayout17.xml><?xml version="1.0" encoding="utf-8"?>
-<p:sldLayout xmlns:a="http://schemas.openxmlformats.org/drawingml/2006/main" xmlns:r="http://schemas.openxmlformats.org/officeDocument/2006/relationships" xmlns:mc="http://schemas.openxmlformats.org/markup-compatibility/2006" xmlns:mv="urn:schemas-microsoft-com:mac:vml" xmlns:p="http://schemas.openxmlformats.org/presentationml/2006/main" xmlns:c="http://schemas.openxmlformats.org/drawingml/2006/chart" xmlns:dgm="http://schemas.openxmlformats.org/drawingml/2006/diagram" xmlns:o="urn:schemas-microsoft-com:office:office" xmlns:v="urn:schemas-microsoft-com:vml" xmlns:pvml="urn:schemas-microsoft-com:office:powerpoint" xmlns:com="http://schemas.openxmlformats.org/drawingml/2006/compatibility" xmlns:p14="http://schemas.microsoft.com/office/powerpoint/2010/main" xmlns:p15="http://schemas.microsoft.com/office/powerpoint/2012/main" xmlns:ahyp="http://schemas.microsoft.com/office/drawing/2018/hyperlinkcolor" matchingName="TITLE_AND_TWO_COLUMNS" type="twoObj">
-  <p:cSld name="TWO_OBJECTS">
+<p:sldLayout xmlns:a="http://schemas.openxmlformats.org/drawingml/2006/main" xmlns:r="http://schemas.openxmlformats.org/officeDocument/2006/relationships" xmlns:mc="http://schemas.openxmlformats.org/markup-compatibility/2006" xmlns:mv="urn:schemas-microsoft-com:mac:vml" xmlns:p="http://schemas.openxmlformats.org/presentationml/2006/main" xmlns:c="http://schemas.openxmlformats.org/drawingml/2006/chart" xmlns:dgm="http://schemas.openxmlformats.org/drawingml/2006/diagram" xmlns:o="urn:schemas-microsoft-com:office:office" xmlns:v="urn:schemas-microsoft-com:vml" xmlns:pvml="urn:schemas-microsoft-com:office:powerpoint" xmlns:com="http://schemas.openxmlformats.org/drawingml/2006/compatibility" xmlns:p14="http://schemas.microsoft.com/office/powerpoint/2010/main" xmlns:p15="http://schemas.microsoft.com/office/powerpoint/2012/main" xmlns:ahyp="http://schemas.microsoft.com/office/drawing/2018/hyperlinkcolor" matchingName="BLANK">
+  <p:cSld name="BLANK 2">
     <p:bg>
       <p:bgPr>
         <a:solidFill>
@@ -6002,7 +6606,7 @@
     </p:bg>
     <p:spTree>
       <p:nvGrpSpPr>
-        <p:cNvPr id="78" name="Shape 78"/>
+        <p:cNvPr id="81" name="Shape 81"/>
         <p:cNvGrpSpPr/>
         <p:nvPr/>
       </p:nvGrpSpPr>
@@ -6014,393 +6618,6 @@
           <a:chExt cx="0" cy="0"/>
         </a:xfrm>
       </p:grpSpPr>
-      <p:sp>
-        <p:nvSpPr>
-          <p:cNvPr id="79" name="Google Shape;79;p19"/>
-          <p:cNvSpPr txBox="1"/>
-          <p:nvPr>
-            <p:ph type="title"/>
-          </p:nvPr>
-        </p:nvSpPr>
-        <p:spPr>
-          <a:xfrm>
-            <a:off x="311760" y="444960"/>
-            <a:ext cx="8520000" cy="572400"/>
-          </a:xfrm>
-          <a:prstGeom prst="rect">
-            <a:avLst/>
-          </a:prstGeom>
-          <a:noFill/>
-          <a:ln>
-            <a:noFill/>
-          </a:ln>
-        </p:spPr>
-        <p:txBody>
-          <a:bodyPr anchorCtr="0" anchor="t" bIns="91425" lIns="91425" spcFirstLastPara="1" rIns="91425" wrap="square" tIns="91425">
-            <a:noAutofit/>
-          </a:bodyPr>
-          <a:lstStyle>
-            <a:lvl1pPr lvl="0" marR="0" algn="l">
-              <a:spcBef>
-                <a:spcPts val="0"/>
-              </a:spcBef>
-              <a:spcAft>
-                <a:spcPts val="0"/>
-              </a:spcAft>
-              <a:buSzPts val="1400"/>
-              <a:buNone/>
-              <a:defRPr b="0" i="0" sz="1800" u="none" cap="none" strike="noStrike"/>
-            </a:lvl1pPr>
-            <a:lvl2pPr lvl="1" marR="0" algn="l">
-              <a:spcBef>
-                <a:spcPts val="0"/>
-              </a:spcBef>
-              <a:spcAft>
-                <a:spcPts val="0"/>
-              </a:spcAft>
-              <a:buSzPts val="1400"/>
-              <a:buNone/>
-              <a:defRPr b="0" i="0" sz="1800" u="none" cap="none" strike="noStrike"/>
-            </a:lvl2pPr>
-            <a:lvl3pPr lvl="2" marR="0" algn="l">
-              <a:spcBef>
-                <a:spcPts val="0"/>
-              </a:spcBef>
-              <a:spcAft>
-                <a:spcPts val="0"/>
-              </a:spcAft>
-              <a:buSzPts val="1400"/>
-              <a:buNone/>
-              <a:defRPr b="0" i="0" sz="1800" u="none" cap="none" strike="noStrike"/>
-            </a:lvl3pPr>
-            <a:lvl4pPr lvl="3" marR="0" algn="l">
-              <a:spcBef>
-                <a:spcPts val="0"/>
-              </a:spcBef>
-              <a:spcAft>
-                <a:spcPts val="0"/>
-              </a:spcAft>
-              <a:buSzPts val="1400"/>
-              <a:buNone/>
-              <a:defRPr b="0" i="0" sz="1800" u="none" cap="none" strike="noStrike"/>
-            </a:lvl4pPr>
-            <a:lvl5pPr lvl="4" marR="0" algn="l">
-              <a:spcBef>
-                <a:spcPts val="0"/>
-              </a:spcBef>
-              <a:spcAft>
-                <a:spcPts val="0"/>
-              </a:spcAft>
-              <a:buSzPts val="1400"/>
-              <a:buNone/>
-              <a:defRPr b="0" i="0" sz="1800" u="none" cap="none" strike="noStrike"/>
-            </a:lvl5pPr>
-            <a:lvl6pPr lvl="5" marR="0" algn="l">
-              <a:spcBef>
-                <a:spcPts val="0"/>
-              </a:spcBef>
-              <a:spcAft>
-                <a:spcPts val="0"/>
-              </a:spcAft>
-              <a:buSzPts val="1400"/>
-              <a:buNone/>
-              <a:defRPr b="0" i="0" sz="1800" u="none" cap="none" strike="noStrike"/>
-            </a:lvl6pPr>
-            <a:lvl7pPr lvl="6" marR="0" algn="l">
-              <a:spcBef>
-                <a:spcPts val="0"/>
-              </a:spcBef>
-              <a:spcAft>
-                <a:spcPts val="0"/>
-              </a:spcAft>
-              <a:buSzPts val="1400"/>
-              <a:buNone/>
-              <a:defRPr b="0" i="0" sz="1800" u="none" cap="none" strike="noStrike"/>
-            </a:lvl7pPr>
-            <a:lvl8pPr lvl="7" marR="0" algn="l">
-              <a:spcBef>
-                <a:spcPts val="0"/>
-              </a:spcBef>
-              <a:spcAft>
-                <a:spcPts val="0"/>
-              </a:spcAft>
-              <a:buSzPts val="1400"/>
-              <a:buNone/>
-              <a:defRPr b="0" i="0" sz="1800" u="none" cap="none" strike="noStrike"/>
-            </a:lvl8pPr>
-            <a:lvl9pPr lvl="8" marR="0" algn="l">
-              <a:spcBef>
-                <a:spcPts val="0"/>
-              </a:spcBef>
-              <a:spcAft>
-                <a:spcPts val="0"/>
-              </a:spcAft>
-              <a:buSzPts val="1400"/>
-              <a:buNone/>
-              <a:defRPr b="0" i="0" sz="1800" u="none" cap="none" strike="noStrike"/>
-            </a:lvl9pPr>
-          </a:lstStyle>
-          <a:p/>
-        </p:txBody>
-      </p:sp>
-      <p:sp>
-        <p:nvSpPr>
-          <p:cNvPr id="80" name="Google Shape;80;p19"/>
-          <p:cNvSpPr txBox="1"/>
-          <p:nvPr>
-            <p:ph idx="1" type="body"/>
-          </p:nvPr>
-        </p:nvSpPr>
-        <p:spPr>
-          <a:xfrm>
-            <a:off x="311760" y="1152360"/>
-            <a:ext cx="3999600" cy="3416100"/>
-          </a:xfrm>
-          <a:prstGeom prst="rect">
-            <a:avLst/>
-          </a:prstGeom>
-          <a:noFill/>
-          <a:ln>
-            <a:noFill/>
-          </a:ln>
-        </p:spPr>
-        <p:txBody>
-          <a:bodyPr anchorCtr="0" anchor="t" bIns="91425" lIns="91425" spcFirstLastPara="1" rIns="91425" wrap="square" tIns="91425">
-            <a:noAutofit/>
-          </a:bodyPr>
-          <a:lstStyle>
-            <a:lvl1pPr indent="-228600" lvl="0" marL="457200" marR="0" algn="l">
-              <a:spcBef>
-                <a:spcPts val="0"/>
-              </a:spcBef>
-              <a:spcAft>
-                <a:spcPts val="0"/>
-              </a:spcAft>
-              <a:buSzPts val="1400"/>
-              <a:buNone/>
-              <a:defRPr b="0" i="0" sz="1800" u="none" cap="none" strike="noStrike"/>
-            </a:lvl1pPr>
-            <a:lvl2pPr indent="-228600" lvl="1" marL="914400" marR="0" algn="l">
-              <a:spcBef>
-                <a:spcPts val="0"/>
-              </a:spcBef>
-              <a:spcAft>
-                <a:spcPts val="0"/>
-              </a:spcAft>
-              <a:buSzPts val="1400"/>
-              <a:buNone/>
-              <a:defRPr b="0" i="0" sz="1800" u="none" cap="none" strike="noStrike"/>
-            </a:lvl2pPr>
-            <a:lvl3pPr indent="-228600" lvl="2" marL="1371600" marR="0" algn="l">
-              <a:spcBef>
-                <a:spcPts val="0"/>
-              </a:spcBef>
-              <a:spcAft>
-                <a:spcPts val="0"/>
-              </a:spcAft>
-              <a:buSzPts val="1400"/>
-              <a:buNone/>
-              <a:defRPr b="0" i="0" sz="1800" u="none" cap="none" strike="noStrike"/>
-            </a:lvl3pPr>
-            <a:lvl4pPr indent="-228600" lvl="3" marL="1828800" marR="0" algn="l">
-              <a:spcBef>
-                <a:spcPts val="0"/>
-              </a:spcBef>
-              <a:spcAft>
-                <a:spcPts val="0"/>
-              </a:spcAft>
-              <a:buSzPts val="1400"/>
-              <a:buNone/>
-              <a:defRPr b="0" i="0" sz="1800" u="none" cap="none" strike="noStrike"/>
-            </a:lvl4pPr>
-            <a:lvl5pPr indent="-228600" lvl="4" marL="2286000" marR="0" algn="l">
-              <a:spcBef>
-                <a:spcPts val="0"/>
-              </a:spcBef>
-              <a:spcAft>
-                <a:spcPts val="0"/>
-              </a:spcAft>
-              <a:buSzPts val="1400"/>
-              <a:buNone/>
-              <a:defRPr b="0" i="0" sz="1800" u="none" cap="none" strike="noStrike"/>
-            </a:lvl5pPr>
-            <a:lvl6pPr indent="-228600" lvl="5" marL="2743200" marR="0" algn="l">
-              <a:spcBef>
-                <a:spcPts val="0"/>
-              </a:spcBef>
-              <a:spcAft>
-                <a:spcPts val="0"/>
-              </a:spcAft>
-              <a:buSzPts val="1400"/>
-              <a:buNone/>
-              <a:defRPr b="0" i="0" sz="1800" u="none" cap="none" strike="noStrike"/>
-            </a:lvl6pPr>
-            <a:lvl7pPr indent="-228600" lvl="6" marL="3200400" marR="0" algn="l">
-              <a:spcBef>
-                <a:spcPts val="0"/>
-              </a:spcBef>
-              <a:spcAft>
-                <a:spcPts val="0"/>
-              </a:spcAft>
-              <a:buSzPts val="1400"/>
-              <a:buNone/>
-              <a:defRPr b="0" i="0" sz="1800" u="none" cap="none" strike="noStrike"/>
-            </a:lvl7pPr>
-            <a:lvl8pPr indent="-228600" lvl="7" marL="3657600" marR="0" algn="l">
-              <a:spcBef>
-                <a:spcPts val="0"/>
-              </a:spcBef>
-              <a:spcAft>
-                <a:spcPts val="0"/>
-              </a:spcAft>
-              <a:buSzPts val="1400"/>
-              <a:buNone/>
-              <a:defRPr b="0" i="0" sz="1800" u="none" cap="none" strike="noStrike"/>
-            </a:lvl8pPr>
-            <a:lvl9pPr indent="-228600" lvl="8" marL="4114800" marR="0" algn="l">
-              <a:spcBef>
-                <a:spcPts val="0"/>
-              </a:spcBef>
-              <a:spcAft>
-                <a:spcPts val="0"/>
-              </a:spcAft>
-              <a:buSzPts val="1400"/>
-              <a:buNone/>
-              <a:defRPr b="0" i="0" sz="1800" u="none" cap="none" strike="noStrike"/>
-            </a:lvl9pPr>
-          </a:lstStyle>
-          <a:p/>
-        </p:txBody>
-      </p:sp>
-      <p:sp>
-        <p:nvSpPr>
-          <p:cNvPr id="81" name="Google Shape;81;p19"/>
-          <p:cNvSpPr txBox="1"/>
-          <p:nvPr>
-            <p:ph idx="2" type="body"/>
-          </p:nvPr>
-        </p:nvSpPr>
-        <p:spPr>
-          <a:xfrm>
-            <a:off x="4832280" y="1152360"/>
-            <a:ext cx="3999600" cy="3416100"/>
-          </a:xfrm>
-          <a:prstGeom prst="rect">
-            <a:avLst/>
-          </a:prstGeom>
-          <a:noFill/>
-          <a:ln>
-            <a:noFill/>
-          </a:ln>
-        </p:spPr>
-        <p:txBody>
-          <a:bodyPr anchorCtr="0" anchor="t" bIns="91425" lIns="91425" spcFirstLastPara="1" rIns="91425" wrap="square" tIns="91425">
-            <a:noAutofit/>
-          </a:bodyPr>
-          <a:lstStyle>
-            <a:lvl1pPr indent="-228600" lvl="0" marL="457200" marR="0" algn="l">
-              <a:spcBef>
-                <a:spcPts val="0"/>
-              </a:spcBef>
-              <a:spcAft>
-                <a:spcPts val="0"/>
-              </a:spcAft>
-              <a:buSzPts val="1400"/>
-              <a:buNone/>
-              <a:defRPr b="0" i="0" sz="1800" u="none" cap="none" strike="noStrike"/>
-            </a:lvl1pPr>
-            <a:lvl2pPr indent="-228600" lvl="1" marL="914400" marR="0" algn="l">
-              <a:spcBef>
-                <a:spcPts val="0"/>
-              </a:spcBef>
-              <a:spcAft>
-                <a:spcPts val="0"/>
-              </a:spcAft>
-              <a:buSzPts val="1400"/>
-              <a:buNone/>
-              <a:defRPr b="0" i="0" sz="1800" u="none" cap="none" strike="noStrike"/>
-            </a:lvl2pPr>
-            <a:lvl3pPr indent="-228600" lvl="2" marL="1371600" marR="0" algn="l">
-              <a:spcBef>
-                <a:spcPts val="0"/>
-              </a:spcBef>
-              <a:spcAft>
-                <a:spcPts val="0"/>
-              </a:spcAft>
-              <a:buSzPts val="1400"/>
-              <a:buNone/>
-              <a:defRPr b="0" i="0" sz="1800" u="none" cap="none" strike="noStrike"/>
-            </a:lvl3pPr>
-            <a:lvl4pPr indent="-228600" lvl="3" marL="1828800" marR="0" algn="l">
-              <a:spcBef>
-                <a:spcPts val="0"/>
-              </a:spcBef>
-              <a:spcAft>
-                <a:spcPts val="0"/>
-              </a:spcAft>
-              <a:buSzPts val="1400"/>
-              <a:buNone/>
-              <a:defRPr b="0" i="0" sz="1800" u="none" cap="none" strike="noStrike"/>
-            </a:lvl4pPr>
-            <a:lvl5pPr indent="-228600" lvl="4" marL="2286000" marR="0" algn="l">
-              <a:spcBef>
-                <a:spcPts val="0"/>
-              </a:spcBef>
-              <a:spcAft>
-                <a:spcPts val="0"/>
-              </a:spcAft>
-              <a:buSzPts val="1400"/>
-              <a:buNone/>
-              <a:defRPr b="0" i="0" sz="1800" u="none" cap="none" strike="noStrike"/>
-            </a:lvl5pPr>
-            <a:lvl6pPr indent="-228600" lvl="5" marL="2743200" marR="0" algn="l">
-              <a:spcBef>
-                <a:spcPts val="0"/>
-              </a:spcBef>
-              <a:spcAft>
-                <a:spcPts val="0"/>
-              </a:spcAft>
-              <a:buSzPts val="1400"/>
-              <a:buNone/>
-              <a:defRPr b="0" i="0" sz="1800" u="none" cap="none" strike="noStrike"/>
-            </a:lvl6pPr>
-            <a:lvl7pPr indent="-228600" lvl="6" marL="3200400" marR="0" algn="l">
-              <a:spcBef>
-                <a:spcPts val="0"/>
-              </a:spcBef>
-              <a:spcAft>
-                <a:spcPts val="0"/>
-              </a:spcAft>
-              <a:buSzPts val="1400"/>
-              <a:buNone/>
-              <a:defRPr b="0" i="0" sz="1800" u="none" cap="none" strike="noStrike"/>
-            </a:lvl7pPr>
-            <a:lvl8pPr indent="-228600" lvl="7" marL="3657600" marR="0" algn="l">
-              <a:spcBef>
-                <a:spcPts val="0"/>
-              </a:spcBef>
-              <a:spcAft>
-                <a:spcPts val="0"/>
-              </a:spcAft>
-              <a:buSzPts val="1400"/>
-              <a:buNone/>
-              <a:defRPr b="0" i="0" sz="1800" u="none" cap="none" strike="noStrike"/>
-            </a:lvl8pPr>
-            <a:lvl9pPr indent="-228600" lvl="8" marL="4114800" marR="0" algn="l">
-              <a:spcBef>
-                <a:spcPts val="0"/>
-              </a:spcBef>
-              <a:spcAft>
-                <a:spcPts val="0"/>
-              </a:spcAft>
-              <a:buSzPts val="1400"/>
-              <a:buNone/>
-              <a:defRPr b="0" i="0" sz="1800" u="none" cap="none" strike="noStrike"/>
-            </a:lvl9pPr>
-          </a:lstStyle>
-          <a:p/>
-        </p:txBody>
-      </p:sp>
       <p:sp>
         <p:nvSpPr>
           <p:cNvPr id="82" name="Google Shape;82;p19"/>
@@ -6670,8 +6887,8 @@
 </file>
 
 <file path=ppt/slideLayouts/slideLayout18.xml><?xml version="1.0" encoding="utf-8"?>
-<p:sldLayout xmlns:a="http://schemas.openxmlformats.org/drawingml/2006/main" xmlns:r="http://schemas.openxmlformats.org/officeDocument/2006/relationships" xmlns:mc="http://schemas.openxmlformats.org/markup-compatibility/2006" xmlns:mv="urn:schemas-microsoft-com:mac:vml" xmlns:p="http://schemas.openxmlformats.org/presentationml/2006/main" xmlns:c="http://schemas.openxmlformats.org/drawingml/2006/chart" xmlns:dgm="http://schemas.openxmlformats.org/drawingml/2006/diagram" xmlns:o="urn:schemas-microsoft-com:office:office" xmlns:v="urn:schemas-microsoft-com:vml" xmlns:pvml="urn:schemas-microsoft-com:office:powerpoint" xmlns:com="http://schemas.openxmlformats.org/drawingml/2006/compatibility" xmlns:p14="http://schemas.microsoft.com/office/powerpoint/2010/main" xmlns:p15="http://schemas.microsoft.com/office/powerpoint/2012/main" xmlns:ahyp="http://schemas.microsoft.com/office/drawing/2018/hyperlinkcolor" matchingName="TITLE_ONLY" type="titleOnly">
-  <p:cSld name="TITLE_ONLY">
+<p:sldLayout xmlns:a="http://schemas.openxmlformats.org/drawingml/2006/main" xmlns:r="http://schemas.openxmlformats.org/officeDocument/2006/relationships" xmlns:mc="http://schemas.openxmlformats.org/markup-compatibility/2006" xmlns:mv="urn:schemas-microsoft-com:mac:vml" xmlns:p="http://schemas.openxmlformats.org/presentationml/2006/main" xmlns:c="http://schemas.openxmlformats.org/drawingml/2006/chart" xmlns:dgm="http://schemas.openxmlformats.org/drawingml/2006/diagram" xmlns:o="urn:schemas-microsoft-com:office:office" xmlns:v="urn:schemas-microsoft-com:vml" xmlns:pvml="urn:schemas-microsoft-com:office:powerpoint" xmlns:com="http://schemas.openxmlformats.org/drawingml/2006/compatibility" xmlns:p14="http://schemas.microsoft.com/office/powerpoint/2010/main" xmlns:p15="http://schemas.microsoft.com/office/powerpoint/2012/main" xmlns:ahyp="http://schemas.microsoft.com/office/drawing/2018/hyperlinkcolor" matchingName="TITLE_AND_TWO_COLUMNS" type="twoObj">
+  <p:cSld name="TWO_OBJECTS">
     <p:bg>
       <p:bgPr>
         <a:solidFill>
@@ -6827,6 +7044,264 @@
           <p:cNvPr id="85" name="Google Shape;85;p20"/>
           <p:cNvSpPr txBox="1"/>
           <p:nvPr>
+            <p:ph idx="1" type="body"/>
+          </p:nvPr>
+        </p:nvSpPr>
+        <p:spPr>
+          <a:xfrm>
+            <a:off x="311760" y="1152360"/>
+            <a:ext cx="3999600" cy="3416100"/>
+          </a:xfrm>
+          <a:prstGeom prst="rect">
+            <a:avLst/>
+          </a:prstGeom>
+          <a:noFill/>
+          <a:ln>
+            <a:noFill/>
+          </a:ln>
+        </p:spPr>
+        <p:txBody>
+          <a:bodyPr anchorCtr="0" anchor="t" bIns="91425" lIns="91425" spcFirstLastPara="1" rIns="91425" wrap="square" tIns="91425">
+            <a:noAutofit/>
+          </a:bodyPr>
+          <a:lstStyle>
+            <a:lvl1pPr indent="-228600" lvl="0" marL="457200" marR="0" algn="l">
+              <a:spcBef>
+                <a:spcPts val="0"/>
+              </a:spcBef>
+              <a:spcAft>
+                <a:spcPts val="0"/>
+              </a:spcAft>
+              <a:buSzPts val="1400"/>
+              <a:buNone/>
+              <a:defRPr b="0" i="0" sz="1800" u="none" cap="none" strike="noStrike"/>
+            </a:lvl1pPr>
+            <a:lvl2pPr indent="-228600" lvl="1" marL="914400" marR="0" algn="l">
+              <a:spcBef>
+                <a:spcPts val="0"/>
+              </a:spcBef>
+              <a:spcAft>
+                <a:spcPts val="0"/>
+              </a:spcAft>
+              <a:buSzPts val="1400"/>
+              <a:buNone/>
+              <a:defRPr b="0" i="0" sz="1800" u="none" cap="none" strike="noStrike"/>
+            </a:lvl2pPr>
+            <a:lvl3pPr indent="-228600" lvl="2" marL="1371600" marR="0" algn="l">
+              <a:spcBef>
+                <a:spcPts val="0"/>
+              </a:spcBef>
+              <a:spcAft>
+                <a:spcPts val="0"/>
+              </a:spcAft>
+              <a:buSzPts val="1400"/>
+              <a:buNone/>
+              <a:defRPr b="0" i="0" sz="1800" u="none" cap="none" strike="noStrike"/>
+            </a:lvl3pPr>
+            <a:lvl4pPr indent="-228600" lvl="3" marL="1828800" marR="0" algn="l">
+              <a:spcBef>
+                <a:spcPts val="0"/>
+              </a:spcBef>
+              <a:spcAft>
+                <a:spcPts val="0"/>
+              </a:spcAft>
+              <a:buSzPts val="1400"/>
+              <a:buNone/>
+              <a:defRPr b="0" i="0" sz="1800" u="none" cap="none" strike="noStrike"/>
+            </a:lvl4pPr>
+            <a:lvl5pPr indent="-228600" lvl="4" marL="2286000" marR="0" algn="l">
+              <a:spcBef>
+                <a:spcPts val="0"/>
+              </a:spcBef>
+              <a:spcAft>
+                <a:spcPts val="0"/>
+              </a:spcAft>
+              <a:buSzPts val="1400"/>
+              <a:buNone/>
+              <a:defRPr b="0" i="0" sz="1800" u="none" cap="none" strike="noStrike"/>
+            </a:lvl5pPr>
+            <a:lvl6pPr indent="-228600" lvl="5" marL="2743200" marR="0" algn="l">
+              <a:spcBef>
+                <a:spcPts val="0"/>
+              </a:spcBef>
+              <a:spcAft>
+                <a:spcPts val="0"/>
+              </a:spcAft>
+              <a:buSzPts val="1400"/>
+              <a:buNone/>
+              <a:defRPr b="0" i="0" sz="1800" u="none" cap="none" strike="noStrike"/>
+            </a:lvl6pPr>
+            <a:lvl7pPr indent="-228600" lvl="6" marL="3200400" marR="0" algn="l">
+              <a:spcBef>
+                <a:spcPts val="0"/>
+              </a:spcBef>
+              <a:spcAft>
+                <a:spcPts val="0"/>
+              </a:spcAft>
+              <a:buSzPts val="1400"/>
+              <a:buNone/>
+              <a:defRPr b="0" i="0" sz="1800" u="none" cap="none" strike="noStrike"/>
+            </a:lvl7pPr>
+            <a:lvl8pPr indent="-228600" lvl="7" marL="3657600" marR="0" algn="l">
+              <a:spcBef>
+                <a:spcPts val="0"/>
+              </a:spcBef>
+              <a:spcAft>
+                <a:spcPts val="0"/>
+              </a:spcAft>
+              <a:buSzPts val="1400"/>
+              <a:buNone/>
+              <a:defRPr b="0" i="0" sz="1800" u="none" cap="none" strike="noStrike"/>
+            </a:lvl8pPr>
+            <a:lvl9pPr indent="-228600" lvl="8" marL="4114800" marR="0" algn="l">
+              <a:spcBef>
+                <a:spcPts val="0"/>
+              </a:spcBef>
+              <a:spcAft>
+                <a:spcPts val="0"/>
+              </a:spcAft>
+              <a:buSzPts val="1400"/>
+              <a:buNone/>
+              <a:defRPr b="0" i="0" sz="1800" u="none" cap="none" strike="noStrike"/>
+            </a:lvl9pPr>
+          </a:lstStyle>
+          <a:p/>
+        </p:txBody>
+      </p:sp>
+      <p:sp>
+        <p:nvSpPr>
+          <p:cNvPr id="86" name="Google Shape;86;p20"/>
+          <p:cNvSpPr txBox="1"/>
+          <p:nvPr>
+            <p:ph idx="2" type="body"/>
+          </p:nvPr>
+        </p:nvSpPr>
+        <p:spPr>
+          <a:xfrm>
+            <a:off x="4832280" y="1152360"/>
+            <a:ext cx="3999600" cy="3416100"/>
+          </a:xfrm>
+          <a:prstGeom prst="rect">
+            <a:avLst/>
+          </a:prstGeom>
+          <a:noFill/>
+          <a:ln>
+            <a:noFill/>
+          </a:ln>
+        </p:spPr>
+        <p:txBody>
+          <a:bodyPr anchorCtr="0" anchor="t" bIns="91425" lIns="91425" spcFirstLastPara="1" rIns="91425" wrap="square" tIns="91425">
+            <a:noAutofit/>
+          </a:bodyPr>
+          <a:lstStyle>
+            <a:lvl1pPr indent="-228600" lvl="0" marL="457200" marR="0" algn="l">
+              <a:spcBef>
+                <a:spcPts val="0"/>
+              </a:spcBef>
+              <a:spcAft>
+                <a:spcPts val="0"/>
+              </a:spcAft>
+              <a:buSzPts val="1400"/>
+              <a:buNone/>
+              <a:defRPr b="0" i="0" sz="1800" u="none" cap="none" strike="noStrike"/>
+            </a:lvl1pPr>
+            <a:lvl2pPr indent="-228600" lvl="1" marL="914400" marR="0" algn="l">
+              <a:spcBef>
+                <a:spcPts val="0"/>
+              </a:spcBef>
+              <a:spcAft>
+                <a:spcPts val="0"/>
+              </a:spcAft>
+              <a:buSzPts val="1400"/>
+              <a:buNone/>
+              <a:defRPr b="0" i="0" sz="1800" u="none" cap="none" strike="noStrike"/>
+            </a:lvl2pPr>
+            <a:lvl3pPr indent="-228600" lvl="2" marL="1371600" marR="0" algn="l">
+              <a:spcBef>
+                <a:spcPts val="0"/>
+              </a:spcBef>
+              <a:spcAft>
+                <a:spcPts val="0"/>
+              </a:spcAft>
+              <a:buSzPts val="1400"/>
+              <a:buNone/>
+              <a:defRPr b="0" i="0" sz="1800" u="none" cap="none" strike="noStrike"/>
+            </a:lvl3pPr>
+            <a:lvl4pPr indent="-228600" lvl="3" marL="1828800" marR="0" algn="l">
+              <a:spcBef>
+                <a:spcPts val="0"/>
+              </a:spcBef>
+              <a:spcAft>
+                <a:spcPts val="0"/>
+              </a:spcAft>
+              <a:buSzPts val="1400"/>
+              <a:buNone/>
+              <a:defRPr b="0" i="0" sz="1800" u="none" cap="none" strike="noStrike"/>
+            </a:lvl4pPr>
+            <a:lvl5pPr indent="-228600" lvl="4" marL="2286000" marR="0" algn="l">
+              <a:spcBef>
+                <a:spcPts val="0"/>
+              </a:spcBef>
+              <a:spcAft>
+                <a:spcPts val="0"/>
+              </a:spcAft>
+              <a:buSzPts val="1400"/>
+              <a:buNone/>
+              <a:defRPr b="0" i="0" sz="1800" u="none" cap="none" strike="noStrike"/>
+            </a:lvl5pPr>
+            <a:lvl6pPr indent="-228600" lvl="5" marL="2743200" marR="0" algn="l">
+              <a:spcBef>
+                <a:spcPts val="0"/>
+              </a:spcBef>
+              <a:spcAft>
+                <a:spcPts val="0"/>
+              </a:spcAft>
+              <a:buSzPts val="1400"/>
+              <a:buNone/>
+              <a:defRPr b="0" i="0" sz="1800" u="none" cap="none" strike="noStrike"/>
+            </a:lvl6pPr>
+            <a:lvl7pPr indent="-228600" lvl="6" marL="3200400" marR="0" algn="l">
+              <a:spcBef>
+                <a:spcPts val="0"/>
+              </a:spcBef>
+              <a:spcAft>
+                <a:spcPts val="0"/>
+              </a:spcAft>
+              <a:buSzPts val="1400"/>
+              <a:buNone/>
+              <a:defRPr b="0" i="0" sz="1800" u="none" cap="none" strike="noStrike"/>
+            </a:lvl7pPr>
+            <a:lvl8pPr indent="-228600" lvl="7" marL="3657600" marR="0" algn="l">
+              <a:spcBef>
+                <a:spcPts val="0"/>
+              </a:spcBef>
+              <a:spcAft>
+                <a:spcPts val="0"/>
+              </a:spcAft>
+              <a:buSzPts val="1400"/>
+              <a:buNone/>
+              <a:defRPr b="0" i="0" sz="1800" u="none" cap="none" strike="noStrike"/>
+            </a:lvl8pPr>
+            <a:lvl9pPr indent="-228600" lvl="8" marL="4114800" marR="0" algn="l">
+              <a:spcBef>
+                <a:spcPts val="0"/>
+              </a:spcBef>
+              <a:spcAft>
+                <a:spcPts val="0"/>
+              </a:spcAft>
+              <a:buSzPts val="1400"/>
+              <a:buNone/>
+              <a:defRPr b="0" i="0" sz="1800" u="none" cap="none" strike="noStrike"/>
+            </a:lvl9pPr>
+          </a:lstStyle>
+          <a:p/>
+        </p:txBody>
+      </p:sp>
+      <p:sp>
+        <p:nvSpPr>
+          <p:cNvPr id="87" name="Google Shape;87;p20"/>
+          <p:cNvSpPr txBox="1"/>
+          <p:nvPr>
             <p:ph idx="12" type="sldNum"/>
           </p:nvPr>
         </p:nvSpPr>
@@ -7091,8 +7566,8 @@
 </file>
 
 <file path=ppt/slideLayouts/slideLayout19.xml><?xml version="1.0" encoding="utf-8"?>
-<p:sldLayout xmlns:a="http://schemas.openxmlformats.org/drawingml/2006/main" xmlns:r="http://schemas.openxmlformats.org/officeDocument/2006/relationships" xmlns:mc="http://schemas.openxmlformats.org/markup-compatibility/2006" xmlns:mv="urn:schemas-microsoft-com:mac:vml" xmlns:p="http://schemas.openxmlformats.org/presentationml/2006/main" xmlns:c="http://schemas.openxmlformats.org/drawingml/2006/chart" xmlns:dgm="http://schemas.openxmlformats.org/drawingml/2006/diagram" xmlns:o="urn:schemas-microsoft-com:office:office" xmlns:v="urn:schemas-microsoft-com:vml" xmlns:pvml="urn:schemas-microsoft-com:office:powerpoint" xmlns:com="http://schemas.openxmlformats.org/drawingml/2006/compatibility" xmlns:p14="http://schemas.microsoft.com/office/powerpoint/2010/main" xmlns:p15="http://schemas.microsoft.com/office/powerpoint/2012/main" xmlns:ahyp="http://schemas.microsoft.com/office/drawing/2018/hyperlinkcolor" matchingName="ONE_COLUMN_TEXT">
-  <p:cSld name="ONE_COLUMN_TEXT">
+<p:sldLayout xmlns:a="http://schemas.openxmlformats.org/drawingml/2006/main" xmlns:r="http://schemas.openxmlformats.org/officeDocument/2006/relationships" xmlns:mc="http://schemas.openxmlformats.org/markup-compatibility/2006" xmlns:mv="urn:schemas-microsoft-com:mac:vml" xmlns:p="http://schemas.openxmlformats.org/presentationml/2006/main" xmlns:c="http://schemas.openxmlformats.org/drawingml/2006/chart" xmlns:dgm="http://schemas.openxmlformats.org/drawingml/2006/diagram" xmlns:o="urn:schemas-microsoft-com:office:office" xmlns:v="urn:schemas-microsoft-com:vml" xmlns:pvml="urn:schemas-microsoft-com:office:powerpoint" xmlns:com="http://schemas.openxmlformats.org/drawingml/2006/compatibility" xmlns:p14="http://schemas.microsoft.com/office/powerpoint/2010/main" xmlns:p15="http://schemas.microsoft.com/office/powerpoint/2012/main" xmlns:ahyp="http://schemas.microsoft.com/office/drawing/2018/hyperlinkcolor" matchingName="TITLE_ONLY" type="titleOnly">
+  <p:cSld name="TITLE_ONLY">
     <p:bg>
       <p:bgPr>
         <a:solidFill>
@@ -7102,7 +7577,7 @@
     </p:bg>
     <p:spTree>
       <p:nvGrpSpPr>
-        <p:cNvPr id="86" name="Shape 86"/>
+        <p:cNvPr id="88" name="Shape 88"/>
         <p:cNvGrpSpPr/>
         <p:nvPr/>
       </p:nvGrpSpPr>
@@ -7116,7 +7591,7 @@
       </p:grpSpPr>
       <p:sp>
         <p:nvSpPr>
-          <p:cNvPr id="87" name="Google Shape;87;p21"/>
+          <p:cNvPr id="89" name="Google Shape;89;p21"/>
           <p:cNvSpPr txBox="1"/>
           <p:nvPr>
             <p:ph type="title"/>
@@ -7124,137 +7599,8 @@
         </p:nvSpPr>
         <p:spPr>
           <a:xfrm>
-            <a:off x="311760" y="555480"/>
-            <a:ext cx="2807700" cy="755400"/>
-          </a:xfrm>
-          <a:prstGeom prst="rect">
-            <a:avLst/>
-          </a:prstGeom>
-          <a:noFill/>
-          <a:ln>
-            <a:noFill/>
-          </a:ln>
-        </p:spPr>
-        <p:txBody>
-          <a:bodyPr anchorCtr="0" anchor="b" bIns="91425" lIns="91425" spcFirstLastPara="1" rIns="91425" wrap="square" tIns="91425">
-            <a:noAutofit/>
-          </a:bodyPr>
-          <a:lstStyle>
-            <a:lvl1pPr lvl="0" marR="0" algn="l">
-              <a:spcBef>
-                <a:spcPts val="0"/>
-              </a:spcBef>
-              <a:spcAft>
-                <a:spcPts val="0"/>
-              </a:spcAft>
-              <a:buSzPts val="1400"/>
-              <a:buNone/>
-              <a:defRPr b="0" i="0" sz="1800" u="none" cap="none" strike="noStrike"/>
-            </a:lvl1pPr>
-            <a:lvl2pPr lvl="1" marR="0" algn="l">
-              <a:spcBef>
-                <a:spcPts val="0"/>
-              </a:spcBef>
-              <a:spcAft>
-                <a:spcPts val="0"/>
-              </a:spcAft>
-              <a:buSzPts val="1400"/>
-              <a:buNone/>
-              <a:defRPr b="0" i="0" sz="1800" u="none" cap="none" strike="noStrike"/>
-            </a:lvl2pPr>
-            <a:lvl3pPr lvl="2" marR="0" algn="l">
-              <a:spcBef>
-                <a:spcPts val="0"/>
-              </a:spcBef>
-              <a:spcAft>
-                <a:spcPts val="0"/>
-              </a:spcAft>
-              <a:buSzPts val="1400"/>
-              <a:buNone/>
-              <a:defRPr b="0" i="0" sz="1800" u="none" cap="none" strike="noStrike"/>
-            </a:lvl3pPr>
-            <a:lvl4pPr lvl="3" marR="0" algn="l">
-              <a:spcBef>
-                <a:spcPts val="0"/>
-              </a:spcBef>
-              <a:spcAft>
-                <a:spcPts val="0"/>
-              </a:spcAft>
-              <a:buSzPts val="1400"/>
-              <a:buNone/>
-              <a:defRPr b="0" i="0" sz="1800" u="none" cap="none" strike="noStrike"/>
-            </a:lvl4pPr>
-            <a:lvl5pPr lvl="4" marR="0" algn="l">
-              <a:spcBef>
-                <a:spcPts val="0"/>
-              </a:spcBef>
-              <a:spcAft>
-                <a:spcPts val="0"/>
-              </a:spcAft>
-              <a:buSzPts val="1400"/>
-              <a:buNone/>
-              <a:defRPr b="0" i="0" sz="1800" u="none" cap="none" strike="noStrike"/>
-            </a:lvl5pPr>
-            <a:lvl6pPr lvl="5" marR="0" algn="l">
-              <a:spcBef>
-                <a:spcPts val="0"/>
-              </a:spcBef>
-              <a:spcAft>
-                <a:spcPts val="0"/>
-              </a:spcAft>
-              <a:buSzPts val="1400"/>
-              <a:buNone/>
-              <a:defRPr b="0" i="0" sz="1800" u="none" cap="none" strike="noStrike"/>
-            </a:lvl6pPr>
-            <a:lvl7pPr lvl="6" marR="0" algn="l">
-              <a:spcBef>
-                <a:spcPts val="0"/>
-              </a:spcBef>
-              <a:spcAft>
-                <a:spcPts val="0"/>
-              </a:spcAft>
-              <a:buSzPts val="1400"/>
-              <a:buNone/>
-              <a:defRPr b="0" i="0" sz="1800" u="none" cap="none" strike="noStrike"/>
-            </a:lvl7pPr>
-            <a:lvl8pPr lvl="7" marR="0" algn="l">
-              <a:spcBef>
-                <a:spcPts val="0"/>
-              </a:spcBef>
-              <a:spcAft>
-                <a:spcPts val="0"/>
-              </a:spcAft>
-              <a:buSzPts val="1400"/>
-              <a:buNone/>
-              <a:defRPr b="0" i="0" sz="1800" u="none" cap="none" strike="noStrike"/>
-            </a:lvl8pPr>
-            <a:lvl9pPr lvl="8" marR="0" algn="l">
-              <a:spcBef>
-                <a:spcPts val="0"/>
-              </a:spcBef>
-              <a:spcAft>
-                <a:spcPts val="0"/>
-              </a:spcAft>
-              <a:buSzPts val="1400"/>
-              <a:buNone/>
-              <a:defRPr b="0" i="0" sz="1800" u="none" cap="none" strike="noStrike"/>
-            </a:lvl9pPr>
-          </a:lstStyle>
-          <a:p/>
-        </p:txBody>
-      </p:sp>
-      <p:sp>
-        <p:nvSpPr>
-          <p:cNvPr id="88" name="Google Shape;88;p21"/>
-          <p:cNvSpPr txBox="1"/>
-          <p:nvPr>
-            <p:ph idx="1" type="body"/>
-          </p:nvPr>
-        </p:nvSpPr>
-        <p:spPr>
-          <a:xfrm>
-            <a:off x="311760" y="1389600"/>
-            <a:ext cx="2807700" cy="3179100"/>
+            <a:off x="311760" y="444960"/>
+            <a:ext cx="8520000" cy="572400"/>
           </a:xfrm>
           <a:prstGeom prst="rect">
             <a:avLst/>
@@ -7269,7 +7615,7 @@
             <a:noAutofit/>
           </a:bodyPr>
           <a:lstStyle>
-            <a:lvl1pPr indent="-228600" lvl="0" marL="457200" marR="0" algn="l">
+            <a:lvl1pPr lvl="0" marR="0" algn="l">
               <a:spcBef>
                 <a:spcPts val="0"/>
               </a:spcBef>
@@ -7280,7 +7626,7 @@
               <a:buNone/>
               <a:defRPr b="0" i="0" sz="1800" u="none" cap="none" strike="noStrike"/>
             </a:lvl1pPr>
-            <a:lvl2pPr indent="-228600" lvl="1" marL="914400" marR="0" algn="l">
+            <a:lvl2pPr lvl="1" marR="0" algn="l">
               <a:spcBef>
                 <a:spcPts val="0"/>
               </a:spcBef>
@@ -7291,7 +7637,7 @@
               <a:buNone/>
               <a:defRPr b="0" i="0" sz="1800" u="none" cap="none" strike="noStrike"/>
             </a:lvl2pPr>
-            <a:lvl3pPr indent="-228600" lvl="2" marL="1371600" marR="0" algn="l">
+            <a:lvl3pPr lvl="2" marR="0" algn="l">
               <a:spcBef>
                 <a:spcPts val="0"/>
               </a:spcBef>
@@ -7302,7 +7648,7 @@
               <a:buNone/>
               <a:defRPr b="0" i="0" sz="1800" u="none" cap="none" strike="noStrike"/>
             </a:lvl3pPr>
-            <a:lvl4pPr indent="-228600" lvl="3" marL="1828800" marR="0" algn="l">
+            <a:lvl4pPr lvl="3" marR="0" algn="l">
               <a:spcBef>
                 <a:spcPts val="0"/>
               </a:spcBef>
@@ -7313,7 +7659,7 @@
               <a:buNone/>
               <a:defRPr b="0" i="0" sz="1800" u="none" cap="none" strike="noStrike"/>
             </a:lvl4pPr>
-            <a:lvl5pPr indent="-228600" lvl="4" marL="2286000" marR="0" algn="l">
+            <a:lvl5pPr lvl="4" marR="0" algn="l">
               <a:spcBef>
                 <a:spcPts val="0"/>
               </a:spcBef>
@@ -7324,7 +7670,7 @@
               <a:buNone/>
               <a:defRPr b="0" i="0" sz="1800" u="none" cap="none" strike="noStrike"/>
             </a:lvl5pPr>
-            <a:lvl6pPr indent="-228600" lvl="5" marL="2743200" marR="0" algn="l">
+            <a:lvl6pPr lvl="5" marR="0" algn="l">
               <a:spcBef>
                 <a:spcPts val="0"/>
               </a:spcBef>
@@ -7335,7 +7681,7 @@
               <a:buNone/>
               <a:defRPr b="0" i="0" sz="1800" u="none" cap="none" strike="noStrike"/>
             </a:lvl6pPr>
-            <a:lvl7pPr indent="-228600" lvl="6" marL="3200400" marR="0" algn="l">
+            <a:lvl7pPr lvl="6" marR="0" algn="l">
               <a:spcBef>
                 <a:spcPts val="0"/>
               </a:spcBef>
@@ -7346,7 +7692,7 @@
               <a:buNone/>
               <a:defRPr b="0" i="0" sz="1800" u="none" cap="none" strike="noStrike"/>
             </a:lvl7pPr>
-            <a:lvl8pPr indent="-228600" lvl="7" marL="3657600" marR="0" algn="l">
+            <a:lvl8pPr lvl="7" marR="0" algn="l">
               <a:spcBef>
                 <a:spcPts val="0"/>
               </a:spcBef>
@@ -7357,7 +7703,7 @@
               <a:buNone/>
               <a:defRPr b="0" i="0" sz="1800" u="none" cap="none" strike="noStrike"/>
             </a:lvl8pPr>
-            <a:lvl9pPr indent="-228600" lvl="8" marL="4114800" marR="0" algn="l">
+            <a:lvl9pPr lvl="8" marR="0" algn="l">
               <a:spcBef>
                 <a:spcPts val="0"/>
               </a:spcBef>
@@ -7374,7 +7720,7 @@
       </p:sp>
       <p:sp>
         <p:nvSpPr>
-          <p:cNvPr id="89" name="Google Shape;89;p21"/>
+          <p:cNvPr id="90" name="Google Shape;90;p21"/>
           <p:cNvSpPr txBox="1"/>
           <p:nvPr>
             <p:ph idx="12" type="sldNum"/>
@@ -8000,18 +8346,18 @@
 </file>
 
 <file path=ppt/slideLayouts/slideLayout20.xml><?xml version="1.0" encoding="utf-8"?>
-<p:sldLayout xmlns:a="http://schemas.openxmlformats.org/drawingml/2006/main" xmlns:r="http://schemas.openxmlformats.org/officeDocument/2006/relationships" xmlns:mc="http://schemas.openxmlformats.org/markup-compatibility/2006" xmlns:mv="urn:schemas-microsoft-com:mac:vml" xmlns:p="http://schemas.openxmlformats.org/presentationml/2006/main" xmlns:c="http://schemas.openxmlformats.org/drawingml/2006/chart" xmlns:dgm="http://schemas.openxmlformats.org/drawingml/2006/diagram" xmlns:o="urn:schemas-microsoft-com:office:office" xmlns:v="urn:schemas-microsoft-com:vml" xmlns:pvml="urn:schemas-microsoft-com:office:powerpoint" xmlns:com="http://schemas.openxmlformats.org/drawingml/2006/compatibility" xmlns:p14="http://schemas.microsoft.com/office/powerpoint/2010/main" xmlns:p15="http://schemas.microsoft.com/office/powerpoint/2012/main" xmlns:ahyp="http://schemas.microsoft.com/office/drawing/2018/hyperlinkcolor" matchingName="MAIN_POINT">
-  <p:cSld name="MAIN_POINT">
+<p:sldLayout xmlns:a="http://schemas.openxmlformats.org/drawingml/2006/main" xmlns:r="http://schemas.openxmlformats.org/officeDocument/2006/relationships" xmlns:mc="http://schemas.openxmlformats.org/markup-compatibility/2006" xmlns:mv="urn:schemas-microsoft-com:mac:vml" xmlns:p="http://schemas.openxmlformats.org/presentationml/2006/main" xmlns:c="http://schemas.openxmlformats.org/drawingml/2006/chart" xmlns:dgm="http://schemas.openxmlformats.org/drawingml/2006/diagram" xmlns:o="urn:schemas-microsoft-com:office:office" xmlns:v="urn:schemas-microsoft-com:vml" xmlns:pvml="urn:schemas-microsoft-com:office:powerpoint" xmlns:com="http://schemas.openxmlformats.org/drawingml/2006/compatibility" xmlns:p14="http://schemas.microsoft.com/office/powerpoint/2010/main" xmlns:p15="http://schemas.microsoft.com/office/powerpoint/2012/main" xmlns:ahyp="http://schemas.microsoft.com/office/drawing/2018/hyperlinkcolor" matchingName="ONE_COLUMN_TEXT">
+  <p:cSld name="ONE_COLUMN_TEXT">
     <p:bg>
       <p:bgPr>
         <a:solidFill>
-          <a:schemeClr val="lt2"/>
+          <a:schemeClr val="lt1"/>
         </a:solidFill>
       </p:bgPr>
     </p:bg>
     <p:spTree>
       <p:nvGrpSpPr>
-        <p:cNvPr id="90" name="Shape 90"/>
+        <p:cNvPr id="91" name="Shape 91"/>
         <p:cNvGrpSpPr/>
         <p:nvPr/>
       </p:nvGrpSpPr>
@@ -8025,7 +8371,7 @@
       </p:grpSpPr>
       <p:sp>
         <p:nvSpPr>
-          <p:cNvPr id="91" name="Google Shape;91;p22"/>
+          <p:cNvPr id="92" name="Google Shape;92;p22"/>
           <p:cNvSpPr txBox="1"/>
           <p:nvPr>
             <p:ph type="title"/>
@@ -8033,8 +8379,8 @@
         </p:nvSpPr>
         <p:spPr>
           <a:xfrm>
-            <a:off x="490320" y="526320"/>
-            <a:ext cx="5797200" cy="4090200"/>
+            <a:off x="311760" y="555480"/>
+            <a:ext cx="2807700" cy="755400"/>
           </a:xfrm>
           <a:prstGeom prst="rect">
             <a:avLst/>
@@ -8045,7 +8391,7 @@
           </a:ln>
         </p:spPr>
         <p:txBody>
-          <a:bodyPr anchorCtr="0" anchor="ctr" bIns="91425" lIns="91425" spcFirstLastPara="1" rIns="91425" wrap="square" tIns="91425">
+          <a:bodyPr anchorCtr="0" anchor="b" bIns="91425" lIns="91425" spcFirstLastPara="1" rIns="91425" wrap="square" tIns="91425">
             <a:noAutofit/>
           </a:bodyPr>
           <a:lstStyle>
@@ -8154,7 +8500,136 @@
       </p:sp>
       <p:sp>
         <p:nvSpPr>
-          <p:cNvPr id="92" name="Google Shape;92;p22"/>
+          <p:cNvPr id="93" name="Google Shape;93;p22"/>
+          <p:cNvSpPr txBox="1"/>
+          <p:nvPr>
+            <p:ph idx="1" type="body"/>
+          </p:nvPr>
+        </p:nvSpPr>
+        <p:spPr>
+          <a:xfrm>
+            <a:off x="311760" y="1389600"/>
+            <a:ext cx="2807700" cy="3179100"/>
+          </a:xfrm>
+          <a:prstGeom prst="rect">
+            <a:avLst/>
+          </a:prstGeom>
+          <a:noFill/>
+          <a:ln>
+            <a:noFill/>
+          </a:ln>
+        </p:spPr>
+        <p:txBody>
+          <a:bodyPr anchorCtr="0" anchor="t" bIns="91425" lIns="91425" spcFirstLastPara="1" rIns="91425" wrap="square" tIns="91425">
+            <a:noAutofit/>
+          </a:bodyPr>
+          <a:lstStyle>
+            <a:lvl1pPr indent="-228600" lvl="0" marL="457200" marR="0" algn="l">
+              <a:spcBef>
+                <a:spcPts val="0"/>
+              </a:spcBef>
+              <a:spcAft>
+                <a:spcPts val="0"/>
+              </a:spcAft>
+              <a:buSzPts val="1400"/>
+              <a:buNone/>
+              <a:defRPr b="0" i="0" sz="1800" u="none" cap="none" strike="noStrike"/>
+            </a:lvl1pPr>
+            <a:lvl2pPr indent="-228600" lvl="1" marL="914400" marR="0" algn="l">
+              <a:spcBef>
+                <a:spcPts val="0"/>
+              </a:spcBef>
+              <a:spcAft>
+                <a:spcPts val="0"/>
+              </a:spcAft>
+              <a:buSzPts val="1400"/>
+              <a:buNone/>
+              <a:defRPr b="0" i="0" sz="1800" u="none" cap="none" strike="noStrike"/>
+            </a:lvl2pPr>
+            <a:lvl3pPr indent="-228600" lvl="2" marL="1371600" marR="0" algn="l">
+              <a:spcBef>
+                <a:spcPts val="0"/>
+              </a:spcBef>
+              <a:spcAft>
+                <a:spcPts val="0"/>
+              </a:spcAft>
+              <a:buSzPts val="1400"/>
+              <a:buNone/>
+              <a:defRPr b="0" i="0" sz="1800" u="none" cap="none" strike="noStrike"/>
+            </a:lvl3pPr>
+            <a:lvl4pPr indent="-228600" lvl="3" marL="1828800" marR="0" algn="l">
+              <a:spcBef>
+                <a:spcPts val="0"/>
+              </a:spcBef>
+              <a:spcAft>
+                <a:spcPts val="0"/>
+              </a:spcAft>
+              <a:buSzPts val="1400"/>
+              <a:buNone/>
+              <a:defRPr b="0" i="0" sz="1800" u="none" cap="none" strike="noStrike"/>
+            </a:lvl4pPr>
+            <a:lvl5pPr indent="-228600" lvl="4" marL="2286000" marR="0" algn="l">
+              <a:spcBef>
+                <a:spcPts val="0"/>
+              </a:spcBef>
+              <a:spcAft>
+                <a:spcPts val="0"/>
+              </a:spcAft>
+              <a:buSzPts val="1400"/>
+              <a:buNone/>
+              <a:defRPr b="0" i="0" sz="1800" u="none" cap="none" strike="noStrike"/>
+            </a:lvl5pPr>
+            <a:lvl6pPr indent="-228600" lvl="5" marL="2743200" marR="0" algn="l">
+              <a:spcBef>
+                <a:spcPts val="0"/>
+              </a:spcBef>
+              <a:spcAft>
+                <a:spcPts val="0"/>
+              </a:spcAft>
+              <a:buSzPts val="1400"/>
+              <a:buNone/>
+              <a:defRPr b="0" i="0" sz="1800" u="none" cap="none" strike="noStrike"/>
+            </a:lvl6pPr>
+            <a:lvl7pPr indent="-228600" lvl="6" marL="3200400" marR="0" algn="l">
+              <a:spcBef>
+                <a:spcPts val="0"/>
+              </a:spcBef>
+              <a:spcAft>
+                <a:spcPts val="0"/>
+              </a:spcAft>
+              <a:buSzPts val="1400"/>
+              <a:buNone/>
+              <a:defRPr b="0" i="0" sz="1800" u="none" cap="none" strike="noStrike"/>
+            </a:lvl7pPr>
+            <a:lvl8pPr indent="-228600" lvl="7" marL="3657600" marR="0" algn="l">
+              <a:spcBef>
+                <a:spcPts val="0"/>
+              </a:spcBef>
+              <a:spcAft>
+                <a:spcPts val="0"/>
+              </a:spcAft>
+              <a:buSzPts val="1400"/>
+              <a:buNone/>
+              <a:defRPr b="0" i="0" sz="1800" u="none" cap="none" strike="noStrike"/>
+            </a:lvl8pPr>
+            <a:lvl9pPr indent="-228600" lvl="8" marL="4114800" marR="0" algn="l">
+              <a:spcBef>
+                <a:spcPts val="0"/>
+              </a:spcBef>
+              <a:spcAft>
+                <a:spcPts val="0"/>
+              </a:spcAft>
+              <a:buSzPts val="1400"/>
+              <a:buNone/>
+              <a:defRPr b="0" i="0" sz="1800" u="none" cap="none" strike="noStrike"/>
+            </a:lvl9pPr>
+          </a:lstStyle>
+          <a:p/>
+        </p:txBody>
+      </p:sp>
+      <p:sp>
+        <p:nvSpPr>
+          <p:cNvPr id="94" name="Google Shape;94;p22"/>
           <p:cNvSpPr txBox="1"/>
           <p:nvPr>
             <p:ph idx="12" type="sldNum"/>
@@ -8421,18 +8896,18 @@
 </file>
 
 <file path=ppt/slideLayouts/slideLayout21.xml><?xml version="1.0" encoding="utf-8"?>
-<p:sldLayout xmlns:a="http://schemas.openxmlformats.org/drawingml/2006/main" xmlns:r="http://schemas.openxmlformats.org/officeDocument/2006/relationships" xmlns:mc="http://schemas.openxmlformats.org/markup-compatibility/2006" xmlns:mv="urn:schemas-microsoft-com:mac:vml" xmlns:p="http://schemas.openxmlformats.org/presentationml/2006/main" xmlns:c="http://schemas.openxmlformats.org/drawingml/2006/chart" xmlns:dgm="http://schemas.openxmlformats.org/drawingml/2006/diagram" xmlns:o="urn:schemas-microsoft-com:office:office" xmlns:v="urn:schemas-microsoft-com:vml" xmlns:pvml="urn:schemas-microsoft-com:office:powerpoint" xmlns:com="http://schemas.openxmlformats.org/drawingml/2006/compatibility" xmlns:p14="http://schemas.microsoft.com/office/powerpoint/2010/main" xmlns:p15="http://schemas.microsoft.com/office/powerpoint/2012/main" xmlns:ahyp="http://schemas.microsoft.com/office/drawing/2018/hyperlinkcolor" matchingName="SECTION_TITLE_AND_DESCRIPTION">
-  <p:cSld name="SECTION_TITLE_AND_DESCRIPTION">
+<p:sldLayout xmlns:a="http://schemas.openxmlformats.org/drawingml/2006/main" xmlns:r="http://schemas.openxmlformats.org/officeDocument/2006/relationships" xmlns:mc="http://schemas.openxmlformats.org/markup-compatibility/2006" xmlns:mv="urn:schemas-microsoft-com:mac:vml" xmlns:p="http://schemas.openxmlformats.org/presentationml/2006/main" xmlns:c="http://schemas.openxmlformats.org/drawingml/2006/chart" xmlns:dgm="http://schemas.openxmlformats.org/drawingml/2006/diagram" xmlns:o="urn:schemas-microsoft-com:office:office" xmlns:v="urn:schemas-microsoft-com:vml" xmlns:pvml="urn:schemas-microsoft-com:office:powerpoint" xmlns:com="http://schemas.openxmlformats.org/drawingml/2006/compatibility" xmlns:p14="http://schemas.microsoft.com/office/powerpoint/2010/main" xmlns:p15="http://schemas.microsoft.com/office/powerpoint/2012/main" xmlns:ahyp="http://schemas.microsoft.com/office/drawing/2018/hyperlinkcolor" matchingName="MAIN_POINT">
+  <p:cSld name="MAIN_POINT">
     <p:bg>
       <p:bgPr>
         <a:solidFill>
-          <a:schemeClr val="lt1"/>
+          <a:schemeClr val="lt2"/>
         </a:solidFill>
       </p:bgPr>
     </p:bg>
     <p:spTree>
       <p:nvGrpSpPr>
-        <p:cNvPr id="93" name="Shape 93"/>
+        <p:cNvPr id="95" name="Shape 95"/>
         <p:cNvGrpSpPr/>
         <p:nvPr/>
       </p:nvGrpSpPr>
@@ -8446,7 +8921,428 @@
       </p:grpSpPr>
       <p:sp>
         <p:nvSpPr>
-          <p:cNvPr id="94" name="Google Shape;94;p23"/>
+          <p:cNvPr id="96" name="Google Shape;96;p23"/>
+          <p:cNvSpPr txBox="1"/>
+          <p:nvPr>
+            <p:ph type="title"/>
+          </p:nvPr>
+        </p:nvSpPr>
+        <p:spPr>
+          <a:xfrm>
+            <a:off x="490320" y="526320"/>
+            <a:ext cx="5797200" cy="4090200"/>
+          </a:xfrm>
+          <a:prstGeom prst="rect">
+            <a:avLst/>
+          </a:prstGeom>
+          <a:noFill/>
+          <a:ln>
+            <a:noFill/>
+          </a:ln>
+        </p:spPr>
+        <p:txBody>
+          <a:bodyPr anchorCtr="0" anchor="ctr" bIns="91425" lIns="91425" spcFirstLastPara="1" rIns="91425" wrap="square" tIns="91425">
+            <a:noAutofit/>
+          </a:bodyPr>
+          <a:lstStyle>
+            <a:lvl1pPr lvl="0" marR="0" algn="l">
+              <a:spcBef>
+                <a:spcPts val="0"/>
+              </a:spcBef>
+              <a:spcAft>
+                <a:spcPts val="0"/>
+              </a:spcAft>
+              <a:buSzPts val="1400"/>
+              <a:buNone/>
+              <a:defRPr b="0" i="0" sz="1800" u="none" cap="none" strike="noStrike"/>
+            </a:lvl1pPr>
+            <a:lvl2pPr lvl="1" marR="0" algn="l">
+              <a:spcBef>
+                <a:spcPts val="0"/>
+              </a:spcBef>
+              <a:spcAft>
+                <a:spcPts val="0"/>
+              </a:spcAft>
+              <a:buSzPts val="1400"/>
+              <a:buNone/>
+              <a:defRPr b="0" i="0" sz="1800" u="none" cap="none" strike="noStrike"/>
+            </a:lvl2pPr>
+            <a:lvl3pPr lvl="2" marR="0" algn="l">
+              <a:spcBef>
+                <a:spcPts val="0"/>
+              </a:spcBef>
+              <a:spcAft>
+                <a:spcPts val="0"/>
+              </a:spcAft>
+              <a:buSzPts val="1400"/>
+              <a:buNone/>
+              <a:defRPr b="0" i="0" sz="1800" u="none" cap="none" strike="noStrike"/>
+            </a:lvl3pPr>
+            <a:lvl4pPr lvl="3" marR="0" algn="l">
+              <a:spcBef>
+                <a:spcPts val="0"/>
+              </a:spcBef>
+              <a:spcAft>
+                <a:spcPts val="0"/>
+              </a:spcAft>
+              <a:buSzPts val="1400"/>
+              <a:buNone/>
+              <a:defRPr b="0" i="0" sz="1800" u="none" cap="none" strike="noStrike"/>
+            </a:lvl4pPr>
+            <a:lvl5pPr lvl="4" marR="0" algn="l">
+              <a:spcBef>
+                <a:spcPts val="0"/>
+              </a:spcBef>
+              <a:spcAft>
+                <a:spcPts val="0"/>
+              </a:spcAft>
+              <a:buSzPts val="1400"/>
+              <a:buNone/>
+              <a:defRPr b="0" i="0" sz="1800" u="none" cap="none" strike="noStrike"/>
+            </a:lvl5pPr>
+            <a:lvl6pPr lvl="5" marR="0" algn="l">
+              <a:spcBef>
+                <a:spcPts val="0"/>
+              </a:spcBef>
+              <a:spcAft>
+                <a:spcPts val="0"/>
+              </a:spcAft>
+              <a:buSzPts val="1400"/>
+              <a:buNone/>
+              <a:defRPr b="0" i="0" sz="1800" u="none" cap="none" strike="noStrike"/>
+            </a:lvl6pPr>
+            <a:lvl7pPr lvl="6" marR="0" algn="l">
+              <a:spcBef>
+                <a:spcPts val="0"/>
+              </a:spcBef>
+              <a:spcAft>
+                <a:spcPts val="0"/>
+              </a:spcAft>
+              <a:buSzPts val="1400"/>
+              <a:buNone/>
+              <a:defRPr b="0" i="0" sz="1800" u="none" cap="none" strike="noStrike"/>
+            </a:lvl7pPr>
+            <a:lvl8pPr lvl="7" marR="0" algn="l">
+              <a:spcBef>
+                <a:spcPts val="0"/>
+              </a:spcBef>
+              <a:spcAft>
+                <a:spcPts val="0"/>
+              </a:spcAft>
+              <a:buSzPts val="1400"/>
+              <a:buNone/>
+              <a:defRPr b="0" i="0" sz="1800" u="none" cap="none" strike="noStrike"/>
+            </a:lvl8pPr>
+            <a:lvl9pPr lvl="8" marR="0" algn="l">
+              <a:spcBef>
+                <a:spcPts val="0"/>
+              </a:spcBef>
+              <a:spcAft>
+                <a:spcPts val="0"/>
+              </a:spcAft>
+              <a:buSzPts val="1400"/>
+              <a:buNone/>
+              <a:defRPr b="0" i="0" sz="1800" u="none" cap="none" strike="noStrike"/>
+            </a:lvl9pPr>
+          </a:lstStyle>
+          <a:p/>
+        </p:txBody>
+      </p:sp>
+      <p:sp>
+        <p:nvSpPr>
+          <p:cNvPr id="97" name="Google Shape;97;p23"/>
+          <p:cNvSpPr txBox="1"/>
+          <p:nvPr>
+            <p:ph idx="12" type="sldNum"/>
+          </p:nvPr>
+        </p:nvSpPr>
+        <p:spPr>
+          <a:xfrm>
+            <a:off x="8472600" y="4663080"/>
+            <a:ext cx="548400" cy="393000"/>
+          </a:xfrm>
+          <a:prstGeom prst="rect">
+            <a:avLst/>
+          </a:prstGeom>
+          <a:noFill/>
+          <a:ln>
+            <a:noFill/>
+          </a:ln>
+        </p:spPr>
+        <p:txBody>
+          <a:bodyPr anchorCtr="0" anchor="ctr" bIns="91425" lIns="91425" spcFirstLastPara="1" rIns="91425" wrap="square" tIns="91425">
+            <a:noAutofit/>
+          </a:bodyPr>
+          <a:lstStyle>
+            <a:lvl1pPr indent="0" lvl="0" marL="0" marR="0" algn="r">
+              <a:lnSpc>
+                <a:spcPct val="100000"/>
+              </a:lnSpc>
+              <a:spcBef>
+                <a:spcPts val="0"/>
+              </a:spcBef>
+              <a:buClr>
+                <a:schemeClr val="dk1"/>
+              </a:buClr>
+              <a:buSzPts val="1000"/>
+              <a:buFont typeface="Proxima Nova"/>
+              <a:buNone/>
+              <a:defRPr b="0" sz="1000" u="none" strike="noStrike">
+                <a:solidFill>
+                  <a:schemeClr val="dk1"/>
+                </a:solidFill>
+                <a:latin typeface="Proxima Nova"/>
+                <a:ea typeface="Proxima Nova"/>
+                <a:cs typeface="Proxima Nova"/>
+                <a:sym typeface="Proxima Nova"/>
+              </a:defRPr>
+            </a:lvl1pPr>
+            <a:lvl2pPr indent="0" lvl="1" marL="0" marR="0" algn="r">
+              <a:lnSpc>
+                <a:spcPct val="100000"/>
+              </a:lnSpc>
+              <a:spcBef>
+                <a:spcPts val="0"/>
+              </a:spcBef>
+              <a:buClr>
+                <a:schemeClr val="dk1"/>
+              </a:buClr>
+              <a:buSzPts val="1000"/>
+              <a:buFont typeface="Proxima Nova"/>
+              <a:buNone/>
+              <a:defRPr b="0" sz="1000" u="none" strike="noStrike">
+                <a:solidFill>
+                  <a:schemeClr val="dk1"/>
+                </a:solidFill>
+                <a:latin typeface="Proxima Nova"/>
+                <a:ea typeface="Proxima Nova"/>
+                <a:cs typeface="Proxima Nova"/>
+                <a:sym typeface="Proxima Nova"/>
+              </a:defRPr>
+            </a:lvl2pPr>
+            <a:lvl3pPr indent="0" lvl="2" marL="0" marR="0" algn="r">
+              <a:lnSpc>
+                <a:spcPct val="100000"/>
+              </a:lnSpc>
+              <a:spcBef>
+                <a:spcPts val="0"/>
+              </a:spcBef>
+              <a:buClr>
+                <a:schemeClr val="dk1"/>
+              </a:buClr>
+              <a:buSzPts val="1000"/>
+              <a:buFont typeface="Proxima Nova"/>
+              <a:buNone/>
+              <a:defRPr b="0" sz="1000" u="none" strike="noStrike">
+                <a:solidFill>
+                  <a:schemeClr val="dk1"/>
+                </a:solidFill>
+                <a:latin typeface="Proxima Nova"/>
+                <a:ea typeface="Proxima Nova"/>
+                <a:cs typeface="Proxima Nova"/>
+                <a:sym typeface="Proxima Nova"/>
+              </a:defRPr>
+            </a:lvl3pPr>
+            <a:lvl4pPr indent="0" lvl="3" marL="0" marR="0" algn="r">
+              <a:lnSpc>
+                <a:spcPct val="100000"/>
+              </a:lnSpc>
+              <a:spcBef>
+                <a:spcPts val="0"/>
+              </a:spcBef>
+              <a:buClr>
+                <a:schemeClr val="dk1"/>
+              </a:buClr>
+              <a:buSzPts val="1000"/>
+              <a:buFont typeface="Proxima Nova"/>
+              <a:buNone/>
+              <a:defRPr b="0" sz="1000" u="none" strike="noStrike">
+                <a:solidFill>
+                  <a:schemeClr val="dk1"/>
+                </a:solidFill>
+                <a:latin typeface="Proxima Nova"/>
+                <a:ea typeface="Proxima Nova"/>
+                <a:cs typeface="Proxima Nova"/>
+                <a:sym typeface="Proxima Nova"/>
+              </a:defRPr>
+            </a:lvl4pPr>
+            <a:lvl5pPr indent="0" lvl="4" marL="0" marR="0" algn="r">
+              <a:lnSpc>
+                <a:spcPct val="100000"/>
+              </a:lnSpc>
+              <a:spcBef>
+                <a:spcPts val="0"/>
+              </a:spcBef>
+              <a:buClr>
+                <a:schemeClr val="dk1"/>
+              </a:buClr>
+              <a:buSzPts val="1000"/>
+              <a:buFont typeface="Proxima Nova"/>
+              <a:buNone/>
+              <a:defRPr b="0" sz="1000" u="none" strike="noStrike">
+                <a:solidFill>
+                  <a:schemeClr val="dk1"/>
+                </a:solidFill>
+                <a:latin typeface="Proxima Nova"/>
+                <a:ea typeface="Proxima Nova"/>
+                <a:cs typeface="Proxima Nova"/>
+                <a:sym typeface="Proxima Nova"/>
+              </a:defRPr>
+            </a:lvl5pPr>
+            <a:lvl6pPr indent="0" lvl="5" marL="0" marR="0" algn="r">
+              <a:lnSpc>
+                <a:spcPct val="100000"/>
+              </a:lnSpc>
+              <a:spcBef>
+                <a:spcPts val="0"/>
+              </a:spcBef>
+              <a:buClr>
+                <a:schemeClr val="dk1"/>
+              </a:buClr>
+              <a:buSzPts val="1000"/>
+              <a:buFont typeface="Proxima Nova"/>
+              <a:buNone/>
+              <a:defRPr b="0" sz="1000" u="none" strike="noStrike">
+                <a:solidFill>
+                  <a:schemeClr val="dk1"/>
+                </a:solidFill>
+                <a:latin typeface="Proxima Nova"/>
+                <a:ea typeface="Proxima Nova"/>
+                <a:cs typeface="Proxima Nova"/>
+                <a:sym typeface="Proxima Nova"/>
+              </a:defRPr>
+            </a:lvl6pPr>
+            <a:lvl7pPr indent="0" lvl="6" marL="0" marR="0" algn="r">
+              <a:lnSpc>
+                <a:spcPct val="100000"/>
+              </a:lnSpc>
+              <a:spcBef>
+                <a:spcPts val="0"/>
+              </a:spcBef>
+              <a:buClr>
+                <a:schemeClr val="dk1"/>
+              </a:buClr>
+              <a:buSzPts val="1000"/>
+              <a:buFont typeface="Proxima Nova"/>
+              <a:buNone/>
+              <a:defRPr b="0" sz="1000" u="none" strike="noStrike">
+                <a:solidFill>
+                  <a:schemeClr val="dk1"/>
+                </a:solidFill>
+                <a:latin typeface="Proxima Nova"/>
+                <a:ea typeface="Proxima Nova"/>
+                <a:cs typeface="Proxima Nova"/>
+                <a:sym typeface="Proxima Nova"/>
+              </a:defRPr>
+            </a:lvl7pPr>
+            <a:lvl8pPr indent="0" lvl="7" marL="0" marR="0" algn="r">
+              <a:lnSpc>
+                <a:spcPct val="100000"/>
+              </a:lnSpc>
+              <a:spcBef>
+                <a:spcPts val="0"/>
+              </a:spcBef>
+              <a:buClr>
+                <a:schemeClr val="dk1"/>
+              </a:buClr>
+              <a:buSzPts val="1000"/>
+              <a:buFont typeface="Proxima Nova"/>
+              <a:buNone/>
+              <a:defRPr b="0" sz="1000" u="none" strike="noStrike">
+                <a:solidFill>
+                  <a:schemeClr val="dk1"/>
+                </a:solidFill>
+                <a:latin typeface="Proxima Nova"/>
+                <a:ea typeface="Proxima Nova"/>
+                <a:cs typeface="Proxima Nova"/>
+                <a:sym typeface="Proxima Nova"/>
+              </a:defRPr>
+            </a:lvl8pPr>
+            <a:lvl9pPr indent="0" lvl="8" marL="0" marR="0" algn="r">
+              <a:lnSpc>
+                <a:spcPct val="100000"/>
+              </a:lnSpc>
+              <a:spcBef>
+                <a:spcPts val="0"/>
+              </a:spcBef>
+              <a:buClr>
+                <a:schemeClr val="dk1"/>
+              </a:buClr>
+              <a:buSzPts val="1000"/>
+              <a:buFont typeface="Proxima Nova"/>
+              <a:buNone/>
+              <a:defRPr b="0" sz="1000" u="none" strike="noStrike">
+                <a:solidFill>
+                  <a:schemeClr val="dk1"/>
+                </a:solidFill>
+                <a:latin typeface="Proxima Nova"/>
+                <a:ea typeface="Proxima Nova"/>
+                <a:cs typeface="Proxima Nova"/>
+                <a:sym typeface="Proxima Nova"/>
+              </a:defRPr>
+            </a:lvl9pPr>
+          </a:lstStyle>
+          <a:p>
+            <a:pPr indent="0" lvl="0" marL="0" rtl="0" algn="r">
+              <a:spcBef>
+                <a:spcPts val="0"/>
+              </a:spcBef>
+              <a:spcAft>
+                <a:spcPts val="0"/>
+              </a:spcAft>
+              <a:buNone/>
+            </a:pPr>
+            <a:fld id="{00000000-1234-1234-1234-123412341234}" type="slidenum">
+              <a:rPr lang="en"/>
+              <a:t>‹#›</a:t>
+            </a:fld>
+            <a:endParaRPr>
+              <a:solidFill>
+                <a:srgbClr val="000000"/>
+              </a:solidFill>
+              <a:latin typeface="Times New Roman"/>
+              <a:ea typeface="Times New Roman"/>
+              <a:cs typeface="Times New Roman"/>
+              <a:sym typeface="Times New Roman"/>
+            </a:endParaRPr>
+          </a:p>
+        </p:txBody>
+      </p:sp>
+    </p:spTree>
+  </p:cSld>
+  <p:clrMapOvr>
+    <a:masterClrMapping/>
+  </p:clrMapOvr>
+</p:sldLayout>
+</file>
+
+<file path=ppt/slideLayouts/slideLayout22.xml><?xml version="1.0" encoding="utf-8"?>
+<p:sldLayout xmlns:a="http://schemas.openxmlformats.org/drawingml/2006/main" xmlns:r="http://schemas.openxmlformats.org/officeDocument/2006/relationships" xmlns:mc="http://schemas.openxmlformats.org/markup-compatibility/2006" xmlns:mv="urn:schemas-microsoft-com:mac:vml" xmlns:p="http://schemas.openxmlformats.org/presentationml/2006/main" xmlns:c="http://schemas.openxmlformats.org/drawingml/2006/chart" xmlns:dgm="http://schemas.openxmlformats.org/drawingml/2006/diagram" xmlns:o="urn:schemas-microsoft-com:office:office" xmlns:v="urn:schemas-microsoft-com:vml" xmlns:pvml="urn:schemas-microsoft-com:office:powerpoint" xmlns:com="http://schemas.openxmlformats.org/drawingml/2006/compatibility" xmlns:p14="http://schemas.microsoft.com/office/powerpoint/2010/main" xmlns:p15="http://schemas.microsoft.com/office/powerpoint/2012/main" xmlns:ahyp="http://schemas.microsoft.com/office/drawing/2018/hyperlinkcolor" matchingName="SECTION_TITLE_AND_DESCRIPTION">
+  <p:cSld name="SECTION_TITLE_AND_DESCRIPTION">
+    <p:bg>
+      <p:bgPr>
+        <a:solidFill>
+          <a:schemeClr val="lt1"/>
+        </a:solidFill>
+      </p:bgPr>
+    </p:bg>
+    <p:spTree>
+      <p:nvGrpSpPr>
+        <p:cNvPr id="98" name="Shape 98"/>
+        <p:cNvGrpSpPr/>
+        <p:nvPr/>
+      </p:nvGrpSpPr>
+      <p:grpSpPr>
+        <a:xfrm>
+          <a:off x="0" y="0"/>
+          <a:ext cx="0" cy="0"/>
+          <a:chOff x="0" y="0"/>
+          <a:chExt cx="0" cy="0"/>
+        </a:xfrm>
+      </p:grpSpPr>
+      <p:sp>
+        <p:nvSpPr>
+          <p:cNvPr id="99" name="Google Shape;99;p24"/>
           <p:cNvSpPr/>
           <p:nvPr/>
         </p:nvSpPr>
@@ -8500,7 +9396,7 @@
       </p:sp>
       <p:cxnSp>
         <p:nvCxnSpPr>
-          <p:cNvPr id="95" name="Google Shape;95;p23"/>
+          <p:cNvPr id="100" name="Google Shape;100;p24"/>
           <p:cNvCxnSpPr/>
           <p:nvPr/>
         </p:nvCxnSpPr>
@@ -8526,7 +9422,7 @@
       </p:cxnSp>
       <p:sp>
         <p:nvSpPr>
-          <p:cNvPr id="96" name="Google Shape;96;p23"/>
+          <p:cNvPr id="101" name="Google Shape;101;p24"/>
           <p:cNvSpPr txBox="1"/>
           <p:nvPr>
             <p:ph type="title"/>
@@ -8655,7 +9551,7 @@
       </p:sp>
       <p:sp>
         <p:nvSpPr>
-          <p:cNvPr id="97" name="Google Shape;97;p23"/>
+          <p:cNvPr id="102" name="Google Shape;102;p24"/>
           <p:cNvSpPr txBox="1"/>
           <p:nvPr>
             <p:ph idx="1" type="body"/>
@@ -8784,7 +9680,7 @@
       </p:sp>
       <p:sp>
         <p:nvSpPr>
-          <p:cNvPr id="98" name="Google Shape;98;p23"/>
+          <p:cNvPr id="103" name="Google Shape;103;p24"/>
           <p:cNvSpPr txBox="1"/>
           <p:nvPr>
             <p:ph idx="12" type="sldNum"/>
@@ -9050,7 +9946,7 @@
 </p:sldLayout>
 </file>
 
-<file path=ppt/slideLayouts/slideLayout22.xml><?xml version="1.0" encoding="utf-8"?>
+<file path=ppt/slideLayouts/slideLayout23.xml><?xml version="1.0" encoding="utf-8"?>
 <p:sldLayout xmlns:a="http://schemas.openxmlformats.org/drawingml/2006/main" xmlns:r="http://schemas.openxmlformats.org/officeDocument/2006/relationships" xmlns:mc="http://schemas.openxmlformats.org/markup-compatibility/2006" xmlns:mv="urn:schemas-microsoft-com:mac:vml" xmlns:p="http://schemas.openxmlformats.org/presentationml/2006/main" xmlns:c="http://schemas.openxmlformats.org/drawingml/2006/chart" xmlns:dgm="http://schemas.openxmlformats.org/drawingml/2006/diagram" xmlns:o="urn:schemas-microsoft-com:office:office" xmlns:v="urn:schemas-microsoft-com:vml" xmlns:pvml="urn:schemas-microsoft-com:office:powerpoint" xmlns:com="http://schemas.openxmlformats.org/drawingml/2006/compatibility" xmlns:p14="http://schemas.microsoft.com/office/powerpoint/2010/main" xmlns:p15="http://schemas.microsoft.com/office/powerpoint/2012/main" xmlns:ahyp="http://schemas.microsoft.com/office/drawing/2018/hyperlinkcolor" matchingName="CAPTION_ONLY">
   <p:cSld name="CAPTION_ONLY">
     <p:bg>
@@ -9062,7 +9958,7 @@
     </p:bg>
     <p:spTree>
       <p:nvGrpSpPr>
-        <p:cNvPr id="99" name="Shape 99"/>
+        <p:cNvPr id="104" name="Shape 104"/>
         <p:cNvGrpSpPr/>
         <p:nvPr/>
       </p:nvGrpSpPr>
@@ -9076,7 +9972,7 @@
       </p:grpSpPr>
       <p:sp>
         <p:nvSpPr>
-          <p:cNvPr id="100" name="Google Shape;100;p24"/>
+          <p:cNvPr id="105" name="Google Shape;105;p25"/>
           <p:cNvSpPr txBox="1"/>
           <p:nvPr>
             <p:ph idx="1" type="body"/>
@@ -9117,7 +10013,7 @@
       </p:sp>
       <p:sp>
         <p:nvSpPr>
-          <p:cNvPr id="101" name="Google Shape;101;p24"/>
+          <p:cNvPr id="106" name="Google Shape;106;p25"/>
           <p:cNvSpPr txBox="1"/>
           <p:nvPr>
             <p:ph idx="12" type="sldNum"/>
@@ -12575,6 +13471,7 @@
     <p:sldLayoutId id="2147483656" r:id="rId9"/>
     <p:sldLayoutId id="2147483657" r:id="rId10"/>
     <p:sldLayoutId id="2147483658" r:id="rId11"/>
+    <p:sldLayoutId id="2147483659" r:id="rId12"/>
   </p:sldLayoutIdLst>
   <p:hf dt="0" ftr="0" hdr="0" sldNum="0"/>
   <p:txStyles>
@@ -13274,7 +14171,7 @@
   <p:cSld>
     <p:spTree>
       <p:nvGrpSpPr>
-        <p:cNvPr id="55" name="Shape 55"/>
+        <p:cNvPr id="60" name="Shape 60"/>
         <p:cNvGrpSpPr/>
         <p:nvPr/>
       </p:nvGrpSpPr>
@@ -13290,17 +14187,17 @@
   </p:cSld>
   <p:clrMap accent1="accent1" accent2="accent2" accent3="accent3" accent4="accent4" accent5="accent5" accent6="accent6" bg1="lt1" bg2="dk2" tx1="dk1" tx2="lt2" folHlink="folHlink" hlink="hlink"/>
   <p:sldLayoutIdLst>
-    <p:sldLayoutId id="2147483659" r:id="rId1"/>
-    <p:sldLayoutId id="2147483660" r:id="rId2"/>
-    <p:sldLayoutId id="2147483661" r:id="rId3"/>
-    <p:sldLayoutId id="2147483662" r:id="rId4"/>
-    <p:sldLayoutId id="2147483663" r:id="rId5"/>
-    <p:sldLayoutId id="2147483664" r:id="rId6"/>
-    <p:sldLayoutId id="2147483665" r:id="rId7"/>
-    <p:sldLayoutId id="2147483666" r:id="rId8"/>
-    <p:sldLayoutId id="2147483667" r:id="rId9"/>
-    <p:sldLayoutId id="2147483668" r:id="rId10"/>
-    <p:sldLayoutId id="2147483669" r:id="rId11"/>
+    <p:sldLayoutId id="2147483660" r:id="rId1"/>
+    <p:sldLayoutId id="2147483661" r:id="rId2"/>
+    <p:sldLayoutId id="2147483662" r:id="rId3"/>
+    <p:sldLayoutId id="2147483663" r:id="rId4"/>
+    <p:sldLayoutId id="2147483664" r:id="rId5"/>
+    <p:sldLayoutId id="2147483665" r:id="rId6"/>
+    <p:sldLayoutId id="2147483666" r:id="rId7"/>
+    <p:sldLayoutId id="2147483667" r:id="rId8"/>
+    <p:sldLayoutId id="2147483668" r:id="rId9"/>
+    <p:sldLayoutId id="2147483669" r:id="rId10"/>
+    <p:sldLayoutId id="2147483670" r:id="rId11"/>
   </p:sldLayoutIdLst>
   <p:hf dt="0" ftr="0" hdr="0" sldNum="0"/>
   <p:txStyles>
@@ -14000,7 +14897,7 @@
   <p:cSld>
     <p:spTree>
       <p:nvGrpSpPr>
-        <p:cNvPr id="105" name="Shape 105"/>
+        <p:cNvPr id="110" name="Shape 110"/>
         <p:cNvGrpSpPr/>
         <p:nvPr/>
       </p:nvGrpSpPr>
@@ -14014,7 +14911,7 @@
       </p:grpSpPr>
       <p:sp>
         <p:nvSpPr>
-          <p:cNvPr id="106" name="Google Shape;106;p25"/>
+          <p:cNvPr id="111" name="Google Shape;111;p26"/>
           <p:cNvSpPr txBox="1"/>
           <p:nvPr>
             <p:ph type="ctrTitle"/>
@@ -14054,7 +14951,7 @@
       </p:sp>
       <p:sp>
         <p:nvSpPr>
-          <p:cNvPr id="107" name="Google Shape;107;p25"/>
+          <p:cNvPr id="112" name="Google Shape;112;p26"/>
           <p:cNvSpPr txBox="1"/>
           <p:nvPr>
             <p:ph idx="1" type="subTitle"/>
@@ -14105,7 +15002,7 @@
   <p:cSld>
     <p:spTree>
       <p:nvGrpSpPr>
-        <p:cNvPr id="173" name="Shape 173"/>
+        <p:cNvPr id="177" name="Shape 177"/>
         <p:cNvGrpSpPr/>
         <p:nvPr/>
       </p:nvGrpSpPr>
@@ -14119,7 +15016,7 @@
       </p:grpSpPr>
       <p:sp>
         <p:nvSpPr>
-          <p:cNvPr id="174" name="Google Shape;174;p34"/>
+          <p:cNvPr id="178" name="Google Shape;178;p35"/>
           <p:cNvSpPr txBox="1"/>
           <p:nvPr>
             <p:ph type="title"/>
@@ -14159,7 +15056,424 @@
       </p:sp>
       <p:pic>
         <p:nvPicPr>
-          <p:cNvPr id="175" name="Google Shape;175;p34"/>
+          <p:cNvPr id="179" name="Google Shape;179;p35"/>
+          <p:cNvPicPr preferRelativeResize="0"/>
+          <p:nvPr/>
+        </p:nvPicPr>
+        <p:blipFill>
+          <a:blip r:embed="rId3">
+            <a:alphaModFix/>
+          </a:blip>
+          <a:stretch>
+            <a:fillRect/>
+          </a:stretch>
+        </p:blipFill>
+        <p:spPr>
+          <a:xfrm>
+            <a:off x="4630200" y="696600"/>
+            <a:ext cx="3301574" cy="3301574"/>
+          </a:xfrm>
+          <a:prstGeom prst="rect">
+            <a:avLst/>
+          </a:prstGeom>
+          <a:noFill/>
+          <a:ln>
+            <a:noFill/>
+          </a:ln>
+        </p:spPr>
+      </p:pic>
+      <p:sp>
+        <p:nvSpPr>
+          <p:cNvPr id="180" name="Google Shape;180;p35"/>
+          <p:cNvSpPr txBox="1"/>
+          <p:nvPr/>
+        </p:nvSpPr>
+        <p:spPr>
+          <a:xfrm rot="-1459944">
+            <a:off x="6402738" y="2197131"/>
+            <a:ext cx="1759824" cy="461606"/>
+          </a:xfrm>
+          <a:prstGeom prst="rect">
+            <a:avLst/>
+          </a:prstGeom>
+          <a:noFill/>
+          <a:ln>
+            <a:noFill/>
+          </a:ln>
+        </p:spPr>
+        <p:txBody>
+          <a:bodyPr anchorCtr="0" anchor="t" bIns="91425" lIns="91425" spcFirstLastPara="1" rIns="91425" wrap="square" tIns="91425">
+            <a:spAutoFit/>
+          </a:bodyPr>
+          <a:lstStyle/>
+          <a:p>
+            <a:pPr indent="0" lvl="0" marL="0" rtl="0" algn="l">
+              <a:spcBef>
+                <a:spcPts val="0"/>
+              </a:spcBef>
+              <a:spcAft>
+                <a:spcPts val="0"/>
+              </a:spcAft>
+              <a:buNone/>
+            </a:pPr>
+            <a:r>
+              <a:rPr b="1" lang="en" sz="1800">
+                <a:solidFill>
+                  <a:srgbClr val="FFFFFF"/>
+                </a:solidFill>
+                <a:latin typeface="Proxima Nova"/>
+                <a:ea typeface="Proxima Nova"/>
+                <a:cs typeface="Proxima Nova"/>
+                <a:sym typeface="Proxima Nova"/>
+              </a:rPr>
+              <a:t>LED’s</a:t>
+            </a:r>
+            <a:endParaRPr b="1" sz="1800">
+              <a:solidFill>
+                <a:srgbClr val="FFFFFF"/>
+              </a:solidFill>
+              <a:latin typeface="Proxima Nova"/>
+              <a:ea typeface="Proxima Nova"/>
+              <a:cs typeface="Proxima Nova"/>
+              <a:sym typeface="Proxima Nova"/>
+            </a:endParaRPr>
+          </a:p>
+        </p:txBody>
+      </p:sp>
+      <p:sp>
+        <p:nvSpPr>
+          <p:cNvPr id="181" name="Google Shape;181;p35"/>
+          <p:cNvSpPr txBox="1"/>
+          <p:nvPr/>
+        </p:nvSpPr>
+        <p:spPr>
+          <a:xfrm>
+            <a:off x="398075" y="1016125"/>
+            <a:ext cx="4232100" cy="3232500"/>
+          </a:xfrm>
+          <a:prstGeom prst="rect">
+            <a:avLst/>
+          </a:prstGeom>
+          <a:noFill/>
+          <a:ln>
+            <a:noFill/>
+          </a:ln>
+        </p:spPr>
+        <p:txBody>
+          <a:bodyPr anchorCtr="0" anchor="t" bIns="91425" lIns="91425" spcFirstLastPara="1" rIns="91425" wrap="square" tIns="91425">
+            <a:spAutoFit/>
+          </a:bodyPr>
+          <a:lstStyle/>
+          <a:p>
+            <a:pPr indent="-342900" lvl="0" marL="457200" rtl="0" algn="l">
+              <a:spcBef>
+                <a:spcPts val="0"/>
+              </a:spcBef>
+              <a:spcAft>
+                <a:spcPts val="0"/>
+              </a:spcAft>
+              <a:buSzPts val="1800"/>
+              <a:buFont typeface="Proxima Nova"/>
+              <a:buChar char="●"/>
+            </a:pPr>
+            <a:r>
+              <a:rPr lang="en" sz="1800">
+                <a:latin typeface="Proxima Nova"/>
+                <a:ea typeface="Proxima Nova"/>
+                <a:cs typeface="Proxima Nova"/>
+                <a:sym typeface="Proxima Nova"/>
+              </a:rPr>
+              <a:t>Libraries are collections of programs written by others, that make things easier to duplicate.</a:t>
+            </a:r>
+            <a:endParaRPr sz="1800">
+              <a:latin typeface="Proxima Nova"/>
+              <a:ea typeface="Proxima Nova"/>
+              <a:cs typeface="Proxima Nova"/>
+              <a:sym typeface="Proxima Nova"/>
+            </a:endParaRPr>
+          </a:p>
+          <a:p>
+            <a:pPr indent="0" lvl="0" marL="457200" rtl="0" algn="l">
+              <a:spcBef>
+                <a:spcPts val="0"/>
+              </a:spcBef>
+              <a:spcAft>
+                <a:spcPts val="0"/>
+              </a:spcAft>
+              <a:buNone/>
+            </a:pPr>
+            <a:r>
+              <a:t/>
+            </a:r>
+            <a:endParaRPr sz="1800">
+              <a:latin typeface="Proxima Nova"/>
+              <a:ea typeface="Proxima Nova"/>
+              <a:cs typeface="Proxima Nova"/>
+              <a:sym typeface="Proxima Nova"/>
+            </a:endParaRPr>
+          </a:p>
+          <a:p>
+            <a:pPr indent="-342900" lvl="0" marL="457200" rtl="0" algn="l">
+              <a:spcBef>
+                <a:spcPts val="0"/>
+              </a:spcBef>
+              <a:spcAft>
+                <a:spcPts val="0"/>
+              </a:spcAft>
+              <a:buSzPts val="1800"/>
+              <a:buFont typeface="Proxima Nova"/>
+              <a:buChar char="●"/>
+            </a:pPr>
+            <a:r>
+              <a:rPr lang="en" sz="1800">
+                <a:latin typeface="Proxima Nova"/>
+                <a:ea typeface="Proxima Nova"/>
+                <a:cs typeface="Proxima Nova"/>
+                <a:sym typeface="Proxima Nova"/>
+              </a:rPr>
+              <a:t>A library can hold either one or many routines that we call by name inside them.</a:t>
+            </a:r>
+            <a:endParaRPr sz="1800">
+              <a:latin typeface="Proxima Nova"/>
+              <a:ea typeface="Proxima Nova"/>
+              <a:cs typeface="Proxima Nova"/>
+              <a:sym typeface="Proxima Nova"/>
+            </a:endParaRPr>
+          </a:p>
+          <a:p>
+            <a:pPr indent="0" lvl="0" marL="457200" rtl="0" algn="l">
+              <a:spcBef>
+                <a:spcPts val="0"/>
+              </a:spcBef>
+              <a:spcAft>
+                <a:spcPts val="0"/>
+              </a:spcAft>
+              <a:buNone/>
+            </a:pPr>
+            <a:r>
+              <a:t/>
+            </a:r>
+            <a:endParaRPr sz="1800">
+              <a:latin typeface="Proxima Nova"/>
+              <a:ea typeface="Proxima Nova"/>
+              <a:cs typeface="Proxima Nova"/>
+              <a:sym typeface="Proxima Nova"/>
+            </a:endParaRPr>
+          </a:p>
+          <a:p>
+            <a:pPr indent="-342900" lvl="0" marL="457200" rtl="0" algn="l">
+              <a:spcBef>
+                <a:spcPts val="0"/>
+              </a:spcBef>
+              <a:spcAft>
+                <a:spcPts val="0"/>
+              </a:spcAft>
+              <a:buSzPts val="1800"/>
+              <a:buFont typeface="Proxima Nova"/>
+              <a:buChar char="●"/>
+            </a:pPr>
+            <a:r>
+              <a:rPr lang="en" sz="1800">
+                <a:latin typeface="Proxima Nova"/>
+                <a:ea typeface="Proxima Nova"/>
+                <a:cs typeface="Proxima Nova"/>
+                <a:sym typeface="Proxima Nova"/>
+              </a:rPr>
+              <a:t>When we want to use a library, we need to “check it out” and bring it into our program.</a:t>
+            </a:r>
+            <a:endParaRPr sz="1800">
+              <a:latin typeface="Proxima Nova"/>
+              <a:ea typeface="Proxima Nova"/>
+              <a:cs typeface="Proxima Nova"/>
+              <a:sym typeface="Proxima Nova"/>
+            </a:endParaRPr>
+          </a:p>
+        </p:txBody>
+      </p:sp>
+      <p:sp>
+        <p:nvSpPr>
+          <p:cNvPr id="182" name="Google Shape;182;p35"/>
+          <p:cNvSpPr txBox="1"/>
+          <p:nvPr/>
+        </p:nvSpPr>
+        <p:spPr>
+          <a:xfrm rot="-5400000">
+            <a:off x="4924625" y="2401524"/>
+            <a:ext cx="1375500" cy="461700"/>
+          </a:xfrm>
+          <a:prstGeom prst="rect">
+            <a:avLst/>
+          </a:prstGeom>
+          <a:noFill/>
+          <a:ln>
+            <a:noFill/>
+          </a:ln>
+        </p:spPr>
+        <p:txBody>
+          <a:bodyPr anchorCtr="0" anchor="t" bIns="91425" lIns="91425" spcFirstLastPara="1" rIns="91425" wrap="square" tIns="91425">
+            <a:spAutoFit/>
+          </a:bodyPr>
+          <a:lstStyle/>
+          <a:p>
+            <a:pPr indent="0" lvl="0" marL="0" rtl="0" algn="l">
+              <a:spcBef>
+                <a:spcPts val="0"/>
+              </a:spcBef>
+              <a:spcAft>
+                <a:spcPts val="0"/>
+              </a:spcAft>
+              <a:buNone/>
+            </a:pPr>
+            <a:r>
+              <a:rPr b="1" lang="en" sz="1800">
+                <a:solidFill>
+                  <a:srgbClr val="FFFFFF"/>
+                </a:solidFill>
+                <a:latin typeface="Proxima Nova"/>
+                <a:ea typeface="Proxima Nova"/>
+                <a:cs typeface="Proxima Nova"/>
+                <a:sym typeface="Proxima Nova"/>
+              </a:rPr>
+              <a:t>Buttons</a:t>
+            </a:r>
+            <a:endParaRPr b="1" sz="1800">
+              <a:solidFill>
+                <a:srgbClr val="FFFFFF"/>
+              </a:solidFill>
+              <a:latin typeface="Proxima Nova"/>
+              <a:ea typeface="Proxima Nova"/>
+              <a:cs typeface="Proxima Nova"/>
+              <a:sym typeface="Proxima Nova"/>
+            </a:endParaRPr>
+          </a:p>
+        </p:txBody>
+      </p:sp>
+      <p:sp>
+        <p:nvSpPr>
+          <p:cNvPr id="183" name="Google Shape;183;p35"/>
+          <p:cNvSpPr txBox="1"/>
+          <p:nvPr/>
+        </p:nvSpPr>
+        <p:spPr>
+          <a:xfrm rot="-5400000">
+            <a:off x="4462925" y="1998724"/>
+            <a:ext cx="1375500" cy="461700"/>
+          </a:xfrm>
+          <a:prstGeom prst="rect">
+            <a:avLst/>
+          </a:prstGeom>
+          <a:noFill/>
+          <a:ln>
+            <a:noFill/>
+          </a:ln>
+        </p:spPr>
+        <p:txBody>
+          <a:bodyPr anchorCtr="0" anchor="t" bIns="91425" lIns="91425" spcFirstLastPara="1" rIns="91425" wrap="square" tIns="91425">
+            <a:spAutoFit/>
+          </a:bodyPr>
+          <a:lstStyle/>
+          <a:p>
+            <a:pPr indent="0" lvl="0" marL="0" rtl="0" algn="l">
+              <a:spcBef>
+                <a:spcPts val="0"/>
+              </a:spcBef>
+              <a:spcAft>
+                <a:spcPts val="0"/>
+              </a:spcAft>
+              <a:buNone/>
+            </a:pPr>
+            <a:r>
+              <a:rPr b="1" lang="en" sz="1800">
+                <a:solidFill>
+                  <a:srgbClr val="FFFFFF"/>
+                </a:solidFill>
+                <a:latin typeface="Proxima Nova"/>
+                <a:ea typeface="Proxima Nova"/>
+                <a:cs typeface="Proxima Nova"/>
+                <a:sym typeface="Proxima Nova"/>
+              </a:rPr>
+              <a:t>Display</a:t>
+            </a:r>
+            <a:endParaRPr b="1" sz="1800">
+              <a:solidFill>
+                <a:srgbClr val="FFFFFF"/>
+              </a:solidFill>
+              <a:latin typeface="Proxima Nova"/>
+              <a:ea typeface="Proxima Nova"/>
+              <a:cs typeface="Proxima Nova"/>
+              <a:sym typeface="Proxima Nova"/>
+            </a:endParaRPr>
+          </a:p>
+        </p:txBody>
+      </p:sp>
+    </p:spTree>
+  </p:cSld>
+  <p:clrMapOvr>
+    <a:masterClrMapping/>
+  </p:clrMapOvr>
+</p:sld>
+</file>
+
+<file path=ppt/slides/slide11.xml><?xml version="1.0" encoding="utf-8"?>
+<p:sld xmlns:a="http://schemas.openxmlformats.org/drawingml/2006/main" xmlns:r="http://schemas.openxmlformats.org/officeDocument/2006/relationships" xmlns:mc="http://schemas.openxmlformats.org/markup-compatibility/2006" xmlns:mv="urn:schemas-microsoft-com:mac:vml" xmlns:p="http://schemas.openxmlformats.org/presentationml/2006/main" xmlns:c="http://schemas.openxmlformats.org/drawingml/2006/chart" xmlns:dgm="http://schemas.openxmlformats.org/drawingml/2006/diagram" xmlns:o="urn:schemas-microsoft-com:office:office" xmlns:v="urn:schemas-microsoft-com:vml" xmlns:pvml="urn:schemas-microsoft-com:office:powerpoint" xmlns:com="http://schemas.openxmlformats.org/drawingml/2006/compatibility" xmlns:p14="http://schemas.microsoft.com/office/powerpoint/2010/main" xmlns:p15="http://schemas.microsoft.com/office/powerpoint/2012/main" xmlns:ahyp="http://schemas.microsoft.com/office/drawing/2018/hyperlinkcolor">
+  <p:cSld>
+    <p:spTree>
+      <p:nvGrpSpPr>
+        <p:cNvPr id="187" name="Shape 187"/>
+        <p:cNvGrpSpPr/>
+        <p:nvPr/>
+      </p:nvGrpSpPr>
+      <p:grpSpPr>
+        <a:xfrm>
+          <a:off x="0" y="0"/>
+          <a:ext cx="0" cy="0"/>
+          <a:chOff x="0" y="0"/>
+          <a:chExt cx="0" cy="0"/>
+        </a:xfrm>
+      </p:grpSpPr>
+      <p:sp>
+        <p:nvSpPr>
+          <p:cNvPr id="188" name="Google Shape;188;p36"/>
+          <p:cNvSpPr txBox="1"/>
+          <p:nvPr>
+            <p:ph type="title"/>
+          </p:nvPr>
+        </p:nvSpPr>
+        <p:spPr>
+          <a:xfrm>
+            <a:off x="0" y="0"/>
+            <a:ext cx="8520600" cy="572700"/>
+          </a:xfrm>
+          <a:prstGeom prst="rect">
+            <a:avLst/>
+          </a:prstGeom>
+        </p:spPr>
+        <p:txBody>
+          <a:bodyPr anchorCtr="0" anchor="t" bIns="91425" lIns="91425" spcFirstLastPara="1" rIns="91425" wrap="square" tIns="91425">
+            <a:noAutofit/>
+          </a:bodyPr>
+          <a:lstStyle/>
+          <a:p>
+            <a:pPr indent="0" lvl="0" marL="0" rtl="0" algn="l">
+              <a:spcBef>
+                <a:spcPts val="0"/>
+              </a:spcBef>
+              <a:spcAft>
+                <a:spcPts val="0"/>
+              </a:spcAft>
+              <a:buNone/>
+            </a:pPr>
+            <a:r>
+              <a:rPr lang="en"/>
+              <a:t>Python Basics in the REPL- Libraries</a:t>
+            </a:r>
+            <a:endParaRPr/>
+          </a:p>
+        </p:txBody>
+      </p:sp>
+      <p:pic>
+        <p:nvPicPr>
+          <p:cNvPr id="189" name="Google Shape;189;p36"/>
           <p:cNvPicPr preferRelativeResize="0"/>
           <p:nvPr/>
         </p:nvPicPr>
@@ -14187,7 +15501,7 @@
       </p:pic>
       <p:sp>
         <p:nvSpPr>
-          <p:cNvPr id="176" name="Google Shape;176;p34"/>
+          <p:cNvPr id="190" name="Google Shape;190;p36"/>
           <p:cNvSpPr txBox="1"/>
           <p:nvPr/>
         </p:nvSpPr>
@@ -14245,7 +15559,7 @@
       </p:sp>
       <p:sp>
         <p:nvSpPr>
-          <p:cNvPr id="177" name="Google Shape;177;p34"/>
+          <p:cNvPr id="191" name="Google Shape;191;p36"/>
           <p:cNvSpPr txBox="1"/>
           <p:nvPr/>
         </p:nvSpPr>
@@ -14323,7 +15637,7 @@
       </p:sp>
       <p:sp>
         <p:nvSpPr>
-          <p:cNvPr id="178" name="Google Shape;178;p34"/>
+          <p:cNvPr id="192" name="Google Shape;192;p36"/>
           <p:cNvSpPr txBox="1"/>
           <p:nvPr/>
         </p:nvSpPr>
@@ -14381,7 +15695,7 @@
       </p:sp>
       <p:sp>
         <p:nvSpPr>
-          <p:cNvPr id="179" name="Google Shape;179;p34"/>
+          <p:cNvPr id="193" name="Google Shape;193;p36"/>
           <p:cNvSpPr txBox="1"/>
           <p:nvPr/>
         </p:nvSpPr>
@@ -14439,7 +15753,7 @@
       </p:sp>
       <p:sp>
         <p:nvSpPr>
-          <p:cNvPr id="180" name="Google Shape;180;p34"/>
+          <p:cNvPr id="194" name="Google Shape;194;p36"/>
           <p:cNvSpPr txBox="1"/>
           <p:nvPr/>
         </p:nvSpPr>
@@ -14497,7 +15811,7 @@
       </p:sp>
       <p:sp>
         <p:nvSpPr>
-          <p:cNvPr id="181" name="Google Shape;181;p34"/>
+          <p:cNvPr id="195" name="Google Shape;195;p36"/>
           <p:cNvSpPr txBox="1"/>
           <p:nvPr/>
         </p:nvSpPr>
@@ -14575,7 +15889,7 @@
       </p:sp>
       <p:sp>
         <p:nvSpPr>
-          <p:cNvPr id="182" name="Google Shape;182;p34"/>
+          <p:cNvPr id="196" name="Google Shape;196;p36"/>
           <p:cNvSpPr txBox="1"/>
           <p:nvPr/>
         </p:nvSpPr>
@@ -14659,12 +15973,19 @@
 </p:sld>
 </file>
 
-<file path=ppt/slides/slide11.xml><?xml version="1.0" encoding="utf-8"?>
+<file path=ppt/slides/slide12.xml><?xml version="1.0" encoding="utf-8"?>
 <p:sld xmlns:a="http://schemas.openxmlformats.org/drawingml/2006/main" xmlns:r="http://schemas.openxmlformats.org/officeDocument/2006/relationships" xmlns:mc="http://schemas.openxmlformats.org/markup-compatibility/2006" xmlns:mv="urn:schemas-microsoft-com:mac:vml" xmlns:p="http://schemas.openxmlformats.org/presentationml/2006/main" xmlns:c="http://schemas.openxmlformats.org/drawingml/2006/chart" xmlns:dgm="http://schemas.openxmlformats.org/drawingml/2006/diagram" xmlns:o="urn:schemas-microsoft-com:office:office" xmlns:v="urn:schemas-microsoft-com:vml" xmlns:pvml="urn:schemas-microsoft-com:office:powerpoint" xmlns:com="http://schemas.openxmlformats.org/drawingml/2006/compatibility" xmlns:p14="http://schemas.microsoft.com/office/powerpoint/2010/main" xmlns:p15="http://schemas.microsoft.com/office/powerpoint/2012/main" xmlns:ahyp="http://schemas.microsoft.com/office/drawing/2018/hyperlinkcolor">
   <p:cSld>
+    <p:bg>
+      <p:bgPr>
+        <a:solidFill>
+          <a:srgbClr val="134F5C"/>
+        </a:solidFill>
+      </p:bgPr>
+    </p:bg>
     <p:spTree>
       <p:nvGrpSpPr>
-        <p:cNvPr id="186" name="Shape 186"/>
+        <p:cNvPr id="201" name="Shape 201"/>
         <p:cNvGrpSpPr/>
         <p:nvPr/>
       </p:nvGrpSpPr>
@@ -14678,7 +15999,548 @@
       </p:grpSpPr>
       <p:sp>
         <p:nvSpPr>
-          <p:cNvPr id="187" name="Google Shape;187;p35"/>
+          <p:cNvPr id="202" name="Google Shape;202;p37"/>
+          <p:cNvSpPr txBox="1"/>
+          <p:nvPr>
+            <p:ph type="title"/>
+          </p:nvPr>
+        </p:nvSpPr>
+        <p:spPr>
+          <a:xfrm>
+            <a:off x="5" y="0"/>
+            <a:ext cx="8122800" cy="778200"/>
+          </a:xfrm>
+          <a:prstGeom prst="rect">
+            <a:avLst/>
+          </a:prstGeom>
+        </p:spPr>
+        <p:txBody>
+          <a:bodyPr anchorCtr="0" anchor="b" bIns="91425" lIns="91425" spcFirstLastPara="1" rIns="91425" wrap="square" tIns="91425">
+            <a:noAutofit/>
+          </a:bodyPr>
+          <a:lstStyle/>
+          <a:p>
+            <a:pPr indent="0" lvl="0" marL="0" rtl="0" algn="l">
+              <a:spcBef>
+                <a:spcPts val="0"/>
+              </a:spcBef>
+              <a:spcAft>
+                <a:spcPts val="0"/>
+              </a:spcAft>
+              <a:buNone/>
+            </a:pPr>
+            <a:r>
+              <a:rPr lang="en" sz="2400">
+                <a:solidFill>
+                  <a:srgbClr val="FFFFFF"/>
+                </a:solidFill>
+              </a:rPr>
+              <a:t>Images - import microbit, dir(Image)</a:t>
+            </a:r>
+            <a:endParaRPr sz="2400">
+              <a:solidFill>
+                <a:srgbClr val="FFFFFF"/>
+              </a:solidFill>
+            </a:endParaRPr>
+          </a:p>
+        </p:txBody>
+      </p:sp>
+      <p:sp>
+        <p:nvSpPr>
+          <p:cNvPr id="203" name="Google Shape;203;p37"/>
+          <p:cNvSpPr txBox="1"/>
+          <p:nvPr/>
+        </p:nvSpPr>
+        <p:spPr>
+          <a:xfrm>
+            <a:off x="0" y="10077050"/>
+            <a:ext cx="3000000" cy="400200"/>
+          </a:xfrm>
+          <a:prstGeom prst="rect">
+            <a:avLst/>
+          </a:prstGeom>
+          <a:noFill/>
+          <a:ln>
+            <a:noFill/>
+          </a:ln>
+        </p:spPr>
+        <p:txBody>
+          <a:bodyPr anchorCtr="0" anchor="t" bIns="91425" lIns="91425" spcFirstLastPara="1" rIns="91425" wrap="square" tIns="91425">
+            <a:spAutoFit/>
+          </a:bodyPr>
+          <a:lstStyle/>
+          <a:p>
+            <a:pPr indent="0" lvl="0" marL="0" rtl="0" algn="l">
+              <a:spcBef>
+                <a:spcPts val="0"/>
+              </a:spcBef>
+              <a:spcAft>
+                <a:spcPts val="0"/>
+              </a:spcAft>
+              <a:buNone/>
+            </a:pPr>
+            <a:r>
+              <a:t/>
+            </a:r>
+            <a:endParaRPr/>
+          </a:p>
+        </p:txBody>
+      </p:sp>
+      <p:sp>
+        <p:nvSpPr>
+          <p:cNvPr id="204" name="Google Shape;204;p37"/>
+          <p:cNvSpPr txBox="1"/>
+          <p:nvPr/>
+        </p:nvSpPr>
+        <p:spPr>
+          <a:xfrm>
+            <a:off x="0" y="834675"/>
+            <a:ext cx="3000000" cy="3786600"/>
+          </a:xfrm>
+          <a:prstGeom prst="rect">
+            <a:avLst/>
+          </a:prstGeom>
+          <a:noFill/>
+          <a:ln>
+            <a:noFill/>
+          </a:ln>
+        </p:spPr>
+        <p:txBody>
+          <a:bodyPr anchorCtr="0" anchor="t" bIns="91425" lIns="91425" spcFirstLastPara="1" rIns="91425" wrap="square" tIns="91425">
+            <a:spAutoFit/>
+          </a:bodyPr>
+          <a:lstStyle/>
+          <a:p>
+            <a:pPr indent="0" lvl="0" marL="0" rtl="0" algn="l">
+              <a:spcBef>
+                <a:spcPts val="0"/>
+              </a:spcBef>
+              <a:spcAft>
+                <a:spcPts val="0"/>
+              </a:spcAft>
+              <a:buNone/>
+            </a:pPr>
+            <a:r>
+              <a:rPr b="1" lang="en" sz="1800">
+                <a:solidFill>
+                  <a:srgbClr val="FFFFFF"/>
+                </a:solidFill>
+              </a:rPr>
+              <a:t>'ALL_ARROWS', 'ALL_CLOCKS', 'ANGRY', 'ARROW_E', 'ARROW_N', 'ARROW_NE', 'ARROW_NW', 'ARROW_S', 'ARROW_SE', 'ARROW_SW', 'ARROW_W', 'ASLEEP', 'BUTTERFLY', 'CHESSBOARD', 'CLOCK1', 'CLOCK10', 'CLOCK11', 'CLOCK12', '</a:t>
+            </a:r>
+            <a:endParaRPr b="1" sz="800">
+              <a:solidFill>
+                <a:srgbClr val="FFFFFF"/>
+              </a:solidFill>
+            </a:endParaRPr>
+          </a:p>
+        </p:txBody>
+      </p:sp>
+      <p:sp>
+        <p:nvSpPr>
+          <p:cNvPr id="205" name="Google Shape;205;p37"/>
+          <p:cNvSpPr txBox="1"/>
+          <p:nvPr/>
+        </p:nvSpPr>
+        <p:spPr>
+          <a:xfrm>
+            <a:off x="3073500" y="893575"/>
+            <a:ext cx="2464800" cy="5734800"/>
+          </a:xfrm>
+          <a:prstGeom prst="rect">
+            <a:avLst/>
+          </a:prstGeom>
+          <a:noFill/>
+          <a:ln>
+            <a:noFill/>
+          </a:ln>
+        </p:spPr>
+        <p:txBody>
+          <a:bodyPr anchorCtr="0" anchor="t" bIns="91425" lIns="91425" spcFirstLastPara="1" rIns="91425" wrap="square" tIns="91425">
+            <a:noAutofit/>
+          </a:bodyPr>
+          <a:lstStyle/>
+          <a:p>
+            <a:pPr indent="0" lvl="0" marL="0" rtl="0" algn="l">
+              <a:spcBef>
+                <a:spcPts val="0"/>
+              </a:spcBef>
+              <a:spcAft>
+                <a:spcPts val="0"/>
+              </a:spcAft>
+              <a:buNone/>
+            </a:pPr>
+            <a:r>
+              <a:rPr b="1" lang="en" sz="1800">
+                <a:solidFill>
+                  <a:srgbClr val="FFFFFF"/>
+                </a:solidFill>
+              </a:rPr>
+              <a:t>CLOCK2', 'CLOCK3', 'CLOCK4', CLOCK5', 'CLOCK6', CLOCK7', 'CLOCK8', CLOCK9', </a:t>
+            </a:r>
+            <a:endParaRPr b="1" sz="1800">
+              <a:solidFill>
+                <a:srgbClr val="FFFFFF"/>
+              </a:solidFill>
+            </a:endParaRPr>
+          </a:p>
+          <a:p>
+            <a:pPr indent="0" lvl="0" marL="0" rtl="0" algn="l">
+              <a:spcBef>
+                <a:spcPts val="0"/>
+              </a:spcBef>
+              <a:spcAft>
+                <a:spcPts val="0"/>
+              </a:spcAft>
+              <a:buNone/>
+            </a:pPr>
+            <a:r>
+              <a:rPr b="1" lang="en" sz="1800">
+                <a:solidFill>
+                  <a:srgbClr val="FFFFFF"/>
+                </a:solidFill>
+              </a:rPr>
+              <a:t>'CONFUSED', 'COW', 'DIAMOND', 'DIAMOND_SMALL', 'DUCK', 'FABULOUS', 'GHOST', 'GIRAFFE', 'HAPPY', 'HEART', 'HEART_SMALL', </a:t>
+            </a:r>
+            <a:endParaRPr b="1" sz="1800">
+              <a:solidFill>
+                <a:srgbClr val="FFFFFF"/>
+              </a:solidFill>
+            </a:endParaRPr>
+          </a:p>
+        </p:txBody>
+      </p:sp>
+      <p:sp>
+        <p:nvSpPr>
+          <p:cNvPr id="206" name="Google Shape;206;p37"/>
+          <p:cNvSpPr txBox="1"/>
+          <p:nvPr/>
+        </p:nvSpPr>
+        <p:spPr>
+          <a:xfrm>
+            <a:off x="5764150" y="607850"/>
+            <a:ext cx="3537000" cy="3554700"/>
+          </a:xfrm>
+          <a:prstGeom prst="rect">
+            <a:avLst/>
+          </a:prstGeom>
+          <a:noFill/>
+          <a:ln>
+            <a:noFill/>
+          </a:ln>
+        </p:spPr>
+        <p:txBody>
+          <a:bodyPr anchorCtr="0" anchor="t" bIns="91425" lIns="91425" spcFirstLastPara="1" rIns="91425" wrap="square" tIns="91425">
+            <a:noAutofit/>
+          </a:bodyPr>
+          <a:lstStyle/>
+          <a:p>
+            <a:pPr indent="0" lvl="0" marL="0" rtl="0" algn="l">
+              <a:spcBef>
+                <a:spcPts val="0"/>
+              </a:spcBef>
+              <a:spcAft>
+                <a:spcPts val="0"/>
+              </a:spcAft>
+              <a:buNone/>
+            </a:pPr>
+            <a:r>
+              <a:rPr b="1" lang="en" sz="1800">
+                <a:solidFill>
+                  <a:srgbClr val="FFFFFF"/>
+                </a:solidFill>
+              </a:rPr>
+              <a:t>'HOUSE', 'MEH', 'MUSIC_CROTCHET', 'MUSIC_QUAVER', 'MUSIC_QUAVERS', 'NO', 'PACMAN', 'PITCHFORK', 'RABBIT', 'ROLLERSKATE', 'SAD', 'SCISSORS', 'SILLY', 'SKULL', 'SMILE', 'SNAKE', 'SQUARE',‘SQUARE_SMALL''STICKFIGURE', 'SURPRISED', 'SWORD', 'TARGET', 'TORTOISE', 'TRIANGLE', 'TRIANGLE_LEFT', 'TSHIRT', 'UMBRELLA', 'XMAS', 'YES',</a:t>
+            </a:r>
+            <a:endParaRPr b="1" sz="1300"/>
+          </a:p>
+        </p:txBody>
+      </p:sp>
+    </p:spTree>
+  </p:cSld>
+  <p:clrMapOvr>
+    <a:masterClrMapping/>
+  </p:clrMapOvr>
+</p:sld>
+</file>
+
+<file path=ppt/slides/slide13.xml><?xml version="1.0" encoding="utf-8"?>
+<p:sld xmlns:a="http://schemas.openxmlformats.org/drawingml/2006/main" xmlns:r="http://schemas.openxmlformats.org/officeDocument/2006/relationships" xmlns:mc="http://schemas.openxmlformats.org/markup-compatibility/2006" xmlns:mv="urn:schemas-microsoft-com:mac:vml" xmlns:p="http://schemas.openxmlformats.org/presentationml/2006/main" xmlns:c="http://schemas.openxmlformats.org/drawingml/2006/chart" xmlns:dgm="http://schemas.openxmlformats.org/drawingml/2006/diagram" xmlns:o="urn:schemas-microsoft-com:office:office" xmlns:v="urn:schemas-microsoft-com:vml" xmlns:pvml="urn:schemas-microsoft-com:office:powerpoint" xmlns:com="http://schemas.openxmlformats.org/drawingml/2006/compatibility" xmlns:p14="http://schemas.microsoft.com/office/powerpoint/2010/main" xmlns:p15="http://schemas.microsoft.com/office/powerpoint/2012/main" xmlns:ahyp="http://schemas.microsoft.com/office/drawing/2018/hyperlinkcolor">
+  <p:cSld>
+    <p:bg>
+      <p:bgPr>
+        <a:solidFill>
+          <a:srgbClr val="134F5C"/>
+        </a:solidFill>
+      </p:bgPr>
+    </p:bg>
+    <p:spTree>
+      <p:nvGrpSpPr>
+        <p:cNvPr id="211" name="Shape 211"/>
+        <p:cNvGrpSpPr/>
+        <p:nvPr/>
+      </p:nvGrpSpPr>
+      <p:grpSpPr>
+        <a:xfrm>
+          <a:off x="0" y="0"/>
+          <a:ext cx="0" cy="0"/>
+          <a:chOff x="0" y="0"/>
+          <a:chExt cx="0" cy="0"/>
+        </a:xfrm>
+      </p:grpSpPr>
+      <p:sp>
+        <p:nvSpPr>
+          <p:cNvPr id="212" name="Google Shape;212;p38"/>
+          <p:cNvSpPr txBox="1"/>
+          <p:nvPr>
+            <p:ph type="title"/>
+          </p:nvPr>
+        </p:nvSpPr>
+        <p:spPr>
+          <a:xfrm>
+            <a:off x="5" y="0"/>
+            <a:ext cx="8122800" cy="778200"/>
+          </a:xfrm>
+          <a:prstGeom prst="rect">
+            <a:avLst/>
+          </a:prstGeom>
+        </p:spPr>
+        <p:txBody>
+          <a:bodyPr anchorCtr="0" anchor="b" bIns="91425" lIns="91425" spcFirstLastPara="1" rIns="91425" wrap="square" tIns="91425">
+            <a:noAutofit/>
+          </a:bodyPr>
+          <a:lstStyle/>
+          <a:p>
+            <a:pPr indent="0" lvl="0" marL="0" rtl="0" algn="l">
+              <a:spcBef>
+                <a:spcPts val="0"/>
+              </a:spcBef>
+              <a:spcAft>
+                <a:spcPts val="0"/>
+              </a:spcAft>
+              <a:buNone/>
+            </a:pPr>
+            <a:r>
+              <a:rPr lang="en" sz="2400">
+                <a:solidFill>
+                  <a:srgbClr val="FFFFFF"/>
+                </a:solidFill>
+              </a:rPr>
+              <a:t>Music - import music, dir(music)</a:t>
+            </a:r>
+            <a:endParaRPr sz="2400">
+              <a:solidFill>
+                <a:srgbClr val="FFFFFF"/>
+              </a:solidFill>
+            </a:endParaRPr>
+          </a:p>
+        </p:txBody>
+      </p:sp>
+      <p:sp>
+        <p:nvSpPr>
+          <p:cNvPr id="213" name="Google Shape;213;p38"/>
+          <p:cNvSpPr txBox="1"/>
+          <p:nvPr/>
+        </p:nvSpPr>
+        <p:spPr>
+          <a:xfrm>
+            <a:off x="0" y="10077050"/>
+            <a:ext cx="3000000" cy="400200"/>
+          </a:xfrm>
+          <a:prstGeom prst="rect">
+            <a:avLst/>
+          </a:prstGeom>
+          <a:noFill/>
+          <a:ln>
+            <a:noFill/>
+          </a:ln>
+        </p:spPr>
+        <p:txBody>
+          <a:bodyPr anchorCtr="0" anchor="t" bIns="91425" lIns="91425" spcFirstLastPara="1" rIns="91425" wrap="square" tIns="91425">
+            <a:spAutoFit/>
+          </a:bodyPr>
+          <a:lstStyle/>
+          <a:p>
+            <a:pPr indent="0" lvl="0" marL="0" rtl="0" algn="l">
+              <a:spcBef>
+                <a:spcPts val="0"/>
+              </a:spcBef>
+              <a:spcAft>
+                <a:spcPts val="0"/>
+              </a:spcAft>
+              <a:buNone/>
+            </a:pPr>
+            <a:r>
+              <a:t/>
+            </a:r>
+            <a:endParaRPr/>
+          </a:p>
+        </p:txBody>
+      </p:sp>
+      <p:sp>
+        <p:nvSpPr>
+          <p:cNvPr id="214" name="Google Shape;214;p38"/>
+          <p:cNvSpPr txBox="1"/>
+          <p:nvPr/>
+        </p:nvSpPr>
+        <p:spPr>
+          <a:xfrm>
+            <a:off x="2670925" y="932875"/>
+            <a:ext cx="3000000" cy="3586500"/>
+          </a:xfrm>
+          <a:prstGeom prst="rect">
+            <a:avLst/>
+          </a:prstGeom>
+          <a:noFill/>
+          <a:ln>
+            <a:noFill/>
+          </a:ln>
+        </p:spPr>
+        <p:txBody>
+          <a:bodyPr anchorCtr="0" anchor="t" bIns="91425" lIns="91425" spcFirstLastPara="1" rIns="91425" wrap="square" tIns="91425">
+            <a:spAutoFit/>
+          </a:bodyPr>
+          <a:lstStyle/>
+          <a:p>
+            <a:pPr indent="0" lvl="0" marL="0" rtl="0" algn="l">
+              <a:spcBef>
+                <a:spcPts val="0"/>
+              </a:spcBef>
+              <a:spcAft>
+                <a:spcPts val="0"/>
+              </a:spcAft>
+              <a:buNone/>
+            </a:pPr>
+            <a:r>
+              <a:rPr b="1" lang="en" sz="1700">
+                <a:solidFill>
+                  <a:srgbClr val="FFFFFF"/>
+                </a:solidFill>
+              </a:rPr>
+              <a:t>'BADDY', 'BA_DING', 'BIRTHDAY', 'BLUES', 'CHASE', 'DADADADUM', 'ENTERTAINER', 'FUNERAL', 'FUNK', 'JUMP_DOWN', 'JUMP_UP', 'NYAN', 'ODE', 'POWER_DOWN', 'POWER_UP', 'PRELUDE', 'PUNCHLINE', 'PYTHON', 'RINGTONE', 'WAWAWAWAA', 'WEDDING', 'get_tempo</a:t>
+            </a:r>
+            <a:endParaRPr b="1" sz="1700">
+              <a:solidFill>
+                <a:srgbClr val="FFFFFF"/>
+              </a:solidFill>
+            </a:endParaRPr>
+          </a:p>
+        </p:txBody>
+      </p:sp>
+      <p:sp>
+        <p:nvSpPr>
+          <p:cNvPr id="215" name="Google Shape;215;p38"/>
+          <p:cNvSpPr txBox="1"/>
+          <p:nvPr/>
+        </p:nvSpPr>
+        <p:spPr>
+          <a:xfrm>
+            <a:off x="3073500" y="893575"/>
+            <a:ext cx="2464800" cy="5734800"/>
+          </a:xfrm>
+          <a:prstGeom prst="rect">
+            <a:avLst/>
+          </a:prstGeom>
+          <a:noFill/>
+          <a:ln>
+            <a:noFill/>
+          </a:ln>
+        </p:spPr>
+        <p:txBody>
+          <a:bodyPr anchorCtr="0" anchor="t" bIns="91425" lIns="91425" spcFirstLastPara="1" rIns="91425" wrap="square" tIns="91425">
+            <a:noAutofit/>
+          </a:bodyPr>
+          <a:lstStyle/>
+          <a:p>
+            <a:pPr indent="0" lvl="0" marL="0" rtl="0" algn="l">
+              <a:spcBef>
+                <a:spcPts val="0"/>
+              </a:spcBef>
+              <a:spcAft>
+                <a:spcPts val="0"/>
+              </a:spcAft>
+              <a:buNone/>
+            </a:pPr>
+            <a:r>
+              <a:t/>
+            </a:r>
+            <a:endParaRPr b="1" sz="1800">
+              <a:solidFill>
+                <a:srgbClr val="FFFFFF"/>
+              </a:solidFill>
+            </a:endParaRPr>
+          </a:p>
+        </p:txBody>
+      </p:sp>
+      <p:sp>
+        <p:nvSpPr>
+          <p:cNvPr id="216" name="Google Shape;216;p38"/>
+          <p:cNvSpPr txBox="1"/>
+          <p:nvPr/>
+        </p:nvSpPr>
+        <p:spPr>
+          <a:xfrm>
+            <a:off x="5764150" y="607850"/>
+            <a:ext cx="3537000" cy="3554700"/>
+          </a:xfrm>
+          <a:prstGeom prst="rect">
+            <a:avLst/>
+          </a:prstGeom>
+          <a:noFill/>
+          <a:ln>
+            <a:noFill/>
+          </a:ln>
+        </p:spPr>
+        <p:txBody>
+          <a:bodyPr anchorCtr="0" anchor="t" bIns="91425" lIns="91425" spcFirstLastPara="1" rIns="91425" wrap="square" tIns="91425">
+            <a:noAutofit/>
+          </a:bodyPr>
+          <a:lstStyle/>
+          <a:p>
+            <a:pPr indent="0" lvl="0" marL="0" rtl="0" algn="l">
+              <a:spcBef>
+                <a:spcPts val="0"/>
+              </a:spcBef>
+              <a:spcAft>
+                <a:spcPts val="0"/>
+              </a:spcAft>
+              <a:buNone/>
+            </a:pPr>
+            <a:r>
+              <a:t/>
+            </a:r>
+            <a:endParaRPr b="1" sz="1300"/>
+          </a:p>
+        </p:txBody>
+      </p:sp>
+    </p:spTree>
+  </p:cSld>
+  <p:clrMapOvr>
+    <a:masterClrMapping/>
+  </p:clrMapOvr>
+</p:sld>
+</file>
+
+<file path=ppt/slides/slide14.xml><?xml version="1.0" encoding="utf-8"?>
+<p:sld xmlns:a="http://schemas.openxmlformats.org/drawingml/2006/main" xmlns:r="http://schemas.openxmlformats.org/officeDocument/2006/relationships" xmlns:mc="http://schemas.openxmlformats.org/markup-compatibility/2006" xmlns:mv="urn:schemas-microsoft-com:mac:vml" xmlns:p="http://schemas.openxmlformats.org/presentationml/2006/main" xmlns:c="http://schemas.openxmlformats.org/drawingml/2006/chart" xmlns:dgm="http://schemas.openxmlformats.org/drawingml/2006/diagram" xmlns:o="urn:schemas-microsoft-com:office:office" xmlns:v="urn:schemas-microsoft-com:vml" xmlns:pvml="urn:schemas-microsoft-com:office:powerpoint" xmlns:com="http://schemas.openxmlformats.org/drawingml/2006/compatibility" xmlns:p14="http://schemas.microsoft.com/office/powerpoint/2010/main" xmlns:p15="http://schemas.microsoft.com/office/powerpoint/2012/main" xmlns:ahyp="http://schemas.microsoft.com/office/drawing/2018/hyperlinkcolor">
+  <p:cSld>
+    <p:spTree>
+      <p:nvGrpSpPr>
+        <p:cNvPr id="220" name="Shape 220"/>
+        <p:cNvGrpSpPr/>
+        <p:nvPr/>
+      </p:nvGrpSpPr>
+      <p:grpSpPr>
+        <a:xfrm>
+          <a:off x="0" y="0"/>
+          <a:ext cx="0" cy="0"/>
+          <a:chOff x="0" y="0"/>
+          <a:chExt cx="0" cy="0"/>
+        </a:xfrm>
+      </p:grpSpPr>
+      <p:sp>
+        <p:nvSpPr>
+          <p:cNvPr id="221" name="Google Shape;221;p39"/>
           <p:cNvSpPr txBox="1"/>
           <p:nvPr>
             <p:ph type="title"/>
@@ -14718,7 +16580,7 @@
       </p:sp>
       <p:sp>
         <p:nvSpPr>
-          <p:cNvPr id="188" name="Google Shape;188;p35"/>
+          <p:cNvPr id="222" name="Google Shape;222;p39"/>
           <p:cNvSpPr txBox="1"/>
           <p:nvPr/>
         </p:nvSpPr>
@@ -14796,7 +16658,7 @@
       </p:sp>
       <p:sp>
         <p:nvSpPr>
-          <p:cNvPr id="189" name="Google Shape;189;p35"/>
+          <p:cNvPr id="223" name="Google Shape;223;p39"/>
           <p:cNvSpPr txBox="1"/>
           <p:nvPr/>
         </p:nvSpPr>
@@ -14874,7 +16736,7 @@
       </p:sp>
       <p:sp>
         <p:nvSpPr>
-          <p:cNvPr id="190" name="Google Shape;190;p35"/>
+          <p:cNvPr id="224" name="Google Shape;224;p39"/>
           <p:cNvSpPr txBox="1"/>
           <p:nvPr/>
         </p:nvSpPr>
@@ -15004,7 +16866,7 @@
       </p:sp>
       <p:sp>
         <p:nvSpPr>
-          <p:cNvPr id="191" name="Google Shape;191;p35"/>
+          <p:cNvPr id="225" name="Google Shape;225;p39"/>
           <p:cNvSpPr/>
           <p:nvPr/>
         </p:nvSpPr>
@@ -15055,7 +16917,7 @@
       </p:sp>
       <p:sp>
         <p:nvSpPr>
-          <p:cNvPr id="192" name="Google Shape;192;p35"/>
+          <p:cNvPr id="226" name="Google Shape;226;p39"/>
           <p:cNvSpPr/>
           <p:nvPr/>
         </p:nvSpPr>
@@ -15105,7 +16967,7 @@
       </p:sp>
       <p:sp>
         <p:nvSpPr>
-          <p:cNvPr id="193" name="Google Shape;193;p35"/>
+          <p:cNvPr id="227" name="Google Shape;227;p39"/>
           <p:cNvSpPr/>
           <p:nvPr/>
         </p:nvSpPr>
@@ -15203,7 +17065,7 @@
       </p:sp>
       <p:sp>
         <p:nvSpPr>
-          <p:cNvPr id="194" name="Google Shape;194;p35"/>
+          <p:cNvPr id="228" name="Google Shape;228;p39"/>
           <p:cNvSpPr/>
           <p:nvPr/>
         </p:nvSpPr>
@@ -15253,7 +17115,7 @@
       </p:sp>
       <p:cxnSp>
         <p:nvCxnSpPr>
-          <p:cNvPr id="195" name="Google Shape;195;p35"/>
+          <p:cNvPr id="229" name="Google Shape;229;p39"/>
           <p:cNvCxnSpPr/>
           <p:nvPr/>
         </p:nvCxnSpPr>
@@ -15285,12 +17147,12 @@
 </p:sld>
 </file>
 
-<file path=ppt/slides/slide12.xml><?xml version="1.0" encoding="utf-8"?>
+<file path=ppt/slides/slide15.xml><?xml version="1.0" encoding="utf-8"?>
 <p:sld xmlns:a="http://schemas.openxmlformats.org/drawingml/2006/main" xmlns:r="http://schemas.openxmlformats.org/officeDocument/2006/relationships" xmlns:mc="http://schemas.openxmlformats.org/markup-compatibility/2006" xmlns:mv="urn:schemas-microsoft-com:mac:vml" xmlns:p="http://schemas.openxmlformats.org/presentationml/2006/main" xmlns:c="http://schemas.openxmlformats.org/drawingml/2006/chart" xmlns:dgm="http://schemas.openxmlformats.org/drawingml/2006/diagram" xmlns:o="urn:schemas-microsoft-com:office:office" xmlns:v="urn:schemas-microsoft-com:vml" xmlns:pvml="urn:schemas-microsoft-com:office:powerpoint" xmlns:com="http://schemas.openxmlformats.org/drawingml/2006/compatibility" xmlns:p14="http://schemas.microsoft.com/office/powerpoint/2010/main" xmlns:p15="http://schemas.microsoft.com/office/powerpoint/2012/main" xmlns:ahyp="http://schemas.microsoft.com/office/drawing/2018/hyperlinkcolor">
   <p:cSld>
     <p:spTree>
       <p:nvGrpSpPr>
-        <p:cNvPr id="199" name="Shape 199"/>
+        <p:cNvPr id="233" name="Shape 233"/>
         <p:cNvGrpSpPr/>
         <p:nvPr/>
       </p:nvGrpSpPr>
@@ -15304,7 +17166,7 @@
       </p:grpSpPr>
       <p:sp>
         <p:nvSpPr>
-          <p:cNvPr id="200" name="Google Shape;200;p36"/>
+          <p:cNvPr id="234" name="Google Shape;234;p40"/>
           <p:cNvSpPr txBox="1"/>
           <p:nvPr>
             <p:ph type="title"/>
@@ -15336,7 +17198,7 @@
             </a:pPr>
             <a:r>
               <a:rPr lang="en"/>
-              <a:t>Python Basics in the REPL- Libraries</a:t>
+              <a:t>Anatomy of micro:bit python program</a:t>
             </a:r>
             <a:endParaRPr/>
           </a:p>
@@ -15344,900 +17206,7 @@
       </p:sp>
       <p:sp>
         <p:nvSpPr>
-          <p:cNvPr id="201" name="Google Shape;201;p36"/>
-          <p:cNvSpPr txBox="1"/>
-          <p:nvPr>
-            <p:ph idx="1" type="body"/>
-          </p:nvPr>
-        </p:nvSpPr>
-        <p:spPr>
-          <a:xfrm>
-            <a:off x="209500" y="723500"/>
-            <a:ext cx="8311200" cy="6231000"/>
-          </a:xfrm>
-          <a:prstGeom prst="rect">
-            <a:avLst/>
-          </a:prstGeom>
-        </p:spPr>
-        <p:txBody>
-          <a:bodyPr anchorCtr="0" anchor="t" bIns="91425" lIns="91425" spcFirstLastPara="1" rIns="91425" wrap="square" tIns="91425">
-            <a:noAutofit/>
-          </a:bodyPr>
-          <a:lstStyle/>
-          <a:p>
-            <a:pPr indent="0" lvl="0" marL="0" rtl="0" algn="l">
-              <a:lnSpc>
-                <a:spcPct val="100000"/>
-              </a:lnSpc>
-              <a:spcBef>
-                <a:spcPts val="0"/>
-              </a:spcBef>
-              <a:spcAft>
-                <a:spcPts val="0"/>
-              </a:spcAft>
-              <a:buNone/>
-            </a:pPr>
-            <a:r>
-              <a:rPr b="1" lang="en" sz="1400">
-                <a:latin typeface="Courier New"/>
-                <a:ea typeface="Courier New"/>
-                <a:cs typeface="Courier New"/>
-                <a:sym typeface="Courier New"/>
-              </a:rPr>
-              <a:t>&gt;&gt;&gt; </a:t>
-            </a:r>
-            <a:r>
-              <a:rPr b="1" lang="en" sz="1400">
-                <a:highlight>
-                  <a:schemeClr val="lt1"/>
-                </a:highlight>
-                <a:latin typeface="Courier New"/>
-                <a:ea typeface="Courier New"/>
-                <a:cs typeface="Courier New"/>
-                <a:sym typeface="Courier New"/>
-              </a:rPr>
-              <a:t>i = 1</a:t>
-            </a:r>
-            <a:endParaRPr b="1" sz="1400">
-              <a:highlight>
-                <a:schemeClr val="lt1"/>
-              </a:highlight>
-              <a:latin typeface="Courier New"/>
-              <a:ea typeface="Courier New"/>
-              <a:cs typeface="Courier New"/>
-              <a:sym typeface="Courier New"/>
-            </a:endParaRPr>
-          </a:p>
-          <a:p>
-            <a:pPr indent="0" lvl="0" marL="0" rtl="0" algn="l">
-              <a:lnSpc>
-                <a:spcPct val="100000"/>
-              </a:lnSpc>
-              <a:spcBef>
-                <a:spcPts val="0"/>
-              </a:spcBef>
-              <a:spcAft>
-                <a:spcPts val="0"/>
-              </a:spcAft>
-              <a:buNone/>
-            </a:pPr>
-            <a:r>
-              <a:rPr b="1" lang="en" sz="1400">
-                <a:highlight>
-                  <a:schemeClr val="lt1"/>
-                </a:highlight>
-                <a:latin typeface="Courier New"/>
-                <a:ea typeface="Courier New"/>
-                <a:cs typeface="Courier New"/>
-                <a:sym typeface="Courier New"/>
-              </a:rPr>
-              <a:t>&gt;&gt;&gt; print(i)</a:t>
-            </a:r>
-            <a:endParaRPr b="1" sz="1400">
-              <a:highlight>
-                <a:schemeClr val="lt1"/>
-              </a:highlight>
-              <a:latin typeface="Courier New"/>
-              <a:ea typeface="Courier New"/>
-              <a:cs typeface="Courier New"/>
-              <a:sym typeface="Courier New"/>
-            </a:endParaRPr>
-          </a:p>
-          <a:p>
-            <a:pPr indent="0" lvl="0" marL="0" rtl="0" algn="l">
-              <a:lnSpc>
-                <a:spcPct val="100000"/>
-              </a:lnSpc>
-              <a:spcBef>
-                <a:spcPts val="0"/>
-              </a:spcBef>
-              <a:spcAft>
-                <a:spcPts val="0"/>
-              </a:spcAft>
-              <a:buNone/>
-            </a:pPr>
-            <a:r>
-              <a:rPr b="1" lang="en" sz="1400">
-                <a:highlight>
-                  <a:schemeClr val="lt1"/>
-                </a:highlight>
-                <a:latin typeface="Courier New"/>
-                <a:ea typeface="Courier New"/>
-                <a:cs typeface="Courier New"/>
-                <a:sym typeface="Courier New"/>
-              </a:rPr>
-              <a:t>1</a:t>
-            </a:r>
-            <a:endParaRPr b="1" sz="1400">
-              <a:highlight>
-                <a:schemeClr val="lt1"/>
-              </a:highlight>
-              <a:latin typeface="Courier New"/>
-              <a:ea typeface="Courier New"/>
-              <a:cs typeface="Courier New"/>
-              <a:sym typeface="Courier New"/>
-            </a:endParaRPr>
-          </a:p>
-          <a:p>
-            <a:pPr indent="0" lvl="0" marL="0" rtl="0" algn="l">
-              <a:lnSpc>
-                <a:spcPct val="100000"/>
-              </a:lnSpc>
-              <a:spcBef>
-                <a:spcPts val="0"/>
-              </a:spcBef>
-              <a:spcAft>
-                <a:spcPts val="0"/>
-              </a:spcAft>
-              <a:buNone/>
-            </a:pPr>
-            <a:r>
-              <a:t/>
-            </a:r>
-            <a:endParaRPr b="1" sz="1400">
-              <a:highlight>
-                <a:schemeClr val="lt1"/>
-              </a:highlight>
-              <a:latin typeface="Courier New"/>
-              <a:ea typeface="Courier New"/>
-              <a:cs typeface="Courier New"/>
-              <a:sym typeface="Courier New"/>
-            </a:endParaRPr>
-          </a:p>
-          <a:p>
-            <a:pPr indent="0" lvl="0" marL="0" rtl="0" algn="l">
-              <a:lnSpc>
-                <a:spcPct val="100000"/>
-              </a:lnSpc>
-              <a:spcBef>
-                <a:spcPts val="0"/>
-              </a:spcBef>
-              <a:spcAft>
-                <a:spcPts val="0"/>
-              </a:spcAft>
-              <a:buNone/>
-            </a:pPr>
-            <a:r>
-              <a:t/>
-            </a:r>
-            <a:endParaRPr b="1" sz="1400">
-              <a:highlight>
-                <a:schemeClr val="lt1"/>
-              </a:highlight>
-              <a:latin typeface="Courier New"/>
-              <a:ea typeface="Courier New"/>
-              <a:cs typeface="Courier New"/>
-              <a:sym typeface="Courier New"/>
-            </a:endParaRPr>
-          </a:p>
-          <a:p>
-            <a:pPr indent="0" lvl="0" marL="0" rtl="0" algn="l">
-              <a:lnSpc>
-                <a:spcPct val="100000"/>
-              </a:lnSpc>
-              <a:spcBef>
-                <a:spcPts val="0"/>
-              </a:spcBef>
-              <a:spcAft>
-                <a:spcPts val="0"/>
-              </a:spcAft>
-              <a:buNone/>
-            </a:pPr>
-            <a:r>
-              <a:rPr b="1" lang="en" sz="1400">
-                <a:highlight>
-                  <a:schemeClr val="lt1"/>
-                </a:highlight>
-                <a:latin typeface="Courier New"/>
-                <a:ea typeface="Courier New"/>
-                <a:cs typeface="Courier New"/>
-                <a:sym typeface="Courier New"/>
-              </a:rPr>
-              <a:t>&gt;&gt;&gt; j = 2.5</a:t>
-            </a:r>
-            <a:endParaRPr b="1" sz="1400">
-              <a:highlight>
-                <a:schemeClr val="lt1"/>
-              </a:highlight>
-              <a:latin typeface="Courier New"/>
-              <a:ea typeface="Courier New"/>
-              <a:cs typeface="Courier New"/>
-              <a:sym typeface="Courier New"/>
-            </a:endParaRPr>
-          </a:p>
-          <a:p>
-            <a:pPr indent="0" lvl="0" marL="0" rtl="0" algn="l">
-              <a:lnSpc>
-                <a:spcPct val="100000"/>
-              </a:lnSpc>
-              <a:spcBef>
-                <a:spcPts val="0"/>
-              </a:spcBef>
-              <a:spcAft>
-                <a:spcPts val="0"/>
-              </a:spcAft>
-              <a:buNone/>
-            </a:pPr>
-            <a:r>
-              <a:rPr b="1" lang="en" sz="1400">
-                <a:highlight>
-                  <a:schemeClr val="lt1"/>
-                </a:highlight>
-                <a:latin typeface="Courier New"/>
-                <a:ea typeface="Courier New"/>
-                <a:cs typeface="Courier New"/>
-                <a:sym typeface="Courier New"/>
-              </a:rPr>
-              <a:t>&gt;&gt;&gt; print(j)</a:t>
-            </a:r>
-            <a:endParaRPr b="1" sz="1400">
-              <a:highlight>
-                <a:schemeClr val="lt1"/>
-              </a:highlight>
-              <a:latin typeface="Courier New"/>
-              <a:ea typeface="Courier New"/>
-              <a:cs typeface="Courier New"/>
-              <a:sym typeface="Courier New"/>
-            </a:endParaRPr>
-          </a:p>
-          <a:p>
-            <a:pPr indent="0" lvl="0" marL="0" rtl="0" algn="l">
-              <a:lnSpc>
-                <a:spcPct val="100000"/>
-              </a:lnSpc>
-              <a:spcBef>
-                <a:spcPts val="0"/>
-              </a:spcBef>
-              <a:spcAft>
-                <a:spcPts val="0"/>
-              </a:spcAft>
-              <a:buNone/>
-            </a:pPr>
-            <a:r>
-              <a:rPr b="1" lang="en" sz="1400">
-                <a:highlight>
-                  <a:schemeClr val="lt1"/>
-                </a:highlight>
-                <a:latin typeface="Courier New"/>
-                <a:ea typeface="Courier New"/>
-                <a:cs typeface="Courier New"/>
-                <a:sym typeface="Courier New"/>
-              </a:rPr>
-              <a:t>2.5</a:t>
-            </a:r>
-            <a:endParaRPr b="1" sz="1400">
-              <a:highlight>
-                <a:schemeClr val="lt1"/>
-              </a:highlight>
-              <a:latin typeface="Courier New"/>
-              <a:ea typeface="Courier New"/>
-              <a:cs typeface="Courier New"/>
-              <a:sym typeface="Courier New"/>
-            </a:endParaRPr>
-          </a:p>
-          <a:p>
-            <a:pPr indent="0" lvl="0" marL="0" rtl="0" algn="l">
-              <a:lnSpc>
-                <a:spcPct val="100000"/>
-              </a:lnSpc>
-              <a:spcBef>
-                <a:spcPts val="0"/>
-              </a:spcBef>
-              <a:spcAft>
-                <a:spcPts val="0"/>
-              </a:spcAft>
-              <a:buNone/>
-            </a:pPr>
-            <a:r>
-              <a:t/>
-            </a:r>
-            <a:endParaRPr b="1" sz="1400">
-              <a:highlight>
-                <a:schemeClr val="lt1"/>
-              </a:highlight>
-              <a:latin typeface="Courier New"/>
-              <a:ea typeface="Courier New"/>
-              <a:cs typeface="Courier New"/>
-              <a:sym typeface="Courier New"/>
-            </a:endParaRPr>
-          </a:p>
-          <a:p>
-            <a:pPr indent="0" lvl="0" marL="0" rtl="0" algn="l">
-              <a:lnSpc>
-                <a:spcPct val="100000"/>
-              </a:lnSpc>
-              <a:spcBef>
-                <a:spcPts val="0"/>
-              </a:spcBef>
-              <a:spcAft>
-                <a:spcPts val="0"/>
-              </a:spcAft>
-              <a:buNone/>
-            </a:pPr>
-            <a:r>
-              <a:t/>
-            </a:r>
-            <a:endParaRPr b="1" sz="1400">
-              <a:highlight>
-                <a:schemeClr val="lt1"/>
-              </a:highlight>
-              <a:latin typeface="Courier New"/>
-              <a:ea typeface="Courier New"/>
-              <a:cs typeface="Courier New"/>
-              <a:sym typeface="Courier New"/>
-            </a:endParaRPr>
-          </a:p>
-          <a:p>
-            <a:pPr indent="0" lvl="0" marL="0" rtl="0" algn="l">
-              <a:lnSpc>
-                <a:spcPct val="100000"/>
-              </a:lnSpc>
-              <a:spcBef>
-                <a:spcPts val="0"/>
-              </a:spcBef>
-              <a:spcAft>
-                <a:spcPts val="0"/>
-              </a:spcAft>
-              <a:buNone/>
-            </a:pPr>
-            <a:r>
-              <a:t/>
-            </a:r>
-            <a:endParaRPr b="1" sz="1400">
-              <a:highlight>
-                <a:schemeClr val="lt1"/>
-              </a:highlight>
-              <a:latin typeface="Courier New"/>
-              <a:ea typeface="Courier New"/>
-              <a:cs typeface="Courier New"/>
-              <a:sym typeface="Courier New"/>
-            </a:endParaRPr>
-          </a:p>
-          <a:p>
-            <a:pPr indent="0" lvl="0" marL="0" rtl="0" algn="l">
-              <a:lnSpc>
-                <a:spcPct val="100000"/>
-              </a:lnSpc>
-              <a:spcBef>
-                <a:spcPts val="0"/>
-              </a:spcBef>
-              <a:spcAft>
-                <a:spcPts val="0"/>
-              </a:spcAft>
-              <a:buNone/>
-            </a:pPr>
-            <a:r>
-              <a:rPr b="1" lang="en" sz="1400">
-                <a:highlight>
-                  <a:schemeClr val="lt1"/>
-                </a:highlight>
-                <a:latin typeface="Courier New"/>
-                <a:ea typeface="Courier New"/>
-                <a:cs typeface="Courier New"/>
-                <a:sym typeface="Courier New"/>
-              </a:rPr>
-              <a:t>&gt;&gt;&gt; dir()</a:t>
-            </a:r>
-            <a:endParaRPr b="1" sz="1400">
-              <a:highlight>
-                <a:schemeClr val="lt1"/>
-              </a:highlight>
-              <a:latin typeface="Courier New"/>
-              <a:ea typeface="Courier New"/>
-              <a:cs typeface="Courier New"/>
-              <a:sym typeface="Courier New"/>
-            </a:endParaRPr>
-          </a:p>
-          <a:p>
-            <a:pPr indent="0" lvl="0" marL="0" rtl="0" algn="l">
-              <a:lnSpc>
-                <a:spcPct val="100000"/>
-              </a:lnSpc>
-              <a:spcBef>
-                <a:spcPts val="0"/>
-              </a:spcBef>
-              <a:spcAft>
-                <a:spcPts val="0"/>
-              </a:spcAft>
-              <a:buNone/>
-            </a:pPr>
-            <a:r>
-              <a:rPr b="1" lang="en" sz="1400">
-                <a:highlight>
-                  <a:schemeClr val="lt1"/>
-                </a:highlight>
-                <a:latin typeface="Courier New"/>
-                <a:ea typeface="Courier New"/>
-                <a:cs typeface="Courier New"/>
-                <a:sym typeface="Courier New"/>
-              </a:rPr>
-              <a:t>&gt;&gt;&gt; print(name)</a:t>
-            </a:r>
-            <a:endParaRPr b="1" sz="1400">
-              <a:highlight>
-                <a:schemeClr val="lt1"/>
-              </a:highlight>
-              <a:latin typeface="Courier New"/>
-              <a:ea typeface="Courier New"/>
-              <a:cs typeface="Courier New"/>
-              <a:sym typeface="Courier New"/>
-            </a:endParaRPr>
-          </a:p>
-          <a:p>
-            <a:pPr indent="0" lvl="0" marL="0" rtl="0" algn="l">
-              <a:lnSpc>
-                <a:spcPct val="100000"/>
-              </a:lnSpc>
-              <a:spcBef>
-                <a:spcPts val="0"/>
-              </a:spcBef>
-              <a:spcAft>
-                <a:spcPts val="0"/>
-              </a:spcAft>
-              <a:buNone/>
-            </a:pPr>
-            <a:r>
-              <a:t/>
-            </a:r>
-            <a:endParaRPr b="1" sz="1400">
-              <a:highlight>
-                <a:schemeClr val="lt1"/>
-              </a:highlight>
-              <a:latin typeface="Courier New"/>
-              <a:ea typeface="Courier New"/>
-              <a:cs typeface="Courier New"/>
-              <a:sym typeface="Courier New"/>
-            </a:endParaRPr>
-          </a:p>
-          <a:p>
-            <a:pPr indent="0" lvl="0" marL="0" rtl="0" algn="l">
-              <a:lnSpc>
-                <a:spcPct val="100000"/>
-              </a:lnSpc>
-              <a:spcBef>
-                <a:spcPts val="0"/>
-              </a:spcBef>
-              <a:spcAft>
-                <a:spcPts val="0"/>
-              </a:spcAft>
-              <a:buNone/>
-            </a:pPr>
-            <a:r>
-              <a:rPr b="1" lang="en" sz="1400">
-                <a:highlight>
-                  <a:schemeClr val="lt1"/>
-                </a:highlight>
-                <a:latin typeface="Courier New"/>
-                <a:ea typeface="Courier New"/>
-                <a:cs typeface="Courier New"/>
-                <a:sym typeface="Courier New"/>
-              </a:rPr>
-              <a:t>&gt;&gt;&gt; j = 2.5</a:t>
-            </a:r>
-            <a:endParaRPr b="1" sz="1400">
-              <a:highlight>
-                <a:schemeClr val="lt1"/>
-              </a:highlight>
-              <a:latin typeface="Courier New"/>
-              <a:ea typeface="Courier New"/>
-              <a:cs typeface="Courier New"/>
-              <a:sym typeface="Courier New"/>
-            </a:endParaRPr>
-          </a:p>
-          <a:p>
-            <a:pPr indent="0" lvl="0" marL="0" rtl="0" algn="l">
-              <a:lnSpc>
-                <a:spcPct val="100000"/>
-              </a:lnSpc>
-              <a:spcBef>
-                <a:spcPts val="0"/>
-              </a:spcBef>
-              <a:spcAft>
-                <a:spcPts val="0"/>
-              </a:spcAft>
-              <a:buNone/>
-            </a:pPr>
-            <a:r>
-              <a:rPr b="1" lang="en" sz="1400">
-                <a:highlight>
-                  <a:schemeClr val="lt1"/>
-                </a:highlight>
-                <a:latin typeface="Courier New"/>
-                <a:ea typeface="Courier New"/>
-                <a:cs typeface="Courier New"/>
-                <a:sym typeface="Courier New"/>
-              </a:rPr>
-              <a:t>&gt;&gt;&gt; a = 1</a:t>
-            </a:r>
-            <a:endParaRPr b="1" sz="1400">
-              <a:highlight>
-                <a:schemeClr val="lt1"/>
-              </a:highlight>
-              <a:latin typeface="Courier New"/>
-              <a:ea typeface="Courier New"/>
-              <a:cs typeface="Courier New"/>
-              <a:sym typeface="Courier New"/>
-            </a:endParaRPr>
-          </a:p>
-          <a:p>
-            <a:pPr indent="0" lvl="0" marL="0" rtl="0" algn="l">
-              <a:lnSpc>
-                <a:spcPct val="100000"/>
-              </a:lnSpc>
-              <a:spcBef>
-                <a:spcPts val="0"/>
-              </a:spcBef>
-              <a:spcAft>
-                <a:spcPts val="0"/>
-              </a:spcAft>
-              <a:buNone/>
-            </a:pPr>
-            <a:r>
-              <a:rPr b="1" lang="en" sz="1400">
-                <a:highlight>
-                  <a:schemeClr val="lt1"/>
-                </a:highlight>
-                <a:latin typeface="Courier New"/>
-                <a:ea typeface="Courier New"/>
-                <a:cs typeface="Courier New"/>
-                <a:sym typeface="Courier New"/>
-              </a:rPr>
-              <a:t>&gt;&gt;&gt; print(a)</a:t>
-            </a:r>
-            <a:endParaRPr b="1" sz="1400">
-              <a:highlight>
-                <a:schemeClr val="lt1"/>
-              </a:highlight>
-              <a:latin typeface="Courier New"/>
-              <a:ea typeface="Courier New"/>
-              <a:cs typeface="Courier New"/>
-              <a:sym typeface="Courier New"/>
-            </a:endParaRPr>
-          </a:p>
-          <a:p>
-            <a:pPr indent="0" lvl="0" marL="0" rtl="0" algn="l">
-              <a:lnSpc>
-                <a:spcPct val="100000"/>
-              </a:lnSpc>
-              <a:spcBef>
-                <a:spcPts val="0"/>
-              </a:spcBef>
-              <a:spcAft>
-                <a:spcPts val="0"/>
-              </a:spcAft>
-              <a:buNone/>
-            </a:pPr>
-            <a:r>
-              <a:t/>
-            </a:r>
-            <a:endParaRPr b="1" sz="1400">
-              <a:highlight>
-                <a:schemeClr val="lt1"/>
-              </a:highlight>
-              <a:latin typeface="Courier New"/>
-              <a:ea typeface="Courier New"/>
-              <a:cs typeface="Courier New"/>
-              <a:sym typeface="Courier New"/>
-            </a:endParaRPr>
-          </a:p>
-        </p:txBody>
-      </p:sp>
-      <p:cxnSp>
-        <p:nvCxnSpPr>
-          <p:cNvPr id="202" name="Google Shape;202;p36"/>
-          <p:cNvCxnSpPr/>
-          <p:nvPr/>
-        </p:nvCxnSpPr>
-        <p:spPr>
-          <a:xfrm rot="10800000">
-            <a:off x="3655850" y="1097575"/>
-            <a:ext cx="592500" cy="12900"/>
-          </a:xfrm>
-          <a:prstGeom prst="straightConnector1">
-            <a:avLst/>
-          </a:prstGeom>
-          <a:noFill/>
-          <a:ln cap="flat" cmpd="sng" w="38100">
-            <a:solidFill>
-              <a:srgbClr val="4BA173"/>
-            </a:solidFill>
-            <a:prstDash val="solid"/>
-            <a:round/>
-            <a:headEnd len="med" w="med" type="none"/>
-            <a:tailEnd len="med" w="med" type="triangle"/>
-          </a:ln>
-        </p:spPr>
-      </p:cxnSp>
-      <p:sp>
-        <p:nvSpPr>
-          <p:cNvPr id="203" name="Google Shape;203;p36"/>
-          <p:cNvSpPr txBox="1"/>
-          <p:nvPr/>
-        </p:nvSpPr>
-        <p:spPr>
-          <a:xfrm>
-            <a:off x="4428575" y="876625"/>
-            <a:ext cx="3470100" cy="328200"/>
-          </a:xfrm>
-          <a:prstGeom prst="rect">
-            <a:avLst/>
-          </a:prstGeom>
-          <a:noFill/>
-          <a:ln>
-            <a:noFill/>
-          </a:ln>
-        </p:spPr>
-        <p:txBody>
-          <a:bodyPr anchorCtr="0" anchor="t" bIns="91425" lIns="91425" spcFirstLastPara="1" rIns="91425" wrap="square" tIns="91425">
-            <a:noAutofit/>
-          </a:bodyPr>
-          <a:lstStyle/>
-          <a:p>
-            <a:pPr indent="0" lvl="0" marL="0" rtl="0" algn="l">
-              <a:spcBef>
-                <a:spcPts val="0"/>
-              </a:spcBef>
-              <a:spcAft>
-                <a:spcPts val="0"/>
-              </a:spcAft>
-              <a:buNone/>
-            </a:pPr>
-            <a:r>
-              <a:rPr b="1" lang="en">
-                <a:solidFill>
-                  <a:srgbClr val="134F5C"/>
-                </a:solidFill>
-              </a:rPr>
-              <a:t>In this case, i is an integer. Think of integers as counting numbers.</a:t>
-            </a:r>
-            <a:endParaRPr b="1">
-              <a:solidFill>
-                <a:srgbClr val="134F5C"/>
-              </a:solidFill>
-            </a:endParaRPr>
-          </a:p>
-        </p:txBody>
-      </p:sp>
-      <p:cxnSp>
-        <p:nvCxnSpPr>
-          <p:cNvPr id="204" name="Google Shape;204;p36"/>
-          <p:cNvCxnSpPr/>
-          <p:nvPr/>
-        </p:nvCxnSpPr>
-        <p:spPr>
-          <a:xfrm rot="10800000">
-            <a:off x="3655838" y="2153725"/>
-            <a:ext cx="592500" cy="12900"/>
-          </a:xfrm>
-          <a:prstGeom prst="straightConnector1">
-            <a:avLst/>
-          </a:prstGeom>
-          <a:noFill/>
-          <a:ln cap="flat" cmpd="sng" w="38100">
-            <a:solidFill>
-              <a:srgbClr val="4BA173"/>
-            </a:solidFill>
-            <a:prstDash val="solid"/>
-            <a:round/>
-            <a:headEnd len="med" w="med" type="none"/>
-            <a:tailEnd len="med" w="med" type="triangle"/>
-          </a:ln>
-        </p:spPr>
-      </p:cxnSp>
-      <p:sp>
-        <p:nvSpPr>
-          <p:cNvPr id="205" name="Google Shape;205;p36"/>
-          <p:cNvSpPr txBox="1"/>
-          <p:nvPr/>
-        </p:nvSpPr>
-        <p:spPr>
-          <a:xfrm>
-            <a:off x="4431338" y="1825525"/>
-            <a:ext cx="3470100" cy="328200"/>
-          </a:xfrm>
-          <a:prstGeom prst="rect">
-            <a:avLst/>
-          </a:prstGeom>
-          <a:noFill/>
-          <a:ln>
-            <a:noFill/>
-          </a:ln>
-        </p:spPr>
-        <p:txBody>
-          <a:bodyPr anchorCtr="0" anchor="t" bIns="91425" lIns="91425" spcFirstLastPara="1" rIns="91425" wrap="square" tIns="91425">
-            <a:noAutofit/>
-          </a:bodyPr>
-          <a:lstStyle/>
-          <a:p>
-            <a:pPr indent="0" lvl="0" marL="0" rtl="0" algn="l">
-              <a:spcBef>
-                <a:spcPts val="0"/>
-              </a:spcBef>
-              <a:spcAft>
-                <a:spcPts val="0"/>
-              </a:spcAft>
-              <a:buNone/>
-            </a:pPr>
-            <a:r>
-              <a:rPr b="1" lang="en">
-                <a:solidFill>
-                  <a:srgbClr val="134F5C"/>
-                </a:solidFill>
-              </a:rPr>
-              <a:t>In this case, j is an floating point number. Think of it as a number with a fractional part.</a:t>
-            </a:r>
-            <a:endParaRPr b="1">
-              <a:solidFill>
-                <a:srgbClr val="134F5C"/>
-              </a:solidFill>
-            </a:endParaRPr>
-          </a:p>
-        </p:txBody>
-      </p:sp>
-      <p:cxnSp>
-        <p:nvCxnSpPr>
-          <p:cNvPr id="206" name="Google Shape;206;p36"/>
-          <p:cNvCxnSpPr/>
-          <p:nvPr/>
-        </p:nvCxnSpPr>
-        <p:spPr>
-          <a:xfrm rot="10800000">
-            <a:off x="3703488" y="3427000"/>
-            <a:ext cx="592500" cy="12900"/>
-          </a:xfrm>
-          <a:prstGeom prst="straightConnector1">
-            <a:avLst/>
-          </a:prstGeom>
-          <a:noFill/>
-          <a:ln cap="flat" cmpd="sng" w="38100">
-            <a:solidFill>
-              <a:srgbClr val="4BA173"/>
-            </a:solidFill>
-            <a:prstDash val="solid"/>
-            <a:round/>
-            <a:headEnd len="med" w="med" type="none"/>
-            <a:tailEnd len="med" w="med" type="triangle"/>
-          </a:ln>
-        </p:spPr>
-      </p:cxnSp>
-      <p:sp>
-        <p:nvSpPr>
-          <p:cNvPr id="207" name="Google Shape;207;p36"/>
-          <p:cNvSpPr txBox="1"/>
-          <p:nvPr/>
-        </p:nvSpPr>
-        <p:spPr>
-          <a:xfrm>
-            <a:off x="4478988" y="3098800"/>
-            <a:ext cx="3470100" cy="328200"/>
-          </a:xfrm>
-          <a:prstGeom prst="rect">
-            <a:avLst/>
-          </a:prstGeom>
-          <a:noFill/>
-          <a:ln>
-            <a:noFill/>
-          </a:ln>
-        </p:spPr>
-        <p:txBody>
-          <a:bodyPr anchorCtr="0" anchor="t" bIns="91425" lIns="91425" spcFirstLastPara="1" rIns="91425" wrap="square" tIns="91425">
-            <a:noAutofit/>
-          </a:bodyPr>
-          <a:lstStyle/>
-          <a:p>
-            <a:pPr indent="0" lvl="0" marL="0" rtl="0" algn="l">
-              <a:spcBef>
-                <a:spcPts val="0"/>
-              </a:spcBef>
-              <a:spcAft>
-                <a:spcPts val="0"/>
-              </a:spcAft>
-              <a:buNone/>
-            </a:pPr>
-            <a:r>
-              <a:rPr b="1" lang="en">
-                <a:solidFill>
-                  <a:srgbClr val="134F5C"/>
-                </a:solidFill>
-              </a:rPr>
-              <a:t>In this case, name is a string of collected characters.</a:t>
-            </a:r>
-            <a:endParaRPr b="1">
-              <a:solidFill>
-                <a:srgbClr val="134F5C"/>
-              </a:solidFill>
-            </a:endParaRPr>
-          </a:p>
-        </p:txBody>
-      </p:sp>
-    </p:spTree>
-  </p:cSld>
-  <p:clrMapOvr>
-    <a:masterClrMapping/>
-  </p:clrMapOvr>
-</p:sld>
-</file>
-
-<file path=ppt/slides/slide13.xml><?xml version="1.0" encoding="utf-8"?>
-<p:sld xmlns:a="http://schemas.openxmlformats.org/drawingml/2006/main" xmlns:r="http://schemas.openxmlformats.org/officeDocument/2006/relationships" xmlns:mc="http://schemas.openxmlformats.org/markup-compatibility/2006" xmlns:mv="urn:schemas-microsoft-com:mac:vml" xmlns:p="http://schemas.openxmlformats.org/presentationml/2006/main" xmlns:c="http://schemas.openxmlformats.org/drawingml/2006/chart" xmlns:dgm="http://schemas.openxmlformats.org/drawingml/2006/diagram" xmlns:o="urn:schemas-microsoft-com:office:office" xmlns:v="urn:schemas-microsoft-com:vml" xmlns:pvml="urn:schemas-microsoft-com:office:powerpoint" xmlns:com="http://schemas.openxmlformats.org/drawingml/2006/compatibility" xmlns:p14="http://schemas.microsoft.com/office/powerpoint/2010/main" xmlns:p15="http://schemas.microsoft.com/office/powerpoint/2012/main" xmlns:ahyp="http://schemas.microsoft.com/office/drawing/2018/hyperlinkcolor">
-  <p:cSld>
-    <p:spTree>
-      <p:nvGrpSpPr>
-        <p:cNvPr id="211" name="Shape 211"/>
-        <p:cNvGrpSpPr/>
-        <p:nvPr/>
-      </p:nvGrpSpPr>
-      <p:grpSpPr>
-        <a:xfrm>
-          <a:off x="0" y="0"/>
-          <a:ext cx="0" cy="0"/>
-          <a:chOff x="0" y="0"/>
-          <a:chExt cx="0" cy="0"/>
-        </a:xfrm>
-      </p:grpSpPr>
-      <p:sp>
-        <p:nvSpPr>
-          <p:cNvPr id="212" name="Google Shape;212;p37"/>
-          <p:cNvSpPr txBox="1"/>
-          <p:nvPr>
-            <p:ph type="title"/>
-          </p:nvPr>
-        </p:nvSpPr>
-        <p:spPr>
-          <a:xfrm>
-            <a:off x="0" y="0"/>
-            <a:ext cx="8520600" cy="572700"/>
-          </a:xfrm>
-          <a:prstGeom prst="rect">
-            <a:avLst/>
-          </a:prstGeom>
-        </p:spPr>
-        <p:txBody>
-          <a:bodyPr anchorCtr="0" anchor="t" bIns="91425" lIns="91425" spcFirstLastPara="1" rIns="91425" wrap="square" tIns="91425">
-            <a:noAutofit/>
-          </a:bodyPr>
-          <a:lstStyle/>
-          <a:p>
-            <a:pPr indent="0" lvl="0" marL="0" rtl="0" algn="l">
-              <a:spcBef>
-                <a:spcPts val="0"/>
-              </a:spcBef>
-              <a:spcAft>
-                <a:spcPts val="0"/>
-              </a:spcAft>
-              <a:buNone/>
-            </a:pPr>
-            <a:r>
-              <a:rPr lang="en"/>
-              <a:t>Anatomy of bbc:microbit python programs</a:t>
-            </a:r>
-            <a:endParaRPr/>
-          </a:p>
-        </p:txBody>
-      </p:sp>
-      <p:sp>
-        <p:nvSpPr>
-          <p:cNvPr id="213" name="Google Shape;213;p37"/>
+          <p:cNvPr id="235" name="Google Shape;235;p40"/>
           <p:cNvSpPr txBox="1"/>
           <p:nvPr>
             <p:ph idx="1" type="body"/>
@@ -16753,7 +17722,7 @@
       </p:sp>
       <p:cxnSp>
         <p:nvCxnSpPr>
-          <p:cNvPr id="214" name="Google Shape;214;p37"/>
+          <p:cNvPr id="236" name="Google Shape;236;p40"/>
           <p:cNvCxnSpPr/>
           <p:nvPr/>
         </p:nvCxnSpPr>
@@ -16779,7 +17748,7 @@
       </p:cxnSp>
       <p:sp>
         <p:nvSpPr>
-          <p:cNvPr id="215" name="Google Shape;215;p37"/>
+          <p:cNvPr id="237" name="Google Shape;237;p40"/>
           <p:cNvSpPr/>
           <p:nvPr/>
         </p:nvSpPr>
@@ -16826,7 +17795,7 @@
       </p:sp>
       <p:sp>
         <p:nvSpPr>
-          <p:cNvPr id="216" name="Google Shape;216;p37"/>
+          <p:cNvPr id="238" name="Google Shape;238;p40"/>
           <p:cNvSpPr txBox="1"/>
           <p:nvPr/>
         </p:nvSpPr>
@@ -16876,7 +17845,7 @@
       </p:sp>
       <p:sp>
         <p:nvSpPr>
-          <p:cNvPr id="217" name="Google Shape;217;p37"/>
+          <p:cNvPr id="239" name="Google Shape;239;p40"/>
           <p:cNvSpPr/>
           <p:nvPr/>
         </p:nvSpPr>
@@ -16923,7 +17892,7 @@
       </p:sp>
       <p:cxnSp>
         <p:nvCxnSpPr>
-          <p:cNvPr id="218" name="Google Shape;218;p37"/>
+          <p:cNvPr id="240" name="Google Shape;240;p40"/>
           <p:cNvCxnSpPr/>
           <p:nvPr/>
         </p:nvCxnSpPr>
@@ -16949,7 +17918,7 @@
       </p:cxnSp>
       <p:sp>
         <p:nvSpPr>
-          <p:cNvPr id="219" name="Google Shape;219;p37"/>
+          <p:cNvPr id="241" name="Google Shape;241;p40"/>
           <p:cNvSpPr txBox="1"/>
           <p:nvPr/>
         </p:nvSpPr>
@@ -16999,7 +17968,7 @@
       </p:sp>
       <p:sp>
         <p:nvSpPr>
-          <p:cNvPr id="220" name="Google Shape;220;p37"/>
+          <p:cNvPr id="242" name="Google Shape;242;p40"/>
           <p:cNvSpPr/>
           <p:nvPr/>
         </p:nvSpPr>
@@ -17046,7 +18015,7 @@
       </p:sp>
       <p:cxnSp>
         <p:nvCxnSpPr>
-          <p:cNvPr id="221" name="Google Shape;221;p37"/>
+          <p:cNvPr id="243" name="Google Shape;243;p40"/>
           <p:cNvCxnSpPr/>
           <p:nvPr/>
         </p:nvCxnSpPr>
@@ -17072,7 +18041,7 @@
       </p:cxnSp>
       <p:sp>
         <p:nvSpPr>
-          <p:cNvPr id="222" name="Google Shape;222;p37"/>
+          <p:cNvPr id="244" name="Google Shape;244;p40"/>
           <p:cNvSpPr txBox="1"/>
           <p:nvPr/>
         </p:nvSpPr>
@@ -17128,12 +18097,12 @@
 </p:sld>
 </file>
 
-<file path=ppt/slides/slide14.xml><?xml version="1.0" encoding="utf-8"?>
+<file path=ppt/slides/slide16.xml><?xml version="1.0" encoding="utf-8"?>
 <p:sld xmlns:a="http://schemas.openxmlformats.org/drawingml/2006/main" xmlns:r="http://schemas.openxmlformats.org/officeDocument/2006/relationships" xmlns:mc="http://schemas.openxmlformats.org/markup-compatibility/2006" xmlns:mv="urn:schemas-microsoft-com:mac:vml" xmlns:p="http://schemas.openxmlformats.org/presentationml/2006/main" xmlns:c="http://schemas.openxmlformats.org/drawingml/2006/chart" xmlns:dgm="http://schemas.openxmlformats.org/drawingml/2006/diagram" xmlns:o="urn:schemas-microsoft-com:office:office" xmlns:v="urn:schemas-microsoft-com:vml" xmlns:pvml="urn:schemas-microsoft-com:office:powerpoint" xmlns:com="http://schemas.openxmlformats.org/drawingml/2006/compatibility" xmlns:p14="http://schemas.microsoft.com/office/powerpoint/2010/main" xmlns:p15="http://schemas.microsoft.com/office/powerpoint/2012/main" xmlns:ahyp="http://schemas.microsoft.com/office/drawing/2018/hyperlinkcolor">
   <p:cSld>
     <p:spTree>
       <p:nvGrpSpPr>
-        <p:cNvPr id="226" name="Shape 226"/>
+        <p:cNvPr id="248" name="Shape 248"/>
         <p:cNvGrpSpPr/>
         <p:nvPr/>
       </p:nvGrpSpPr>
@@ -17147,7 +18116,7 @@
       </p:grpSpPr>
       <p:pic>
         <p:nvPicPr>
-          <p:cNvPr id="227" name="Google Shape;227;p38"/>
+          <p:cNvPr id="249" name="Google Shape;249;p41"/>
           <p:cNvPicPr preferRelativeResize="0"/>
           <p:nvPr/>
         </p:nvPicPr>
@@ -17175,7 +18144,7 @@
       </p:pic>
       <p:sp>
         <p:nvSpPr>
-          <p:cNvPr id="228" name="Google Shape;228;p38"/>
+          <p:cNvPr id="250" name="Google Shape;250;p41"/>
           <p:cNvSpPr txBox="1"/>
           <p:nvPr>
             <p:ph type="title"/>
@@ -17219,7 +18188,7 @@
       </p:sp>
       <p:cxnSp>
         <p:nvCxnSpPr>
-          <p:cNvPr id="229" name="Google Shape;229;p38"/>
+          <p:cNvPr id="251" name="Google Shape;251;p41"/>
           <p:cNvCxnSpPr/>
           <p:nvPr/>
         </p:nvCxnSpPr>
@@ -17245,7 +18214,7 @@
       </p:cxnSp>
       <p:sp>
         <p:nvSpPr>
-          <p:cNvPr id="230" name="Google Shape;230;p38"/>
+          <p:cNvPr id="252" name="Google Shape;252;p41"/>
           <p:cNvSpPr txBox="1"/>
           <p:nvPr/>
         </p:nvSpPr>
@@ -17303,7 +18272,7 @@
       </p:sp>
       <p:cxnSp>
         <p:nvCxnSpPr>
-          <p:cNvPr id="231" name="Google Shape;231;p38"/>
+          <p:cNvPr id="253" name="Google Shape;253;p41"/>
           <p:cNvCxnSpPr/>
           <p:nvPr/>
         </p:nvCxnSpPr>
@@ -17329,7 +18298,7 @@
       </p:cxnSp>
       <p:sp>
         <p:nvSpPr>
-          <p:cNvPr id="232" name="Google Shape;232;p38"/>
+          <p:cNvPr id="254" name="Google Shape;254;p41"/>
           <p:cNvSpPr txBox="1"/>
           <p:nvPr/>
         </p:nvSpPr>
@@ -17387,7 +18356,7 @@
       </p:sp>
       <p:cxnSp>
         <p:nvCxnSpPr>
-          <p:cNvPr id="233" name="Google Shape;233;p38"/>
+          <p:cNvPr id="255" name="Google Shape;255;p41"/>
           <p:cNvCxnSpPr/>
           <p:nvPr/>
         </p:nvCxnSpPr>
@@ -17413,7 +18382,7 @@
       </p:cxnSp>
       <p:sp>
         <p:nvSpPr>
-          <p:cNvPr id="234" name="Google Shape;234;p38"/>
+          <p:cNvPr id="256" name="Google Shape;256;p41"/>
           <p:cNvSpPr txBox="1"/>
           <p:nvPr/>
         </p:nvSpPr>
@@ -17469,12 +18438,12 @@
 </p:sld>
 </file>
 
-<file path=ppt/slides/slide15.xml><?xml version="1.0" encoding="utf-8"?>
+<file path=ppt/slides/slide17.xml><?xml version="1.0" encoding="utf-8"?>
 <p:sld xmlns:a="http://schemas.openxmlformats.org/drawingml/2006/main" xmlns:r="http://schemas.openxmlformats.org/officeDocument/2006/relationships" xmlns:mc="http://schemas.openxmlformats.org/markup-compatibility/2006" xmlns:mv="urn:schemas-microsoft-com:mac:vml" xmlns:p="http://schemas.openxmlformats.org/presentationml/2006/main" xmlns:c="http://schemas.openxmlformats.org/drawingml/2006/chart" xmlns:dgm="http://schemas.openxmlformats.org/drawingml/2006/diagram" xmlns:o="urn:schemas-microsoft-com:office:office" xmlns:v="urn:schemas-microsoft-com:vml" xmlns:pvml="urn:schemas-microsoft-com:office:powerpoint" xmlns:com="http://schemas.openxmlformats.org/drawingml/2006/compatibility" xmlns:p14="http://schemas.microsoft.com/office/powerpoint/2010/main" xmlns:p15="http://schemas.microsoft.com/office/powerpoint/2012/main" xmlns:ahyp="http://schemas.microsoft.com/office/drawing/2018/hyperlinkcolor">
   <p:cSld>
     <p:spTree>
       <p:nvGrpSpPr>
-        <p:cNvPr id="238" name="Shape 238"/>
+        <p:cNvPr id="260" name="Shape 260"/>
         <p:cNvGrpSpPr/>
         <p:nvPr/>
       </p:nvGrpSpPr>
@@ -17488,7 +18457,7 @@
       </p:grpSpPr>
       <p:sp>
         <p:nvSpPr>
-          <p:cNvPr id="239" name="Google Shape;239;p39"/>
+          <p:cNvPr id="261" name="Google Shape;261;p42"/>
           <p:cNvSpPr txBox="1"/>
           <p:nvPr>
             <p:ph type="title"/>
@@ -17540,7 +18509,31 @@
                 <a:cs typeface="Proxima Nova"/>
                 <a:sym typeface="Proxima Nova"/>
               </a:rPr>
-              <a:t>Reference material</a:t>
+              <a:t>Reference </a:t>
+            </a:r>
+            <a:r>
+              <a:rPr lang="en" sz="2800">
+                <a:solidFill>
+                  <a:schemeClr val="dk1"/>
+                </a:solidFill>
+                <a:latin typeface="Proxima Nova"/>
+                <a:ea typeface="Proxima Nova"/>
+                <a:cs typeface="Proxima Nova"/>
+                <a:sym typeface="Proxima Nova"/>
+              </a:rPr>
+              <a:t>M</a:t>
+            </a:r>
+            <a:r>
+              <a:rPr b="0" lang="en" sz="2800" u="none" strike="noStrike">
+                <a:solidFill>
+                  <a:schemeClr val="dk1"/>
+                </a:solidFill>
+                <a:latin typeface="Proxima Nova"/>
+                <a:ea typeface="Proxima Nova"/>
+                <a:cs typeface="Proxima Nova"/>
+                <a:sym typeface="Proxima Nova"/>
+              </a:rPr>
+              <a:t>aterial</a:t>
             </a:r>
             <a:endParaRPr b="0" sz="2800" u="none" strike="noStrike">
               <a:solidFill>
@@ -17556,7 +18549,7 @@
       </p:sp>
       <p:sp>
         <p:nvSpPr>
-          <p:cNvPr id="240" name="Google Shape;240;p39"/>
+          <p:cNvPr id="262" name="Google Shape;262;p42"/>
           <p:cNvSpPr txBox="1"/>
           <p:nvPr>
             <p:ph idx="1" type="body"/>
@@ -17632,7 +18625,19 @@
                 <a:cs typeface="Courier New"/>
                 <a:sym typeface="Courier New"/>
               </a:rPr>
-              <a:t>icro:bit		</a:t>
+              <a:t>icro:bit</a:t>
+            </a:r>
+            <a:r>
+              <a:rPr b="1" lang="en" sz="1400">
+                <a:solidFill>
+                  <a:schemeClr val="accent3"/>
+                </a:solidFill>
+                <a:latin typeface="Courier New"/>
+                <a:ea typeface="Courier New"/>
+                <a:cs typeface="Courier New"/>
+                <a:sym typeface="Courier New"/>
+              </a:rPr>
+              <a:t> </a:t>
             </a:r>
             <a:r>
               <a:rPr b="1" i="0" lang="en" sz="1400" u="sng" cap="none" strike="noStrike">
@@ -17647,15 +18652,7 @@
               </a:rPr>
               <a:t>www.microbit.org</a:t>
             </a:r>
-            <a:endParaRPr b="0" i="0" sz="1400" u="none" cap="none" strike="noStrike">
-              <a:solidFill>
-                <a:srgbClr val="000000"/>
-              </a:solidFill>
-              <a:latin typeface="Arial"/>
-              <a:ea typeface="Arial"/>
-              <a:cs typeface="Arial"/>
-              <a:sym typeface="Arial"/>
-            </a:endParaRPr>
+            <a:endParaRPr sz="1400"/>
           </a:p>
           <a:p>
             <a:pPr indent="0" lvl="0" marL="0" marR="0" rtl="0" algn="l">
@@ -17668,34 +18665,6 @@
               <a:spcAft>
                 <a:spcPts val="0"/>
               </a:spcAft>
-              <a:buSzPts val="1400"/>
-              <a:buFont typeface="Arial"/>
-              <a:buNone/>
-            </a:pPr>
-            <a:r>
-              <a:t/>
-            </a:r>
-            <a:endParaRPr b="0" i="0" sz="1400" u="none" cap="none" strike="noStrike">
-              <a:solidFill>
-                <a:srgbClr val="000000"/>
-              </a:solidFill>
-              <a:latin typeface="Arial"/>
-              <a:ea typeface="Arial"/>
-              <a:cs typeface="Arial"/>
-              <a:sym typeface="Arial"/>
-            </a:endParaRPr>
-          </a:p>
-          <a:p>
-            <a:pPr indent="0" lvl="0" marL="0" marR="0" rtl="0" algn="l">
-              <a:lnSpc>
-                <a:spcPct val="100000"/>
-              </a:lnSpc>
-              <a:spcBef>
-                <a:spcPts val="0"/>
-              </a:spcBef>
-              <a:spcAft>
-                <a:spcPts val="0"/>
-              </a:spcAft>
               <a:buClr>
                 <a:schemeClr val="accent3"/>
               </a:buClr>
@@ -17704,7 +18673,27 @@
               <a:buNone/>
             </a:pPr>
             <a:r>
-              <a:rPr b="1" i="0" lang="en" sz="1400" u="none" cap="none" strike="noStrike">
+              <a:t/>
+            </a:r>
+            <a:endParaRPr sz="1400"/>
+          </a:p>
+          <a:p>
+            <a:pPr indent="0" lvl="0" marL="0" rtl="0" algn="l">
+              <a:spcBef>
+                <a:spcPts val="0"/>
+              </a:spcBef>
+              <a:spcAft>
+                <a:spcPts val="0"/>
+              </a:spcAft>
+              <a:buClr>
+                <a:schemeClr val="accent3"/>
+              </a:buClr>
+              <a:buSzPts val="1400"/>
+              <a:buFont typeface="Courier New"/>
+              <a:buNone/>
+            </a:pPr>
+            <a:r>
+              <a:rPr b="1" lang="en" sz="1400">
                 <a:solidFill>
                   <a:schemeClr val="accent3"/>
                 </a:solidFill>
@@ -17713,10 +18702,35 @@
                 <a:cs typeface="Courier New"/>
                 <a:sym typeface="Courier New"/>
               </a:rPr>
-              <a:t>Adafruit Industries: </a:t>
+              <a:t>IEEE Course Material &amp; Programs</a:t>
             </a:r>
+            <a:endParaRPr b="1" sz="1400">
+              <a:solidFill>
+                <a:schemeClr val="accent3"/>
+              </a:solidFill>
+              <a:latin typeface="Courier New"/>
+              <a:ea typeface="Courier New"/>
+              <a:cs typeface="Courier New"/>
+              <a:sym typeface="Courier New"/>
+            </a:endParaRPr>
+          </a:p>
+          <a:p>
+            <a:pPr indent="0" lvl="0" marL="0" rtl="0" algn="l">
+              <a:spcBef>
+                <a:spcPts val="0"/>
+              </a:spcBef>
+              <a:spcAft>
+                <a:spcPts val="0"/>
+              </a:spcAft>
+              <a:buClr>
+                <a:schemeClr val="accent3"/>
+              </a:buClr>
+              <a:buSzPts val="1400"/>
+              <a:buFont typeface="Courier New"/>
+              <a:buNone/>
+            </a:pPr>
             <a:r>
-              <a:rPr b="1" i="0" lang="en" sz="1400" u="sng" cap="none" strike="noStrike">
+              <a:rPr b="1" lang="en" sz="1400" u="sng">
                 <a:solidFill>
                   <a:schemeClr val="hlink"/>
                 </a:solidFill>
@@ -17726,69 +18740,16 @@
                 <a:sym typeface="Courier New"/>
                 <a:hlinkClick r:id="rId4"/>
               </a:rPr>
-              <a:t>www.adafruit.com</a:t>
+              <a:t>https://github.com/IEEE-BV/microbit</a:t>
             </a:r>
-            <a:endParaRPr b="0" i="0" sz="1400" u="none" cap="none" strike="noStrike">
+            <a:endParaRPr b="1" sz="1400">
               <a:solidFill>
-                <a:srgbClr val="000000"/>
+                <a:schemeClr val="accent3"/>
               </a:solidFill>
-              <a:latin typeface="Arial"/>
-              <a:ea typeface="Arial"/>
-              <a:cs typeface="Arial"/>
-              <a:sym typeface="Arial"/>
-            </a:endParaRPr>
-          </a:p>
-          <a:p>
-            <a:pPr indent="0" lvl="0" marL="0" marR="0" rtl="0" algn="l">
-              <a:lnSpc>
-                <a:spcPct val="100000"/>
-              </a:lnSpc>
-              <a:spcBef>
-                <a:spcPts val="0"/>
-              </a:spcBef>
-              <a:spcAft>
-                <a:spcPts val="0"/>
-              </a:spcAft>
-              <a:buClr>
-                <a:schemeClr val="accent3"/>
-              </a:buClr>
-              <a:buSzPts val="1400"/>
-              <a:buFont typeface="Courier New"/>
-              <a:buNone/>
-            </a:pPr>
-            <a:r>
-              <a:rPr b="1" i="0" lang="en" sz="1400" u="none" cap="none" strike="noStrike">
-                <a:solidFill>
-                  <a:schemeClr val="accent3"/>
-                </a:solidFill>
-                <a:latin typeface="Courier New"/>
-                <a:ea typeface="Courier New"/>
-                <a:cs typeface="Courier New"/>
-                <a:sym typeface="Courier New"/>
-              </a:rPr>
-              <a:t>Sparkfun electronics: </a:t>
-            </a:r>
-            <a:r>
-              <a:rPr b="1" i="0" lang="en" sz="1400" u="sng" cap="none" strike="noStrike">
-                <a:solidFill>
-                  <a:schemeClr val="hlink"/>
-                </a:solidFill>
-                <a:latin typeface="Courier New"/>
-                <a:ea typeface="Courier New"/>
-                <a:cs typeface="Courier New"/>
-                <a:sym typeface="Courier New"/>
-                <a:hlinkClick r:id="rId5"/>
-              </a:rPr>
-              <a:t>www.sparkfun.com</a:t>
-            </a:r>
-            <a:endParaRPr b="0" i="0" sz="1400" u="none" cap="none" strike="noStrike">
-              <a:solidFill>
-                <a:srgbClr val="000000"/>
-              </a:solidFill>
-              <a:latin typeface="Arial"/>
-              <a:ea typeface="Arial"/>
-              <a:cs typeface="Arial"/>
-              <a:sym typeface="Arial"/>
+              <a:latin typeface="Courier New"/>
+              <a:ea typeface="Courier New"/>
+              <a:cs typeface="Courier New"/>
+              <a:sym typeface="Courier New"/>
             </a:endParaRPr>
           </a:p>
           <a:p>
@@ -17898,7 +18859,7 @@
                 <a:ea typeface="Courier New"/>
                 <a:cs typeface="Courier New"/>
                 <a:sym typeface="Courier New"/>
-                <a:hlinkClick r:id="rId6"/>
+                <a:hlinkClick r:id="rId5"/>
               </a:rPr>
               <a:t>https://thonny.org/</a:t>
             </a:r>
@@ -18041,7 +19002,7 @@
                 <a:ea typeface="Courier New"/>
                 <a:cs typeface="Courier New"/>
                 <a:sym typeface="Courier New"/>
-                <a:hlinkClick r:id="rId7">
+                <a:hlinkClick r:id="rId6">
                   <a:extLst>
                     <a:ext uri="{A12FA001-AC4F-418D-AE19-62706E023703}">
                       <ahyp:hlinkClr val="tx"/>
@@ -18153,7 +19114,7 @@
                 <a:ea typeface="Courier New"/>
                 <a:cs typeface="Courier New"/>
                 <a:sym typeface="Courier New"/>
-                <a:hlinkClick r:id="rId8"/>
+                <a:hlinkClick r:id="rId7"/>
               </a:rPr>
               <a:t>https://www.w3schools.com/python/default.asp</a:t>
             </a:r>
@@ -18194,7 +19155,7 @@
                 <a:ea typeface="Courier New"/>
                 <a:cs typeface="Courier New"/>
                 <a:sym typeface="Courier New"/>
-                <a:hlinkClick r:id="rId9"/>
+                <a:hlinkClick r:id="rId8"/>
               </a:rPr>
               <a:t>https://www.python.org/</a:t>
             </a:r>
@@ -18247,7 +19208,7 @@
                 <a:ea typeface="Courier New"/>
                 <a:cs typeface="Courier New"/>
                 <a:sym typeface="Courier New"/>
-                <a:hlinkClick r:id="rId10"/>
+                <a:hlinkClick r:id="rId9"/>
               </a:rPr>
               <a:t>https://wiki.python.org/moin/BeginnersGuide</a:t>
             </a:r>
@@ -18430,6 +19391,128 @@
           </a:p>
         </p:txBody>
       </p:sp>
+      <p:sp>
+        <p:nvSpPr>
+          <p:cNvPr id="263" name="Google Shape;263;p42"/>
+          <p:cNvSpPr txBox="1"/>
+          <p:nvPr/>
+        </p:nvSpPr>
+        <p:spPr>
+          <a:xfrm>
+            <a:off x="4492625" y="2139975"/>
+            <a:ext cx="6000900" cy="4191000"/>
+          </a:xfrm>
+          <a:prstGeom prst="rect">
+            <a:avLst/>
+          </a:prstGeom>
+          <a:noFill/>
+          <a:ln>
+            <a:noFill/>
+          </a:ln>
+        </p:spPr>
+        <p:txBody>
+          <a:bodyPr anchorCtr="0" anchor="t" bIns="91425" lIns="91425" spcFirstLastPara="1" rIns="91425" wrap="square" tIns="91425">
+            <a:noAutofit/>
+          </a:bodyPr>
+          <a:lstStyle/>
+          <a:p>
+            <a:pPr indent="0" lvl="0" marL="0" rtl="0" algn="l">
+              <a:spcBef>
+                <a:spcPts val="0"/>
+              </a:spcBef>
+              <a:spcAft>
+                <a:spcPts val="0"/>
+              </a:spcAft>
+              <a:buClr>
+                <a:schemeClr val="accent3"/>
+              </a:buClr>
+              <a:buSzPts val="1400"/>
+              <a:buFont typeface="Courier New"/>
+              <a:buNone/>
+            </a:pPr>
+            <a:r>
+              <a:rPr b="1" lang="en">
+                <a:solidFill>
+                  <a:schemeClr val="accent3"/>
+                </a:solidFill>
+                <a:latin typeface="Courier New"/>
+                <a:ea typeface="Courier New"/>
+                <a:cs typeface="Courier New"/>
+                <a:sym typeface="Courier New"/>
+              </a:rPr>
+              <a:t>Adafruit Industries: </a:t>
+            </a:r>
+            <a:r>
+              <a:rPr b="1" lang="en" u="sng">
+                <a:solidFill>
+                  <a:schemeClr val="accent5"/>
+                </a:solidFill>
+                <a:latin typeface="Courier New"/>
+                <a:ea typeface="Courier New"/>
+                <a:cs typeface="Courier New"/>
+                <a:sym typeface="Courier New"/>
+                <a:hlinkClick r:id="rId10">
+                  <a:extLst>
+                    <a:ext uri="{A12FA001-AC4F-418D-AE19-62706E023703}">
+                      <ahyp:hlinkClr val="tx"/>
+                    </a:ext>
+                  </a:extLst>
+                </a:hlinkClick>
+              </a:rPr>
+              <a:t>www.adafruit.com</a:t>
+            </a:r>
+            <a:endParaRPr/>
+          </a:p>
+          <a:p>
+            <a:pPr indent="0" lvl="0" marL="0" rtl="0" algn="l">
+              <a:spcBef>
+                <a:spcPts val="0"/>
+              </a:spcBef>
+              <a:spcAft>
+                <a:spcPts val="0"/>
+              </a:spcAft>
+              <a:buClr>
+                <a:schemeClr val="accent3"/>
+              </a:buClr>
+              <a:buSzPts val="1400"/>
+              <a:buFont typeface="Courier New"/>
+              <a:buNone/>
+            </a:pPr>
+            <a:r>
+              <a:rPr b="1" lang="en">
+                <a:solidFill>
+                  <a:schemeClr val="accent3"/>
+                </a:solidFill>
+                <a:latin typeface="Courier New"/>
+                <a:ea typeface="Courier New"/>
+                <a:cs typeface="Courier New"/>
+                <a:sym typeface="Courier New"/>
+              </a:rPr>
+              <a:t>Sparkfun electronics: </a:t>
+            </a:r>
+            <a:r>
+              <a:rPr b="1" lang="en" u="sng">
+                <a:solidFill>
+                  <a:schemeClr val="accent5"/>
+                </a:solidFill>
+                <a:latin typeface="Courier New"/>
+                <a:ea typeface="Courier New"/>
+                <a:cs typeface="Courier New"/>
+                <a:sym typeface="Courier New"/>
+                <a:hlinkClick r:id="rId11">
+                  <a:extLst>
+                    <a:ext uri="{A12FA001-AC4F-418D-AE19-62706E023703}">
+                      <ahyp:hlinkClr val="tx"/>
+                    </a:ext>
+                  </a:extLst>
+                </a:hlinkClick>
+              </a:rPr>
+              <a:t>www.sparkfun.com</a:t>
+            </a:r>
+            <a:endParaRPr/>
+          </a:p>
+        </p:txBody>
+      </p:sp>
     </p:spTree>
   </p:cSld>
   <p:clrMapOvr>
@@ -18443,7 +19526,7 @@
   <p:cSld>
     <p:spTree>
       <p:nvGrpSpPr>
-        <p:cNvPr id="111" name="Shape 111"/>
+        <p:cNvPr id="116" name="Shape 116"/>
         <p:cNvGrpSpPr/>
         <p:nvPr/>
       </p:nvGrpSpPr>
@@ -18457,7 +19540,7 @@
       </p:grpSpPr>
       <p:sp>
         <p:nvSpPr>
-          <p:cNvPr id="112" name="Google Shape;112;p26"/>
+          <p:cNvPr id="117" name="Google Shape;117;p27"/>
           <p:cNvSpPr txBox="1"/>
           <p:nvPr>
             <p:ph type="title"/>
@@ -18501,7 +19584,7 @@
       </p:sp>
       <p:pic>
         <p:nvPicPr>
-          <p:cNvPr id="113" name="Google Shape;113;p26"/>
+          <p:cNvPr id="118" name="Google Shape;118;p27"/>
           <p:cNvPicPr preferRelativeResize="0"/>
           <p:nvPr/>
         </p:nvPicPr>
@@ -18539,7 +19622,7 @@
   <p:cSld>
     <p:spTree>
       <p:nvGrpSpPr>
-        <p:cNvPr id="117" name="Shape 117"/>
+        <p:cNvPr id="122" name="Shape 122"/>
         <p:cNvGrpSpPr/>
         <p:nvPr/>
       </p:nvGrpSpPr>
@@ -18553,7 +19636,7 @@
       </p:grpSpPr>
       <p:sp>
         <p:nvSpPr>
-          <p:cNvPr id="118" name="Google Shape;118;p27"/>
+          <p:cNvPr id="123" name="Google Shape;123;p28"/>
           <p:cNvSpPr txBox="1"/>
           <p:nvPr>
             <p:ph type="title"/>
@@ -18605,7 +19688,7 @@
       </p:sp>
       <p:pic>
         <p:nvPicPr>
-          <p:cNvPr id="119" name="Google Shape;119;p27"/>
+          <p:cNvPr id="124" name="Google Shape;124;p28"/>
           <p:cNvPicPr preferRelativeResize="0"/>
           <p:nvPr/>
         </p:nvPicPr>
@@ -18644,7 +19727,7 @@
   <p:cSld>
     <p:spTree>
       <p:nvGrpSpPr>
-        <p:cNvPr id="123" name="Shape 123"/>
+        <p:cNvPr id="128" name="Shape 128"/>
         <p:cNvGrpSpPr/>
         <p:nvPr/>
       </p:nvGrpSpPr>
@@ -18658,414 +19741,7 @@
       </p:grpSpPr>
       <p:sp>
         <p:nvSpPr>
-          <p:cNvPr id="124" name="Google Shape;124;p28"/>
-          <p:cNvSpPr txBox="1"/>
-          <p:nvPr>
-            <p:ph type="title"/>
-          </p:nvPr>
-        </p:nvSpPr>
-        <p:spPr>
-          <a:xfrm>
-            <a:off x="0" y="0"/>
-            <a:ext cx="8520600" cy="572700"/>
-          </a:xfrm>
-          <a:prstGeom prst="rect">
-            <a:avLst/>
-          </a:prstGeom>
-        </p:spPr>
-        <p:txBody>
-          <a:bodyPr anchorCtr="0" anchor="t" bIns="91425" lIns="91425" spcFirstLastPara="1" rIns="91425" wrap="square" tIns="91425">
-            <a:noAutofit/>
-          </a:bodyPr>
-          <a:lstStyle/>
-          <a:p>
-            <a:pPr indent="0" lvl="0" marL="0" rtl="0" algn="l">
-              <a:spcBef>
-                <a:spcPts val="0"/>
-              </a:spcBef>
-              <a:spcAft>
-                <a:spcPts val="0"/>
-              </a:spcAft>
-              <a:buNone/>
-            </a:pPr>
-            <a:r>
-              <a:rPr lang="en"/>
-              <a:t>REPL</a:t>
-            </a:r>
-            <a:endParaRPr/>
-          </a:p>
-        </p:txBody>
-      </p:sp>
-      <p:sp>
-        <p:nvSpPr>
-          <p:cNvPr id="125" name="Google Shape;125;p28"/>
-          <p:cNvSpPr txBox="1"/>
-          <p:nvPr>
-            <p:ph idx="1" type="body"/>
-          </p:nvPr>
-        </p:nvSpPr>
-        <p:spPr>
-          <a:xfrm>
-            <a:off x="0" y="702541"/>
-            <a:ext cx="8520600" cy="6231000"/>
-          </a:xfrm>
-          <a:prstGeom prst="rect">
-            <a:avLst/>
-          </a:prstGeom>
-        </p:spPr>
-        <p:txBody>
-          <a:bodyPr anchorCtr="0" anchor="t" bIns="91425" lIns="91425" spcFirstLastPara="1" rIns="91425" wrap="square" tIns="91425">
-            <a:noAutofit/>
-          </a:bodyPr>
-          <a:lstStyle/>
-          <a:p>
-            <a:pPr indent="0" lvl="0" marL="0" rtl="0" algn="l">
-              <a:lnSpc>
-                <a:spcPct val="100000"/>
-              </a:lnSpc>
-              <a:spcBef>
-                <a:spcPts val="0"/>
-              </a:spcBef>
-              <a:spcAft>
-                <a:spcPts val="0"/>
-              </a:spcAft>
-              <a:buNone/>
-            </a:pPr>
-            <a:r>
-              <a:rPr b="1" lang="en" sz="1900">
-                <a:latin typeface="Courier New"/>
-                <a:ea typeface="Courier New"/>
-                <a:cs typeface="Courier New"/>
-                <a:sym typeface="Courier New"/>
-              </a:rPr>
-              <a:t>REPL pronounced “rep-l” stands for</a:t>
-            </a:r>
-            <a:endParaRPr b="1" sz="1900">
-              <a:latin typeface="Courier New"/>
-              <a:ea typeface="Courier New"/>
-              <a:cs typeface="Courier New"/>
-              <a:sym typeface="Courier New"/>
-            </a:endParaRPr>
-          </a:p>
-          <a:p>
-            <a:pPr indent="0" lvl="0" marL="0" rtl="0" algn="l">
-              <a:lnSpc>
-                <a:spcPct val="100000"/>
-              </a:lnSpc>
-              <a:spcBef>
-                <a:spcPts val="0"/>
-              </a:spcBef>
-              <a:spcAft>
-                <a:spcPts val="0"/>
-              </a:spcAft>
-              <a:buNone/>
-            </a:pPr>
-            <a:r>
-              <a:t/>
-            </a:r>
-            <a:endParaRPr b="1" sz="1400">
-              <a:latin typeface="Courier New"/>
-              <a:ea typeface="Courier New"/>
-              <a:cs typeface="Courier New"/>
-              <a:sym typeface="Courier New"/>
-            </a:endParaRPr>
-          </a:p>
-          <a:p>
-            <a:pPr indent="0" lvl="0" marL="0" rtl="0" algn="l">
-              <a:lnSpc>
-                <a:spcPct val="100000"/>
-              </a:lnSpc>
-              <a:spcBef>
-                <a:spcPts val="0"/>
-              </a:spcBef>
-              <a:spcAft>
-                <a:spcPts val="0"/>
-              </a:spcAft>
-              <a:buNone/>
-            </a:pPr>
-            <a:r>
-              <a:rPr b="1" lang="en" sz="2200">
-                <a:latin typeface="Courier New"/>
-                <a:ea typeface="Courier New"/>
-                <a:cs typeface="Courier New"/>
-                <a:sym typeface="Courier New"/>
-              </a:rPr>
-              <a:t>READ</a:t>
-            </a:r>
-            <a:endParaRPr b="1" sz="2200">
-              <a:latin typeface="Courier New"/>
-              <a:ea typeface="Courier New"/>
-              <a:cs typeface="Courier New"/>
-              <a:sym typeface="Courier New"/>
-            </a:endParaRPr>
-          </a:p>
-          <a:p>
-            <a:pPr indent="0" lvl="0" marL="0" rtl="0" algn="l">
-              <a:lnSpc>
-                <a:spcPct val="100000"/>
-              </a:lnSpc>
-              <a:spcBef>
-                <a:spcPts val="0"/>
-              </a:spcBef>
-              <a:spcAft>
-                <a:spcPts val="0"/>
-              </a:spcAft>
-              <a:buNone/>
-            </a:pPr>
-            <a:r>
-              <a:rPr b="1" lang="en" sz="2200">
-                <a:latin typeface="Courier New"/>
-                <a:ea typeface="Courier New"/>
-                <a:cs typeface="Courier New"/>
-                <a:sym typeface="Courier New"/>
-              </a:rPr>
-              <a:t>EVALUATE</a:t>
-            </a:r>
-            <a:endParaRPr b="1" sz="2200">
-              <a:latin typeface="Courier New"/>
-              <a:ea typeface="Courier New"/>
-              <a:cs typeface="Courier New"/>
-              <a:sym typeface="Courier New"/>
-            </a:endParaRPr>
-          </a:p>
-          <a:p>
-            <a:pPr indent="0" lvl="0" marL="0" rtl="0" algn="l">
-              <a:lnSpc>
-                <a:spcPct val="100000"/>
-              </a:lnSpc>
-              <a:spcBef>
-                <a:spcPts val="0"/>
-              </a:spcBef>
-              <a:spcAft>
-                <a:spcPts val="0"/>
-              </a:spcAft>
-              <a:buNone/>
-            </a:pPr>
-            <a:r>
-              <a:rPr b="1" lang="en" sz="2200">
-                <a:latin typeface="Courier New"/>
-                <a:ea typeface="Courier New"/>
-                <a:cs typeface="Courier New"/>
-                <a:sym typeface="Courier New"/>
-              </a:rPr>
-              <a:t>PRINT</a:t>
-            </a:r>
-            <a:endParaRPr b="1" sz="2200">
-              <a:latin typeface="Courier New"/>
-              <a:ea typeface="Courier New"/>
-              <a:cs typeface="Courier New"/>
-              <a:sym typeface="Courier New"/>
-            </a:endParaRPr>
-          </a:p>
-          <a:p>
-            <a:pPr indent="0" lvl="0" marL="0" rtl="0" algn="l">
-              <a:lnSpc>
-                <a:spcPct val="100000"/>
-              </a:lnSpc>
-              <a:spcBef>
-                <a:spcPts val="0"/>
-              </a:spcBef>
-              <a:spcAft>
-                <a:spcPts val="0"/>
-              </a:spcAft>
-              <a:buNone/>
-            </a:pPr>
-            <a:r>
-              <a:rPr b="1" lang="en" sz="2200">
-                <a:latin typeface="Courier New"/>
-                <a:ea typeface="Courier New"/>
-                <a:cs typeface="Courier New"/>
-                <a:sym typeface="Courier New"/>
-              </a:rPr>
-              <a:t>LOOP</a:t>
-            </a:r>
-            <a:endParaRPr b="1" sz="2200">
-              <a:latin typeface="Courier New"/>
-              <a:ea typeface="Courier New"/>
-              <a:cs typeface="Courier New"/>
-              <a:sym typeface="Courier New"/>
-            </a:endParaRPr>
-          </a:p>
-          <a:p>
-            <a:pPr indent="0" lvl="0" marL="0" rtl="0" algn="l">
-              <a:lnSpc>
-                <a:spcPct val="100000"/>
-              </a:lnSpc>
-              <a:spcBef>
-                <a:spcPts val="0"/>
-              </a:spcBef>
-              <a:spcAft>
-                <a:spcPts val="0"/>
-              </a:spcAft>
-              <a:buNone/>
-            </a:pPr>
-            <a:r>
-              <a:t/>
-            </a:r>
-            <a:endParaRPr b="1" sz="1400">
-              <a:latin typeface="Courier New"/>
-              <a:ea typeface="Courier New"/>
-              <a:cs typeface="Courier New"/>
-              <a:sym typeface="Courier New"/>
-            </a:endParaRPr>
-          </a:p>
-          <a:p>
-            <a:pPr indent="0" lvl="0" marL="0" rtl="0" algn="l">
-              <a:lnSpc>
-                <a:spcPct val="100000"/>
-              </a:lnSpc>
-              <a:spcBef>
-                <a:spcPts val="0"/>
-              </a:spcBef>
-              <a:spcAft>
-                <a:spcPts val="0"/>
-              </a:spcAft>
-              <a:buNone/>
-            </a:pPr>
-            <a:r>
-              <a:rPr b="1" lang="en" sz="1900">
-                <a:latin typeface="Courier New"/>
-                <a:ea typeface="Courier New"/>
-                <a:cs typeface="Courier New"/>
-                <a:sym typeface="Courier New"/>
-              </a:rPr>
-              <a:t>The REPL is used to communicate like a command-line to the Python interpreter.</a:t>
-            </a:r>
-            <a:endParaRPr b="1" sz="1900">
-              <a:latin typeface="Courier New"/>
-              <a:ea typeface="Courier New"/>
-              <a:cs typeface="Courier New"/>
-              <a:sym typeface="Courier New"/>
-            </a:endParaRPr>
-          </a:p>
-          <a:p>
-            <a:pPr indent="0" lvl="0" marL="0" rtl="0" algn="l">
-              <a:lnSpc>
-                <a:spcPct val="100000"/>
-              </a:lnSpc>
-              <a:spcBef>
-                <a:spcPts val="0"/>
-              </a:spcBef>
-              <a:spcAft>
-                <a:spcPts val="0"/>
-              </a:spcAft>
-              <a:buNone/>
-            </a:pPr>
-            <a:r>
-              <a:t/>
-            </a:r>
-            <a:endParaRPr b="1" sz="1900">
-              <a:latin typeface="Courier New"/>
-              <a:ea typeface="Courier New"/>
-              <a:cs typeface="Courier New"/>
-              <a:sym typeface="Courier New"/>
-            </a:endParaRPr>
-          </a:p>
-          <a:p>
-            <a:pPr indent="0" lvl="0" marL="0" rtl="0" algn="l">
-              <a:lnSpc>
-                <a:spcPct val="100000"/>
-              </a:lnSpc>
-              <a:spcBef>
-                <a:spcPts val="0"/>
-              </a:spcBef>
-              <a:spcAft>
-                <a:spcPts val="0"/>
-              </a:spcAft>
-              <a:buNone/>
-            </a:pPr>
-            <a:r>
-              <a:rPr b="1" lang="en" sz="1900">
-                <a:latin typeface="Courier New"/>
-                <a:ea typeface="Courier New"/>
-                <a:cs typeface="Courier New"/>
-                <a:sym typeface="Courier New"/>
-              </a:rPr>
-              <a:t>We use it as a short-cut to test code pieces quickly before we start writing a program.</a:t>
-            </a:r>
-            <a:endParaRPr b="1" sz="1900">
-              <a:latin typeface="Courier New"/>
-              <a:ea typeface="Courier New"/>
-              <a:cs typeface="Courier New"/>
-              <a:sym typeface="Courier New"/>
-            </a:endParaRPr>
-          </a:p>
-          <a:p>
-            <a:pPr indent="0" lvl="0" marL="0" rtl="0" algn="l">
-              <a:lnSpc>
-                <a:spcPct val="100000"/>
-              </a:lnSpc>
-              <a:spcBef>
-                <a:spcPts val="0"/>
-              </a:spcBef>
-              <a:spcAft>
-                <a:spcPts val="0"/>
-              </a:spcAft>
-              <a:buNone/>
-            </a:pPr>
-            <a:r>
-              <a:t/>
-            </a:r>
-            <a:endParaRPr b="1" sz="1400">
-              <a:latin typeface="Courier New"/>
-              <a:ea typeface="Courier New"/>
-              <a:cs typeface="Courier New"/>
-              <a:sym typeface="Courier New"/>
-            </a:endParaRPr>
-          </a:p>
-          <a:p>
-            <a:pPr indent="0" lvl="0" marL="0" rtl="0" algn="l">
-              <a:lnSpc>
-                <a:spcPct val="100000"/>
-              </a:lnSpc>
-              <a:spcBef>
-                <a:spcPts val="0"/>
-              </a:spcBef>
-              <a:spcAft>
-                <a:spcPts val="0"/>
-              </a:spcAft>
-              <a:buNone/>
-            </a:pPr>
-            <a:r>
-              <a:t/>
-            </a:r>
-            <a:endParaRPr b="1" sz="1400">
-              <a:latin typeface="Courier New"/>
-              <a:ea typeface="Courier New"/>
-              <a:cs typeface="Courier New"/>
-              <a:sym typeface="Courier New"/>
-            </a:endParaRPr>
-          </a:p>
-        </p:txBody>
-      </p:sp>
-    </p:spTree>
-  </p:cSld>
-  <p:clrMapOvr>
-    <a:masterClrMapping/>
-  </p:clrMapOvr>
-</p:sld>
-</file>
-
-<file path=ppt/slides/slide5.xml><?xml version="1.0" encoding="utf-8"?>
-<p:sld xmlns:a="http://schemas.openxmlformats.org/drawingml/2006/main" xmlns:r="http://schemas.openxmlformats.org/officeDocument/2006/relationships" xmlns:mc="http://schemas.openxmlformats.org/markup-compatibility/2006" xmlns:mv="urn:schemas-microsoft-com:mac:vml" xmlns:p="http://schemas.openxmlformats.org/presentationml/2006/main" xmlns:c="http://schemas.openxmlformats.org/drawingml/2006/chart" xmlns:dgm="http://schemas.openxmlformats.org/drawingml/2006/diagram" xmlns:o="urn:schemas-microsoft-com:office:office" xmlns:v="urn:schemas-microsoft-com:vml" xmlns:pvml="urn:schemas-microsoft-com:office:powerpoint" xmlns:com="http://schemas.openxmlformats.org/drawingml/2006/compatibility" xmlns:p14="http://schemas.microsoft.com/office/powerpoint/2010/main" xmlns:p15="http://schemas.microsoft.com/office/powerpoint/2012/main" xmlns:ahyp="http://schemas.microsoft.com/office/drawing/2018/hyperlinkcolor">
-  <p:cSld>
-    <p:spTree>
-      <p:nvGrpSpPr>
-        <p:cNvPr id="129" name="Shape 129"/>
-        <p:cNvGrpSpPr/>
-        <p:nvPr/>
-      </p:nvGrpSpPr>
-      <p:grpSpPr>
-        <a:xfrm>
-          <a:off x="0" y="0"/>
-          <a:ext cx="0" cy="0"/>
-          <a:chOff x="0" y="0"/>
-          <a:chExt cx="0" cy="0"/>
-        </a:xfrm>
-      </p:grpSpPr>
-      <p:sp>
-        <p:nvSpPr>
-          <p:cNvPr id="130" name="Google Shape;130;p29"/>
+          <p:cNvPr id="129" name="Google Shape;129;p29"/>
           <p:cNvSpPr txBox="1"/>
           <p:nvPr>
             <p:ph type="title"/>
@@ -19096,6 +19772,209 @@
               <a:buNone/>
             </a:pPr>
             <a:r>
+              <a:rPr lang="en" sz="3400"/>
+              <a:t>BBC micro:bit 						</a:t>
+            </a:r>
+            <a:r>
+              <a:rPr lang="en" sz="2000"/>
+              <a:t>Change to connect to micro:bit</a:t>
+            </a:r>
+            <a:endParaRPr sz="2000"/>
+          </a:p>
+        </p:txBody>
+      </p:sp>
+      <p:pic>
+        <p:nvPicPr>
+          <p:cNvPr id="130" name="Google Shape;130;p29"/>
+          <p:cNvPicPr preferRelativeResize="0"/>
+          <p:nvPr/>
+        </p:nvPicPr>
+        <p:blipFill>
+          <a:blip r:embed="rId3">
+            <a:alphaModFix/>
+          </a:blip>
+          <a:stretch>
+            <a:fillRect/>
+          </a:stretch>
+        </p:blipFill>
+        <p:spPr>
+          <a:xfrm>
+            <a:off x="1288075" y="777025"/>
+            <a:ext cx="6924675" cy="2047875"/>
+          </a:xfrm>
+          <a:prstGeom prst="rect">
+            <a:avLst/>
+          </a:prstGeom>
+          <a:noFill/>
+          <a:ln>
+            <a:noFill/>
+          </a:ln>
+        </p:spPr>
+      </p:pic>
+      <p:cxnSp>
+        <p:nvCxnSpPr>
+          <p:cNvPr id="131" name="Google Shape;131;p29"/>
+          <p:cNvCxnSpPr/>
+          <p:nvPr/>
+        </p:nvCxnSpPr>
+        <p:spPr>
+          <a:xfrm>
+            <a:off x="6536750" y="712350"/>
+            <a:ext cx="658200" cy="1815600"/>
+          </a:xfrm>
+          <a:prstGeom prst="straightConnector1">
+            <a:avLst/>
+          </a:prstGeom>
+          <a:noFill/>
+          <a:ln cap="flat" cmpd="sng" w="114300">
+            <a:solidFill>
+              <a:srgbClr val="FF0000"/>
+            </a:solidFill>
+            <a:prstDash val="solid"/>
+            <a:round/>
+            <a:headEnd len="med" w="med" type="none"/>
+            <a:tailEnd len="med" w="med" type="triangle"/>
+          </a:ln>
+        </p:spPr>
+      </p:cxnSp>
+      <p:pic>
+        <p:nvPicPr>
+          <p:cNvPr id="132" name="Google Shape;132;p29"/>
+          <p:cNvPicPr preferRelativeResize="0"/>
+          <p:nvPr/>
+        </p:nvPicPr>
+        <p:blipFill>
+          <a:blip r:embed="rId4">
+            <a:alphaModFix/>
+          </a:blip>
+          <a:stretch>
+            <a:fillRect/>
+          </a:stretch>
+        </p:blipFill>
+        <p:spPr>
+          <a:xfrm>
+            <a:off x="1403300" y="2962625"/>
+            <a:ext cx="6809455" cy="2013800"/>
+          </a:xfrm>
+          <a:prstGeom prst="rect">
+            <a:avLst/>
+          </a:prstGeom>
+          <a:noFill/>
+          <a:ln>
+            <a:noFill/>
+          </a:ln>
+        </p:spPr>
+      </p:pic>
+      <p:sp>
+        <p:nvSpPr>
+          <p:cNvPr id="133" name="Google Shape;133;p29"/>
+          <p:cNvSpPr/>
+          <p:nvPr/>
+        </p:nvSpPr>
+        <p:spPr>
+          <a:xfrm>
+            <a:off x="3194525" y="3919909"/>
+            <a:ext cx="4938354" cy="278424"/>
+          </a:xfrm>
+          <a:prstGeom prst="flowChartTerminator">
+            <a:avLst/>
+          </a:prstGeom>
+          <a:noFill/>
+          <a:ln cap="flat" cmpd="sng" w="76200">
+            <a:solidFill>
+              <a:srgbClr val="FF0000"/>
+            </a:solidFill>
+            <a:prstDash val="solid"/>
+            <a:round/>
+            <a:headEnd len="sm" w="sm" type="none"/>
+            <a:tailEnd len="sm" w="sm" type="none"/>
+          </a:ln>
+        </p:spPr>
+        <p:txBody>
+          <a:bodyPr anchorCtr="0" anchor="ctr" bIns="91425" lIns="91425" spcFirstLastPara="1" rIns="91425" wrap="square" tIns="91425">
+            <a:noAutofit/>
+          </a:bodyPr>
+          <a:lstStyle/>
+          <a:p>
+            <a:pPr indent="0" lvl="0" marL="0" rtl="0" algn="ctr">
+              <a:spcBef>
+                <a:spcPts val="0"/>
+              </a:spcBef>
+              <a:spcAft>
+                <a:spcPts val="0"/>
+              </a:spcAft>
+              <a:buNone/>
+            </a:pPr>
+            <a:r>
+              <a:t/>
+            </a:r>
+            <a:endParaRPr>
+              <a:latin typeface="Proxima Nova"/>
+              <a:ea typeface="Proxima Nova"/>
+              <a:cs typeface="Proxima Nova"/>
+              <a:sym typeface="Proxima Nova"/>
+            </a:endParaRPr>
+          </a:p>
+        </p:txBody>
+      </p:sp>
+    </p:spTree>
+  </p:cSld>
+  <p:clrMapOvr>
+    <a:masterClrMapping/>
+  </p:clrMapOvr>
+</p:sld>
+</file>
+
+<file path=ppt/slides/slide5.xml><?xml version="1.0" encoding="utf-8"?>
+<p:sld xmlns:a="http://schemas.openxmlformats.org/drawingml/2006/main" xmlns:r="http://schemas.openxmlformats.org/officeDocument/2006/relationships" xmlns:mc="http://schemas.openxmlformats.org/markup-compatibility/2006" xmlns:mv="urn:schemas-microsoft-com:mac:vml" xmlns:p="http://schemas.openxmlformats.org/presentationml/2006/main" xmlns:c="http://schemas.openxmlformats.org/drawingml/2006/chart" xmlns:dgm="http://schemas.openxmlformats.org/drawingml/2006/diagram" xmlns:o="urn:schemas-microsoft-com:office:office" xmlns:v="urn:schemas-microsoft-com:vml" xmlns:pvml="urn:schemas-microsoft-com:office:powerpoint" xmlns:com="http://schemas.openxmlformats.org/drawingml/2006/compatibility" xmlns:p14="http://schemas.microsoft.com/office/powerpoint/2010/main" xmlns:p15="http://schemas.microsoft.com/office/powerpoint/2012/main" xmlns:ahyp="http://schemas.microsoft.com/office/drawing/2018/hyperlinkcolor">
+  <p:cSld>
+    <p:spTree>
+      <p:nvGrpSpPr>
+        <p:cNvPr id="137" name="Shape 137"/>
+        <p:cNvGrpSpPr/>
+        <p:nvPr/>
+      </p:nvGrpSpPr>
+      <p:grpSpPr>
+        <a:xfrm>
+          <a:off x="0" y="0"/>
+          <a:ext cx="0" cy="0"/>
+          <a:chOff x="0" y="0"/>
+          <a:chExt cx="0" cy="0"/>
+        </a:xfrm>
+      </p:grpSpPr>
+      <p:sp>
+        <p:nvSpPr>
+          <p:cNvPr id="138" name="Google Shape;138;p30"/>
+          <p:cNvSpPr txBox="1"/>
+          <p:nvPr>
+            <p:ph type="title"/>
+          </p:nvPr>
+        </p:nvSpPr>
+        <p:spPr>
+          <a:xfrm>
+            <a:off x="171375" y="132350"/>
+            <a:ext cx="8848200" cy="580200"/>
+          </a:xfrm>
+          <a:prstGeom prst="rect">
+            <a:avLst/>
+          </a:prstGeom>
+        </p:spPr>
+        <p:txBody>
+          <a:bodyPr anchorCtr="0" anchor="b" bIns="91425" lIns="91425" spcFirstLastPara="1" rIns="91425" wrap="square" tIns="91425">
+            <a:noAutofit/>
+          </a:bodyPr>
+          <a:lstStyle/>
+          <a:p>
+            <a:pPr indent="0" lvl="0" marL="0" rtl="0" algn="l">
+              <a:spcBef>
+                <a:spcPts val="0"/>
+              </a:spcBef>
+              <a:spcAft>
+                <a:spcPts val="0"/>
+              </a:spcAft>
+              <a:buNone/>
+            </a:pPr>
+            <a:r>
               <a:rPr lang="en"/>
               <a:t>BBC micro:bit 						</a:t>
             </a:r>
@@ -19109,7 +19988,7 @@
       </p:sp>
       <p:pic>
         <p:nvPicPr>
-          <p:cNvPr id="131" name="Google Shape;131;p29"/>
+          <p:cNvPr id="139" name="Google Shape;139;p30"/>
           <p:cNvPicPr preferRelativeResize="0"/>
           <p:nvPr/>
         </p:nvPicPr>
@@ -19137,7 +20016,7 @@
       </p:pic>
       <p:cxnSp>
         <p:nvCxnSpPr>
-          <p:cNvPr id="132" name="Google Shape;132;p29"/>
+          <p:cNvPr id="140" name="Google Shape;140;p30"/>
           <p:cNvCxnSpPr/>
           <p:nvPr/>
         </p:nvCxnSpPr>
@@ -19174,7 +20053,7 @@
   <p:cSld>
     <p:spTree>
       <p:nvGrpSpPr>
-        <p:cNvPr id="136" name="Shape 136"/>
+        <p:cNvPr id="144" name="Shape 144"/>
         <p:cNvGrpSpPr/>
         <p:nvPr/>
       </p:nvGrpSpPr>
@@ -19188,7 +20067,7 @@
       </p:grpSpPr>
       <p:sp>
         <p:nvSpPr>
-          <p:cNvPr id="137" name="Google Shape;137;p30"/>
+          <p:cNvPr id="145" name="Google Shape;145;p31"/>
           <p:cNvSpPr txBox="1"/>
           <p:nvPr>
             <p:ph type="title"/>
@@ -19228,7 +20107,7 @@
       </p:sp>
       <p:sp>
         <p:nvSpPr>
-          <p:cNvPr id="138" name="Google Shape;138;p30"/>
+          <p:cNvPr id="146" name="Google Shape;146;p31"/>
           <p:cNvSpPr txBox="1"/>
           <p:nvPr>
             <p:ph idx="1" type="body"/>
@@ -19250,6 +20129,9 @@
           <a:lstStyle/>
           <a:p>
             <a:pPr indent="0" lvl="0" marL="0" rtl="0" algn="l">
+              <a:lnSpc>
+                <a:spcPct val="100000"/>
+              </a:lnSpc>
               <a:spcBef>
                 <a:spcPts val="0"/>
               </a:spcBef>
@@ -19259,15 +20141,15 @@
               <a:buNone/>
             </a:pPr>
             <a:r>
-              <a:rPr b="1" lang="en" sz="1400">
+              <a:rPr b="1" lang="en" sz="1900">
                 <a:latin typeface="Courier New"/>
                 <a:ea typeface="Courier New"/>
                 <a:cs typeface="Courier New"/>
                 <a:sym typeface="Courier New"/>
               </a:rPr>
-              <a:t>&gt;&gt;&gt; help()</a:t>
+              <a:t>REPL pronounced “rep-l” stands for</a:t>
             </a:r>
-            <a:endParaRPr b="1" sz="1400">
+            <a:endParaRPr b="1" sz="1900">
               <a:latin typeface="Courier New"/>
               <a:ea typeface="Courier New"/>
               <a:cs typeface="Courier New"/>
@@ -19276,32 +20158,9 @@
           </a:p>
           <a:p>
             <a:pPr indent="0" lvl="0" marL="0" rtl="0" algn="l">
-              <a:spcBef>
-                <a:spcPts val="0"/>
-              </a:spcBef>
-              <a:spcAft>
-                <a:spcPts val="0"/>
-              </a:spcAft>
-              <a:buNone/>
-            </a:pPr>
-            <a:r>
-              <a:rPr b="1" lang="en" sz="1400">
-                <a:latin typeface="Courier New"/>
-                <a:ea typeface="Courier New"/>
-                <a:cs typeface="Courier New"/>
-                <a:sym typeface="Courier New"/>
-              </a:rPr>
-              <a:t>Welcome to MicroPython on the micro:bit!</a:t>
-            </a:r>
-            <a:endParaRPr b="1" sz="1400">
-              <a:latin typeface="Courier New"/>
-              <a:ea typeface="Courier New"/>
-              <a:cs typeface="Courier New"/>
-              <a:sym typeface="Courier New"/>
-            </a:endParaRPr>
-          </a:p>
-          <a:p>
-            <a:pPr indent="0" lvl="0" marL="0" rtl="0" algn="l">
+              <a:lnSpc>
+                <a:spcPct val="100000"/>
+              </a:lnSpc>
               <a:spcBef>
                 <a:spcPts val="0"/>
               </a:spcBef>
@@ -19322,6 +20181,9 @@
           </a:p>
           <a:p>
             <a:pPr indent="0" lvl="0" marL="0" rtl="0" algn="l">
+              <a:lnSpc>
+                <a:spcPct val="100000"/>
+              </a:lnSpc>
               <a:spcBef>
                 <a:spcPts val="0"/>
               </a:spcBef>
@@ -19331,15 +20193,15 @@
               <a:buNone/>
             </a:pPr>
             <a:r>
-              <a:rPr b="1" lang="en" sz="1400">
+              <a:rPr b="1" lang="en" sz="2200">
                 <a:latin typeface="Courier New"/>
                 <a:ea typeface="Courier New"/>
                 <a:cs typeface="Courier New"/>
                 <a:sym typeface="Courier New"/>
               </a:rPr>
-              <a:t>Try these commands:</a:t>
+              <a:t>READ</a:t>
             </a:r>
-            <a:endParaRPr b="1" sz="1400">
+            <a:endParaRPr b="1" sz="2200">
               <a:latin typeface="Courier New"/>
               <a:ea typeface="Courier New"/>
               <a:cs typeface="Courier New"/>
@@ -19348,6 +20210,9 @@
           </a:p>
           <a:p>
             <a:pPr indent="0" lvl="0" marL="0" rtl="0" algn="l">
+              <a:lnSpc>
+                <a:spcPct val="100000"/>
+              </a:lnSpc>
               <a:spcBef>
                 <a:spcPts val="0"/>
               </a:spcBef>
@@ -19357,15 +20222,15 @@
               <a:buNone/>
             </a:pPr>
             <a:r>
-              <a:rPr b="1" lang="en" sz="1400">
+              <a:rPr b="1" lang="en" sz="2200">
                 <a:latin typeface="Courier New"/>
                 <a:ea typeface="Courier New"/>
                 <a:cs typeface="Courier New"/>
                 <a:sym typeface="Courier New"/>
               </a:rPr>
-              <a:t> display.scroll('Hello')</a:t>
+              <a:t>EVALUATE</a:t>
             </a:r>
-            <a:endParaRPr b="1" sz="1400">
+            <a:endParaRPr b="1" sz="2200">
               <a:latin typeface="Courier New"/>
               <a:ea typeface="Courier New"/>
               <a:cs typeface="Courier New"/>
@@ -19374,6 +20239,9 @@
           </a:p>
           <a:p>
             <a:pPr indent="0" lvl="0" marL="0" rtl="0" algn="l">
+              <a:lnSpc>
+                <a:spcPct val="100000"/>
+              </a:lnSpc>
               <a:spcBef>
                 <a:spcPts val="0"/>
               </a:spcBef>
@@ -19383,15 +20251,15 @@
               <a:buNone/>
             </a:pPr>
             <a:r>
-              <a:rPr b="1" lang="en" sz="1400">
+              <a:rPr b="1" lang="en" sz="2200">
                 <a:latin typeface="Courier New"/>
                 <a:ea typeface="Courier New"/>
                 <a:cs typeface="Courier New"/>
                 <a:sym typeface="Courier New"/>
               </a:rPr>
-              <a:t> running_time()</a:t>
+              <a:t>PRINT</a:t>
             </a:r>
-            <a:endParaRPr b="1" sz="1400">
+            <a:endParaRPr b="1" sz="2200">
               <a:latin typeface="Courier New"/>
               <a:ea typeface="Courier New"/>
               <a:cs typeface="Courier New"/>
@@ -19400,6 +20268,9 @@
           </a:p>
           <a:p>
             <a:pPr indent="0" lvl="0" marL="0" rtl="0" algn="l">
+              <a:lnSpc>
+                <a:spcPct val="100000"/>
+              </a:lnSpc>
               <a:spcBef>
                 <a:spcPts val="0"/>
               </a:spcBef>
@@ -19409,15 +20280,15 @@
               <a:buNone/>
             </a:pPr>
             <a:r>
-              <a:rPr b="1" lang="en" sz="1400">
+              <a:rPr b="1" lang="en" sz="2200">
                 <a:latin typeface="Courier New"/>
                 <a:ea typeface="Courier New"/>
                 <a:cs typeface="Courier New"/>
                 <a:sym typeface="Courier New"/>
               </a:rPr>
-              <a:t> sleep(1000)</a:t>
+              <a:t>LOOP</a:t>
             </a:r>
-            <a:endParaRPr b="1" sz="1400">
+            <a:endParaRPr b="1" sz="2200">
               <a:latin typeface="Courier New"/>
               <a:ea typeface="Courier New"/>
               <a:cs typeface="Courier New"/>
@@ -19426,32 +20297,9 @@
           </a:p>
           <a:p>
             <a:pPr indent="0" lvl="0" marL="0" rtl="0" algn="l">
-              <a:spcBef>
-                <a:spcPts val="0"/>
-              </a:spcBef>
-              <a:spcAft>
-                <a:spcPts val="0"/>
-              </a:spcAft>
-              <a:buNone/>
-            </a:pPr>
-            <a:r>
-              <a:rPr b="1" lang="en" sz="1400">
-                <a:latin typeface="Courier New"/>
-                <a:ea typeface="Courier New"/>
-                <a:cs typeface="Courier New"/>
-                <a:sym typeface="Courier New"/>
-              </a:rPr>
-              <a:t> button_a.is_pressed()</a:t>
-            </a:r>
-            <a:endParaRPr b="1" sz="1400">
-              <a:latin typeface="Courier New"/>
-              <a:ea typeface="Courier New"/>
-              <a:cs typeface="Courier New"/>
-              <a:sym typeface="Courier New"/>
-            </a:endParaRPr>
-          </a:p>
-          <a:p>
-            <a:pPr indent="0" lvl="0" marL="0" rtl="0" algn="l">
+              <a:lnSpc>
+                <a:spcPct val="100000"/>
+              </a:lnSpc>
               <a:spcBef>
                 <a:spcPts val="0"/>
               </a:spcBef>
@@ -19472,6 +20320,9 @@
           </a:p>
           <a:p>
             <a:pPr indent="0" lvl="0" marL="0" rtl="0" algn="l">
+              <a:lnSpc>
+                <a:spcPct val="100000"/>
+              </a:lnSpc>
               <a:spcBef>
                 <a:spcPts val="0"/>
               </a:spcBef>
@@ -19481,15 +20332,15 @@
               <a:buNone/>
             </a:pPr>
             <a:r>
-              <a:rPr b="1" lang="en" sz="1400">
+              <a:rPr b="1" lang="en" sz="1900">
                 <a:latin typeface="Courier New"/>
                 <a:ea typeface="Courier New"/>
                 <a:cs typeface="Courier New"/>
                 <a:sym typeface="Courier New"/>
               </a:rPr>
-              <a:t>HINT: use the up and down arrow keys to get your command history. </a:t>
+              <a:t>The REPL is used to communicate like a command-line to the Python interpreter.</a:t>
             </a:r>
-            <a:endParaRPr b="1" sz="1400">
+            <a:endParaRPr b="1" sz="1900">
               <a:latin typeface="Courier New"/>
               <a:ea typeface="Courier New"/>
               <a:cs typeface="Courier New"/>
@@ -19498,6 +20349,9 @@
           </a:p>
           <a:p>
             <a:pPr indent="0" lvl="0" marL="0" rtl="0" algn="l">
+              <a:lnSpc>
+                <a:spcPct val="100000"/>
+              </a:lnSpc>
               <a:spcBef>
                 <a:spcPts val="0"/>
               </a:spcBef>
@@ -19507,15 +20361,9 @@
               <a:buNone/>
             </a:pPr>
             <a:r>
-              <a:rPr b="1" lang="en" sz="1400">
-                <a:latin typeface="Courier New"/>
-                <a:ea typeface="Courier New"/>
-                <a:cs typeface="Courier New"/>
-                <a:sym typeface="Courier New"/>
-              </a:rPr>
-              <a:t>Press the TAB key to auto-complete unfinished words </a:t>
+              <a:t/>
             </a:r>
-            <a:endParaRPr b="1" sz="1400">
+            <a:endParaRPr b="1" sz="1900">
               <a:latin typeface="Courier New"/>
               <a:ea typeface="Courier New"/>
               <a:cs typeface="Courier New"/>
@@ -19524,6 +20372,9 @@
           </a:p>
           <a:p>
             <a:pPr indent="0" lvl="0" marL="0" rtl="0" algn="l">
+              <a:lnSpc>
+                <a:spcPct val="100000"/>
+              </a:lnSpc>
               <a:spcBef>
                 <a:spcPts val="0"/>
               </a:spcBef>
@@ -19533,15 +20384,15 @@
               <a:buNone/>
             </a:pPr>
             <a:r>
-              <a:rPr b="1" lang="en" sz="1400">
+              <a:rPr b="1" lang="en" sz="1900">
                 <a:latin typeface="Courier New"/>
                 <a:ea typeface="Courier New"/>
                 <a:cs typeface="Courier New"/>
                 <a:sym typeface="Courier New"/>
               </a:rPr>
-              <a:t>(so 'di' becomes 'display' after you press TAB). </a:t>
+              <a:t>We use it as a short-cut to test code pieces quickly before we start writing a program.</a:t>
             </a:r>
-            <a:endParaRPr b="1" sz="1400">
+            <a:endParaRPr b="1" sz="1900">
               <a:latin typeface="Courier New"/>
               <a:ea typeface="Courier New"/>
               <a:cs typeface="Courier New"/>
@@ -19609,7 +20460,7 @@
   <p:cSld>
     <p:spTree>
       <p:nvGrpSpPr>
-        <p:cNvPr id="142" name="Shape 142"/>
+        <p:cNvPr id="150" name="Shape 150"/>
         <p:cNvGrpSpPr/>
         <p:nvPr/>
       </p:nvGrpSpPr>
@@ -19623,7 +20474,7 @@
       </p:grpSpPr>
       <p:sp>
         <p:nvSpPr>
-          <p:cNvPr id="143" name="Google Shape;143;p31"/>
+          <p:cNvPr id="151" name="Google Shape;151;p32"/>
           <p:cNvSpPr txBox="1"/>
           <p:nvPr>
             <p:ph type="title"/>
@@ -19663,7 +20514,7 @@
       </p:sp>
       <p:sp>
         <p:nvSpPr>
-          <p:cNvPr id="144" name="Google Shape;144;p31"/>
+          <p:cNvPr id="152" name="Google Shape;152;p32"/>
           <p:cNvSpPr txBox="1"/>
           <p:nvPr>
             <p:ph idx="1" type="body"/>
@@ -20119,7 +20970,7 @@
   <p:cSld>
     <p:spTree>
       <p:nvGrpSpPr>
-        <p:cNvPr id="148" name="Shape 148"/>
+        <p:cNvPr id="156" name="Shape 156"/>
         <p:cNvGrpSpPr/>
         <p:nvPr/>
       </p:nvGrpSpPr>
@@ -20133,7 +20984,7 @@
       </p:grpSpPr>
       <p:sp>
         <p:nvSpPr>
-          <p:cNvPr id="149" name="Google Shape;149;p32"/>
+          <p:cNvPr id="157" name="Google Shape;157;p33"/>
           <p:cNvSpPr txBox="1"/>
           <p:nvPr>
             <p:ph type="title"/>
@@ -20165,6 +21016,441 @@
             </a:pPr>
             <a:r>
               <a:rPr lang="en"/>
+              <a:t>REPL</a:t>
+            </a:r>
+            <a:endParaRPr/>
+          </a:p>
+        </p:txBody>
+      </p:sp>
+      <p:sp>
+        <p:nvSpPr>
+          <p:cNvPr id="158" name="Google Shape;158;p33"/>
+          <p:cNvSpPr txBox="1"/>
+          <p:nvPr>
+            <p:ph idx="1" type="body"/>
+          </p:nvPr>
+        </p:nvSpPr>
+        <p:spPr>
+          <a:xfrm>
+            <a:off x="0" y="702541"/>
+            <a:ext cx="8520600" cy="6231000"/>
+          </a:xfrm>
+          <a:prstGeom prst="rect">
+            <a:avLst/>
+          </a:prstGeom>
+        </p:spPr>
+        <p:txBody>
+          <a:bodyPr anchorCtr="0" anchor="t" bIns="91425" lIns="91425" spcFirstLastPara="1" rIns="91425" wrap="square" tIns="91425">
+            <a:noAutofit/>
+          </a:bodyPr>
+          <a:lstStyle/>
+          <a:p>
+            <a:pPr indent="0" lvl="0" marL="0" rtl="0" algn="l">
+              <a:spcBef>
+                <a:spcPts val="0"/>
+              </a:spcBef>
+              <a:spcAft>
+                <a:spcPts val="0"/>
+              </a:spcAft>
+              <a:buNone/>
+            </a:pPr>
+            <a:r>
+              <a:rPr b="1" lang="en" sz="1400">
+                <a:latin typeface="Courier New"/>
+                <a:ea typeface="Courier New"/>
+                <a:cs typeface="Courier New"/>
+                <a:sym typeface="Courier New"/>
+              </a:rPr>
+              <a:t>&gt;&gt;&gt; help()</a:t>
+            </a:r>
+            <a:endParaRPr b="1" sz="1400">
+              <a:latin typeface="Courier New"/>
+              <a:ea typeface="Courier New"/>
+              <a:cs typeface="Courier New"/>
+              <a:sym typeface="Courier New"/>
+            </a:endParaRPr>
+          </a:p>
+          <a:p>
+            <a:pPr indent="0" lvl="0" marL="0" rtl="0" algn="l">
+              <a:spcBef>
+                <a:spcPts val="0"/>
+              </a:spcBef>
+              <a:spcAft>
+                <a:spcPts val="0"/>
+              </a:spcAft>
+              <a:buNone/>
+            </a:pPr>
+            <a:r>
+              <a:rPr b="1" lang="en" sz="1400">
+                <a:latin typeface="Courier New"/>
+                <a:ea typeface="Courier New"/>
+                <a:cs typeface="Courier New"/>
+                <a:sym typeface="Courier New"/>
+              </a:rPr>
+              <a:t>Welcome to MicroPython on the micro:bit!</a:t>
+            </a:r>
+            <a:endParaRPr b="1" sz="1400">
+              <a:latin typeface="Courier New"/>
+              <a:ea typeface="Courier New"/>
+              <a:cs typeface="Courier New"/>
+              <a:sym typeface="Courier New"/>
+            </a:endParaRPr>
+          </a:p>
+          <a:p>
+            <a:pPr indent="0" lvl="0" marL="0" rtl="0" algn="l">
+              <a:spcBef>
+                <a:spcPts val="0"/>
+              </a:spcBef>
+              <a:spcAft>
+                <a:spcPts val="0"/>
+              </a:spcAft>
+              <a:buNone/>
+            </a:pPr>
+            <a:r>
+              <a:t/>
+            </a:r>
+            <a:endParaRPr b="1" sz="1400">
+              <a:latin typeface="Courier New"/>
+              <a:ea typeface="Courier New"/>
+              <a:cs typeface="Courier New"/>
+              <a:sym typeface="Courier New"/>
+            </a:endParaRPr>
+          </a:p>
+          <a:p>
+            <a:pPr indent="0" lvl="0" marL="0" rtl="0" algn="l">
+              <a:spcBef>
+                <a:spcPts val="0"/>
+              </a:spcBef>
+              <a:spcAft>
+                <a:spcPts val="0"/>
+              </a:spcAft>
+              <a:buNone/>
+            </a:pPr>
+            <a:r>
+              <a:rPr b="1" lang="en" sz="1400">
+                <a:latin typeface="Courier New"/>
+                <a:ea typeface="Courier New"/>
+                <a:cs typeface="Courier New"/>
+                <a:sym typeface="Courier New"/>
+              </a:rPr>
+              <a:t>Try these commands:</a:t>
+            </a:r>
+            <a:endParaRPr b="1" sz="1400">
+              <a:latin typeface="Courier New"/>
+              <a:ea typeface="Courier New"/>
+              <a:cs typeface="Courier New"/>
+              <a:sym typeface="Courier New"/>
+            </a:endParaRPr>
+          </a:p>
+          <a:p>
+            <a:pPr indent="0" lvl="0" marL="0" rtl="0" algn="l">
+              <a:spcBef>
+                <a:spcPts val="0"/>
+              </a:spcBef>
+              <a:spcAft>
+                <a:spcPts val="0"/>
+              </a:spcAft>
+              <a:buNone/>
+            </a:pPr>
+            <a:r>
+              <a:rPr b="1" lang="en" sz="1400">
+                <a:latin typeface="Courier New"/>
+                <a:ea typeface="Courier New"/>
+                <a:cs typeface="Courier New"/>
+                <a:sym typeface="Courier New"/>
+              </a:rPr>
+              <a:t> display.scroll('Hello')</a:t>
+            </a:r>
+            <a:endParaRPr b="1" sz="1400">
+              <a:latin typeface="Courier New"/>
+              <a:ea typeface="Courier New"/>
+              <a:cs typeface="Courier New"/>
+              <a:sym typeface="Courier New"/>
+            </a:endParaRPr>
+          </a:p>
+          <a:p>
+            <a:pPr indent="0" lvl="0" marL="0" rtl="0" algn="l">
+              <a:spcBef>
+                <a:spcPts val="0"/>
+              </a:spcBef>
+              <a:spcAft>
+                <a:spcPts val="0"/>
+              </a:spcAft>
+              <a:buNone/>
+            </a:pPr>
+            <a:r>
+              <a:rPr b="1" lang="en" sz="1400">
+                <a:latin typeface="Courier New"/>
+                <a:ea typeface="Courier New"/>
+                <a:cs typeface="Courier New"/>
+                <a:sym typeface="Courier New"/>
+              </a:rPr>
+              <a:t> running_time()</a:t>
+            </a:r>
+            <a:endParaRPr b="1" sz="1400">
+              <a:latin typeface="Courier New"/>
+              <a:ea typeface="Courier New"/>
+              <a:cs typeface="Courier New"/>
+              <a:sym typeface="Courier New"/>
+            </a:endParaRPr>
+          </a:p>
+          <a:p>
+            <a:pPr indent="0" lvl="0" marL="0" rtl="0" algn="l">
+              <a:spcBef>
+                <a:spcPts val="0"/>
+              </a:spcBef>
+              <a:spcAft>
+                <a:spcPts val="0"/>
+              </a:spcAft>
+              <a:buNone/>
+            </a:pPr>
+            <a:r>
+              <a:rPr b="1" lang="en" sz="1400">
+                <a:latin typeface="Courier New"/>
+                <a:ea typeface="Courier New"/>
+                <a:cs typeface="Courier New"/>
+                <a:sym typeface="Courier New"/>
+              </a:rPr>
+              <a:t> sleep(1000)</a:t>
+            </a:r>
+            <a:endParaRPr b="1" sz="1400">
+              <a:latin typeface="Courier New"/>
+              <a:ea typeface="Courier New"/>
+              <a:cs typeface="Courier New"/>
+              <a:sym typeface="Courier New"/>
+            </a:endParaRPr>
+          </a:p>
+          <a:p>
+            <a:pPr indent="0" lvl="0" marL="0" rtl="0" algn="l">
+              <a:spcBef>
+                <a:spcPts val="0"/>
+              </a:spcBef>
+              <a:spcAft>
+                <a:spcPts val="0"/>
+              </a:spcAft>
+              <a:buNone/>
+            </a:pPr>
+            <a:r>
+              <a:rPr b="1" lang="en" sz="1400">
+                <a:latin typeface="Courier New"/>
+                <a:ea typeface="Courier New"/>
+                <a:cs typeface="Courier New"/>
+                <a:sym typeface="Courier New"/>
+              </a:rPr>
+              <a:t> button_a.is_pressed()</a:t>
+            </a:r>
+            <a:endParaRPr b="1" sz="1400">
+              <a:latin typeface="Courier New"/>
+              <a:ea typeface="Courier New"/>
+              <a:cs typeface="Courier New"/>
+              <a:sym typeface="Courier New"/>
+            </a:endParaRPr>
+          </a:p>
+          <a:p>
+            <a:pPr indent="0" lvl="0" marL="0" rtl="0" algn="l">
+              <a:spcBef>
+                <a:spcPts val="0"/>
+              </a:spcBef>
+              <a:spcAft>
+                <a:spcPts val="0"/>
+              </a:spcAft>
+              <a:buNone/>
+            </a:pPr>
+            <a:r>
+              <a:t/>
+            </a:r>
+            <a:endParaRPr b="1" sz="1400">
+              <a:latin typeface="Courier New"/>
+              <a:ea typeface="Courier New"/>
+              <a:cs typeface="Courier New"/>
+              <a:sym typeface="Courier New"/>
+            </a:endParaRPr>
+          </a:p>
+          <a:p>
+            <a:pPr indent="0" lvl="0" marL="0" rtl="0" algn="l">
+              <a:spcBef>
+                <a:spcPts val="0"/>
+              </a:spcBef>
+              <a:spcAft>
+                <a:spcPts val="0"/>
+              </a:spcAft>
+              <a:buNone/>
+            </a:pPr>
+            <a:r>
+              <a:rPr b="1" lang="en" sz="1400">
+                <a:latin typeface="Courier New"/>
+                <a:ea typeface="Courier New"/>
+                <a:cs typeface="Courier New"/>
+                <a:sym typeface="Courier New"/>
+              </a:rPr>
+              <a:t>HINT: use the up and down arrow keys to get your command history. </a:t>
+            </a:r>
+            <a:endParaRPr b="1" sz="1400">
+              <a:latin typeface="Courier New"/>
+              <a:ea typeface="Courier New"/>
+              <a:cs typeface="Courier New"/>
+              <a:sym typeface="Courier New"/>
+            </a:endParaRPr>
+          </a:p>
+          <a:p>
+            <a:pPr indent="0" lvl="0" marL="0" rtl="0" algn="l">
+              <a:spcBef>
+                <a:spcPts val="0"/>
+              </a:spcBef>
+              <a:spcAft>
+                <a:spcPts val="0"/>
+              </a:spcAft>
+              <a:buNone/>
+            </a:pPr>
+            <a:r>
+              <a:rPr b="1" lang="en" sz="1400">
+                <a:latin typeface="Courier New"/>
+                <a:ea typeface="Courier New"/>
+                <a:cs typeface="Courier New"/>
+                <a:sym typeface="Courier New"/>
+              </a:rPr>
+              <a:t>Press the TAB key to auto-complete unfinished words </a:t>
+            </a:r>
+            <a:endParaRPr b="1" sz="1400">
+              <a:latin typeface="Courier New"/>
+              <a:ea typeface="Courier New"/>
+              <a:cs typeface="Courier New"/>
+              <a:sym typeface="Courier New"/>
+            </a:endParaRPr>
+          </a:p>
+          <a:p>
+            <a:pPr indent="0" lvl="0" marL="0" rtl="0" algn="l">
+              <a:spcBef>
+                <a:spcPts val="0"/>
+              </a:spcBef>
+              <a:spcAft>
+                <a:spcPts val="0"/>
+              </a:spcAft>
+              <a:buNone/>
+            </a:pPr>
+            <a:r>
+              <a:rPr b="1" lang="en" sz="1400">
+                <a:latin typeface="Courier New"/>
+                <a:ea typeface="Courier New"/>
+                <a:cs typeface="Courier New"/>
+                <a:sym typeface="Courier New"/>
+              </a:rPr>
+              <a:t>(so 'di' becomes 'display' after you press TAB). </a:t>
+            </a:r>
+            <a:endParaRPr b="1" sz="1400">
+              <a:latin typeface="Courier New"/>
+              <a:ea typeface="Courier New"/>
+              <a:cs typeface="Courier New"/>
+              <a:sym typeface="Courier New"/>
+            </a:endParaRPr>
+          </a:p>
+          <a:p>
+            <a:pPr indent="0" lvl="0" marL="0" rtl="0" algn="l">
+              <a:lnSpc>
+                <a:spcPct val="100000"/>
+              </a:lnSpc>
+              <a:spcBef>
+                <a:spcPts val="0"/>
+              </a:spcBef>
+              <a:spcAft>
+                <a:spcPts val="0"/>
+              </a:spcAft>
+              <a:buNone/>
+            </a:pPr>
+            <a:r>
+              <a:t/>
+            </a:r>
+            <a:endParaRPr b="1" sz="1400">
+              <a:latin typeface="Courier New"/>
+              <a:ea typeface="Courier New"/>
+              <a:cs typeface="Courier New"/>
+              <a:sym typeface="Courier New"/>
+            </a:endParaRPr>
+          </a:p>
+          <a:p>
+            <a:pPr indent="0" lvl="0" marL="0" rtl="0" algn="l">
+              <a:lnSpc>
+                <a:spcPct val="100000"/>
+              </a:lnSpc>
+              <a:spcBef>
+                <a:spcPts val="0"/>
+              </a:spcBef>
+              <a:spcAft>
+                <a:spcPts val="0"/>
+              </a:spcAft>
+              <a:buNone/>
+            </a:pPr>
+            <a:r>
+              <a:t/>
+            </a:r>
+            <a:endParaRPr b="1" sz="1400">
+              <a:latin typeface="Courier New"/>
+              <a:ea typeface="Courier New"/>
+              <a:cs typeface="Courier New"/>
+              <a:sym typeface="Courier New"/>
+            </a:endParaRPr>
+          </a:p>
+        </p:txBody>
+      </p:sp>
+    </p:spTree>
+  </p:cSld>
+  <p:clrMapOvr>
+    <a:masterClrMapping/>
+  </p:clrMapOvr>
+</p:sld>
+</file>
+
+<file path=ppt/slides/slide9.xml><?xml version="1.0" encoding="utf-8"?>
+<p:sld xmlns:a="http://schemas.openxmlformats.org/drawingml/2006/main" xmlns:r="http://schemas.openxmlformats.org/officeDocument/2006/relationships" xmlns:mc="http://schemas.openxmlformats.org/markup-compatibility/2006" xmlns:mv="urn:schemas-microsoft-com:mac:vml" xmlns:p="http://schemas.openxmlformats.org/presentationml/2006/main" xmlns:c="http://schemas.openxmlformats.org/drawingml/2006/chart" xmlns:dgm="http://schemas.openxmlformats.org/drawingml/2006/diagram" xmlns:o="urn:schemas-microsoft-com:office:office" xmlns:v="urn:schemas-microsoft-com:vml" xmlns:pvml="urn:schemas-microsoft-com:office:powerpoint" xmlns:com="http://schemas.openxmlformats.org/drawingml/2006/compatibility" xmlns:p14="http://schemas.microsoft.com/office/powerpoint/2010/main" xmlns:p15="http://schemas.microsoft.com/office/powerpoint/2012/main" xmlns:ahyp="http://schemas.microsoft.com/office/drawing/2018/hyperlinkcolor">
+  <p:cSld>
+    <p:spTree>
+      <p:nvGrpSpPr>
+        <p:cNvPr id="162" name="Shape 162"/>
+        <p:cNvGrpSpPr/>
+        <p:nvPr/>
+      </p:nvGrpSpPr>
+      <p:grpSpPr>
+        <a:xfrm>
+          <a:off x="0" y="0"/>
+          <a:ext cx="0" cy="0"/>
+          <a:chOff x="0" y="0"/>
+          <a:chExt cx="0" cy="0"/>
+        </a:xfrm>
+      </p:grpSpPr>
+      <p:sp>
+        <p:nvSpPr>
+          <p:cNvPr id="163" name="Google Shape;163;p34"/>
+          <p:cNvSpPr txBox="1"/>
+          <p:nvPr>
+            <p:ph type="title"/>
+          </p:nvPr>
+        </p:nvSpPr>
+        <p:spPr>
+          <a:xfrm>
+            <a:off x="0" y="0"/>
+            <a:ext cx="8520600" cy="572700"/>
+          </a:xfrm>
+          <a:prstGeom prst="rect">
+            <a:avLst/>
+          </a:prstGeom>
+        </p:spPr>
+        <p:txBody>
+          <a:bodyPr anchorCtr="0" anchor="t" bIns="91425" lIns="91425" spcFirstLastPara="1" rIns="91425" wrap="square" tIns="91425">
+            <a:noAutofit/>
+          </a:bodyPr>
+          <a:lstStyle/>
+          <a:p>
+            <a:pPr indent="0" lvl="0" marL="0" rtl="0" algn="l">
+              <a:spcBef>
+                <a:spcPts val="0"/>
+              </a:spcBef>
+              <a:spcAft>
+                <a:spcPts val="0"/>
+              </a:spcAft>
+              <a:buNone/>
+            </a:pPr>
+            <a:r>
+              <a:rPr lang="en"/>
               <a:t>Python Basics in the REPL- Variables</a:t>
             </a:r>
             <a:endParaRPr/>
@@ -20173,7 +21459,7 @@
       </p:sp>
       <p:sp>
         <p:nvSpPr>
-          <p:cNvPr id="150" name="Google Shape;150;p32"/>
+          <p:cNvPr id="164" name="Google Shape;164;p34"/>
           <p:cNvSpPr txBox="1"/>
           <p:nvPr>
             <p:ph idx="1" type="body"/>
@@ -20674,7 +21960,7 @@
       </p:sp>
       <p:cxnSp>
         <p:nvCxnSpPr>
-          <p:cNvPr id="151" name="Google Shape;151;p32"/>
+          <p:cNvPr id="165" name="Google Shape;165;p34"/>
           <p:cNvCxnSpPr/>
           <p:nvPr/>
         </p:nvCxnSpPr>
@@ -20700,7 +21986,7 @@
       </p:cxnSp>
       <p:sp>
         <p:nvSpPr>
-          <p:cNvPr id="152" name="Google Shape;152;p32"/>
+          <p:cNvPr id="166" name="Google Shape;166;p34"/>
           <p:cNvSpPr txBox="1"/>
           <p:nvPr/>
         </p:nvSpPr>
@@ -20766,7 +22052,7 @@
       </p:sp>
       <p:sp>
         <p:nvSpPr>
-          <p:cNvPr id="153" name="Google Shape;153;p32"/>
+          <p:cNvPr id="167" name="Google Shape;167;p34"/>
           <p:cNvSpPr/>
           <p:nvPr/>
         </p:nvSpPr>
@@ -20813,7 +22099,7 @@
       </p:sp>
       <p:cxnSp>
         <p:nvCxnSpPr>
-          <p:cNvPr id="154" name="Google Shape;154;p32"/>
+          <p:cNvPr id="168" name="Google Shape;168;p34"/>
           <p:cNvCxnSpPr/>
           <p:nvPr/>
         </p:nvCxnSpPr>
@@ -20839,7 +22125,7 @@
       </p:cxnSp>
       <p:sp>
         <p:nvSpPr>
-          <p:cNvPr id="155" name="Google Shape;155;p32"/>
+          <p:cNvPr id="169" name="Google Shape;169;p34"/>
           <p:cNvSpPr txBox="1"/>
           <p:nvPr/>
         </p:nvSpPr>
@@ -20889,7 +22175,7 @@
       </p:sp>
       <p:sp>
         <p:nvSpPr>
-          <p:cNvPr id="156" name="Google Shape;156;p32"/>
+          <p:cNvPr id="170" name="Google Shape;170;p34"/>
           <p:cNvSpPr/>
           <p:nvPr/>
         </p:nvSpPr>
@@ -20936,7 +22222,7 @@
       </p:sp>
       <p:cxnSp>
         <p:nvCxnSpPr>
-          <p:cNvPr id="157" name="Google Shape;157;p32"/>
+          <p:cNvPr id="171" name="Google Shape;171;p34"/>
           <p:cNvCxnSpPr/>
           <p:nvPr/>
         </p:nvCxnSpPr>
@@ -20962,7 +22248,7 @@
       </p:cxnSp>
       <p:sp>
         <p:nvSpPr>
-          <p:cNvPr id="158" name="Google Shape;158;p32"/>
+          <p:cNvPr id="172" name="Google Shape;172;p34"/>
           <p:cNvSpPr txBox="1"/>
           <p:nvPr/>
         </p:nvSpPr>
@@ -21012,7 +22298,7 @@
       </p:sp>
       <p:sp>
         <p:nvSpPr>
-          <p:cNvPr id="159" name="Google Shape;159;p32"/>
+          <p:cNvPr id="173" name="Google Shape;173;p34"/>
           <p:cNvSpPr/>
           <p:nvPr/>
         </p:nvSpPr>
@@ -21065,462 +22351,45 @@
 </p:sld>
 </file>
 
-<file path=ppt/slides/slide9.xml><?xml version="1.0" encoding="utf-8"?>
-<p:sld xmlns:a="http://schemas.openxmlformats.org/drawingml/2006/main" xmlns:r="http://schemas.openxmlformats.org/officeDocument/2006/relationships" xmlns:mc="http://schemas.openxmlformats.org/markup-compatibility/2006" xmlns:mv="urn:schemas-microsoft-com:mac:vml" xmlns:p="http://schemas.openxmlformats.org/presentationml/2006/main" xmlns:c="http://schemas.openxmlformats.org/drawingml/2006/chart" xmlns:dgm="http://schemas.openxmlformats.org/drawingml/2006/diagram" xmlns:o="urn:schemas-microsoft-com:office:office" xmlns:v="urn:schemas-microsoft-com:vml" xmlns:pvml="urn:schemas-microsoft-com:office:powerpoint" xmlns:com="http://schemas.openxmlformats.org/drawingml/2006/compatibility" xmlns:p14="http://schemas.microsoft.com/office/powerpoint/2010/main" xmlns:p15="http://schemas.microsoft.com/office/powerpoint/2012/main" xmlns:ahyp="http://schemas.microsoft.com/office/drawing/2018/hyperlinkcolor">
-  <p:cSld>
-    <p:spTree>
-      <p:nvGrpSpPr>
-        <p:cNvPr id="163" name="Shape 163"/>
-        <p:cNvGrpSpPr/>
-        <p:nvPr/>
-      </p:nvGrpSpPr>
-      <p:grpSpPr>
-        <a:xfrm>
-          <a:off x="0" y="0"/>
-          <a:ext cx="0" cy="0"/>
-          <a:chOff x="0" y="0"/>
-          <a:chExt cx="0" cy="0"/>
-        </a:xfrm>
-      </p:grpSpPr>
-      <p:sp>
-        <p:nvSpPr>
-          <p:cNvPr id="164" name="Google Shape;164;p33"/>
-          <p:cNvSpPr txBox="1"/>
-          <p:nvPr>
-            <p:ph type="title"/>
-          </p:nvPr>
-        </p:nvSpPr>
-        <p:spPr>
-          <a:xfrm>
-            <a:off x="0" y="0"/>
-            <a:ext cx="8520600" cy="572700"/>
-          </a:xfrm>
-          <a:prstGeom prst="rect">
-            <a:avLst/>
-          </a:prstGeom>
-        </p:spPr>
-        <p:txBody>
-          <a:bodyPr anchorCtr="0" anchor="t" bIns="91425" lIns="91425" spcFirstLastPara="1" rIns="91425" wrap="square" tIns="91425">
-            <a:noAutofit/>
-          </a:bodyPr>
-          <a:lstStyle/>
-          <a:p>
-            <a:pPr indent="0" lvl="0" marL="0" rtl="0" algn="l">
-              <a:spcBef>
-                <a:spcPts val="0"/>
-              </a:spcBef>
-              <a:spcAft>
-                <a:spcPts val="0"/>
-              </a:spcAft>
-              <a:buNone/>
-            </a:pPr>
-            <a:r>
-              <a:rPr lang="en"/>
-              <a:t>Python Basics in the REPL- Libraries</a:t>
-            </a:r>
-            <a:endParaRPr/>
-          </a:p>
-        </p:txBody>
-      </p:sp>
-      <p:pic>
-        <p:nvPicPr>
-          <p:cNvPr id="165" name="Google Shape;165;p33"/>
-          <p:cNvPicPr preferRelativeResize="0"/>
-          <p:nvPr/>
-        </p:nvPicPr>
-        <p:blipFill>
-          <a:blip r:embed="rId3">
-            <a:alphaModFix/>
-          </a:blip>
-          <a:stretch>
-            <a:fillRect/>
-          </a:stretch>
-        </p:blipFill>
-        <p:spPr>
-          <a:xfrm>
-            <a:off x="4630200" y="696600"/>
-            <a:ext cx="3301574" cy="3301574"/>
-          </a:xfrm>
-          <a:prstGeom prst="rect">
-            <a:avLst/>
-          </a:prstGeom>
-          <a:noFill/>
-          <a:ln>
-            <a:noFill/>
-          </a:ln>
-        </p:spPr>
-      </p:pic>
-      <p:sp>
-        <p:nvSpPr>
-          <p:cNvPr id="166" name="Google Shape;166;p33"/>
-          <p:cNvSpPr txBox="1"/>
-          <p:nvPr/>
-        </p:nvSpPr>
-        <p:spPr>
-          <a:xfrm rot="-1459944">
-            <a:off x="6402738" y="2197131"/>
-            <a:ext cx="1759824" cy="461606"/>
-          </a:xfrm>
-          <a:prstGeom prst="rect">
-            <a:avLst/>
-          </a:prstGeom>
-          <a:noFill/>
-          <a:ln>
-            <a:noFill/>
-          </a:ln>
-        </p:spPr>
-        <p:txBody>
-          <a:bodyPr anchorCtr="0" anchor="t" bIns="91425" lIns="91425" spcFirstLastPara="1" rIns="91425" wrap="square" tIns="91425">
-            <a:spAutoFit/>
-          </a:bodyPr>
-          <a:lstStyle/>
-          <a:p>
-            <a:pPr indent="0" lvl="0" marL="0" rtl="0" algn="l">
-              <a:spcBef>
-                <a:spcPts val="0"/>
-              </a:spcBef>
-              <a:spcAft>
-                <a:spcPts val="0"/>
-              </a:spcAft>
-              <a:buNone/>
-            </a:pPr>
-            <a:r>
-              <a:rPr b="1" lang="en" sz="1800">
-                <a:solidFill>
-                  <a:srgbClr val="FFFFFF"/>
-                </a:solidFill>
-                <a:latin typeface="Proxima Nova"/>
-                <a:ea typeface="Proxima Nova"/>
-                <a:cs typeface="Proxima Nova"/>
-                <a:sym typeface="Proxima Nova"/>
-              </a:rPr>
-              <a:t>LED’s</a:t>
-            </a:r>
-            <a:endParaRPr b="1" sz="1800">
-              <a:solidFill>
-                <a:srgbClr val="FFFFFF"/>
-              </a:solidFill>
-              <a:latin typeface="Proxima Nova"/>
-              <a:ea typeface="Proxima Nova"/>
-              <a:cs typeface="Proxima Nova"/>
-              <a:sym typeface="Proxima Nova"/>
-            </a:endParaRPr>
-          </a:p>
-        </p:txBody>
-      </p:sp>
-      <p:sp>
-        <p:nvSpPr>
-          <p:cNvPr id="167" name="Google Shape;167;p33"/>
-          <p:cNvSpPr txBox="1"/>
-          <p:nvPr/>
-        </p:nvSpPr>
-        <p:spPr>
-          <a:xfrm>
-            <a:off x="398075" y="1016125"/>
-            <a:ext cx="4232100" cy="3232500"/>
-          </a:xfrm>
-          <a:prstGeom prst="rect">
-            <a:avLst/>
-          </a:prstGeom>
-          <a:noFill/>
-          <a:ln>
-            <a:noFill/>
-          </a:ln>
-        </p:spPr>
-        <p:txBody>
-          <a:bodyPr anchorCtr="0" anchor="t" bIns="91425" lIns="91425" spcFirstLastPara="1" rIns="91425" wrap="square" tIns="91425">
-            <a:spAutoFit/>
-          </a:bodyPr>
-          <a:lstStyle/>
-          <a:p>
-            <a:pPr indent="-342900" lvl="0" marL="457200" rtl="0" algn="l">
-              <a:spcBef>
-                <a:spcPts val="0"/>
-              </a:spcBef>
-              <a:spcAft>
-                <a:spcPts val="0"/>
-              </a:spcAft>
-              <a:buSzPts val="1800"/>
-              <a:buFont typeface="Proxima Nova"/>
-              <a:buChar char="●"/>
-            </a:pPr>
-            <a:r>
-              <a:rPr lang="en" sz="1800">
-                <a:latin typeface="Proxima Nova"/>
-                <a:ea typeface="Proxima Nova"/>
-                <a:cs typeface="Proxima Nova"/>
-                <a:sym typeface="Proxima Nova"/>
-              </a:rPr>
-              <a:t>Libraries are collections of programs written by others, that make things easier to duplicate.</a:t>
-            </a:r>
-            <a:endParaRPr sz="1800">
-              <a:latin typeface="Proxima Nova"/>
-              <a:ea typeface="Proxima Nova"/>
-              <a:cs typeface="Proxima Nova"/>
-              <a:sym typeface="Proxima Nova"/>
-            </a:endParaRPr>
-          </a:p>
-          <a:p>
-            <a:pPr indent="0" lvl="0" marL="457200" rtl="0" algn="l">
-              <a:spcBef>
-                <a:spcPts val="0"/>
-              </a:spcBef>
-              <a:spcAft>
-                <a:spcPts val="0"/>
-              </a:spcAft>
-              <a:buNone/>
-            </a:pPr>
-            <a:r>
-              <a:t/>
-            </a:r>
-            <a:endParaRPr sz="1800">
-              <a:latin typeface="Proxima Nova"/>
-              <a:ea typeface="Proxima Nova"/>
-              <a:cs typeface="Proxima Nova"/>
-              <a:sym typeface="Proxima Nova"/>
-            </a:endParaRPr>
-          </a:p>
-          <a:p>
-            <a:pPr indent="-342900" lvl="0" marL="457200" rtl="0" algn="l">
-              <a:spcBef>
-                <a:spcPts val="0"/>
-              </a:spcBef>
-              <a:spcAft>
-                <a:spcPts val="0"/>
-              </a:spcAft>
-              <a:buSzPts val="1800"/>
-              <a:buFont typeface="Proxima Nova"/>
-              <a:buChar char="●"/>
-            </a:pPr>
-            <a:r>
-              <a:rPr lang="en" sz="1800">
-                <a:latin typeface="Proxima Nova"/>
-                <a:ea typeface="Proxima Nova"/>
-                <a:cs typeface="Proxima Nova"/>
-                <a:sym typeface="Proxima Nova"/>
-              </a:rPr>
-              <a:t>A library can hold either one or many routines that we call by name inside them.</a:t>
-            </a:r>
-            <a:endParaRPr sz="1800">
-              <a:latin typeface="Proxima Nova"/>
-              <a:ea typeface="Proxima Nova"/>
-              <a:cs typeface="Proxima Nova"/>
-              <a:sym typeface="Proxima Nova"/>
-            </a:endParaRPr>
-          </a:p>
-          <a:p>
-            <a:pPr indent="0" lvl="0" marL="457200" rtl="0" algn="l">
-              <a:spcBef>
-                <a:spcPts val="0"/>
-              </a:spcBef>
-              <a:spcAft>
-                <a:spcPts val="0"/>
-              </a:spcAft>
-              <a:buNone/>
-            </a:pPr>
-            <a:r>
-              <a:t/>
-            </a:r>
-            <a:endParaRPr sz="1800">
-              <a:latin typeface="Proxima Nova"/>
-              <a:ea typeface="Proxima Nova"/>
-              <a:cs typeface="Proxima Nova"/>
-              <a:sym typeface="Proxima Nova"/>
-            </a:endParaRPr>
-          </a:p>
-          <a:p>
-            <a:pPr indent="-342900" lvl="0" marL="457200" rtl="0" algn="l">
-              <a:spcBef>
-                <a:spcPts val="0"/>
-              </a:spcBef>
-              <a:spcAft>
-                <a:spcPts val="0"/>
-              </a:spcAft>
-              <a:buSzPts val="1800"/>
-              <a:buFont typeface="Proxima Nova"/>
-              <a:buChar char="●"/>
-            </a:pPr>
-            <a:r>
-              <a:rPr lang="en" sz="1800">
-                <a:latin typeface="Proxima Nova"/>
-                <a:ea typeface="Proxima Nova"/>
-                <a:cs typeface="Proxima Nova"/>
-                <a:sym typeface="Proxima Nova"/>
-              </a:rPr>
-              <a:t>When we want to use a library, we need to “check it out” and bring it into our program.</a:t>
-            </a:r>
-            <a:endParaRPr sz="1800">
-              <a:latin typeface="Proxima Nova"/>
-              <a:ea typeface="Proxima Nova"/>
-              <a:cs typeface="Proxima Nova"/>
-              <a:sym typeface="Proxima Nova"/>
-            </a:endParaRPr>
-          </a:p>
-        </p:txBody>
-      </p:sp>
-      <p:sp>
-        <p:nvSpPr>
-          <p:cNvPr id="168" name="Google Shape;168;p33"/>
-          <p:cNvSpPr txBox="1"/>
-          <p:nvPr/>
-        </p:nvSpPr>
-        <p:spPr>
-          <a:xfrm rot="-5400000">
-            <a:off x="4924625" y="2401524"/>
-            <a:ext cx="1375500" cy="461700"/>
-          </a:xfrm>
-          <a:prstGeom prst="rect">
-            <a:avLst/>
-          </a:prstGeom>
-          <a:noFill/>
-          <a:ln>
-            <a:noFill/>
-          </a:ln>
-        </p:spPr>
-        <p:txBody>
-          <a:bodyPr anchorCtr="0" anchor="t" bIns="91425" lIns="91425" spcFirstLastPara="1" rIns="91425" wrap="square" tIns="91425">
-            <a:spAutoFit/>
-          </a:bodyPr>
-          <a:lstStyle/>
-          <a:p>
-            <a:pPr indent="0" lvl="0" marL="0" rtl="0" algn="l">
-              <a:spcBef>
-                <a:spcPts val="0"/>
-              </a:spcBef>
-              <a:spcAft>
-                <a:spcPts val="0"/>
-              </a:spcAft>
-              <a:buNone/>
-            </a:pPr>
-            <a:r>
-              <a:rPr b="1" lang="en" sz="1800">
-                <a:solidFill>
-                  <a:srgbClr val="FFFFFF"/>
-                </a:solidFill>
-                <a:latin typeface="Proxima Nova"/>
-                <a:ea typeface="Proxima Nova"/>
-                <a:cs typeface="Proxima Nova"/>
-                <a:sym typeface="Proxima Nova"/>
-              </a:rPr>
-              <a:t>Buttons</a:t>
-            </a:r>
-            <a:endParaRPr b="1" sz="1800">
-              <a:solidFill>
-                <a:srgbClr val="FFFFFF"/>
-              </a:solidFill>
-              <a:latin typeface="Proxima Nova"/>
-              <a:ea typeface="Proxima Nova"/>
-              <a:cs typeface="Proxima Nova"/>
-              <a:sym typeface="Proxima Nova"/>
-            </a:endParaRPr>
-          </a:p>
-        </p:txBody>
-      </p:sp>
-      <p:sp>
-        <p:nvSpPr>
-          <p:cNvPr id="169" name="Google Shape;169;p33"/>
-          <p:cNvSpPr txBox="1"/>
-          <p:nvPr/>
-        </p:nvSpPr>
-        <p:spPr>
-          <a:xfrm rot="-5400000">
-            <a:off x="4462925" y="1998724"/>
-            <a:ext cx="1375500" cy="461700"/>
-          </a:xfrm>
-          <a:prstGeom prst="rect">
-            <a:avLst/>
-          </a:prstGeom>
-          <a:noFill/>
-          <a:ln>
-            <a:noFill/>
-          </a:ln>
-        </p:spPr>
-        <p:txBody>
-          <a:bodyPr anchorCtr="0" anchor="t" bIns="91425" lIns="91425" spcFirstLastPara="1" rIns="91425" wrap="square" tIns="91425">
-            <a:spAutoFit/>
-          </a:bodyPr>
-          <a:lstStyle/>
-          <a:p>
-            <a:pPr indent="0" lvl="0" marL="0" rtl="0" algn="l">
-              <a:spcBef>
-                <a:spcPts val="0"/>
-              </a:spcBef>
-              <a:spcAft>
-                <a:spcPts val="0"/>
-              </a:spcAft>
-              <a:buNone/>
-            </a:pPr>
-            <a:r>
-              <a:rPr b="1" lang="en" sz="1800">
-                <a:solidFill>
-                  <a:srgbClr val="FFFFFF"/>
-                </a:solidFill>
-                <a:latin typeface="Proxima Nova"/>
-                <a:ea typeface="Proxima Nova"/>
-                <a:cs typeface="Proxima Nova"/>
-                <a:sym typeface="Proxima Nova"/>
-              </a:rPr>
-              <a:t>Display</a:t>
-            </a:r>
-            <a:endParaRPr b="1" sz="1800">
-              <a:solidFill>
-                <a:srgbClr val="FFFFFF"/>
-              </a:solidFill>
-              <a:latin typeface="Proxima Nova"/>
-              <a:ea typeface="Proxima Nova"/>
-              <a:cs typeface="Proxima Nova"/>
-              <a:sym typeface="Proxima Nova"/>
-            </a:endParaRPr>
-          </a:p>
-        </p:txBody>
-      </p:sp>
-    </p:spTree>
-  </p:cSld>
-  <p:clrMapOvr>
-    <a:masterClrMapping/>
-  </p:clrMapOvr>
-</p:sld>
-</file>
-
 <file path=ppt/theme/theme1.xml><?xml version="1.0" encoding="utf-8"?>
-<a:theme xmlns:a="http://schemas.openxmlformats.org/drawingml/2006/main" xmlns:r="http://schemas.openxmlformats.org/officeDocument/2006/relationships">
+<a:theme xmlns:a="http://schemas.openxmlformats.org/drawingml/2006/main" xmlns:r="http://schemas.openxmlformats.org/officeDocument/2006/relationships" name="Spearmint">
   <a:themeElements>
-    <a:clrScheme name="Default">
+    <a:clrScheme name="Spearmint">
       <a:dk1>
-        <a:srgbClr val="000000"/>
+        <a:srgbClr val="202729"/>
       </a:dk1>
       <a:lt1>
         <a:srgbClr val="FFFFFF"/>
       </a:lt1>
       <a:dk2>
-        <a:srgbClr val="158158"/>
+        <a:srgbClr val="4BA173"/>
       </a:dk2>
       <a:lt2>
-        <a:srgbClr val="F3F3F3"/>
+        <a:srgbClr val="63D297"/>
       </a:lt2>
       <a:accent1>
-        <a:srgbClr val="058DC7"/>
+        <a:srgbClr val="353744"/>
       </a:accent1>
       <a:accent2>
-        <a:srgbClr val="50B432"/>
+        <a:srgbClr val="424242"/>
       </a:accent2>
       <a:accent3>
-        <a:srgbClr val="ED561B"/>
+        <a:srgbClr val="616161"/>
       </a:accent3>
       <a:accent4>
-        <a:srgbClr val="EDEF00"/>
+        <a:srgbClr val="999999"/>
       </a:accent4>
       <a:accent5>
-        <a:srgbClr val="24CBE5"/>
+        <a:srgbClr val="FF5252"/>
       </a:accent5>
       <a:accent6>
-        <a:srgbClr val="64E572"/>
+        <a:srgbClr val="FFF176"/>
       </a:accent6>
       <a:hlink>
-        <a:srgbClr val="2200CC"/>
+        <a:srgbClr val="FF5252"/>
       </a:hlink>
       <a:folHlink>
-        <a:srgbClr val="551A8B"/>
+        <a:srgbClr val="FF5252"/>
       </a:folHlink>
     </a:clrScheme>
     <a:fontScheme name="Office">
@@ -21762,44 +22631,44 @@
 </file>
 
 <file path=ppt/theme/theme2.xml><?xml version="1.0" encoding="utf-8"?>
-<a:theme xmlns:a="http://schemas.openxmlformats.org/drawingml/2006/main" xmlns:r="http://schemas.openxmlformats.org/officeDocument/2006/relationships" name="Spearmint">
+<a:theme xmlns:a="http://schemas.openxmlformats.org/drawingml/2006/main" xmlns:r="http://schemas.openxmlformats.org/officeDocument/2006/relationships">
   <a:themeElements>
-    <a:clrScheme name="Spearmint">
+    <a:clrScheme name="Default">
       <a:dk1>
-        <a:srgbClr val="202729"/>
+        <a:srgbClr val="000000"/>
       </a:dk1>
       <a:lt1>
         <a:srgbClr val="FFFFFF"/>
       </a:lt1>
       <a:dk2>
-        <a:srgbClr val="4BA173"/>
+        <a:srgbClr val="158158"/>
       </a:dk2>
       <a:lt2>
-        <a:srgbClr val="63D297"/>
+        <a:srgbClr val="F3F3F3"/>
       </a:lt2>
       <a:accent1>
-        <a:srgbClr val="353744"/>
+        <a:srgbClr val="058DC7"/>
       </a:accent1>
       <a:accent2>
-        <a:srgbClr val="424242"/>
+        <a:srgbClr val="50B432"/>
       </a:accent2>
       <a:accent3>
-        <a:srgbClr val="616161"/>
+        <a:srgbClr val="ED561B"/>
       </a:accent3>
       <a:accent4>
-        <a:srgbClr val="999999"/>
+        <a:srgbClr val="EDEF00"/>
       </a:accent4>
       <a:accent5>
-        <a:srgbClr val="FF5252"/>
+        <a:srgbClr val="24CBE5"/>
       </a:accent5>
       <a:accent6>
-        <a:srgbClr val="FFF176"/>
+        <a:srgbClr val="64E572"/>
       </a:accent6>
       <a:hlink>
-        <a:srgbClr val="FF5252"/>
+        <a:srgbClr val="2200CC"/>
       </a:hlink>
       <a:folHlink>
-        <a:srgbClr val="FF5252"/>
+        <a:srgbClr val="551A8B"/>
       </a:folHlink>
     </a:clrScheme>
     <a:fontScheme name="Office">

--- a/presentations/REPL v3.pptx
+++ b/presentations/REPL v3.pptx
@@ -816,7 +816,7 @@
   <p:cSld>
     <p:spTree>
       <p:nvGrpSpPr>
-        <p:cNvPr id="174" name="Shape 174"/>
+        <p:cNvPr id="178" name="Shape 178"/>
         <p:cNvGrpSpPr/>
         <p:nvPr/>
       </p:nvGrpSpPr>
@@ -830,7 +830,7 @@
       </p:grpSpPr>
       <p:sp>
         <p:nvSpPr>
-          <p:cNvPr id="175" name="Google Shape;175;gb8acfec02f_0_14:notes"/>
+          <p:cNvPr id="179" name="Google Shape;179;gb8acfec02f_0_14:notes"/>
           <p:cNvSpPr/>
           <p:nvPr>
             <p:ph idx="2" type="sldImg"/>
@@ -865,7 +865,7 @@
       </p:sp>
       <p:sp>
         <p:nvSpPr>
-          <p:cNvPr id="176" name="Google Shape;176;gb8acfec02f_0_14:notes"/>
+          <p:cNvPr id="180" name="Google Shape;180;gb8acfec02f_0_14:notes"/>
           <p:cNvSpPr txBox="1"/>
           <p:nvPr>
             <p:ph idx="1" type="body"/>
@@ -915,7 +915,7 @@
   <p:cSld>
     <p:spTree>
       <p:nvGrpSpPr>
-        <p:cNvPr id="184" name="Shape 184"/>
+        <p:cNvPr id="188" name="Shape 188"/>
         <p:cNvGrpSpPr/>
         <p:nvPr/>
       </p:nvGrpSpPr>
@@ -929,7 +929,7 @@
       </p:grpSpPr>
       <p:sp>
         <p:nvSpPr>
-          <p:cNvPr id="185" name="Google Shape;185;g20c89bfe95e_0_0:notes"/>
+          <p:cNvPr id="189" name="Google Shape;189;g20c89bfe95e_0_0:notes"/>
           <p:cNvSpPr/>
           <p:nvPr>
             <p:ph idx="2" type="sldImg"/>
@@ -964,7 +964,7 @@
       </p:sp>
       <p:sp>
         <p:nvSpPr>
-          <p:cNvPr id="186" name="Google Shape;186;g20c89bfe95e_0_0:notes"/>
+          <p:cNvPr id="190" name="Google Shape;190;g20c89bfe95e_0_0:notes"/>
           <p:cNvSpPr txBox="1"/>
           <p:nvPr>
             <p:ph idx="1" type="body"/>
@@ -1014,7 +1014,7 @@
   <p:cSld>
     <p:spTree>
       <p:nvGrpSpPr>
-        <p:cNvPr id="197" name="Shape 197"/>
+        <p:cNvPr id="201" name="Shape 201"/>
         <p:cNvGrpSpPr/>
         <p:nvPr/>
       </p:nvGrpSpPr>
@@ -1028,7 +1028,7 @@
       </p:grpSpPr>
       <p:sp>
         <p:nvSpPr>
-          <p:cNvPr id="198" name="Google Shape;198;g3dd07ce15c2_0_12:notes"/>
+          <p:cNvPr id="202" name="Google Shape;202;g3dd07ce15c2_0_12:notes"/>
           <p:cNvSpPr/>
           <p:nvPr>
             <p:ph idx="2" type="sldImg"/>
@@ -1063,7 +1063,7 @@
       </p:sp>
       <p:sp>
         <p:nvSpPr>
-          <p:cNvPr id="199" name="Google Shape;199;g3dd07ce15c2_0_12:notes"/>
+          <p:cNvPr id="203" name="Google Shape;203;g3dd07ce15c2_0_12:notes"/>
           <p:cNvSpPr txBox="1"/>
           <p:nvPr>
             <p:ph idx="1" type="body"/>
@@ -1102,7 +1102,7 @@
       </p:sp>
       <p:sp>
         <p:nvSpPr>
-          <p:cNvPr id="200" name="Google Shape;200;g3dd07ce15c2_0_12:notes"/>
+          <p:cNvPr id="204" name="Google Shape;204;g3dd07ce15c2_0_12:notes"/>
           <p:cNvSpPr txBox="1"/>
           <p:nvPr>
             <p:ph idx="12" type="sldNum"/>
@@ -1157,7 +1157,7 @@
   <p:cSld>
     <p:spTree>
       <p:nvGrpSpPr>
-        <p:cNvPr id="207" name="Shape 207"/>
+        <p:cNvPr id="211" name="Shape 211"/>
         <p:cNvGrpSpPr/>
         <p:nvPr/>
       </p:nvGrpSpPr>
@@ -1171,7 +1171,7 @@
       </p:grpSpPr>
       <p:sp>
         <p:nvSpPr>
-          <p:cNvPr id="208" name="Google Shape;208;g3dd07ce15c2_0_21:notes"/>
+          <p:cNvPr id="212" name="Google Shape;212;g3dd07ce15c2_0_21:notes"/>
           <p:cNvSpPr/>
           <p:nvPr>
             <p:ph idx="2" type="sldImg"/>
@@ -1206,7 +1206,7 @@
       </p:sp>
       <p:sp>
         <p:nvSpPr>
-          <p:cNvPr id="209" name="Google Shape;209;g3dd07ce15c2_0_21:notes"/>
+          <p:cNvPr id="213" name="Google Shape;213;g3dd07ce15c2_0_21:notes"/>
           <p:cNvSpPr txBox="1"/>
           <p:nvPr>
             <p:ph idx="1" type="body"/>
@@ -1245,7 +1245,7 @@
       </p:sp>
       <p:sp>
         <p:nvSpPr>
-          <p:cNvPr id="210" name="Google Shape;210;g3dd07ce15c2_0_21:notes"/>
+          <p:cNvPr id="214" name="Google Shape;214;g3dd07ce15c2_0_21:notes"/>
           <p:cNvSpPr txBox="1"/>
           <p:nvPr>
             <p:ph idx="12" type="sldNum"/>
@@ -1300,7 +1300,7 @@
   <p:cSld>
     <p:spTree>
       <p:nvGrpSpPr>
-        <p:cNvPr id="217" name="Shape 217"/>
+        <p:cNvPr id="221" name="Shape 221"/>
         <p:cNvGrpSpPr/>
         <p:nvPr/>
       </p:nvGrpSpPr>
@@ -1314,7 +1314,7 @@
       </p:grpSpPr>
       <p:sp>
         <p:nvSpPr>
-          <p:cNvPr id="218" name="Google Shape;218;g20c89bfe95e_0_12:notes"/>
+          <p:cNvPr id="222" name="Google Shape;222;g20c89bfe95e_0_12:notes"/>
           <p:cNvSpPr/>
           <p:nvPr>
             <p:ph idx="2" type="sldImg"/>
@@ -1349,7 +1349,7 @@
       </p:sp>
       <p:sp>
         <p:nvSpPr>
-          <p:cNvPr id="219" name="Google Shape;219;g20c89bfe95e_0_12:notes"/>
+          <p:cNvPr id="223" name="Google Shape;223;g20c89bfe95e_0_12:notes"/>
           <p:cNvSpPr txBox="1"/>
           <p:nvPr>
             <p:ph idx="1" type="body"/>
@@ -1399,7 +1399,7 @@
   <p:cSld>
     <p:spTree>
       <p:nvGrpSpPr>
-        <p:cNvPr id="230" name="Shape 230"/>
+        <p:cNvPr id="234" name="Shape 234"/>
         <p:cNvGrpSpPr/>
         <p:nvPr/>
       </p:nvGrpSpPr>
@@ -1413,7 +1413,7 @@
       </p:grpSpPr>
       <p:sp>
         <p:nvSpPr>
-          <p:cNvPr id="231" name="Google Shape;231;g446a604d95_0_5:notes"/>
+          <p:cNvPr id="235" name="Google Shape;235;g446a604d95_0_5:notes"/>
           <p:cNvSpPr/>
           <p:nvPr>
             <p:ph idx="2" type="sldImg"/>
@@ -1448,7 +1448,7 @@
       </p:sp>
       <p:sp>
         <p:nvSpPr>
-          <p:cNvPr id="232" name="Google Shape;232;g446a604d95_0_5:notes"/>
+          <p:cNvPr id="236" name="Google Shape;236;g446a604d95_0_5:notes"/>
           <p:cNvSpPr txBox="1"/>
           <p:nvPr>
             <p:ph idx="1" type="body"/>
@@ -1498,7 +1498,7 @@
   <p:cSld>
     <p:spTree>
       <p:nvGrpSpPr>
-        <p:cNvPr id="245" name="Shape 245"/>
+        <p:cNvPr id="249" name="Shape 249"/>
         <p:cNvGrpSpPr/>
         <p:nvPr/>
       </p:nvGrpSpPr>
@@ -1512,7 +1512,7 @@
       </p:grpSpPr>
       <p:sp>
         <p:nvSpPr>
-          <p:cNvPr id="246" name="Google Shape;246;ga3014a3f69_0_1:notes"/>
+          <p:cNvPr id="250" name="Google Shape;250;ga3014a3f69_0_1:notes"/>
           <p:cNvSpPr/>
           <p:nvPr>
             <p:ph idx="2" type="sldImg"/>
@@ -1547,7 +1547,7 @@
       </p:sp>
       <p:sp>
         <p:nvSpPr>
-          <p:cNvPr id="247" name="Google Shape;247;ga3014a3f69_0_1:notes"/>
+          <p:cNvPr id="251" name="Google Shape;251;ga3014a3f69_0_1:notes"/>
           <p:cNvSpPr txBox="1"/>
           <p:nvPr>
             <p:ph idx="1" type="body"/>
@@ -1597,7 +1597,7 @@
   <p:cSld>
     <p:spTree>
       <p:nvGrpSpPr>
-        <p:cNvPr id="257" name="Shape 257"/>
+        <p:cNvPr id="261" name="Shape 261"/>
         <p:cNvGrpSpPr/>
         <p:nvPr/>
       </p:nvGrpSpPr>
@@ -1611,7 +1611,7 @@
       </p:grpSpPr>
       <p:sp>
         <p:nvSpPr>
-          <p:cNvPr id="258" name="Google Shape;258;g3d3c6ab39dd_0_52:notes"/>
+          <p:cNvPr id="262" name="Google Shape;262;g3d3c6ab39dd_0_52:notes"/>
           <p:cNvSpPr txBox="1"/>
           <p:nvPr>
             <p:ph idx="1" type="body"/>
@@ -1650,7 +1650,7 @@
       </p:sp>
       <p:sp>
         <p:nvSpPr>
-          <p:cNvPr id="259" name="Google Shape;259;g3d3c6ab39dd_0_52:notes"/>
+          <p:cNvPr id="263" name="Google Shape;263;g3d3c6ab39dd_0_52:notes"/>
           <p:cNvSpPr/>
           <p:nvPr>
             <p:ph idx="2" type="sldImg"/>
@@ -1809,7 +1809,7 @@
       </p:grpSpPr>
       <p:sp>
         <p:nvSpPr>
-          <p:cNvPr id="120" name="Google Shape;120;g9cfa74970a_0_0:notes"/>
+          <p:cNvPr id="120" name="Google Shape;120;g3dd07ce15c2_0_0:notes"/>
           <p:cNvSpPr/>
           <p:nvPr>
             <p:ph idx="2" type="sldImg"/>
@@ -1844,7 +1844,7 @@
       </p:sp>
       <p:sp>
         <p:nvSpPr>
-          <p:cNvPr id="121" name="Google Shape;121;g9cfa74970a_0_0:notes"/>
+          <p:cNvPr id="121" name="Google Shape;121;g3dd07ce15c2_0_0:notes"/>
           <p:cNvSpPr txBox="1"/>
           <p:nvPr>
             <p:ph idx="1" type="body"/>
@@ -1926,7 +1926,7 @@
   <p:cSld>
     <p:spTree>
       <p:nvGrpSpPr>
-        <p:cNvPr id="125" name="Shape 125"/>
+        <p:cNvPr id="128" name="Shape 128"/>
         <p:cNvGrpSpPr/>
         <p:nvPr/>
       </p:nvGrpSpPr>
@@ -1940,7 +1940,7 @@
       </p:grpSpPr>
       <p:sp>
         <p:nvSpPr>
-          <p:cNvPr id="126" name="Google Shape;126;g3dd07ce15c2_0_0:notes"/>
+          <p:cNvPr id="129" name="Google Shape;129;g9fa940edee_0_7:notes"/>
           <p:cNvSpPr/>
           <p:nvPr>
             <p:ph idx="2" type="sldImg"/>
@@ -1975,7 +1975,7 @@
       </p:sp>
       <p:sp>
         <p:nvSpPr>
-          <p:cNvPr id="127" name="Google Shape;127;g3dd07ce15c2_0_0:notes"/>
+          <p:cNvPr id="130" name="Google Shape;130;g9fa940edee_0_7:notes"/>
           <p:cNvSpPr txBox="1"/>
           <p:nvPr>
             <p:ph idx="1" type="body"/>
@@ -2057,7 +2057,7 @@
   <p:cSld>
     <p:spTree>
       <p:nvGrpSpPr>
-        <p:cNvPr id="134" name="Shape 134"/>
+        <p:cNvPr id="135" name="Shape 135"/>
         <p:cNvGrpSpPr/>
         <p:nvPr/>
       </p:nvGrpSpPr>
@@ -2071,7 +2071,7 @@
       </p:grpSpPr>
       <p:sp>
         <p:nvSpPr>
-          <p:cNvPr id="135" name="Google Shape;135;g9fa940edee_0_7:notes"/>
+          <p:cNvPr id="136" name="Google Shape;136;g9cfa74970a_0_0:notes"/>
           <p:cNvSpPr/>
           <p:nvPr>
             <p:ph idx="2" type="sldImg"/>
@@ -2106,7 +2106,7 @@
       </p:sp>
       <p:sp>
         <p:nvSpPr>
-          <p:cNvPr id="136" name="Google Shape;136;g9fa940edee_0_7:notes"/>
+          <p:cNvPr id="137" name="Google Shape;137;g9cfa74970a_0_0:notes"/>
           <p:cNvSpPr txBox="1"/>
           <p:nvPr>
             <p:ph idx="1" type="body"/>
@@ -2188,7 +2188,7 @@
   <p:cSld>
     <p:spTree>
       <p:nvGrpSpPr>
-        <p:cNvPr id="141" name="Shape 141"/>
+        <p:cNvPr id="145" name="Shape 145"/>
         <p:cNvGrpSpPr/>
         <p:nvPr/>
       </p:nvGrpSpPr>
@@ -2202,7 +2202,7 @@
       </p:grpSpPr>
       <p:sp>
         <p:nvSpPr>
-          <p:cNvPr id="142" name="Google Shape;142;g7d5853f914ccd074_6:notes"/>
+          <p:cNvPr id="146" name="Google Shape;146;g7d5853f914ccd074_6:notes"/>
           <p:cNvSpPr/>
           <p:nvPr>
             <p:ph idx="2" type="sldImg"/>
@@ -2237,7 +2237,7 @@
       </p:sp>
       <p:sp>
         <p:nvSpPr>
-          <p:cNvPr id="143" name="Google Shape;143;g7d5853f914ccd074_6:notes"/>
+          <p:cNvPr id="147" name="Google Shape;147;g7d5853f914ccd074_6:notes"/>
           <p:cNvSpPr txBox="1"/>
           <p:nvPr>
             <p:ph idx="1" type="body"/>
@@ -2287,7 +2287,7 @@
   <p:cSld>
     <p:spTree>
       <p:nvGrpSpPr>
-        <p:cNvPr id="147" name="Shape 147"/>
+        <p:cNvPr id="151" name="Shape 151"/>
         <p:cNvGrpSpPr/>
         <p:nvPr/>
       </p:nvGrpSpPr>
@@ -2301,7 +2301,7 @@
       </p:grpSpPr>
       <p:sp>
         <p:nvSpPr>
-          <p:cNvPr id="148" name="Google Shape;148;gb30a5969e3_0_15:notes"/>
+          <p:cNvPr id="152" name="Google Shape;152;gb30a5969e3_0_15:notes"/>
           <p:cNvSpPr/>
           <p:nvPr>
             <p:ph idx="2" type="sldImg"/>
@@ -2336,7 +2336,7 @@
       </p:sp>
       <p:sp>
         <p:nvSpPr>
-          <p:cNvPr id="149" name="Google Shape;149;gb30a5969e3_0_15:notes"/>
+          <p:cNvPr id="153" name="Google Shape;153;gb30a5969e3_0_15:notes"/>
           <p:cNvSpPr txBox="1"/>
           <p:nvPr>
             <p:ph idx="1" type="body"/>
@@ -2386,7 +2386,7 @@
   <p:cSld>
     <p:spTree>
       <p:nvGrpSpPr>
-        <p:cNvPr id="153" name="Shape 153"/>
+        <p:cNvPr id="157" name="Shape 157"/>
         <p:cNvGrpSpPr/>
         <p:nvPr/>
       </p:nvGrpSpPr>
@@ -2400,7 +2400,7 @@
       </p:grpSpPr>
       <p:sp>
         <p:nvSpPr>
-          <p:cNvPr id="154" name="Google Shape;154;gb30a5969e3_0_7:notes"/>
+          <p:cNvPr id="158" name="Google Shape;158;gb30a5969e3_0_7:notes"/>
           <p:cNvSpPr/>
           <p:nvPr>
             <p:ph idx="2" type="sldImg"/>
@@ -2435,7 +2435,7 @@
       </p:sp>
       <p:sp>
         <p:nvSpPr>
-          <p:cNvPr id="155" name="Google Shape;155;gb30a5969e3_0_7:notes"/>
+          <p:cNvPr id="159" name="Google Shape;159;gb30a5969e3_0_7:notes"/>
           <p:cNvSpPr txBox="1"/>
           <p:nvPr>
             <p:ph idx="1" type="body"/>
@@ -2485,7 +2485,7 @@
   <p:cSld>
     <p:spTree>
       <p:nvGrpSpPr>
-        <p:cNvPr id="159" name="Shape 159"/>
+        <p:cNvPr id="163" name="Shape 163"/>
         <p:cNvGrpSpPr/>
         <p:nvPr/>
       </p:nvGrpSpPr>
@@ -2499,7 +2499,7 @@
       </p:grpSpPr>
       <p:sp>
         <p:nvSpPr>
-          <p:cNvPr id="160" name="Google Shape;160;g9fa940edee_0_14:notes"/>
+          <p:cNvPr id="164" name="Google Shape;164;g9fa940edee_0_14:notes"/>
           <p:cNvSpPr/>
           <p:nvPr>
             <p:ph idx="2" type="sldImg"/>
@@ -2534,7 +2534,7 @@
       </p:sp>
       <p:sp>
         <p:nvSpPr>
-          <p:cNvPr id="161" name="Google Shape;161;g9fa940edee_0_14:notes"/>
+          <p:cNvPr id="165" name="Google Shape;165;g9fa940edee_0_14:notes"/>
           <p:cNvSpPr txBox="1"/>
           <p:nvPr>
             <p:ph idx="1" type="body"/>
@@ -15002,7 +15002,7 @@
   <p:cSld>
     <p:spTree>
       <p:nvGrpSpPr>
-        <p:cNvPr id="177" name="Shape 177"/>
+        <p:cNvPr id="181" name="Shape 181"/>
         <p:cNvGrpSpPr/>
         <p:nvPr/>
       </p:nvGrpSpPr>
@@ -15016,7 +15016,7 @@
       </p:grpSpPr>
       <p:sp>
         <p:nvSpPr>
-          <p:cNvPr id="178" name="Google Shape;178;p35"/>
+          <p:cNvPr id="182" name="Google Shape;182;p35"/>
           <p:cNvSpPr txBox="1"/>
           <p:nvPr>
             <p:ph type="title"/>
@@ -15056,7 +15056,7 @@
       </p:sp>
       <p:pic>
         <p:nvPicPr>
-          <p:cNvPr id="179" name="Google Shape;179;p35"/>
+          <p:cNvPr id="183" name="Google Shape;183;p35"/>
           <p:cNvPicPr preferRelativeResize="0"/>
           <p:nvPr/>
         </p:nvPicPr>
@@ -15084,7 +15084,7 @@
       </p:pic>
       <p:sp>
         <p:nvSpPr>
-          <p:cNvPr id="180" name="Google Shape;180;p35"/>
+          <p:cNvPr id="184" name="Google Shape;184;p35"/>
           <p:cNvSpPr txBox="1"/>
           <p:nvPr/>
         </p:nvSpPr>
@@ -15142,7 +15142,7 @@
       </p:sp>
       <p:sp>
         <p:nvSpPr>
-          <p:cNvPr id="181" name="Google Shape;181;p35"/>
+          <p:cNvPr id="185" name="Google Shape;185;p35"/>
           <p:cNvSpPr txBox="1"/>
           <p:nvPr/>
         </p:nvSpPr>
@@ -15292,7 +15292,7 @@
       </p:sp>
       <p:sp>
         <p:nvSpPr>
-          <p:cNvPr id="182" name="Google Shape;182;p35"/>
+          <p:cNvPr id="186" name="Google Shape;186;p35"/>
           <p:cNvSpPr txBox="1"/>
           <p:nvPr/>
         </p:nvSpPr>
@@ -15350,7 +15350,7 @@
       </p:sp>
       <p:sp>
         <p:nvSpPr>
-          <p:cNvPr id="183" name="Google Shape;183;p35"/>
+          <p:cNvPr id="187" name="Google Shape;187;p35"/>
           <p:cNvSpPr txBox="1"/>
           <p:nvPr/>
         </p:nvSpPr>
@@ -15419,7 +15419,7 @@
   <p:cSld>
     <p:spTree>
       <p:nvGrpSpPr>
-        <p:cNvPr id="187" name="Shape 187"/>
+        <p:cNvPr id="191" name="Shape 191"/>
         <p:cNvGrpSpPr/>
         <p:nvPr/>
       </p:nvGrpSpPr>
@@ -15433,7 +15433,7 @@
       </p:grpSpPr>
       <p:sp>
         <p:nvSpPr>
-          <p:cNvPr id="188" name="Google Shape;188;p36"/>
+          <p:cNvPr id="192" name="Google Shape;192;p36"/>
           <p:cNvSpPr txBox="1"/>
           <p:nvPr>
             <p:ph type="title"/>
@@ -15473,7 +15473,7 @@
       </p:sp>
       <p:pic>
         <p:nvPicPr>
-          <p:cNvPr id="189" name="Google Shape;189;p36"/>
+          <p:cNvPr id="193" name="Google Shape;193;p36"/>
           <p:cNvPicPr preferRelativeResize="0"/>
           <p:nvPr/>
         </p:nvPicPr>
@@ -15501,7 +15501,7 @@
       </p:pic>
       <p:sp>
         <p:nvSpPr>
-          <p:cNvPr id="190" name="Google Shape;190;p36"/>
+          <p:cNvPr id="194" name="Google Shape;194;p36"/>
           <p:cNvSpPr txBox="1"/>
           <p:nvPr/>
         </p:nvSpPr>
@@ -15559,7 +15559,7 @@
       </p:sp>
       <p:sp>
         <p:nvSpPr>
-          <p:cNvPr id="191" name="Google Shape;191;p36"/>
+          <p:cNvPr id="195" name="Google Shape;195;p36"/>
           <p:cNvSpPr txBox="1"/>
           <p:nvPr/>
         </p:nvSpPr>
@@ -15637,7 +15637,7 @@
       </p:sp>
       <p:sp>
         <p:nvSpPr>
-          <p:cNvPr id="192" name="Google Shape;192;p36"/>
+          <p:cNvPr id="196" name="Google Shape;196;p36"/>
           <p:cNvSpPr txBox="1"/>
           <p:nvPr/>
         </p:nvSpPr>
@@ -15695,7 +15695,7 @@
       </p:sp>
       <p:sp>
         <p:nvSpPr>
-          <p:cNvPr id="193" name="Google Shape;193;p36"/>
+          <p:cNvPr id="197" name="Google Shape;197;p36"/>
           <p:cNvSpPr txBox="1"/>
           <p:nvPr/>
         </p:nvSpPr>
@@ -15753,7 +15753,7 @@
       </p:sp>
       <p:sp>
         <p:nvSpPr>
-          <p:cNvPr id="194" name="Google Shape;194;p36"/>
+          <p:cNvPr id="198" name="Google Shape;198;p36"/>
           <p:cNvSpPr txBox="1"/>
           <p:nvPr/>
         </p:nvSpPr>
@@ -15811,7 +15811,7 @@
       </p:sp>
       <p:sp>
         <p:nvSpPr>
-          <p:cNvPr id="195" name="Google Shape;195;p36"/>
+          <p:cNvPr id="199" name="Google Shape;199;p36"/>
           <p:cNvSpPr txBox="1"/>
           <p:nvPr/>
         </p:nvSpPr>
@@ -15889,7 +15889,7 @@
       </p:sp>
       <p:sp>
         <p:nvSpPr>
-          <p:cNvPr id="196" name="Google Shape;196;p36"/>
+          <p:cNvPr id="200" name="Google Shape;200;p36"/>
           <p:cNvSpPr txBox="1"/>
           <p:nvPr/>
         </p:nvSpPr>
@@ -15985,7 +15985,7 @@
     </p:bg>
     <p:spTree>
       <p:nvGrpSpPr>
-        <p:cNvPr id="201" name="Shape 201"/>
+        <p:cNvPr id="205" name="Shape 205"/>
         <p:cNvGrpSpPr/>
         <p:nvPr/>
       </p:nvGrpSpPr>
@@ -15999,7 +15999,7 @@
       </p:grpSpPr>
       <p:sp>
         <p:nvSpPr>
-          <p:cNvPr id="202" name="Google Shape;202;p37"/>
+          <p:cNvPr id="206" name="Google Shape;206;p37"/>
           <p:cNvSpPr txBox="1"/>
           <p:nvPr>
             <p:ph type="title"/>
@@ -16047,7 +16047,7 @@
       </p:sp>
       <p:sp>
         <p:nvSpPr>
-          <p:cNvPr id="203" name="Google Shape;203;p37"/>
+          <p:cNvPr id="207" name="Google Shape;207;p37"/>
           <p:cNvSpPr txBox="1"/>
           <p:nvPr/>
         </p:nvSpPr>
@@ -16088,7 +16088,7 @@
       </p:sp>
       <p:sp>
         <p:nvSpPr>
-          <p:cNvPr id="204" name="Google Shape;204;p37"/>
+          <p:cNvPr id="208" name="Google Shape;208;p37"/>
           <p:cNvSpPr txBox="1"/>
           <p:nvPr/>
         </p:nvSpPr>
@@ -16138,7 +16138,7 @@
       </p:sp>
       <p:sp>
         <p:nvSpPr>
-          <p:cNvPr id="205" name="Google Shape;205;p37"/>
+          <p:cNvPr id="209" name="Google Shape;209;p37"/>
           <p:cNvSpPr txBox="1"/>
           <p:nvPr/>
         </p:nvSpPr>
@@ -16212,7 +16212,7 @@
       </p:sp>
       <p:sp>
         <p:nvSpPr>
-          <p:cNvPr id="206" name="Google Shape;206;p37"/>
+          <p:cNvPr id="210" name="Google Shape;210;p37"/>
           <p:cNvSpPr txBox="1"/>
           <p:nvPr/>
         </p:nvSpPr>
@@ -16276,7 +16276,7 @@
     </p:bg>
     <p:spTree>
       <p:nvGrpSpPr>
-        <p:cNvPr id="211" name="Shape 211"/>
+        <p:cNvPr id="215" name="Shape 215"/>
         <p:cNvGrpSpPr/>
         <p:nvPr/>
       </p:nvGrpSpPr>
@@ -16290,7 +16290,7 @@
       </p:grpSpPr>
       <p:sp>
         <p:nvSpPr>
-          <p:cNvPr id="212" name="Google Shape;212;p38"/>
+          <p:cNvPr id="216" name="Google Shape;216;p38"/>
           <p:cNvSpPr txBox="1"/>
           <p:nvPr>
             <p:ph type="title"/>
@@ -16338,7 +16338,7 @@
       </p:sp>
       <p:sp>
         <p:nvSpPr>
-          <p:cNvPr id="213" name="Google Shape;213;p38"/>
+          <p:cNvPr id="217" name="Google Shape;217;p38"/>
           <p:cNvSpPr txBox="1"/>
           <p:nvPr/>
         </p:nvSpPr>
@@ -16379,7 +16379,7 @@
       </p:sp>
       <p:sp>
         <p:nvSpPr>
-          <p:cNvPr id="214" name="Google Shape;214;p38"/>
+          <p:cNvPr id="218" name="Google Shape;218;p38"/>
           <p:cNvSpPr txBox="1"/>
           <p:nvPr/>
         </p:nvSpPr>
@@ -16429,7 +16429,7 @@
       </p:sp>
       <p:sp>
         <p:nvSpPr>
-          <p:cNvPr id="215" name="Google Shape;215;p38"/>
+          <p:cNvPr id="219" name="Google Shape;219;p38"/>
           <p:cNvSpPr txBox="1"/>
           <p:nvPr/>
         </p:nvSpPr>
@@ -16474,7 +16474,7 @@
       </p:sp>
       <p:sp>
         <p:nvSpPr>
-          <p:cNvPr id="216" name="Google Shape;216;p38"/>
+          <p:cNvPr id="220" name="Google Shape;220;p38"/>
           <p:cNvSpPr txBox="1"/>
           <p:nvPr/>
         </p:nvSpPr>
@@ -16526,7 +16526,7 @@
   <p:cSld>
     <p:spTree>
       <p:nvGrpSpPr>
-        <p:cNvPr id="220" name="Shape 220"/>
+        <p:cNvPr id="224" name="Shape 224"/>
         <p:cNvGrpSpPr/>
         <p:nvPr/>
       </p:nvGrpSpPr>
@@ -16540,7 +16540,7 @@
       </p:grpSpPr>
       <p:sp>
         <p:nvSpPr>
-          <p:cNvPr id="221" name="Google Shape;221;p39"/>
+          <p:cNvPr id="225" name="Google Shape;225;p39"/>
           <p:cNvSpPr txBox="1"/>
           <p:nvPr>
             <p:ph type="title"/>
@@ -16580,7 +16580,7 @@
       </p:sp>
       <p:sp>
         <p:nvSpPr>
-          <p:cNvPr id="222" name="Google Shape;222;p39"/>
+          <p:cNvPr id="226" name="Google Shape;226;p39"/>
           <p:cNvSpPr txBox="1"/>
           <p:nvPr/>
         </p:nvSpPr>
@@ -16658,7 +16658,7 @@
       </p:sp>
       <p:sp>
         <p:nvSpPr>
-          <p:cNvPr id="223" name="Google Shape;223;p39"/>
+          <p:cNvPr id="227" name="Google Shape;227;p39"/>
           <p:cNvSpPr txBox="1"/>
           <p:nvPr/>
         </p:nvSpPr>
@@ -16736,7 +16736,7 @@
       </p:sp>
       <p:sp>
         <p:nvSpPr>
-          <p:cNvPr id="224" name="Google Shape;224;p39"/>
+          <p:cNvPr id="228" name="Google Shape;228;p39"/>
           <p:cNvSpPr txBox="1"/>
           <p:nvPr/>
         </p:nvSpPr>
@@ -16866,7 +16866,7 @@
       </p:sp>
       <p:sp>
         <p:nvSpPr>
-          <p:cNvPr id="225" name="Google Shape;225;p39"/>
+          <p:cNvPr id="229" name="Google Shape;229;p39"/>
           <p:cNvSpPr/>
           <p:nvPr/>
         </p:nvSpPr>
@@ -16917,7 +16917,7 @@
       </p:sp>
       <p:sp>
         <p:nvSpPr>
-          <p:cNvPr id="226" name="Google Shape;226;p39"/>
+          <p:cNvPr id="230" name="Google Shape;230;p39"/>
           <p:cNvSpPr/>
           <p:nvPr/>
         </p:nvSpPr>
@@ -16967,7 +16967,7 @@
       </p:sp>
       <p:sp>
         <p:nvSpPr>
-          <p:cNvPr id="227" name="Google Shape;227;p39"/>
+          <p:cNvPr id="231" name="Google Shape;231;p39"/>
           <p:cNvSpPr/>
           <p:nvPr/>
         </p:nvSpPr>
@@ -17065,7 +17065,7 @@
       </p:sp>
       <p:sp>
         <p:nvSpPr>
-          <p:cNvPr id="228" name="Google Shape;228;p39"/>
+          <p:cNvPr id="232" name="Google Shape;232;p39"/>
           <p:cNvSpPr/>
           <p:nvPr/>
         </p:nvSpPr>
@@ -17115,7 +17115,7 @@
       </p:sp>
       <p:cxnSp>
         <p:nvCxnSpPr>
-          <p:cNvPr id="229" name="Google Shape;229;p39"/>
+          <p:cNvPr id="233" name="Google Shape;233;p39"/>
           <p:cNvCxnSpPr/>
           <p:nvPr/>
         </p:nvCxnSpPr>
@@ -17152,7 +17152,7 @@
   <p:cSld>
     <p:spTree>
       <p:nvGrpSpPr>
-        <p:cNvPr id="233" name="Shape 233"/>
+        <p:cNvPr id="237" name="Shape 237"/>
         <p:cNvGrpSpPr/>
         <p:nvPr/>
       </p:nvGrpSpPr>
@@ -17166,7 +17166,7 @@
       </p:grpSpPr>
       <p:sp>
         <p:nvSpPr>
-          <p:cNvPr id="234" name="Google Shape;234;p40"/>
+          <p:cNvPr id="238" name="Google Shape;238;p40"/>
           <p:cNvSpPr txBox="1"/>
           <p:nvPr>
             <p:ph type="title"/>
@@ -17206,7 +17206,7 @@
       </p:sp>
       <p:sp>
         <p:nvSpPr>
-          <p:cNvPr id="235" name="Google Shape;235;p40"/>
+          <p:cNvPr id="239" name="Google Shape;239;p40"/>
           <p:cNvSpPr txBox="1"/>
           <p:nvPr>
             <p:ph idx="1" type="body"/>
@@ -17722,7 +17722,7 @@
       </p:sp>
       <p:cxnSp>
         <p:nvCxnSpPr>
-          <p:cNvPr id="236" name="Google Shape;236;p40"/>
+          <p:cNvPr id="240" name="Google Shape;240;p40"/>
           <p:cNvCxnSpPr/>
           <p:nvPr/>
         </p:nvCxnSpPr>
@@ -17748,7 +17748,7 @@
       </p:cxnSp>
       <p:sp>
         <p:nvSpPr>
-          <p:cNvPr id="237" name="Google Shape;237;p40"/>
+          <p:cNvPr id="241" name="Google Shape;241;p40"/>
           <p:cNvSpPr/>
           <p:nvPr/>
         </p:nvSpPr>
@@ -17795,7 +17795,7 @@
       </p:sp>
       <p:sp>
         <p:nvSpPr>
-          <p:cNvPr id="238" name="Google Shape;238;p40"/>
+          <p:cNvPr id="242" name="Google Shape;242;p40"/>
           <p:cNvSpPr txBox="1"/>
           <p:nvPr/>
         </p:nvSpPr>
@@ -17845,7 +17845,7 @@
       </p:sp>
       <p:sp>
         <p:nvSpPr>
-          <p:cNvPr id="239" name="Google Shape;239;p40"/>
+          <p:cNvPr id="243" name="Google Shape;243;p40"/>
           <p:cNvSpPr/>
           <p:nvPr/>
         </p:nvSpPr>
@@ -17892,7 +17892,7 @@
       </p:sp>
       <p:cxnSp>
         <p:nvCxnSpPr>
-          <p:cNvPr id="240" name="Google Shape;240;p40"/>
+          <p:cNvPr id="244" name="Google Shape;244;p40"/>
           <p:cNvCxnSpPr/>
           <p:nvPr/>
         </p:nvCxnSpPr>
@@ -17918,7 +17918,7 @@
       </p:cxnSp>
       <p:sp>
         <p:nvSpPr>
-          <p:cNvPr id="241" name="Google Shape;241;p40"/>
+          <p:cNvPr id="245" name="Google Shape;245;p40"/>
           <p:cNvSpPr txBox="1"/>
           <p:nvPr/>
         </p:nvSpPr>
@@ -17968,7 +17968,7 @@
       </p:sp>
       <p:sp>
         <p:nvSpPr>
-          <p:cNvPr id="242" name="Google Shape;242;p40"/>
+          <p:cNvPr id="246" name="Google Shape;246;p40"/>
           <p:cNvSpPr/>
           <p:nvPr/>
         </p:nvSpPr>
@@ -18015,7 +18015,7 @@
       </p:sp>
       <p:cxnSp>
         <p:nvCxnSpPr>
-          <p:cNvPr id="243" name="Google Shape;243;p40"/>
+          <p:cNvPr id="247" name="Google Shape;247;p40"/>
           <p:cNvCxnSpPr/>
           <p:nvPr/>
         </p:nvCxnSpPr>
@@ -18041,7 +18041,7 @@
       </p:cxnSp>
       <p:sp>
         <p:nvSpPr>
-          <p:cNvPr id="244" name="Google Shape;244;p40"/>
+          <p:cNvPr id="248" name="Google Shape;248;p40"/>
           <p:cNvSpPr txBox="1"/>
           <p:nvPr/>
         </p:nvSpPr>
@@ -18102,7 +18102,7 @@
   <p:cSld>
     <p:spTree>
       <p:nvGrpSpPr>
-        <p:cNvPr id="248" name="Shape 248"/>
+        <p:cNvPr id="252" name="Shape 252"/>
         <p:cNvGrpSpPr/>
         <p:nvPr/>
       </p:nvGrpSpPr>
@@ -18116,7 +18116,7 @@
       </p:grpSpPr>
       <p:pic>
         <p:nvPicPr>
-          <p:cNvPr id="249" name="Google Shape;249;p41"/>
+          <p:cNvPr id="253" name="Google Shape;253;p41"/>
           <p:cNvPicPr preferRelativeResize="0"/>
           <p:nvPr/>
         </p:nvPicPr>
@@ -18144,7 +18144,7 @@
       </p:pic>
       <p:sp>
         <p:nvSpPr>
-          <p:cNvPr id="250" name="Google Shape;250;p41"/>
+          <p:cNvPr id="254" name="Google Shape;254;p41"/>
           <p:cNvSpPr txBox="1"/>
           <p:nvPr>
             <p:ph type="title"/>
@@ -18188,7 +18188,7 @@
       </p:sp>
       <p:cxnSp>
         <p:nvCxnSpPr>
-          <p:cNvPr id="251" name="Google Shape;251;p41"/>
+          <p:cNvPr id="255" name="Google Shape;255;p41"/>
           <p:cNvCxnSpPr/>
           <p:nvPr/>
         </p:nvCxnSpPr>
@@ -18214,7 +18214,7 @@
       </p:cxnSp>
       <p:sp>
         <p:nvSpPr>
-          <p:cNvPr id="252" name="Google Shape;252;p41"/>
+          <p:cNvPr id="256" name="Google Shape;256;p41"/>
           <p:cNvSpPr txBox="1"/>
           <p:nvPr/>
         </p:nvSpPr>
@@ -18272,7 +18272,7 @@
       </p:sp>
       <p:cxnSp>
         <p:nvCxnSpPr>
-          <p:cNvPr id="253" name="Google Shape;253;p41"/>
+          <p:cNvPr id="257" name="Google Shape;257;p41"/>
           <p:cNvCxnSpPr/>
           <p:nvPr/>
         </p:nvCxnSpPr>
@@ -18298,7 +18298,7 @@
       </p:cxnSp>
       <p:sp>
         <p:nvSpPr>
-          <p:cNvPr id="254" name="Google Shape;254;p41"/>
+          <p:cNvPr id="258" name="Google Shape;258;p41"/>
           <p:cNvSpPr txBox="1"/>
           <p:nvPr/>
         </p:nvSpPr>
@@ -18356,7 +18356,7 @@
       </p:sp>
       <p:cxnSp>
         <p:nvCxnSpPr>
-          <p:cNvPr id="255" name="Google Shape;255;p41"/>
+          <p:cNvPr id="259" name="Google Shape;259;p41"/>
           <p:cNvCxnSpPr/>
           <p:nvPr/>
         </p:nvCxnSpPr>
@@ -18382,7 +18382,7 @@
       </p:cxnSp>
       <p:sp>
         <p:nvSpPr>
-          <p:cNvPr id="256" name="Google Shape;256;p41"/>
+          <p:cNvPr id="260" name="Google Shape;260;p41"/>
           <p:cNvSpPr txBox="1"/>
           <p:nvPr/>
         </p:nvSpPr>
@@ -18443,7 +18443,7 @@
   <p:cSld>
     <p:spTree>
       <p:nvGrpSpPr>
-        <p:cNvPr id="260" name="Shape 260"/>
+        <p:cNvPr id="264" name="Shape 264"/>
         <p:cNvGrpSpPr/>
         <p:nvPr/>
       </p:nvGrpSpPr>
@@ -18457,7 +18457,7 @@
       </p:grpSpPr>
       <p:sp>
         <p:nvSpPr>
-          <p:cNvPr id="261" name="Google Shape;261;p42"/>
+          <p:cNvPr id="265" name="Google Shape;265;p42"/>
           <p:cNvSpPr txBox="1"/>
           <p:nvPr>
             <p:ph type="title"/>
@@ -18549,7 +18549,7 @@
       </p:sp>
       <p:sp>
         <p:nvSpPr>
-          <p:cNvPr id="262" name="Google Shape;262;p42"/>
+          <p:cNvPr id="266" name="Google Shape;266;p42"/>
           <p:cNvSpPr txBox="1"/>
           <p:nvPr>
             <p:ph idx="1" type="body"/>
@@ -19393,7 +19393,7 @@
       </p:sp>
       <p:sp>
         <p:nvSpPr>
-          <p:cNvPr id="263" name="Google Shape;263;p42"/>
+          <p:cNvPr id="267" name="Google Shape;267;p42"/>
           <p:cNvSpPr txBox="1"/>
           <p:nvPr/>
         </p:nvSpPr>
@@ -19671,121 +19671,16 @@
               <a:t>BBC micro:bit 						</a:t>
             </a:r>
             <a:r>
-              <a:rPr lang="en" sz="2700"/>
-              <a:t>Thonny</a:t>
+              <a:rPr lang="en" sz="2000"/>
+              <a:t>Change to connect to micro:bit</a:t>
             </a:r>
-            <a:r>
-              <a:rPr lang="en" sz="3400"/>
-              <a:t> </a:t>
-            </a:r>
-            <a:r>
-              <a:rPr lang="en" sz="2700"/>
-              <a:t>Python Editor</a:t>
-            </a:r>
-            <a:endParaRPr sz="2700"/>
+            <a:endParaRPr sz="2000"/>
           </a:p>
         </p:txBody>
       </p:sp>
       <p:pic>
         <p:nvPicPr>
           <p:cNvPr id="124" name="Google Shape;124;p28"/>
-          <p:cNvPicPr preferRelativeResize="0"/>
-          <p:nvPr/>
-        </p:nvPicPr>
-        <p:blipFill>
-          <a:blip r:embed="rId3">
-            <a:alphaModFix/>
-          </a:blip>
-          <a:stretch>
-            <a:fillRect/>
-          </a:stretch>
-        </p:blipFill>
-        <p:spPr>
-          <a:xfrm>
-            <a:off x="540500" y="712540"/>
-            <a:ext cx="7642408" cy="4126258"/>
-          </a:xfrm>
-          <a:prstGeom prst="rect">
-            <a:avLst/>
-          </a:prstGeom>
-          <a:noFill/>
-          <a:ln>
-            <a:noFill/>
-          </a:ln>
-        </p:spPr>
-      </p:pic>
-    </p:spTree>
-  </p:cSld>
-  <p:clrMapOvr>
-    <a:masterClrMapping/>
-  </p:clrMapOvr>
-</p:sld>
-</file>
-
-<file path=ppt/slides/slide4.xml><?xml version="1.0" encoding="utf-8"?>
-<p:sld xmlns:a="http://schemas.openxmlformats.org/drawingml/2006/main" xmlns:r="http://schemas.openxmlformats.org/officeDocument/2006/relationships" xmlns:mc="http://schemas.openxmlformats.org/markup-compatibility/2006" xmlns:mv="urn:schemas-microsoft-com:mac:vml" xmlns:p="http://schemas.openxmlformats.org/presentationml/2006/main" xmlns:c="http://schemas.openxmlformats.org/drawingml/2006/chart" xmlns:dgm="http://schemas.openxmlformats.org/drawingml/2006/diagram" xmlns:o="urn:schemas-microsoft-com:office:office" xmlns:v="urn:schemas-microsoft-com:vml" xmlns:pvml="urn:schemas-microsoft-com:office:powerpoint" xmlns:com="http://schemas.openxmlformats.org/drawingml/2006/compatibility" xmlns:p14="http://schemas.microsoft.com/office/powerpoint/2010/main" xmlns:p15="http://schemas.microsoft.com/office/powerpoint/2012/main" xmlns:ahyp="http://schemas.microsoft.com/office/drawing/2018/hyperlinkcolor">
-  <p:cSld>
-    <p:spTree>
-      <p:nvGrpSpPr>
-        <p:cNvPr id="128" name="Shape 128"/>
-        <p:cNvGrpSpPr/>
-        <p:nvPr/>
-      </p:nvGrpSpPr>
-      <p:grpSpPr>
-        <a:xfrm>
-          <a:off x="0" y="0"/>
-          <a:ext cx="0" cy="0"/>
-          <a:chOff x="0" y="0"/>
-          <a:chExt cx="0" cy="0"/>
-        </a:xfrm>
-      </p:grpSpPr>
-      <p:sp>
-        <p:nvSpPr>
-          <p:cNvPr id="129" name="Google Shape;129;p29"/>
-          <p:cNvSpPr txBox="1"/>
-          <p:nvPr>
-            <p:ph type="title"/>
-          </p:nvPr>
-        </p:nvSpPr>
-        <p:spPr>
-          <a:xfrm>
-            <a:off x="171375" y="132350"/>
-            <a:ext cx="8848200" cy="580200"/>
-          </a:xfrm>
-          <a:prstGeom prst="rect">
-            <a:avLst/>
-          </a:prstGeom>
-        </p:spPr>
-        <p:txBody>
-          <a:bodyPr anchorCtr="0" anchor="b" bIns="91425" lIns="91425" spcFirstLastPara="1" rIns="91425" wrap="square" tIns="91425">
-            <a:noAutofit/>
-          </a:bodyPr>
-          <a:lstStyle/>
-          <a:p>
-            <a:pPr indent="0" lvl="0" marL="0" rtl="0" algn="l">
-              <a:spcBef>
-                <a:spcPts val="0"/>
-              </a:spcBef>
-              <a:spcAft>
-                <a:spcPts val="0"/>
-              </a:spcAft>
-              <a:buNone/>
-            </a:pPr>
-            <a:r>
-              <a:rPr lang="en" sz="3400"/>
-              <a:t>BBC micro:bit 						</a:t>
-            </a:r>
-            <a:r>
-              <a:rPr lang="en" sz="2000"/>
-              <a:t>Change to connect to micro:bit</a:t>
-            </a:r>
-            <a:endParaRPr sz="2000"/>
-          </a:p>
-        </p:txBody>
-      </p:sp>
-      <p:pic>
-        <p:nvPicPr>
-          <p:cNvPr id="130" name="Google Shape;130;p29"/>
           <p:cNvPicPr preferRelativeResize="0"/>
           <p:nvPr/>
         </p:nvPicPr>
@@ -19813,7 +19708,7 @@
       </p:pic>
       <p:cxnSp>
         <p:nvCxnSpPr>
-          <p:cNvPr id="131" name="Google Shape;131;p29"/>
+          <p:cNvPr id="125" name="Google Shape;125;p28"/>
           <p:cNvCxnSpPr/>
           <p:nvPr/>
         </p:nvCxnSpPr>
@@ -19839,7 +19734,7 @@
       </p:cxnSp>
       <p:pic>
         <p:nvPicPr>
-          <p:cNvPr id="132" name="Google Shape;132;p29"/>
+          <p:cNvPr id="126" name="Google Shape;126;p28"/>
           <p:cNvPicPr preferRelativeResize="0"/>
           <p:nvPr/>
         </p:nvPicPr>
@@ -19867,7 +19762,7 @@
       </p:pic>
       <p:sp>
         <p:nvSpPr>
-          <p:cNvPr id="133" name="Google Shape;133;p29"/>
+          <p:cNvPr id="127" name="Google Shape;127;p28"/>
           <p:cNvSpPr/>
           <p:nvPr/>
         </p:nvSpPr>
@@ -19925,12 +19820,12 @@
 </p:sld>
 </file>
 
-<file path=ppt/slides/slide5.xml><?xml version="1.0" encoding="utf-8"?>
+<file path=ppt/slides/slide4.xml><?xml version="1.0" encoding="utf-8"?>
 <p:sld xmlns:a="http://schemas.openxmlformats.org/drawingml/2006/main" xmlns:r="http://schemas.openxmlformats.org/officeDocument/2006/relationships" xmlns:mc="http://schemas.openxmlformats.org/markup-compatibility/2006" xmlns:mv="urn:schemas-microsoft-com:mac:vml" xmlns:p="http://schemas.openxmlformats.org/presentationml/2006/main" xmlns:c="http://schemas.openxmlformats.org/drawingml/2006/chart" xmlns:dgm="http://schemas.openxmlformats.org/drawingml/2006/diagram" xmlns:o="urn:schemas-microsoft-com:office:office" xmlns:v="urn:schemas-microsoft-com:vml" xmlns:pvml="urn:schemas-microsoft-com:office:powerpoint" xmlns:com="http://schemas.openxmlformats.org/drawingml/2006/compatibility" xmlns:p14="http://schemas.microsoft.com/office/powerpoint/2010/main" xmlns:p15="http://schemas.microsoft.com/office/powerpoint/2012/main" xmlns:ahyp="http://schemas.microsoft.com/office/drawing/2018/hyperlinkcolor">
   <p:cSld>
     <p:spTree>
       <p:nvGrpSpPr>
-        <p:cNvPr id="137" name="Shape 137"/>
+        <p:cNvPr id="131" name="Shape 131"/>
         <p:cNvGrpSpPr/>
         <p:nvPr/>
       </p:nvGrpSpPr>
@@ -19944,7 +19839,7 @@
       </p:grpSpPr>
       <p:sp>
         <p:nvSpPr>
-          <p:cNvPr id="138" name="Google Shape;138;p30"/>
+          <p:cNvPr id="132" name="Google Shape;132;p29"/>
           <p:cNvSpPr txBox="1"/>
           <p:nvPr>
             <p:ph type="title"/>
@@ -19988,7 +19883,7 @@
       </p:sp>
       <p:pic>
         <p:nvPicPr>
-          <p:cNvPr id="139" name="Google Shape;139;p30"/>
+          <p:cNvPr id="133" name="Google Shape;133;p29"/>
           <p:cNvPicPr preferRelativeResize="0"/>
           <p:nvPr/>
         </p:nvPicPr>
@@ -20016,7 +19911,7 @@
       </p:pic>
       <p:cxnSp>
         <p:nvCxnSpPr>
-          <p:cNvPr id="140" name="Google Shape;140;p30"/>
+          <p:cNvPr id="134" name="Google Shape;134;p29"/>
           <p:cNvCxnSpPr/>
           <p:nvPr/>
         </p:nvCxnSpPr>
@@ -20048,12 +19943,12 @@
 </p:sld>
 </file>
 
-<file path=ppt/slides/slide6.xml><?xml version="1.0" encoding="utf-8"?>
+<file path=ppt/slides/slide5.xml><?xml version="1.0" encoding="utf-8"?>
 <p:sld xmlns:a="http://schemas.openxmlformats.org/drawingml/2006/main" xmlns:r="http://schemas.openxmlformats.org/officeDocument/2006/relationships" xmlns:mc="http://schemas.openxmlformats.org/markup-compatibility/2006" xmlns:mv="urn:schemas-microsoft-com:mac:vml" xmlns:p="http://schemas.openxmlformats.org/presentationml/2006/main" xmlns:c="http://schemas.openxmlformats.org/drawingml/2006/chart" xmlns:dgm="http://schemas.openxmlformats.org/drawingml/2006/diagram" xmlns:o="urn:schemas-microsoft-com:office:office" xmlns:v="urn:schemas-microsoft-com:vml" xmlns:pvml="urn:schemas-microsoft-com:office:powerpoint" xmlns:com="http://schemas.openxmlformats.org/drawingml/2006/compatibility" xmlns:p14="http://schemas.microsoft.com/office/powerpoint/2010/main" xmlns:p15="http://schemas.microsoft.com/office/powerpoint/2012/main" xmlns:ahyp="http://schemas.microsoft.com/office/drawing/2018/hyperlinkcolor">
   <p:cSld>
     <p:spTree>
       <p:nvGrpSpPr>
-        <p:cNvPr id="144" name="Shape 144"/>
+        <p:cNvPr id="138" name="Shape 138"/>
         <p:cNvGrpSpPr/>
         <p:nvPr/>
       </p:nvGrpSpPr>
@@ -20067,7 +19962,248 @@
       </p:grpSpPr>
       <p:sp>
         <p:nvSpPr>
-          <p:cNvPr id="145" name="Google Shape;145;p31"/>
+          <p:cNvPr id="139" name="Google Shape;139;p30"/>
+          <p:cNvSpPr txBox="1"/>
+          <p:nvPr>
+            <p:ph type="title"/>
+          </p:nvPr>
+        </p:nvSpPr>
+        <p:spPr>
+          <a:xfrm>
+            <a:off x="171375" y="132350"/>
+            <a:ext cx="8848200" cy="580200"/>
+          </a:xfrm>
+          <a:prstGeom prst="rect">
+            <a:avLst/>
+          </a:prstGeom>
+        </p:spPr>
+        <p:txBody>
+          <a:bodyPr anchorCtr="0" anchor="b" bIns="91425" lIns="91425" spcFirstLastPara="1" rIns="91425" wrap="square" tIns="91425">
+            <a:noAutofit/>
+          </a:bodyPr>
+          <a:lstStyle/>
+          <a:p>
+            <a:pPr indent="0" lvl="0" marL="0" rtl="0" algn="l">
+              <a:spcBef>
+                <a:spcPts val="0"/>
+              </a:spcBef>
+              <a:spcAft>
+                <a:spcPts val="0"/>
+              </a:spcAft>
+              <a:buNone/>
+            </a:pPr>
+            <a:r>
+              <a:rPr lang="en" sz="3400"/>
+              <a:t>BBC micro:bit 						</a:t>
+            </a:r>
+            <a:r>
+              <a:rPr lang="en" sz="2700"/>
+              <a:t>Thonny</a:t>
+            </a:r>
+            <a:r>
+              <a:rPr lang="en" sz="3400"/>
+              <a:t> </a:t>
+            </a:r>
+            <a:r>
+              <a:rPr lang="en" sz="2700"/>
+              <a:t>Python Editor</a:t>
+            </a:r>
+            <a:endParaRPr sz="2700"/>
+          </a:p>
+        </p:txBody>
+      </p:sp>
+      <p:pic>
+        <p:nvPicPr>
+          <p:cNvPr id="140" name="Google Shape;140;p30"/>
+          <p:cNvPicPr preferRelativeResize="0"/>
+          <p:nvPr/>
+        </p:nvPicPr>
+        <p:blipFill>
+          <a:blip r:embed="rId3">
+            <a:alphaModFix/>
+          </a:blip>
+          <a:stretch>
+            <a:fillRect/>
+          </a:stretch>
+        </p:blipFill>
+        <p:spPr>
+          <a:xfrm>
+            <a:off x="692250" y="632415"/>
+            <a:ext cx="7642408" cy="4126258"/>
+          </a:xfrm>
+          <a:prstGeom prst="rect">
+            <a:avLst/>
+          </a:prstGeom>
+          <a:noFill/>
+          <a:ln>
+            <a:noFill/>
+          </a:ln>
+        </p:spPr>
+      </p:pic>
+      <p:cxnSp>
+        <p:nvCxnSpPr>
+          <p:cNvPr id="141" name="Google Shape;141;p30"/>
+          <p:cNvCxnSpPr/>
+          <p:nvPr/>
+        </p:nvCxnSpPr>
+        <p:spPr>
+          <a:xfrm flipH="1">
+            <a:off x="3512175" y="912450"/>
+            <a:ext cx="2031300" cy="283500"/>
+          </a:xfrm>
+          <a:prstGeom prst="straightConnector1">
+            <a:avLst/>
+          </a:prstGeom>
+          <a:noFill/>
+          <a:ln cap="flat" cmpd="sng" w="9525">
+            <a:solidFill>
+              <a:srgbClr val="4BA173"/>
+            </a:solidFill>
+            <a:prstDash val="solid"/>
+            <a:round/>
+            <a:headEnd len="med" w="med" type="none"/>
+            <a:tailEnd len="med" w="med" type="triangle"/>
+          </a:ln>
+        </p:spPr>
+      </p:cxnSp>
+      <p:sp>
+        <p:nvSpPr>
+          <p:cNvPr id="142" name="Google Shape;142;p30"/>
+          <p:cNvSpPr txBox="1"/>
+          <p:nvPr/>
+        </p:nvSpPr>
+        <p:spPr>
+          <a:xfrm>
+            <a:off x="5499750" y="712525"/>
+            <a:ext cx="1631100" cy="356400"/>
+          </a:xfrm>
+          <a:prstGeom prst="rect">
+            <a:avLst/>
+          </a:prstGeom>
+          <a:noFill/>
+          <a:ln>
+            <a:noFill/>
+          </a:ln>
+        </p:spPr>
+        <p:txBody>
+          <a:bodyPr anchorCtr="0" anchor="b" bIns="91425" lIns="91425" spcFirstLastPara="1" rIns="91425" wrap="square" tIns="91425">
+            <a:noAutofit/>
+          </a:bodyPr>
+          <a:lstStyle/>
+          <a:p>
+            <a:pPr indent="0" lvl="0" marL="0" rtl="0" algn="l">
+              <a:spcBef>
+                <a:spcPts val="0"/>
+              </a:spcBef>
+              <a:spcAft>
+                <a:spcPts val="0"/>
+              </a:spcAft>
+              <a:buNone/>
+            </a:pPr>
+            <a:r>
+              <a:rPr lang="en"/>
+              <a:t>Program tabs</a:t>
+            </a:r>
+            <a:endParaRPr/>
+          </a:p>
+        </p:txBody>
+      </p:sp>
+      <p:cxnSp>
+        <p:nvCxnSpPr>
+          <p:cNvPr id="143" name="Google Shape;143;p30"/>
+          <p:cNvCxnSpPr/>
+          <p:nvPr/>
+        </p:nvCxnSpPr>
+        <p:spPr>
+          <a:xfrm flipH="1">
+            <a:off x="3006201" y="3958535"/>
+            <a:ext cx="3362100" cy="469200"/>
+          </a:xfrm>
+          <a:prstGeom prst="straightConnector1">
+            <a:avLst/>
+          </a:prstGeom>
+          <a:noFill/>
+          <a:ln cap="flat" cmpd="sng" w="15775">
+            <a:solidFill>
+              <a:srgbClr val="4BA173"/>
+            </a:solidFill>
+            <a:prstDash val="solid"/>
+            <a:round/>
+            <a:headEnd len="med" w="med" type="none"/>
+            <a:tailEnd len="med" w="med" type="triangle"/>
+          </a:ln>
+        </p:spPr>
+      </p:cxnSp>
+      <p:sp>
+        <p:nvSpPr>
+          <p:cNvPr id="144" name="Google Shape;144;p30"/>
+          <p:cNvSpPr txBox="1"/>
+          <p:nvPr/>
+        </p:nvSpPr>
+        <p:spPr>
+          <a:xfrm>
+            <a:off x="6264654" y="3614800"/>
+            <a:ext cx="2699700" cy="589800"/>
+          </a:xfrm>
+          <a:prstGeom prst="rect">
+            <a:avLst/>
+          </a:prstGeom>
+          <a:noFill/>
+          <a:ln>
+            <a:noFill/>
+          </a:ln>
+        </p:spPr>
+        <p:txBody>
+          <a:bodyPr anchorCtr="0" anchor="b" bIns="151325" lIns="151325" spcFirstLastPara="1" rIns="151325" wrap="square" tIns="151325">
+            <a:noAutofit/>
+          </a:bodyPr>
+          <a:lstStyle/>
+          <a:p>
+            <a:pPr indent="0" lvl="0" marL="0" rtl="0" algn="l">
+              <a:spcBef>
+                <a:spcPts val="0"/>
+              </a:spcBef>
+              <a:spcAft>
+                <a:spcPts val="0"/>
+              </a:spcAft>
+              <a:buNone/>
+            </a:pPr>
+            <a:r>
+              <a:rPr lang="en" sz="2317"/>
+              <a:t>REPL</a:t>
+            </a:r>
+            <a:endParaRPr sz="2317"/>
+          </a:p>
+        </p:txBody>
+      </p:sp>
+    </p:spTree>
+  </p:cSld>
+  <p:clrMapOvr>
+    <a:masterClrMapping/>
+  </p:clrMapOvr>
+</p:sld>
+</file>
+
+<file path=ppt/slides/slide6.xml><?xml version="1.0" encoding="utf-8"?>
+<p:sld xmlns:a="http://schemas.openxmlformats.org/drawingml/2006/main" xmlns:r="http://schemas.openxmlformats.org/officeDocument/2006/relationships" xmlns:mc="http://schemas.openxmlformats.org/markup-compatibility/2006" xmlns:mv="urn:schemas-microsoft-com:mac:vml" xmlns:p="http://schemas.openxmlformats.org/presentationml/2006/main" xmlns:c="http://schemas.openxmlformats.org/drawingml/2006/chart" xmlns:dgm="http://schemas.openxmlformats.org/drawingml/2006/diagram" xmlns:o="urn:schemas-microsoft-com:office:office" xmlns:v="urn:schemas-microsoft-com:vml" xmlns:pvml="urn:schemas-microsoft-com:office:powerpoint" xmlns:com="http://schemas.openxmlformats.org/drawingml/2006/compatibility" xmlns:p14="http://schemas.microsoft.com/office/powerpoint/2010/main" xmlns:p15="http://schemas.microsoft.com/office/powerpoint/2012/main" xmlns:ahyp="http://schemas.microsoft.com/office/drawing/2018/hyperlinkcolor">
+  <p:cSld>
+    <p:spTree>
+      <p:nvGrpSpPr>
+        <p:cNvPr id="148" name="Shape 148"/>
+        <p:cNvGrpSpPr/>
+        <p:nvPr/>
+      </p:nvGrpSpPr>
+      <p:grpSpPr>
+        <a:xfrm>
+          <a:off x="0" y="0"/>
+          <a:ext cx="0" cy="0"/>
+          <a:chOff x="0" y="0"/>
+          <a:chExt cx="0" cy="0"/>
+        </a:xfrm>
+      </p:grpSpPr>
+      <p:sp>
+        <p:nvSpPr>
+          <p:cNvPr id="149" name="Google Shape;149;p31"/>
           <p:cNvSpPr txBox="1"/>
           <p:nvPr>
             <p:ph type="title"/>
@@ -20107,7 +20243,7 @@
       </p:sp>
       <p:sp>
         <p:nvSpPr>
-          <p:cNvPr id="146" name="Google Shape;146;p31"/>
+          <p:cNvPr id="150" name="Google Shape;150;p31"/>
           <p:cNvSpPr txBox="1"/>
           <p:nvPr>
             <p:ph idx="1" type="body"/>
@@ -20460,7 +20596,7 @@
   <p:cSld>
     <p:spTree>
       <p:nvGrpSpPr>
-        <p:cNvPr id="150" name="Shape 150"/>
+        <p:cNvPr id="154" name="Shape 154"/>
         <p:cNvGrpSpPr/>
         <p:nvPr/>
       </p:nvGrpSpPr>
@@ -20474,7 +20610,7 @@
       </p:grpSpPr>
       <p:sp>
         <p:nvSpPr>
-          <p:cNvPr id="151" name="Google Shape;151;p32"/>
+          <p:cNvPr id="155" name="Google Shape;155;p32"/>
           <p:cNvSpPr txBox="1"/>
           <p:nvPr>
             <p:ph type="title"/>
@@ -20514,7 +20650,7 @@
       </p:sp>
       <p:sp>
         <p:nvSpPr>
-          <p:cNvPr id="152" name="Google Shape;152;p32"/>
+          <p:cNvPr id="156" name="Google Shape;156;p32"/>
           <p:cNvSpPr txBox="1"/>
           <p:nvPr>
             <p:ph idx="1" type="body"/>
@@ -20970,7 +21106,7 @@
   <p:cSld>
     <p:spTree>
       <p:nvGrpSpPr>
-        <p:cNvPr id="156" name="Shape 156"/>
+        <p:cNvPr id="160" name="Shape 160"/>
         <p:cNvGrpSpPr/>
         <p:nvPr/>
       </p:nvGrpSpPr>
@@ -20984,7 +21120,7 @@
       </p:grpSpPr>
       <p:sp>
         <p:nvSpPr>
-          <p:cNvPr id="157" name="Google Shape;157;p33"/>
+          <p:cNvPr id="161" name="Google Shape;161;p33"/>
           <p:cNvSpPr txBox="1"/>
           <p:nvPr>
             <p:ph type="title"/>
@@ -21024,7 +21160,7 @@
       </p:sp>
       <p:sp>
         <p:nvSpPr>
-          <p:cNvPr id="158" name="Google Shape;158;p33"/>
+          <p:cNvPr id="162" name="Google Shape;162;p33"/>
           <p:cNvSpPr txBox="1"/>
           <p:nvPr>
             <p:ph idx="1" type="body"/>
@@ -21159,6 +21295,52 @@
                 <a:cs typeface="Courier New"/>
                 <a:sym typeface="Courier New"/>
               </a:rPr>
+              <a:t> from microbit import *</a:t>
+            </a:r>
+            <a:endParaRPr b="1" sz="1400">
+              <a:latin typeface="Courier New"/>
+              <a:ea typeface="Courier New"/>
+              <a:cs typeface="Courier New"/>
+              <a:sym typeface="Courier New"/>
+            </a:endParaRPr>
+          </a:p>
+          <a:p>
+            <a:pPr indent="0" lvl="0" marL="0" rtl="0" algn="l">
+              <a:spcBef>
+                <a:spcPts val="0"/>
+              </a:spcBef>
+              <a:spcAft>
+                <a:spcPts val="0"/>
+              </a:spcAft>
+              <a:buNone/>
+            </a:pPr>
+            <a:r>
+              <a:t/>
+            </a:r>
+            <a:endParaRPr b="1" sz="1400">
+              <a:latin typeface="Courier New"/>
+              <a:ea typeface="Courier New"/>
+              <a:cs typeface="Courier New"/>
+              <a:sym typeface="Courier New"/>
+            </a:endParaRPr>
+          </a:p>
+          <a:p>
+            <a:pPr indent="0" lvl="0" marL="0" rtl="0" algn="l">
+              <a:spcBef>
+                <a:spcPts val="0"/>
+              </a:spcBef>
+              <a:spcAft>
+                <a:spcPts val="0"/>
+              </a:spcAft>
+              <a:buNone/>
+            </a:pPr>
+            <a:r>
+              <a:rPr b="1" lang="en" sz="1400">
+                <a:latin typeface="Courier New"/>
+                <a:ea typeface="Courier New"/>
+                <a:cs typeface="Courier New"/>
+                <a:sym typeface="Courier New"/>
+              </a:rPr>
               <a:t> display.scroll('Hello')</a:t>
             </a:r>
             <a:endParaRPr b="1" sz="1400">
@@ -21401,11 +21583,11 @@
 </file>
 
 <file path=ppt/slides/slide9.xml><?xml version="1.0" encoding="utf-8"?>
-<p:sld xmlns:a="http://schemas.openxmlformats.org/drawingml/2006/main" xmlns:r="http://schemas.openxmlformats.org/officeDocument/2006/relationships" xmlns:mc="http://schemas.openxmlformats.org/markup-compatibility/2006" xmlns:mv="urn:schemas-microsoft-com:mac:vml" xmlns:p="http://schemas.openxmlformats.org/presentationml/2006/main" xmlns:c="http://schemas.openxmlformats.org/drawingml/2006/chart" xmlns:dgm="http://schemas.openxmlformats.org/drawingml/2006/diagram" xmlns:o="urn:schemas-microsoft-com:office:office" xmlns:v="urn:schemas-microsoft-com:vml" xmlns:pvml="urn:schemas-microsoft-com:office:powerpoint" xmlns:com="http://schemas.openxmlformats.org/drawingml/2006/compatibility" xmlns:p14="http://schemas.microsoft.com/office/powerpoint/2010/main" xmlns:p15="http://schemas.microsoft.com/office/powerpoint/2012/main" xmlns:ahyp="http://schemas.microsoft.com/office/drawing/2018/hyperlinkcolor">
+<p:sld xmlns:a="http://schemas.openxmlformats.org/drawingml/2006/main" xmlns:r="http://schemas.openxmlformats.org/officeDocument/2006/relationships" xmlns:mc="http://schemas.openxmlformats.org/markup-compatibility/2006" xmlns:mv="urn:schemas-microsoft-com:mac:vml" xmlns:p="http://schemas.openxmlformats.org/presentationml/2006/main" xmlns:c="http://schemas.openxmlformats.org/drawingml/2006/chart" xmlns:dgm="http://schemas.openxmlformats.org/drawingml/2006/diagram" xmlns:o="urn:schemas-microsoft-com:office:office" xmlns:v="urn:schemas-microsoft-com:vml" xmlns:pvml="urn:schemas-microsoft-com:office:powerpoint" xmlns:com="http://schemas.openxmlformats.org/drawingml/2006/compatibility" xmlns:p14="http://schemas.microsoft.com/office/powerpoint/2010/main" xmlns:p15="http://schemas.microsoft.com/office/powerpoint/2012/main" xmlns:ahyp="http://schemas.microsoft.com/office/drawing/2018/hyperlinkcolor" show="0">
   <p:cSld>
     <p:spTree>
       <p:nvGrpSpPr>
-        <p:cNvPr id="162" name="Shape 162"/>
+        <p:cNvPr id="166" name="Shape 166"/>
         <p:cNvGrpSpPr/>
         <p:nvPr/>
       </p:nvGrpSpPr>
@@ -21419,7 +21601,7 @@
       </p:grpSpPr>
       <p:sp>
         <p:nvSpPr>
-          <p:cNvPr id="163" name="Google Shape;163;p34"/>
+          <p:cNvPr id="167" name="Google Shape;167;p34"/>
           <p:cNvSpPr txBox="1"/>
           <p:nvPr>
             <p:ph type="title"/>
@@ -21459,7 +21641,7 @@
       </p:sp>
       <p:sp>
         <p:nvSpPr>
-          <p:cNvPr id="164" name="Google Shape;164;p34"/>
+          <p:cNvPr id="168" name="Google Shape;168;p34"/>
           <p:cNvSpPr txBox="1"/>
           <p:nvPr>
             <p:ph idx="1" type="body"/>
@@ -21960,7 +22142,7 @@
       </p:sp>
       <p:cxnSp>
         <p:nvCxnSpPr>
-          <p:cNvPr id="165" name="Google Shape;165;p34"/>
+          <p:cNvPr id="169" name="Google Shape;169;p34"/>
           <p:cNvCxnSpPr/>
           <p:nvPr/>
         </p:nvCxnSpPr>
@@ -21986,7 +22168,7 @@
       </p:cxnSp>
       <p:sp>
         <p:nvSpPr>
-          <p:cNvPr id="166" name="Google Shape;166;p34"/>
+          <p:cNvPr id="170" name="Google Shape;170;p34"/>
           <p:cNvSpPr txBox="1"/>
           <p:nvPr/>
         </p:nvSpPr>
@@ -22052,7 +22234,7 @@
       </p:sp>
       <p:sp>
         <p:nvSpPr>
-          <p:cNvPr id="167" name="Google Shape;167;p34"/>
+          <p:cNvPr id="171" name="Google Shape;171;p34"/>
           <p:cNvSpPr/>
           <p:nvPr/>
         </p:nvSpPr>
@@ -22099,7 +22281,7 @@
       </p:sp>
       <p:cxnSp>
         <p:nvCxnSpPr>
-          <p:cNvPr id="168" name="Google Shape;168;p34"/>
+          <p:cNvPr id="172" name="Google Shape;172;p34"/>
           <p:cNvCxnSpPr/>
           <p:nvPr/>
         </p:nvCxnSpPr>
@@ -22125,7 +22307,7 @@
       </p:cxnSp>
       <p:sp>
         <p:nvSpPr>
-          <p:cNvPr id="169" name="Google Shape;169;p34"/>
+          <p:cNvPr id="173" name="Google Shape;173;p34"/>
           <p:cNvSpPr txBox="1"/>
           <p:nvPr/>
         </p:nvSpPr>
@@ -22175,7 +22357,7 @@
       </p:sp>
       <p:sp>
         <p:nvSpPr>
-          <p:cNvPr id="170" name="Google Shape;170;p34"/>
+          <p:cNvPr id="174" name="Google Shape;174;p34"/>
           <p:cNvSpPr/>
           <p:nvPr/>
         </p:nvSpPr>
@@ -22222,7 +22404,7 @@
       </p:sp>
       <p:cxnSp>
         <p:nvCxnSpPr>
-          <p:cNvPr id="171" name="Google Shape;171;p34"/>
+          <p:cNvPr id="175" name="Google Shape;175;p34"/>
           <p:cNvCxnSpPr/>
           <p:nvPr/>
         </p:nvCxnSpPr>
@@ -22248,7 +22430,7 @@
       </p:cxnSp>
       <p:sp>
         <p:nvSpPr>
-          <p:cNvPr id="172" name="Google Shape;172;p34"/>
+          <p:cNvPr id="176" name="Google Shape;176;p34"/>
           <p:cNvSpPr txBox="1"/>
           <p:nvPr/>
         </p:nvSpPr>
@@ -22298,7 +22480,7 @@
       </p:sp>
       <p:sp>
         <p:nvSpPr>
-          <p:cNvPr id="173" name="Google Shape;173;p34"/>
+          <p:cNvPr id="177" name="Google Shape;177;p34"/>
           <p:cNvSpPr/>
           <p:nvPr/>
         </p:nvSpPr>
@@ -22631,6 +22813,285 @@
 </file>
 
 <file path=ppt/theme/theme2.xml><?xml version="1.0" encoding="utf-8"?>
+<a:theme xmlns:a="http://schemas.openxmlformats.org/drawingml/2006/main" xmlns:r="http://schemas.openxmlformats.org/officeDocument/2006/relationships" name="Spearmint">
+  <a:themeElements>
+    <a:clrScheme name="Spearmint">
+      <a:dk1>
+        <a:srgbClr val="202729"/>
+      </a:dk1>
+      <a:lt1>
+        <a:srgbClr val="FFFFFF"/>
+      </a:lt1>
+      <a:dk2>
+        <a:srgbClr val="4BA173"/>
+      </a:dk2>
+      <a:lt2>
+        <a:srgbClr val="63D297"/>
+      </a:lt2>
+      <a:accent1>
+        <a:srgbClr val="353744"/>
+      </a:accent1>
+      <a:accent2>
+        <a:srgbClr val="424242"/>
+      </a:accent2>
+      <a:accent3>
+        <a:srgbClr val="616161"/>
+      </a:accent3>
+      <a:accent4>
+        <a:srgbClr val="999999"/>
+      </a:accent4>
+      <a:accent5>
+        <a:srgbClr val="FF5252"/>
+      </a:accent5>
+      <a:accent6>
+        <a:srgbClr val="FFF176"/>
+      </a:accent6>
+      <a:hlink>
+        <a:srgbClr val="FF5252"/>
+      </a:hlink>
+      <a:folHlink>
+        <a:srgbClr val="FF5252"/>
+      </a:folHlink>
+    </a:clrScheme>
+    <a:fontScheme name="Office">
+      <a:majorFont>
+        <a:latin typeface="Arial"/>
+        <a:ea typeface=""/>
+        <a:cs typeface=""/>
+        <a:font script="Jpan" typeface="ＭＳ Ｐゴシック"/>
+        <a:font script="Hang" typeface="맑은 고딕"/>
+        <a:font script="Hans" typeface="宋体"/>
+        <a:font script="Hant" typeface="新細明體"/>
+        <a:font script="Arab" typeface="Times New Roman"/>
+        <a:font script="Hebr" typeface="Times New Roman"/>
+        <a:font script="Thai" typeface="Angsana New"/>
+        <a:font script="Ethi" typeface="Nyala"/>
+        <a:font script="Beng" typeface="Vrinda"/>
+        <a:font script="Gujr" typeface="Shruti"/>
+        <a:font script="Khmr" typeface="MoolBoran"/>
+        <a:font script="Knda" typeface="Tunga"/>
+        <a:font script="Guru" typeface="Raavi"/>
+        <a:font script="Cans" typeface="Euphemia"/>
+        <a:font script="Cher" typeface="Plantagenet Cherokee"/>
+        <a:font script="Yiii" typeface="Microsoft Yi Baiti"/>
+        <a:font script="Tibt" typeface="Microsoft Himalaya"/>
+        <a:font script="Thaa" typeface="MV Boli"/>
+        <a:font script="Deva" typeface="Mangal"/>
+        <a:font script="Telu" typeface="Gautami"/>
+        <a:font script="Taml" typeface="Latha"/>
+        <a:font script="Syrc" typeface="Estrangelo Edessa"/>
+        <a:font script="Orya" typeface="Kalinga"/>
+        <a:font script="Mlym" typeface="Kartika"/>
+        <a:font script="Laoo" typeface="DokChampa"/>
+        <a:font script="Sinh" typeface="Iskoola Pota"/>
+        <a:font script="Mong" typeface="Mongolian Baiti"/>
+        <a:font script="Viet" typeface="Times New Roman"/>
+        <a:font script="Uigh" typeface="Microsoft Uighur"/>
+        <a:font script="Geor" typeface="Sylfaen"/>
+      </a:majorFont>
+      <a:minorFont>
+        <a:latin typeface="Arial"/>
+        <a:ea typeface=""/>
+        <a:cs typeface=""/>
+        <a:font script="Jpan" typeface="ＭＳ Ｐゴシック"/>
+        <a:font script="Hang" typeface="맑은 고딕"/>
+        <a:font script="Hans" typeface="宋体"/>
+        <a:font script="Hant" typeface="新細明體"/>
+        <a:font script="Arab" typeface="Arial"/>
+        <a:font script="Hebr" typeface="Arial"/>
+        <a:font script="Thai" typeface="Cordia New"/>
+        <a:font script="Ethi" typeface="Nyala"/>
+        <a:font script="Beng" typeface="Vrinda"/>
+        <a:font script="Gujr" typeface="Shruti"/>
+        <a:font script="Khmr" typeface="DaunPenh"/>
+        <a:font script="Knda" typeface="Tunga"/>
+        <a:font script="Guru" typeface="Raavi"/>
+        <a:font script="Cans" typeface="Euphemia"/>
+        <a:font script="Cher" typeface="Plantagenet Cherokee"/>
+        <a:font script="Yiii" typeface="Microsoft Yi Baiti"/>
+        <a:font script="Tibt" typeface="Microsoft Himalaya"/>
+        <a:font script="Thaa" typeface="MV Boli"/>
+        <a:font script="Deva" typeface="Mangal"/>
+        <a:font script="Telu" typeface="Gautami"/>
+        <a:font script="Taml" typeface="Latha"/>
+        <a:font script="Syrc" typeface="Estrangelo Edessa"/>
+        <a:font script="Orya" typeface="Kalinga"/>
+        <a:font script="Mlym" typeface="Kartika"/>
+        <a:font script="Laoo" typeface="DokChampa"/>
+        <a:font script="Sinh" typeface="Iskoola Pota"/>
+        <a:font script="Mong" typeface="Mongolian Baiti"/>
+        <a:font script="Viet" typeface="Arial"/>
+        <a:font script="Uigh" typeface="Microsoft Uighur"/>
+        <a:font script="Geor" typeface="Sylfaen"/>
+      </a:minorFont>
+    </a:fontScheme>
+    <a:fmtScheme name="Office">
+      <a:fillStyleLst>
+        <a:solidFill>
+          <a:schemeClr val="phClr"/>
+        </a:solidFill>
+        <a:gradFill rotWithShape="1">
+          <a:gsLst>
+            <a:gs pos="0">
+              <a:schemeClr val="phClr">
+                <a:tint val="50000"/>
+                <a:satMod val="300000"/>
+              </a:schemeClr>
+            </a:gs>
+            <a:gs pos="35000">
+              <a:schemeClr val="phClr">
+                <a:tint val="37000"/>
+                <a:satMod val="300000"/>
+              </a:schemeClr>
+            </a:gs>
+            <a:gs pos="100000">
+              <a:schemeClr val="phClr">
+                <a:tint val="15000"/>
+                <a:satMod val="350000"/>
+              </a:schemeClr>
+            </a:gs>
+          </a:gsLst>
+          <a:lin ang="16200000" scaled="1"/>
+        </a:gradFill>
+        <a:gradFill rotWithShape="1">
+          <a:gsLst>
+            <a:gs pos="0">
+              <a:schemeClr val="phClr">
+                <a:tint val="100000"/>
+                <a:shade val="100000"/>
+                <a:satMod val="130000"/>
+              </a:schemeClr>
+            </a:gs>
+            <a:gs pos="100000">
+              <a:schemeClr val="phClr">
+                <a:tint val="50000"/>
+                <a:shade val="100000"/>
+                <a:satMod val="350000"/>
+              </a:schemeClr>
+            </a:gs>
+          </a:gsLst>
+          <a:lin ang="16200000" scaled="0"/>
+        </a:gradFill>
+      </a:fillStyleLst>
+      <a:lnStyleLst>
+        <a:ln w="9525" cap="flat" cmpd="sng" algn="ctr">
+          <a:solidFill>
+            <a:schemeClr val="phClr">
+              <a:shade val="95000"/>
+              <a:satMod val="105000"/>
+            </a:schemeClr>
+          </a:solidFill>
+          <a:prstDash val="solid"/>
+        </a:ln>
+        <a:ln w="25400" cap="flat" cmpd="sng" algn="ctr">
+          <a:solidFill>
+            <a:schemeClr val="phClr"/>
+          </a:solidFill>
+          <a:prstDash val="solid"/>
+        </a:ln>
+        <a:ln w="38100" cap="flat" cmpd="sng" algn="ctr">
+          <a:solidFill>
+            <a:schemeClr val="phClr"/>
+          </a:solidFill>
+          <a:prstDash val="solid"/>
+        </a:ln>
+      </a:lnStyleLst>
+      <a:effectStyleLst>
+        <a:effectStyle>
+          <a:effectLst>
+            <a:outerShdw blurRad="40000" dist="20000" dir="5400000" rotWithShape="0">
+              <a:srgbClr val="000000">
+                <a:alpha val="38000"/>
+              </a:srgbClr>
+            </a:outerShdw>
+          </a:effectLst>
+        </a:effectStyle>
+        <a:effectStyle>
+          <a:effectLst>
+            <a:outerShdw blurRad="40000" dist="23000" dir="5400000" rotWithShape="0">
+              <a:srgbClr val="000000">
+                <a:alpha val="35000"/>
+              </a:srgbClr>
+            </a:outerShdw>
+          </a:effectLst>
+        </a:effectStyle>
+        <a:effectStyle>
+          <a:effectLst>
+            <a:outerShdw blurRad="40000" dist="23000" dir="5400000" rotWithShape="0">
+              <a:srgbClr val="000000">
+                <a:alpha val="35000"/>
+              </a:srgbClr>
+            </a:outerShdw>
+          </a:effectLst>
+          <a:scene3d>
+            <a:camera prst="orthographicFront">
+              <a:rot lat="0" lon="0" rev="0"/>
+            </a:camera>
+            <a:lightRig rig="threePt" dir="t">
+              <a:rot lat="0" lon="0" rev="1200000"/>
+            </a:lightRig>
+          </a:scene3d>
+          <a:sp3d>
+            <a:bevelT w="63500" h="25400"/>
+          </a:sp3d>
+        </a:effectStyle>
+      </a:effectStyleLst>
+      <a:bgFillStyleLst>
+        <a:solidFill>
+          <a:schemeClr val="phClr"/>
+        </a:solidFill>
+        <a:gradFill rotWithShape="1">
+          <a:gsLst>
+            <a:gs pos="0">
+              <a:schemeClr val="phClr">
+                <a:tint val="40000"/>
+                <a:satMod val="350000"/>
+              </a:schemeClr>
+            </a:gs>
+            <a:gs pos="40000">
+              <a:schemeClr val="phClr">
+                <a:tint val="45000"/>
+                <a:shade val="99000"/>
+                <a:satMod val="350000"/>
+              </a:schemeClr>
+            </a:gs>
+            <a:gs pos="100000">
+              <a:schemeClr val="phClr">
+                <a:shade val="20000"/>
+                <a:satMod val="255000"/>
+              </a:schemeClr>
+            </a:gs>
+          </a:gsLst>
+          <a:path path="circle">
+            <a:fillToRect l="50000" t="-80000" r="50000" b="180000"/>
+          </a:path>
+        </a:gradFill>
+        <a:gradFill rotWithShape="1">
+          <a:gsLst>
+            <a:gs pos="0">
+              <a:schemeClr val="phClr">
+                <a:tint val="80000"/>
+                <a:satMod val="300000"/>
+              </a:schemeClr>
+            </a:gs>
+            <a:gs pos="100000">
+              <a:schemeClr val="phClr">
+                <a:shade val="30000"/>
+                <a:satMod val="200000"/>
+              </a:schemeClr>
+            </a:gs>
+          </a:gsLst>
+          <a:path path="circle">
+            <a:fillToRect l="50000" t="50000" r="50000" b="50000"/>
+          </a:path>
+        </a:gradFill>
+      </a:bgFillStyleLst>
+    </a:fmtScheme>
+  </a:themeElements>
+</a:theme>
+</file>
+
+<file path=ppt/theme/theme3.xml><?xml version="1.0" encoding="utf-8"?>
 <a:theme xmlns:a="http://schemas.openxmlformats.org/drawingml/2006/main" xmlns:r="http://schemas.openxmlformats.org/officeDocument/2006/relationships">
   <a:themeElements>
     <a:clrScheme name="Default">
@@ -22907,283 +23368,4 @@
     </a:fmtScheme>
   </a:themeElements>
 </a:theme>
-</file>
-
-<file path=ppt/theme/theme3.xml><?xml version="1.0" encoding="utf-8"?>
-<a:theme xmlns:a="http://schemas.openxmlformats.org/drawingml/2006/main" xmlns:r="http://schemas.openxmlformats.org/officeDocument/2006/relationships" name="Spearmint">
-  <a:themeElements>
-    <a:clrScheme name="Spearmint">
-      <a:dk1>
-        <a:srgbClr val="202729"/>
-      </a:dk1>
-      <a:lt1>
-        <a:srgbClr val="FFFFFF"/>
-      </a:lt1>
-      <a:dk2>
-        <a:srgbClr val="4BA173"/>
-      </a:dk2>
-      <a:lt2>
-        <a:srgbClr val="63D297"/>
-      </a:lt2>
-      <a:accent1>
-        <a:srgbClr val="353744"/>
-      </a:accent1>
-      <a:accent2>
-        <a:srgbClr val="424242"/>
-      </a:accent2>
-      <a:accent3>
-        <a:srgbClr val="616161"/>
-      </a:accent3>
-      <a:accent4>
-        <a:srgbClr val="999999"/>
-      </a:accent4>
-      <a:accent5>
-        <a:srgbClr val="FF5252"/>
-      </a:accent5>
-      <a:accent6>
-        <a:srgbClr val="FFF176"/>
-      </a:accent6>
-      <a:hlink>
-        <a:srgbClr val="FF5252"/>
-      </a:hlink>
-      <a:folHlink>
-        <a:srgbClr val="FF5252"/>
-      </a:folHlink>
-    </a:clrScheme>
-    <a:fontScheme name="Office">
-      <a:majorFont>
-        <a:latin typeface="Arial"/>
-        <a:ea typeface=""/>
-        <a:cs typeface=""/>
-        <a:font script="Jpan" typeface="ＭＳ Ｐゴシック"/>
-        <a:font script="Hang" typeface="맑은 고딕"/>
-        <a:font script="Hans" typeface="宋体"/>
-        <a:font script="Hant" typeface="新細明體"/>
-        <a:font script="Arab" typeface="Times New Roman"/>
-        <a:font script="Hebr" typeface="Times New Roman"/>
-        <a:font script="Thai" typeface="Angsana New"/>
-        <a:font script="Ethi" typeface="Nyala"/>
-        <a:font script="Beng" typeface="Vrinda"/>
-        <a:font script="Gujr" typeface="Shruti"/>
-        <a:font script="Khmr" typeface="MoolBoran"/>
-        <a:font script="Knda" typeface="Tunga"/>
-        <a:font script="Guru" typeface="Raavi"/>
-        <a:font script="Cans" typeface="Euphemia"/>
-        <a:font script="Cher" typeface="Plantagenet Cherokee"/>
-        <a:font script="Yiii" typeface="Microsoft Yi Baiti"/>
-        <a:font script="Tibt" typeface="Microsoft Himalaya"/>
-        <a:font script="Thaa" typeface="MV Boli"/>
-        <a:font script="Deva" typeface="Mangal"/>
-        <a:font script="Telu" typeface="Gautami"/>
-        <a:font script="Taml" typeface="Latha"/>
-        <a:font script="Syrc" typeface="Estrangelo Edessa"/>
-        <a:font script="Orya" typeface="Kalinga"/>
-        <a:font script="Mlym" typeface="Kartika"/>
-        <a:font script="Laoo" typeface="DokChampa"/>
-        <a:font script="Sinh" typeface="Iskoola Pota"/>
-        <a:font script="Mong" typeface="Mongolian Baiti"/>
-        <a:font script="Viet" typeface="Times New Roman"/>
-        <a:font script="Uigh" typeface="Microsoft Uighur"/>
-        <a:font script="Geor" typeface="Sylfaen"/>
-      </a:majorFont>
-      <a:minorFont>
-        <a:latin typeface="Arial"/>
-        <a:ea typeface=""/>
-        <a:cs typeface=""/>
-        <a:font script="Jpan" typeface="ＭＳ Ｐゴシック"/>
-        <a:font script="Hang" typeface="맑은 고딕"/>
-        <a:font script="Hans" typeface="宋体"/>
-        <a:font script="Hant" typeface="新細明體"/>
-        <a:font script="Arab" typeface="Arial"/>
-        <a:font script="Hebr" typeface="Arial"/>
-        <a:font script="Thai" typeface="Cordia New"/>
-        <a:font script="Ethi" typeface="Nyala"/>
-        <a:font script="Beng" typeface="Vrinda"/>
-        <a:font script="Gujr" typeface="Shruti"/>
-        <a:font script="Khmr" typeface="DaunPenh"/>
-        <a:font script="Knda" typeface="Tunga"/>
-        <a:font script="Guru" typeface="Raavi"/>
-        <a:font script="Cans" typeface="Euphemia"/>
-        <a:font script="Cher" typeface="Plantagenet Cherokee"/>
-        <a:font script="Yiii" typeface="Microsoft Yi Baiti"/>
-        <a:font script="Tibt" typeface="Microsoft Himalaya"/>
-        <a:font script="Thaa" typeface="MV Boli"/>
-        <a:font script="Deva" typeface="Mangal"/>
-        <a:font script="Telu" typeface="Gautami"/>
-        <a:font script="Taml" typeface="Latha"/>
-        <a:font script="Syrc" typeface="Estrangelo Edessa"/>
-        <a:font script="Orya" typeface="Kalinga"/>
-        <a:font script="Mlym" typeface="Kartika"/>
-        <a:font script="Laoo" typeface="DokChampa"/>
-        <a:font script="Sinh" typeface="Iskoola Pota"/>
-        <a:font script="Mong" typeface="Mongolian Baiti"/>
-        <a:font script="Viet" typeface="Arial"/>
-        <a:font script="Uigh" typeface="Microsoft Uighur"/>
-        <a:font script="Geor" typeface="Sylfaen"/>
-      </a:minorFont>
-    </a:fontScheme>
-    <a:fmtScheme name="Office">
-      <a:fillStyleLst>
-        <a:solidFill>
-          <a:schemeClr val="phClr"/>
-        </a:solidFill>
-        <a:gradFill rotWithShape="1">
-          <a:gsLst>
-            <a:gs pos="0">
-              <a:schemeClr val="phClr">
-                <a:tint val="50000"/>
-                <a:satMod val="300000"/>
-              </a:schemeClr>
-            </a:gs>
-            <a:gs pos="35000">
-              <a:schemeClr val="phClr">
-                <a:tint val="37000"/>
-                <a:satMod val="300000"/>
-              </a:schemeClr>
-            </a:gs>
-            <a:gs pos="100000">
-              <a:schemeClr val="phClr">
-                <a:tint val="15000"/>
-                <a:satMod val="350000"/>
-              </a:schemeClr>
-            </a:gs>
-          </a:gsLst>
-          <a:lin ang="16200000" scaled="1"/>
-        </a:gradFill>
-        <a:gradFill rotWithShape="1">
-          <a:gsLst>
-            <a:gs pos="0">
-              <a:schemeClr val="phClr">
-                <a:tint val="100000"/>
-                <a:shade val="100000"/>
-                <a:satMod val="130000"/>
-              </a:schemeClr>
-            </a:gs>
-            <a:gs pos="100000">
-              <a:schemeClr val="phClr">
-                <a:tint val="50000"/>
-                <a:shade val="100000"/>
-                <a:satMod val="350000"/>
-              </a:schemeClr>
-            </a:gs>
-          </a:gsLst>
-          <a:lin ang="16200000" scaled="0"/>
-        </a:gradFill>
-      </a:fillStyleLst>
-      <a:lnStyleLst>
-        <a:ln w="9525" cap="flat" cmpd="sng" algn="ctr">
-          <a:solidFill>
-            <a:schemeClr val="phClr">
-              <a:shade val="95000"/>
-              <a:satMod val="105000"/>
-            </a:schemeClr>
-          </a:solidFill>
-          <a:prstDash val="solid"/>
-        </a:ln>
-        <a:ln w="25400" cap="flat" cmpd="sng" algn="ctr">
-          <a:solidFill>
-            <a:schemeClr val="phClr"/>
-          </a:solidFill>
-          <a:prstDash val="solid"/>
-        </a:ln>
-        <a:ln w="38100" cap="flat" cmpd="sng" algn="ctr">
-          <a:solidFill>
-            <a:schemeClr val="phClr"/>
-          </a:solidFill>
-          <a:prstDash val="solid"/>
-        </a:ln>
-      </a:lnStyleLst>
-      <a:effectStyleLst>
-        <a:effectStyle>
-          <a:effectLst>
-            <a:outerShdw blurRad="40000" dist="20000" dir="5400000" rotWithShape="0">
-              <a:srgbClr val="000000">
-                <a:alpha val="38000"/>
-              </a:srgbClr>
-            </a:outerShdw>
-          </a:effectLst>
-        </a:effectStyle>
-        <a:effectStyle>
-          <a:effectLst>
-            <a:outerShdw blurRad="40000" dist="23000" dir="5400000" rotWithShape="0">
-              <a:srgbClr val="000000">
-                <a:alpha val="35000"/>
-              </a:srgbClr>
-            </a:outerShdw>
-          </a:effectLst>
-        </a:effectStyle>
-        <a:effectStyle>
-          <a:effectLst>
-            <a:outerShdw blurRad="40000" dist="23000" dir="5400000" rotWithShape="0">
-              <a:srgbClr val="000000">
-                <a:alpha val="35000"/>
-              </a:srgbClr>
-            </a:outerShdw>
-          </a:effectLst>
-          <a:scene3d>
-            <a:camera prst="orthographicFront">
-              <a:rot lat="0" lon="0" rev="0"/>
-            </a:camera>
-            <a:lightRig rig="threePt" dir="t">
-              <a:rot lat="0" lon="0" rev="1200000"/>
-            </a:lightRig>
-          </a:scene3d>
-          <a:sp3d>
-            <a:bevelT w="63500" h="25400"/>
-          </a:sp3d>
-        </a:effectStyle>
-      </a:effectStyleLst>
-      <a:bgFillStyleLst>
-        <a:solidFill>
-          <a:schemeClr val="phClr"/>
-        </a:solidFill>
-        <a:gradFill rotWithShape="1">
-          <a:gsLst>
-            <a:gs pos="0">
-              <a:schemeClr val="phClr">
-                <a:tint val="40000"/>
-                <a:satMod val="350000"/>
-              </a:schemeClr>
-            </a:gs>
-            <a:gs pos="40000">
-              <a:schemeClr val="phClr">
-                <a:tint val="45000"/>
-                <a:shade val="99000"/>
-                <a:satMod val="350000"/>
-              </a:schemeClr>
-            </a:gs>
-            <a:gs pos="100000">
-              <a:schemeClr val="phClr">
-                <a:shade val="20000"/>
-                <a:satMod val="255000"/>
-              </a:schemeClr>
-            </a:gs>
-          </a:gsLst>
-          <a:path path="circle">
-            <a:fillToRect l="50000" t="-80000" r="50000" b="180000"/>
-          </a:path>
-        </a:gradFill>
-        <a:gradFill rotWithShape="1">
-          <a:gsLst>
-            <a:gs pos="0">
-              <a:schemeClr val="phClr">
-                <a:tint val="80000"/>
-                <a:satMod val="300000"/>
-              </a:schemeClr>
-            </a:gs>
-            <a:gs pos="100000">
-              <a:schemeClr val="phClr">
-                <a:shade val="30000"/>
-                <a:satMod val="200000"/>
-              </a:schemeClr>
-            </a:gs>
-          </a:gsLst>
-          <a:path path="circle">
-            <a:fillToRect l="50000" t="50000" r="50000" b="50000"/>
-          </a:path>
-        </a:gradFill>
-      </a:bgFillStyleLst>
-    </a:fmtScheme>
-  </a:themeElements>
-</a:theme>
 </file>